--- a/pitch/SocFi-pitch.pptx
+++ b/pitch/SocFi-pitch.pptx
@@ -16,9 +16,15 @@
     <p:sldId id="264" r:id="rId10"/>
     <p:sldId id="265" r:id="rId11"/>
     <p:sldId id="266" r:id="rId12"/>
+    <p:sldId id="267" r:id="rId13"/>
+    <p:sldId id="268" r:id="rId14"/>
+    <p:sldId id="269" r:id="rId15"/>
+    <p:sldId id="270" r:id="rId16"/>
+    <p:sldId id="271" r:id="rId17"/>
+    <p:sldId id="272" r:id="rId18"/>
   </p:sldIdLst>
   <p:notesMasterIdLst>
-    <p:notesMasterId r:id="rId13"/>
+    <p:notesMasterId r:id="rId19"/>
   </p:notesMasterIdLst>
   <p:sldSz cx="12192000" cy="6858000"/>
   <p:notesSz cx="6858000" cy="12192000"/>
@@ -117,39 +123,49 @@
   <p:extLst>
     <p:ext uri="{521415D9-36F7-43E2-AB2F-B90AF26B5E84}">
       <p14:sectionLst xmlns:p14="http://schemas.microsoft.com/office/powerpoint/2010/main">
-        <p14:section name="Opening" id="{54ce88a5-b677-c77f-8caf-d69dc4f34d13}">
+        <p14:section name="Opening" id="{ffd0c091-d95e-d9d3-7bcf-6b781f6e7e89}">
           <p14:sldIdLst>
             <p14:sldId id="256"/>
           </p14:sldIdLst>
         </p14:section>
-        <p14:section name="Problem" id="{6781c014-9306-24ae-78e0-c0649d5f5999}">
+        <p14:section name="Problem" id="{e8529a86-8bef-49cc-3aa3-0cee087bc41e}">
           <p14:sldIdLst>
             <p14:sldId id="257"/>
             <p14:sldId id="258"/>
           </p14:sldIdLst>
         </p14:section>
-        <p14:section name="Solution" id="{d19d15c9-634c-c67f-c7e4-b304b8b27a3a}">
+        <p14:section name="Solution" id="{30a6e60e-0d75-5c61-60e7-cdfb88a1eda6}">
           <p14:sldIdLst>
             <p14:sldId id="259"/>
             <p14:sldId id="260"/>
           </p14:sldIdLst>
         </p14:section>
-        <p14:section name="Ledger" id="{22f63dd8-bd25-c9fc-af7e-3336e6004de3}">
+        <p14:section name="Ledger" id="{a12936e2-0d90-749e-7093-cc3a856f0858}">
           <p14:sldIdLst>
             <p14:sldId id="261"/>
             <p14:sldId id="262"/>
           </p14:sldIdLst>
         </p14:section>
-        <p14:section name="Build" id="{9ba96a39-6d32-21d7-d1b2-d4ff4a537871}">
+        <p14:section name="Build" id="{ca9fd98a-33b9-f315-5902-f113ecee4da5}">
           <p14:sldIdLst>
             <p14:sldId id="263"/>
           </p14:sldIdLst>
         </p14:section>
-        <p14:section name="Impact" id="{cd2cae36-6526-685a-a0e5-e06e199207d2}">
+        <p14:section name="Impact" id="{cb7cbeca-40e1-5202-d61e-a45e36b69726}">
           <p14:sldIdLst>
             <p14:sldId id="264"/>
             <p14:sldId id="265"/>
+            <p14:sldId id="272"/>
+          </p14:sldIdLst>
+        </p14:section>
+        <p14:section name="Criteria" id="{f0a4bcc1-6edf-a6f0-c5b7-3ba4cfc990d0}">
+          <p14:sldIdLst>
             <p14:sldId id="266"/>
+            <p14:sldId id="267"/>
+            <p14:sldId id="268"/>
+            <p14:sldId id="269"/>
+            <p14:sldId id="270"/>
+            <p14:sldId id="271"/>
           </p14:sldIdLst>
         </p14:section>
       </p14:sectionLst>
@@ -648,10 +664,10 @@
             <a:r>
               <a:rPr lang="en-US" dirty="0"/>
               <a:t>[4:30–4:50]
-This week: the app, the agent and real clear-signed payouts.
-Next: the agent’s API key in Ledger Key Ring, a real Ledger in the treasurer’s browser, and ERC-7730 metadata so the device says “Reimburse Blockchain Society”.
+This week: the app, the agent, real clear-signed payouts, and the agent’s API key sealed with Ledger Key Ring.
+Next: a real Ledger in the treasurer’s browser, Key Ring on Ledger’s production service, and ERC-7730 metadata so the device says “Reimburse Blockchain Society”.
 Then on-chain budgets, multi-signer approval for large claims, and a pilot with St Andrews societies.
-[Scored here: innovation and usefulness. If Key Ring ships before submission, move it to “Built this week”.]</a:t>
+[Scored here: innovation and usefulness.]</a:t>
             </a:r>
             <a:endParaRPr lang="en-US" dirty="0"/>
           </a:p>
@@ -739,10 +755,12 @@
           <a:p>
             <a:r>
               <a:rPr lang="en-US" dirty="0"/>
-              <a:t>[4:50–5:00]
-So: the agent does the work, the Ledger keeps the keys. Students get paid back in minutes, and no AI can ever be talked into paying.
-You can try it on your phone right now at the link. Thank you, we’d love your questions.
-[Likely questions: Why crypto and not bank transfer? (Instant, any day, programmable caps; members who want pounds stay on the normal route.) What if the treasurer just presses approve? (The device screen is their one job: amount and recipient. Multi-signer for large claims is on the roadmap.) Real Ledger? (Same DMK code; only the transport changes to WebHID.)]</a:t>
+              <a:t>[~25s]
+Technical execution. Everything you saw is real code: over eight and a half thousand lines, written in four days.
+We use four Ledger building blocks: the Device Management Kit, the Ethereum Signer Kit, clear signing, and Key Ring.
+It works end to end. A claim from the app, approved by the agent, clear-signed on an emulated Nano S Plus, and paid in real test USDC on Base Sepolia.
+Key Ring had no documented emulator route, so we built Ledger Sync for Speculos ourselves. Now the agent’s own API key is sealed by a Ledger.
+[Stat sources: line count of frontend/src, backend/src and backend/scripts on 13 Oct; first commit 10 Oct. Point at the 4 and the real payout.]</a:t>
             </a:r>
             <a:endParaRPr lang="en-US" dirty="0"/>
           </a:p>
@@ -766,6 +784,555 @@
             <a:fld id="{F7021451-1387-4CA6-816F-3879F97B5CBC}" type="slidenum">
               <a:rPr lang="en-US"/>
               <a:t>11</a:t>
+            </a:fld>
+            <a:endParaRPr lang="en-US"/>
+          </a:p>
+        </p:txBody>
+      </p:sp>
+    </p:spTree>
+    <p:extLst>
+      <p:ext uri="{BB962C8B-B14F-4D97-AF65-F5344CB8AC3E}">
+        <p14:creationId xmlns:p14="http://schemas.microsoft.com/office/powerpoint/2010/main" val="1024086991"/>
+      </p:ext>
+    </p:extLst>
+  </p:cSld>
+  <p:clrMapOvr>
+    <a:masterClrMapping/>
+  </p:clrMapOvr>
+</p:notes>
+</file>
+
+<file path=ppt/notesSlides/notesSlide12.xml><?xml version="1.0" encoding="utf-8"?>
+<p:notes xmlns:a="http://schemas.openxmlformats.org/drawingml/2006/main" xmlns:r="http://schemas.openxmlformats.org/officeDocument/2006/relationships" xmlns:p="http://schemas.openxmlformats.org/presentationml/2006/main">
+  <p:cSld>
+    <p:spTree>
+      <p:nvGrpSpPr>
+        <p:cNvPr id="1" name=""/>
+        <p:cNvGrpSpPr/>
+        <p:nvPr/>
+      </p:nvGrpSpPr>
+      <p:grpSpPr>
+        <a:xfrm>
+          <a:off x="0" y="0"/>
+          <a:ext cx="0" cy="0"/>
+          <a:chOff x="0" y="0"/>
+          <a:chExt cx="0" cy="0"/>
+        </a:xfrm>
+      </p:grpSpPr>
+      <p:sp>
+        <p:nvSpPr>
+          <p:cNvPr id="2" name="Slide Image Placeholder 1"/>
+          <p:cNvSpPr>
+            <a:spLocks noGrp="1" noRot="1" noChangeAspect="1"/>
+          </p:cNvSpPr>
+          <p:nvPr>
+            <p:ph type="sldImg"/>
+          </p:nvPr>
+        </p:nvSpPr>
+        <p:spPr/>
+      </p:sp>
+      <p:sp>
+        <p:nvSpPr>
+          <p:cNvPr id="3" name="Notes Placeholder 2"/>
+          <p:cNvSpPr>
+            <a:spLocks noGrp="1"/>
+          </p:cNvSpPr>
+          <p:nvPr>
+            <p:ph type="body" idx="1"/>
+          </p:nvPr>
+        </p:nvSpPr>
+        <p:spPr/>
+        <p:txBody>
+          <a:bodyPr/>
+          <a:lstStyle/>
+          <a:p>
+            <a:r>
+              <a:rPr lang="en-US" dirty="0"/>
+              <a:t>[~25s]
+Why this matters to Ledger. Ledger isn’t an add-on here: it is the only way money moves. No private key sits on any server, and every payout is confirmed on the device.
+One Ledger protects a whole union. St Andrews alone has nearly 200 societies.
+That makes it a route into universities: a partnership with each students’ union puts Ledger in front of young people.
+And committees change every year, so every year a new group of students learns what a hardware wallet is by using one. Today’s society treasurer is tomorrow’s Ledger customer.
+[Source: St Andrews Students’ Association freshers booklet 2026, “nearly 200 affiliated societies”.]</a:t>
+            </a:r>
+            <a:endParaRPr lang="en-US" dirty="0"/>
+          </a:p>
+        </p:txBody>
+      </p:sp>
+      <p:sp>
+        <p:nvSpPr>
+          <p:cNvPr id="4" name="Slide Number Placeholder 3"/>
+          <p:cNvSpPr>
+            <a:spLocks noGrp="1"/>
+          </p:cNvSpPr>
+          <p:nvPr>
+            <p:ph type="sldNum" sz="quarter" idx="10"/>
+          </p:nvPr>
+        </p:nvSpPr>
+        <p:spPr/>
+        <p:txBody>
+          <a:bodyPr/>
+          <a:lstStyle/>
+          <a:p>
+            <a:fld id="{F7021451-1387-4CA6-816F-3879F97B5CBC}" type="slidenum">
+              <a:rPr lang="en-US"/>
+              <a:t>12</a:t>
+            </a:fld>
+            <a:endParaRPr lang="en-US"/>
+          </a:p>
+        </p:txBody>
+      </p:sp>
+    </p:spTree>
+    <p:extLst>
+      <p:ext uri="{BB962C8B-B14F-4D97-AF65-F5344CB8AC3E}">
+        <p14:creationId xmlns:p14="http://schemas.microsoft.com/office/powerpoint/2010/main" val="1024086991"/>
+      </p:ext>
+    </p:extLst>
+  </p:cSld>
+  <p:clrMapOvr>
+    <a:masterClrMapping/>
+  </p:clrMapOvr>
+</p:notes>
+</file>
+
+<file path=ppt/notesSlides/notesSlide13.xml><?xml version="1.0" encoding="utf-8"?>
+<p:notes xmlns:a="http://schemas.openxmlformats.org/drawingml/2006/main" xmlns:r="http://schemas.openxmlformats.org/officeDocument/2006/relationships" xmlns:p="http://schemas.openxmlformats.org/presentationml/2006/main">
+  <p:cSld>
+    <p:spTree>
+      <p:nvGrpSpPr>
+        <p:cNvPr id="1" name=""/>
+        <p:cNvGrpSpPr/>
+        <p:nvPr/>
+      </p:nvGrpSpPr>
+      <p:grpSpPr>
+        <a:xfrm>
+          <a:off x="0" y="0"/>
+          <a:ext cx="0" cy="0"/>
+          <a:chOff x="0" y="0"/>
+          <a:chExt cx="0" cy="0"/>
+        </a:xfrm>
+      </p:grpSpPr>
+      <p:sp>
+        <p:nvSpPr>
+          <p:cNvPr id="2" name="Slide Image Placeholder 1"/>
+          <p:cNvSpPr>
+            <a:spLocks noGrp="1" noRot="1" noChangeAspect="1"/>
+          </p:cNvSpPr>
+          <p:nvPr>
+            <p:ph type="sldImg"/>
+          </p:nvPr>
+        </p:nvSpPr>
+        <p:spPr/>
+      </p:sp>
+      <p:sp>
+        <p:nvSpPr>
+          <p:cNvPr id="3" name="Notes Placeholder 2"/>
+          <p:cNvSpPr>
+            <a:spLocks noGrp="1"/>
+          </p:cNvSpPr>
+          <p:nvPr>
+            <p:ph type="body" idx="1"/>
+          </p:nvPr>
+        </p:nvSpPr>
+        <p:spPr/>
+        <p:txBody>
+          <a:bodyPr/>
+          <a:lstStyle/>
+          <a:p>
+            <a:r>
+              <a:rPr lang="en-US" dirty="0"/>
+              <a:t>[~25s]
+Innovation. This problem is everywhere: every university, every society, and it’s still paper forms and email. Students front the money and can wait weeks, sometimes months, to be paid back. One union in Manchester has over 400 societies.
+Our idea is a new split of trust: the AI makes the decision on its own, so it’s fast, but it physically can’t pay. Only a person with a Ledger can.
+And we proved it: our attack demo turns the safeguards off on purpose. The AI is fooled, and the Ledger still catches it.
+[Source: University of Manchester Students’ Union, “over 400 societies”. “Months” is our committee members’ experience; say “can take”, not “always”.]</a:t>
+            </a:r>
+            <a:endParaRPr lang="en-US" dirty="0"/>
+          </a:p>
+        </p:txBody>
+      </p:sp>
+      <p:sp>
+        <p:nvSpPr>
+          <p:cNvPr id="4" name="Slide Number Placeholder 3"/>
+          <p:cNvSpPr>
+            <a:spLocks noGrp="1"/>
+          </p:cNvSpPr>
+          <p:nvPr>
+            <p:ph type="sldNum" sz="quarter" idx="10"/>
+          </p:nvPr>
+        </p:nvSpPr>
+        <p:spPr/>
+        <p:txBody>
+          <a:bodyPr/>
+          <a:lstStyle/>
+          <a:p>
+            <a:fld id="{F7021451-1387-4CA6-816F-3879F97B5CBC}" type="slidenum">
+              <a:rPr lang="en-US"/>
+              <a:t>13</a:t>
+            </a:fld>
+            <a:endParaRPr lang="en-US"/>
+          </a:p>
+        </p:txBody>
+      </p:sp>
+    </p:spTree>
+    <p:extLst>
+      <p:ext uri="{BB962C8B-B14F-4D97-AF65-F5344CB8AC3E}">
+        <p14:creationId xmlns:p14="http://schemas.microsoft.com/office/powerpoint/2010/main" val="1024086991"/>
+      </p:ext>
+    </p:extLst>
+  </p:cSld>
+  <p:clrMapOvr>
+    <a:masterClrMapping/>
+  </p:clrMapOvr>
+</p:notes>
+</file>
+
+<file path=ppt/notesSlides/notesSlide14.xml><?xml version="1.0" encoding="utf-8"?>
+<p:notes xmlns:a="http://schemas.openxmlformats.org/drawingml/2006/main" xmlns:r="http://schemas.openxmlformats.org/officeDocument/2006/relationships" xmlns:p="http://schemas.openxmlformats.org/presentationml/2006/main">
+  <p:cSld>
+    <p:spTree>
+      <p:nvGrpSpPr>
+        <p:cNvPr id="1" name=""/>
+        <p:cNvGrpSpPr/>
+        <p:nvPr/>
+      </p:nvGrpSpPr>
+      <p:grpSpPr>
+        <a:xfrm>
+          <a:off x="0" y="0"/>
+          <a:ext cx="0" cy="0"/>
+          <a:chOff x="0" y="0"/>
+          <a:chExt cx="0" cy="0"/>
+        </a:xfrm>
+      </p:grpSpPr>
+      <p:sp>
+        <p:nvSpPr>
+          <p:cNvPr id="2" name="Slide Image Placeholder 1"/>
+          <p:cNvSpPr>
+            <a:spLocks noGrp="1" noRot="1" noChangeAspect="1"/>
+          </p:cNvSpPr>
+          <p:nvPr>
+            <p:ph type="sldImg"/>
+          </p:nvPr>
+        </p:nvSpPr>
+        <p:spPr/>
+      </p:sp>
+      <p:sp>
+        <p:nvSpPr>
+          <p:cNvPr id="3" name="Notes Placeholder 2"/>
+          <p:cNvSpPr>
+            <a:spLocks noGrp="1"/>
+          </p:cNvSpPr>
+          <p:nvPr>
+            <p:ph type="body" idx="1"/>
+          </p:nvPr>
+        </p:nvSpPr>
+        <p:spPr/>
+        <p:txBody>
+          <a:bodyPr/>
+          <a:lstStyle/>
+          <a:p>
+            <a:r>
+              <a:rPr lang="en-US" dirty="0"/>
+              <a:t>[~20s]
+User experience. A member submits a claim in under a minute, from their phone, with no app to install. Reading the receipt costs nothing and the photo never leaves the phone.
+If the agent says no, it says why, in plain words, and offers an appeal.
+And the Union treasurer has one simple job: check the flagged field, then press the button on the Ledger.</a:t>
+            </a:r>
+            <a:endParaRPr lang="en-US" dirty="0"/>
+          </a:p>
+        </p:txBody>
+      </p:sp>
+      <p:sp>
+        <p:nvSpPr>
+          <p:cNvPr id="4" name="Slide Number Placeholder 3"/>
+          <p:cNvSpPr>
+            <a:spLocks noGrp="1"/>
+          </p:cNvSpPr>
+          <p:nvPr>
+            <p:ph type="sldNum" sz="quarter" idx="10"/>
+          </p:nvPr>
+        </p:nvSpPr>
+        <p:spPr/>
+        <p:txBody>
+          <a:bodyPr/>
+          <a:lstStyle/>
+          <a:p>
+            <a:fld id="{F7021451-1387-4CA6-816F-3879F97B5CBC}" type="slidenum">
+              <a:rPr lang="en-US"/>
+              <a:t>14</a:t>
+            </a:fld>
+            <a:endParaRPr lang="en-US"/>
+          </a:p>
+        </p:txBody>
+      </p:sp>
+    </p:spTree>
+    <p:extLst>
+      <p:ext uri="{BB962C8B-B14F-4D97-AF65-F5344CB8AC3E}">
+        <p14:creationId xmlns:p14="http://schemas.microsoft.com/office/powerpoint/2010/main" val="1024086991"/>
+      </p:ext>
+    </p:extLst>
+  </p:cSld>
+  <p:clrMapOvr>
+    <a:masterClrMapping/>
+  </p:clrMapOvr>
+</p:notes>
+</file>
+
+<file path=ppt/notesSlides/notesSlide15.xml><?xml version="1.0" encoding="utf-8"?>
+<p:notes xmlns:a="http://schemas.openxmlformats.org/drawingml/2006/main" xmlns:r="http://schemas.openxmlformats.org/officeDocument/2006/relationships" xmlns:p="http://schemas.openxmlformats.org/presentationml/2006/main">
+  <p:cSld>
+    <p:spTree>
+      <p:nvGrpSpPr>
+        <p:cNvPr id="1" name=""/>
+        <p:cNvGrpSpPr/>
+        <p:nvPr/>
+      </p:nvGrpSpPr>
+      <p:grpSpPr>
+        <a:xfrm>
+          <a:off x="0" y="0"/>
+          <a:ext cx="0" cy="0"/>
+          <a:chOff x="0" y="0"/>
+          <a:chExt cx="0" cy="0"/>
+        </a:xfrm>
+      </p:grpSpPr>
+      <p:sp>
+        <p:nvSpPr>
+          <p:cNvPr id="2" name="Slide Image Placeholder 1"/>
+          <p:cNvSpPr>
+            <a:spLocks noGrp="1" noRot="1" noChangeAspect="1"/>
+          </p:cNvSpPr>
+          <p:nvPr>
+            <p:ph type="sldImg"/>
+          </p:nvPr>
+        </p:nvSpPr>
+        <p:spPr/>
+      </p:sp>
+      <p:sp>
+        <p:nvSpPr>
+          <p:cNvPr id="3" name="Notes Placeholder 2"/>
+          <p:cNvSpPr>
+            <a:spLocks noGrp="1"/>
+          </p:cNvSpPr>
+          <p:nvPr>
+            <p:ph type="body" idx="1"/>
+          </p:nvPr>
+        </p:nvSpPr>
+        <p:spPr/>
+        <p:txBody>
+          <a:bodyPr/>
+          <a:lstStyle/>
+          <a:p>
+            <a:r>
+              <a:rPr lang="en-US" dirty="0"/>
+              <a:t>[~20s]
+New use cases. SocFi is one example of a pattern: an agent proposes, a person signs on hardware.
+Universities first, then charities, clubs, company expenses, grants and agent wallets.
+And Ledger does two jobs here, not one: it signs the payouts, and with Key Ring it holds the agent’s own secrets.</a:t>
+            </a:r>
+            <a:endParaRPr lang="en-US" dirty="0"/>
+          </a:p>
+        </p:txBody>
+      </p:sp>
+      <p:sp>
+        <p:nvSpPr>
+          <p:cNvPr id="4" name="Slide Number Placeholder 3"/>
+          <p:cNvSpPr>
+            <a:spLocks noGrp="1"/>
+          </p:cNvSpPr>
+          <p:nvPr>
+            <p:ph type="sldNum" sz="quarter" idx="10"/>
+          </p:nvPr>
+        </p:nvSpPr>
+        <p:spPr/>
+        <p:txBody>
+          <a:bodyPr/>
+          <a:lstStyle/>
+          <a:p>
+            <a:fld id="{F7021451-1387-4CA6-816F-3879F97B5CBC}" type="slidenum">
+              <a:rPr lang="en-US"/>
+              <a:t>15</a:t>
+            </a:fld>
+            <a:endParaRPr lang="en-US"/>
+          </a:p>
+        </p:txBody>
+      </p:sp>
+    </p:spTree>
+    <p:extLst>
+      <p:ext uri="{BB962C8B-B14F-4D97-AF65-F5344CB8AC3E}">
+        <p14:creationId xmlns:p14="http://schemas.microsoft.com/office/powerpoint/2010/main" val="1024086991"/>
+      </p:ext>
+    </p:extLst>
+  </p:cSld>
+  <p:clrMapOvr>
+    <a:masterClrMapping/>
+  </p:clrMapOvr>
+</p:notes>
+</file>
+
+<file path=ppt/notesSlides/notesSlide16.xml><?xml version="1.0" encoding="utf-8"?>
+<p:notes xmlns:a="http://schemas.openxmlformats.org/drawingml/2006/main" xmlns:r="http://schemas.openxmlformats.org/officeDocument/2006/relationships" xmlns:p="http://schemas.openxmlformats.org/presentationml/2006/main">
+  <p:cSld>
+    <p:spTree>
+      <p:nvGrpSpPr>
+        <p:cNvPr id="1" name=""/>
+        <p:cNvGrpSpPr/>
+        <p:nvPr/>
+      </p:nvGrpSpPr>
+      <p:grpSpPr>
+        <a:xfrm>
+          <a:off x="0" y="0"/>
+          <a:ext cx="0" cy="0"/>
+          <a:chOff x="0" y="0"/>
+          <a:chExt cx="0" cy="0"/>
+        </a:xfrm>
+      </p:grpSpPr>
+      <p:sp>
+        <p:nvSpPr>
+          <p:cNvPr id="2" name="Slide Image Placeholder 1"/>
+          <p:cNvSpPr>
+            <a:spLocks noGrp="1" noRot="1" noChangeAspect="1"/>
+          </p:cNvSpPr>
+          <p:nvPr>
+            <p:ph type="sldImg"/>
+          </p:nvPr>
+        </p:nvSpPr>
+        <p:spPr/>
+      </p:sp>
+      <p:sp>
+        <p:nvSpPr>
+          <p:cNvPr id="3" name="Notes Placeholder 2"/>
+          <p:cNvSpPr>
+            <a:spLocks noGrp="1"/>
+          </p:cNvSpPr>
+          <p:nvPr>
+            <p:ph type="body" idx="1"/>
+          </p:nvPr>
+        </p:nvSpPr>
+        <p:spPr/>
+        <p:txBody>
+          <a:bodyPr/>
+          <a:lstStyle/>
+          <a:p>
+            <a:r>
+              <a:rPr lang="en-US" dirty="0"/>
+              <a:t>[~15s]
+Everything is documented and open. The GitHub README starts with what’s real and what’s mocked, how to run it on Mac or Windows, a seventeen-step demo script, and a map from each judging criterion to the code.
+And you can try it now on your phone at the link.
+[The links on this slide are clickable in the PDF and in PowerPoint.]</a:t>
+            </a:r>
+            <a:endParaRPr lang="en-US" dirty="0"/>
+          </a:p>
+        </p:txBody>
+      </p:sp>
+      <p:sp>
+        <p:nvSpPr>
+          <p:cNvPr id="4" name="Slide Number Placeholder 3"/>
+          <p:cNvSpPr>
+            <a:spLocks noGrp="1"/>
+          </p:cNvSpPr>
+          <p:nvPr>
+            <p:ph type="sldNum" sz="quarter" idx="10"/>
+          </p:nvPr>
+        </p:nvSpPr>
+        <p:spPr/>
+        <p:txBody>
+          <a:bodyPr/>
+          <a:lstStyle/>
+          <a:p>
+            <a:fld id="{F7021451-1387-4CA6-816F-3879F97B5CBC}" type="slidenum">
+              <a:rPr lang="en-US"/>
+              <a:t>16</a:t>
+            </a:fld>
+            <a:endParaRPr lang="en-US"/>
+          </a:p>
+        </p:txBody>
+      </p:sp>
+    </p:spTree>
+    <p:extLst>
+      <p:ext uri="{BB962C8B-B14F-4D97-AF65-F5344CB8AC3E}">
+        <p14:creationId xmlns:p14="http://schemas.microsoft.com/office/powerpoint/2010/main" val="1024086991"/>
+      </p:ext>
+    </p:extLst>
+  </p:cSld>
+  <p:clrMapOvr>
+    <a:masterClrMapping/>
+  </p:clrMapOvr>
+</p:notes>
+</file>
+
+<file path=ppt/notesSlides/notesSlide17.xml><?xml version="1.0" encoding="utf-8"?>
+<p:notes xmlns:a="http://schemas.openxmlformats.org/drawingml/2006/main" xmlns:r="http://schemas.openxmlformats.org/officeDocument/2006/relationships" xmlns:p="http://schemas.openxmlformats.org/presentationml/2006/main">
+  <p:cSld>
+    <p:spTree>
+      <p:nvGrpSpPr>
+        <p:cNvPr id="1" name=""/>
+        <p:cNvGrpSpPr/>
+        <p:nvPr/>
+      </p:nvGrpSpPr>
+      <p:grpSpPr>
+        <a:xfrm>
+          <a:off x="0" y="0"/>
+          <a:ext cx="0" cy="0"/>
+          <a:chOff x="0" y="0"/>
+          <a:chExt cx="0" cy="0"/>
+        </a:xfrm>
+      </p:grpSpPr>
+      <p:sp>
+        <p:nvSpPr>
+          <p:cNvPr id="2" name="Slide Image Placeholder 1"/>
+          <p:cNvSpPr>
+            <a:spLocks noGrp="1" noRot="1" noChangeAspect="1"/>
+          </p:cNvSpPr>
+          <p:nvPr>
+            <p:ph type="sldImg"/>
+          </p:nvPr>
+        </p:nvSpPr>
+        <p:spPr/>
+      </p:sp>
+      <p:sp>
+        <p:nvSpPr>
+          <p:cNvPr id="3" name="Notes Placeholder 2"/>
+          <p:cNvSpPr>
+            <a:spLocks noGrp="1"/>
+          </p:cNvSpPr>
+          <p:nvPr>
+            <p:ph type="body" idx="1"/>
+          </p:nvPr>
+        </p:nvSpPr>
+        <p:spPr/>
+        <p:txBody>
+          <a:bodyPr/>
+          <a:lstStyle/>
+          <a:p>
+            <a:r>
+              <a:rPr lang="en-US" dirty="0"/>
+              <a:t>[4:50–5:00]
+So: the agent does the work, the Ledger keeps the keys. Students get paid back in minutes, and no AI can ever be talked into paying.
+You can try it on your phone right now at the link. Thank you, we’d love your questions.
+[Likely questions: Why crypto and not bank transfer? (Instant, any day, programmable caps; members who want pounds stay on the normal route.) What if the treasurer just presses approve? (The device screen is their one job: amount and recipient. Multi-signer for large claims is on the roadmap.) Real Ledger? (Same DMK code; only the transport changes to WebHID.)]</a:t>
+            </a:r>
+            <a:endParaRPr lang="en-US" dirty="0"/>
+          </a:p>
+        </p:txBody>
+      </p:sp>
+      <p:sp>
+        <p:nvSpPr>
+          <p:cNvPr id="4" name="Slide Number Placeholder 3"/>
+          <p:cNvSpPr>
+            <a:spLocks noGrp="1"/>
+          </p:cNvSpPr>
+          <p:nvPr>
+            <p:ph type="sldNum" sz="quarter" idx="10"/>
+          </p:nvPr>
+        </p:nvSpPr>
+        <p:spPr/>
+        <p:txBody>
+          <a:bodyPr/>
+          <a:lstStyle/>
+          <a:p>
+            <a:fld id="{F7021451-1387-4CA6-816F-3879F97B5CBC}" type="slidenum">
+              <a:rPr lang="en-US"/>
+              <a:t>17</a:t>
             </a:fld>
             <a:endParaRPr lang="en-US"/>
           </a:p>
@@ -1205,7 +1772,8 @@
 The backend drafts the USDC transfer but holds no keys. It hands the unsigned transaction to the device through Ledger’s Device Management Kit and Ethereum Signer Kit, running against the Speculos emulator of a Nano S Plus.
 The device clear-signs: amount, recipient and network on its own screen. If they don’t match, the treasurer rejects and nothing is sent.
 And it’s real: a claim from the app, approved by the agent, signed on the device, paid in test USDC on Base Sepolia.
-[Scored here: relevance for Ledger and technical execution: “a concrete Ledger primitive actually implemented”. If Key Ring is finished before submission, add: “and the agent’s own API key is encrypted with Ledger Key Ring.”]</a:t>
+And the agent’s own API key is encrypted with Ledger Key Ring, so even its credentials answer to a Ledger.
+[Scored here: relevance for Ledger and technical execution: “a concrete Ledger primitive actually implemented”.]</a:t>
             </a:r>
             <a:endParaRPr lang="en-US" dirty="0"/>
           </a:p>
@@ -2690,16 +3258,62 @@
           </a:p>
         </p:txBody>
       </p:sp>
+      <p:sp>
+        <p:nvSpPr>
+          <p:cNvPr id="9" name="Text 7"/>
+          <p:cNvSpPr txBox="1"/>
+          <p:nvPr/>
+        </p:nvSpPr>
+        <p:spPr>
+          <a:xfrm>
+            <a:off x="548640" y="5577840"/>
+            <a:ext cx="6858000" cy="320040"/>
+          </a:xfrm>
+          <a:prstGeom prst="rect">
+            <a:avLst/>
+          </a:prstGeom>
+          <a:noFill/>
+          <a:ln/>
+        </p:spPr>
+        <p:txBody>
+          <a:bodyPr wrap="square" lIns="0" tIns="0" rIns="0" bIns="0" rtlCol="0" anchor="t"/>
+          <a:lstStyle/>
+          <a:p>
+            <a:pPr indent="0" marL="0">
+              <a:buNone/>
+            </a:pPr>
+            <a:r>
+              <a:rPr lang="en-US" sz="1200" u="sng" dirty="0">
+                <a:solidFill>
+                  <a:schemeClr val="accent1"/>
+                </a:solidFill>
+                <a:latin typeface="Consolas" pitchFamily="34" charset="0"/>
+                <a:ea typeface="Consolas" pitchFamily="34" charset="-122"/>
+                <a:cs typeface="Consolas" pitchFamily="34" charset="-120"/>
+                <a:hlinkClick r:id="rId1" invalidUrl="" action="" tgtFrame="" tooltip="https://github.com/tamrachan/ledger-hackathon" history="1" highlightClick="0" endSnd="0">
+                  <a:extLst>
+                    <a:ext uri="{A12FA001-AC4F-418D-AE19-62706E023703}">
+                      <ahyp:hlinkClr xmlns:ahyp="http://schemas.microsoft.com/office/drawing/2018/hyperlinkcolor" val="tx"/>
+                    </a:ext>
+                  </a:extLst>
+                </a:hlinkClick>
+              </a:rPr>
+              <a:t>github.com/tamrachan/ledger-hackathon</a:t>
+            </a:r>
+            <a:endParaRPr lang="en-US" sz="1200" dirty="0"/>
+          </a:p>
+        </p:txBody>
+      </p:sp>
       <p:pic>
         <p:nvPicPr>
-          <p:cNvPr id="9" name="App on a phone" descr="C:\Users\tamra\AppData\Local\Temp\claude\c--Users-tamra-Documents-Projects-ledger-hackathon\fddb4cb0-085f-44b4-8227-1530ce90967d\scratchpad\deck\shots\c-phone.png">    </p:cNvPr>
+          <p:cNvPr id="10" name="App on a phone" descr="C:\Users\tamra\AppData\Local\Temp\claude\c--Users-tamra-Documents-Projects-ledger-hackathon\fddb4cb0-085f-44b4-8227-1530ce90967d\scratchpad\deck\shots\c-phone.png">    </p:cNvPr>
           <p:cNvPicPr>
             <a:picLocks noChangeAspect="1"/>
           </p:cNvPicPr>
           <p:nvPr/>
         </p:nvPicPr>
         <p:blipFill>
-          <a:blip r:embed="rId1"/>
+          <a:blip r:embed="rId2"/>
           <a:stretch>
             <a:fillRect/>
           </a:stretch>
@@ -3008,7 +3622,7 @@
                 <a:ea typeface="Calibri" pitchFamily="34" charset="-122"/>
                 <a:cs typeface="Calibri" pitchFamily="34" charset="-120"/>
               </a:rPr>
-              <a:t>Real test-USDC payout on Base Sepolia</a:t>
+              <a:t>Agent’s API key sealed with Ledger Key Ring</a:t>
             </a:r>
             <a:endParaRPr lang="en-US" sz="1500" dirty="0"/>
           </a:p>
@@ -3115,7 +3729,7 @@
                 <a:ea typeface="Calibri" pitchFamily="34" charset="-122"/>
                 <a:cs typeface="Calibri" pitchFamily="34" charset="-120"/>
               </a:rPr>
-              <a:t>Agent’s API key in Ledger Key Ring, no plain .env</a:t>
+              <a:t>Real Ledger in the treasurer’s browser (WebHID)</a:t>
             </a:r>
             <a:endParaRPr lang="en-US" sz="1500" dirty="0"/>
           </a:p>
@@ -3136,7 +3750,7 @@
                 <a:ea typeface="Calibri" pitchFamily="34" charset="-122"/>
                 <a:cs typeface="Calibri" pitchFamily="34" charset="-120"/>
               </a:rPr>
-              <a:t>Real Ledger in the treasurer’s browser (WebHID)</a:t>
+              <a:t>Key Ring on Ledger’s production service</a:t>
             </a:r>
             <a:endParaRPr lang="en-US" sz="1500" dirty="0"/>
           </a:p>
@@ -3429,53 +4043,57 @@
       </p:grpSpPr>
       <p:sp>
         <p:nvSpPr>
-          <p:cNvPr id="2" name="Text 0"/>
-          <p:cNvSpPr txBox="1"/>
-          <p:nvPr/>
-        </p:nvSpPr>
-        <p:spPr>
-          <a:xfrm>
-            <a:off x="548640" y="1645920"/>
-            <a:ext cx="10972800" cy="822960"/>
-          </a:xfrm>
-          <a:prstGeom prst="rect">
-            <a:avLst/>
-          </a:prstGeom>
-          <a:noFill/>
-          <a:ln/>
-        </p:spPr>
-        <p:txBody>
-          <a:bodyPr wrap="square" lIns="0" tIns="0" rIns="0" bIns="0" rtlCol="0" anchor="t"/>
-          <a:lstStyle/>
-          <a:p>
-            <a:pPr indent="0" marL="0">
-              <a:buNone/>
-            </a:pPr>
-            <a:r>
-              <a:rPr lang="en-US" sz="4400" b="1" dirty="0">
-                <a:solidFill>
-                  <a:schemeClr val="accent6"/>
+          <p:cNvPr id="2" name="Text 4"/>
+          <p:cNvSpPr/>
+          <p:nvPr>
+            <p:ph idx="104" type="body" hasCustomPrompt="1"/>
+          </p:nvPr>
+        </p:nvSpPr>
+        <p:spPr>
+          <a:xfrm>
+            <a:off x="548640" y="457200"/>
+            <a:ext cx="8229600" cy="274320"/>
+          </a:xfrm>
+          <a:prstGeom prst="rect">
+            <a:avLst/>
+          </a:prstGeom>
+          <a:noFill/>
+          <a:ln/>
+        </p:spPr>
+        <p:txBody>
+          <a:bodyPr wrap="square" lIns="0" tIns="0" rIns="0" bIns="0" rtlCol="0" anchor="ctr"/>
+          <a:lstStyle/>
+          <a:p>
+            <a:pPr indent="0" marL="0">
+              <a:buNone/>
+            </a:pPr>
+            <a:r>
+              <a:rPr lang="en-US" sz="1200" spc="300" kern="0" dirty="0">
+                <a:solidFill>
+                  <a:schemeClr val="accent1"/>
                 </a:solidFill>
                 <a:latin typeface="Consolas" pitchFamily="34" charset="0"/>
                 <a:ea typeface="Consolas" pitchFamily="34" charset="-122"/>
                 <a:cs typeface="Consolas" pitchFamily="34" charset="-120"/>
               </a:rPr>
-              <a:t>THE AGENT DOES THE WORK.</a:t>
-            </a:r>
-            <a:endParaRPr lang="en-US" sz="4400" dirty="0"/>
-          </a:p>
-        </p:txBody>
-      </p:sp>
-      <p:sp>
-        <p:nvSpPr>
-          <p:cNvPr id="3" name="Text 1"/>
-          <p:cNvSpPr txBox="1"/>
-          <p:nvPr/>
-        </p:nvSpPr>
-        <p:spPr>
-          <a:xfrm>
-            <a:off x="548640" y="2468880"/>
-            <a:ext cx="10972800" cy="822960"/>
+              <a:t>JUDGED ON · TECHNICAL EXECUTION · 25%</a:t>
+            </a:r>
+            <a:endParaRPr lang="en-US" sz="1200" dirty="0"/>
+          </a:p>
+        </p:txBody>
+      </p:sp>
+      <p:sp>
+        <p:nvSpPr>
+          <p:cNvPr id="3" name="Text 4"/>
+          <p:cNvSpPr/>
+          <p:nvPr>
+            <p:ph idx="105" type="title" hasCustomPrompt="1"/>
+          </p:nvPr>
+        </p:nvSpPr>
+        <p:spPr>
+          <a:xfrm>
+            <a:off x="548640" y="777240"/>
+            <a:ext cx="11094415" cy="777240"/>
           </a:xfrm>
           <a:prstGeom prst="rect">
             <a:avLst/>
@@ -3487,77 +4105,38 @@
           <a:bodyPr wrap="square" lIns="0" tIns="0" rIns="0" bIns="0" rtlCol="0" anchor="t"/>
           <a:lstStyle/>
           <a:p>
-            <a:pPr indent="0" marL="0">
-              <a:buNone/>
-            </a:pPr>
-            <a:r>
-              <a:rPr lang="en-US" sz="4400" b="1" dirty="0">
-                <a:solidFill>
-                  <a:schemeClr val="accent1"/>
+            <a:pPr algn="l" indent="0" marL="0">
+              <a:buNone/>
+            </a:pPr>
+            <a:r>
+              <a:rPr lang="en-US" sz="3200" b="1" dirty="0">
+                <a:solidFill>
+                  <a:schemeClr val="bg1"/>
                 </a:solidFill>
                 <a:latin typeface="Consolas" pitchFamily="34" charset="0"/>
                 <a:ea typeface="Consolas" pitchFamily="34" charset="-122"/>
                 <a:cs typeface="Consolas" pitchFamily="34" charset="-120"/>
               </a:rPr>
-              <a:t>THE LEDGER KEEPS THE KEYS.</a:t>
-            </a:r>
-            <a:endParaRPr lang="en-US" sz="4400" dirty="0"/>
-          </a:p>
-        </p:txBody>
-      </p:sp>
-      <p:sp>
-        <p:nvSpPr>
-          <p:cNvPr id="4" name="Text 2"/>
-          <p:cNvSpPr txBox="1"/>
-          <p:nvPr/>
-        </p:nvSpPr>
-        <p:spPr>
-          <a:xfrm>
-            <a:off x="548640" y="3520440"/>
-            <a:ext cx="9144000" cy="548640"/>
-          </a:xfrm>
-          <a:prstGeom prst="rect">
-            <a:avLst/>
-          </a:prstGeom>
-          <a:noFill/>
-          <a:ln/>
-        </p:spPr>
-        <p:txBody>
-          <a:bodyPr wrap="square" lIns="0" tIns="0" rIns="0" bIns="0" rtlCol="0" anchor="t"/>
-          <a:lstStyle/>
-          <a:p>
-            <a:pPr indent="0" marL="0">
-              <a:buNone/>
-            </a:pPr>
-            <a:r>
-              <a:rPr lang="en-US" sz="2000" dirty="0">
-                <a:solidFill>
-                  <a:schemeClr val="bg2"/>
-                </a:solidFill>
-                <a:latin typeface="Calibri" pitchFamily="34" charset="0"/>
-                <a:ea typeface="Calibri" pitchFamily="34" charset="-122"/>
-                <a:cs typeface="Calibri" pitchFamily="34" charset="-120"/>
-              </a:rPr>
-              <a:t>Students get paid back in minutes, and no AI can ever be talked into paying.</a:t>
-            </a:r>
-            <a:endParaRPr lang="en-US" sz="2000" dirty="0"/>
-          </a:p>
-        </p:txBody>
-      </p:sp>
-      <p:sp>
-        <p:nvSpPr>
-          <p:cNvPr id="5" name="Link 1"/>
+              <a:t>REAL SIGNATURES. REAL PAYOUTS. REAL KEY RING</a:t>
+            </a:r>
+            <a:endParaRPr lang="en-US" sz="3200" dirty="0"/>
+          </a:p>
+        </p:txBody>
+      </p:sp>
+      <p:sp>
+        <p:nvSpPr>
+          <p:cNvPr id="4" name="Stat 1"/>
           <p:cNvSpPr/>
           <p:nvPr/>
         </p:nvSpPr>
         <p:spPr>
           <a:xfrm>
-            <a:off x="548640" y="4526280"/>
-            <a:ext cx="4251960" cy="1097280"/>
+            <a:off x="548640" y="1783080"/>
+            <a:ext cx="2567864" cy="1554480"/>
           </a:xfrm>
           <a:prstGeom prst="roundRect">
             <a:avLst>
-              <a:gd name="adj" fmla="val 10000"/>
+              <a:gd name="adj" fmla="val 7059"/>
             </a:avLst>
           </a:prstGeom>
           <a:solidFill>
@@ -3573,30 +4152,32 @@
       </p:sp>
       <p:sp>
         <p:nvSpPr>
-          <p:cNvPr id="6" name="Text 4"/>
-          <p:cNvSpPr txBox="1"/>
-          <p:nvPr/>
-        </p:nvSpPr>
-        <p:spPr>
-          <a:xfrm>
-            <a:off x="822960" y="4690872"/>
-            <a:ext cx="3794760" cy="274320"/>
-          </a:xfrm>
-          <a:prstGeom prst="rect">
-            <a:avLst/>
-          </a:prstGeom>
-          <a:noFill/>
-          <a:ln/>
-        </p:spPr>
-        <p:txBody>
-          <a:bodyPr wrap="square" lIns="0" tIns="0" rIns="0" bIns="0" rtlCol="0" anchor="t"/>
-          <a:lstStyle/>
-          <a:p>
-            <a:pPr indent="0" marL="0">
-              <a:buNone/>
-            </a:pPr>
-            <a:r>
-              <a:rPr lang="en-US" sz="1100" spc="200" kern="0" dirty="0">
+          <p:cNvPr id="5" name="Text 3"/>
+          <p:cNvSpPr txBox="1"/>
+          <p:nvPr/>
+        </p:nvSpPr>
+        <p:spPr>
+          <a:xfrm>
+            <a:off x="822960" y="1920240"/>
+            <a:ext cx="2110664" cy="685800"/>
+          </a:xfrm>
+          <a:prstGeom prst="rect">
+            <a:avLst/>
+          </a:prstGeom>
+          <a:noFill/>
+          <a:ln/>
+        </p:spPr>
+        <p:txBody>
+          <a:bodyPr wrap="square" lIns="0" tIns="0" rIns="0" bIns="0" rtlCol="0" anchor="ctr">
+            <a:normAutofit/>
+          </a:bodyPr>
+          <a:lstStyle/>
+          <a:p>
+            <a:pPr indent="0" marL="0">
+              <a:buNone/>
+            </a:pPr>
+            <a:r>
+              <a:rPr lang="en-US" sz="3600" b="1" dirty="0">
                 <a:solidFill>
                   <a:schemeClr val="accent1"/>
                 </a:solidFill>
@@ -3604,22 +4185,22 @@
                 <a:ea typeface="Consolas" pitchFamily="34" charset="-122"/>
                 <a:cs typeface="Consolas" pitchFamily="34" charset="-120"/>
               </a:rPr>
-              <a:t>TRY IT</a:t>
-            </a:r>
-            <a:endParaRPr lang="en-US" sz="1100" dirty="0"/>
-          </a:p>
-        </p:txBody>
-      </p:sp>
-      <p:sp>
-        <p:nvSpPr>
-          <p:cNvPr id="7" name="Text 5"/>
-          <p:cNvSpPr txBox="1"/>
-          <p:nvPr/>
-        </p:nvSpPr>
-        <p:spPr>
-          <a:xfrm>
-            <a:off x="822960" y="5029200"/>
-            <a:ext cx="3840480" cy="411480"/>
+              <a:t>8,600+</a:t>
+            </a:r>
+            <a:endParaRPr lang="en-US" sz="3600" dirty="0"/>
+          </a:p>
+        </p:txBody>
+      </p:sp>
+      <p:sp>
+        <p:nvSpPr>
+          <p:cNvPr id="6" name="Text 4"/>
+          <p:cNvSpPr txBox="1"/>
+          <p:nvPr/>
+        </p:nvSpPr>
+        <p:spPr>
+          <a:xfrm>
+            <a:off x="822960" y="2633472"/>
+            <a:ext cx="2110664" cy="640080"/>
           </a:xfrm>
           <a:prstGeom prst="rect">
             <a:avLst/>
@@ -3632,37 +4213,40 @@
           <a:lstStyle/>
           <a:p>
             <a:pPr indent="0" marL="0">
-              <a:buNone/>
-            </a:pPr>
-            <a:r>
-              <a:rPr lang="en-US" sz="1250" dirty="0">
-                <a:solidFill>
-                  <a:schemeClr val="accent6"/>
-                </a:solidFill>
-                <a:latin typeface="Consolas" pitchFamily="34" charset="0"/>
-                <a:ea typeface="Consolas" pitchFamily="34" charset="-122"/>
-                <a:cs typeface="Consolas" pitchFamily="34" charset="-120"/>
-              </a:rPr>
-              <a:t>tamrachan.github.io/ledger-hackathon</a:t>
-            </a:r>
-            <a:endParaRPr lang="en-US" sz="1250" dirty="0"/>
-          </a:p>
-        </p:txBody>
-      </p:sp>
-      <p:sp>
-        <p:nvSpPr>
-          <p:cNvPr id="8" name="Link 2"/>
+              <a:lnSpc>
+                <a:spcPct val="105000"/>
+              </a:lnSpc>
+              <a:buNone/>
+            </a:pPr>
+            <a:r>
+              <a:rPr lang="en-US" sz="1350" dirty="0">
+                <a:solidFill>
+                  <a:schemeClr val="bg2"/>
+                </a:solidFill>
+                <a:latin typeface="Calibri" pitchFamily="34" charset="0"/>
+                <a:ea typeface="Calibri" pitchFamily="34" charset="-122"/>
+                <a:cs typeface="Calibri" pitchFamily="34" charset="-120"/>
+              </a:rPr>
+              <a:t>lines of code, written in 4 days by 2 people</a:t>
+            </a:r>
+            <a:endParaRPr lang="en-US" sz="1350" dirty="0"/>
+          </a:p>
+        </p:txBody>
+      </p:sp>
+      <p:sp>
+        <p:nvSpPr>
+          <p:cNvPr id="7" name="Stat 2"/>
           <p:cNvSpPr/>
           <p:nvPr/>
         </p:nvSpPr>
         <p:spPr>
           <a:xfrm>
-            <a:off x="5074920" y="4526280"/>
-            <a:ext cx="4251960" cy="1097280"/>
+            <a:off x="3390824" y="1783080"/>
+            <a:ext cx="2567864" cy="1554480"/>
           </a:xfrm>
           <a:prstGeom prst="roundRect">
             <a:avLst>
-              <a:gd name="adj" fmla="val 10000"/>
+              <a:gd name="adj" fmla="val 7059"/>
             </a:avLst>
           </a:prstGeom>
           <a:solidFill>
@@ -3678,30 +4262,32 @@
       </p:sp>
       <p:sp>
         <p:nvSpPr>
-          <p:cNvPr id="9" name="Text 7"/>
-          <p:cNvSpPr txBox="1"/>
-          <p:nvPr/>
-        </p:nvSpPr>
-        <p:spPr>
-          <a:xfrm>
-            <a:off x="5349240" y="4690872"/>
-            <a:ext cx="3794760" cy="274320"/>
-          </a:xfrm>
-          <a:prstGeom prst="rect">
-            <a:avLst/>
-          </a:prstGeom>
-          <a:noFill/>
-          <a:ln/>
-        </p:spPr>
-        <p:txBody>
-          <a:bodyPr wrap="square" lIns="0" tIns="0" rIns="0" bIns="0" rtlCol="0" anchor="t"/>
-          <a:lstStyle/>
-          <a:p>
-            <a:pPr indent="0" marL="0">
-              <a:buNone/>
-            </a:pPr>
-            <a:r>
-              <a:rPr lang="en-US" sz="1100" spc="200" kern="0" dirty="0">
+          <p:cNvPr id="8" name="Text 6"/>
+          <p:cNvSpPr txBox="1"/>
+          <p:nvPr/>
+        </p:nvSpPr>
+        <p:spPr>
+          <a:xfrm>
+            <a:off x="3665144" y="1920240"/>
+            <a:ext cx="2110664" cy="685800"/>
+          </a:xfrm>
+          <a:prstGeom prst="rect">
+            <a:avLst/>
+          </a:prstGeom>
+          <a:noFill/>
+          <a:ln/>
+        </p:spPr>
+        <p:txBody>
+          <a:bodyPr wrap="square" lIns="0" tIns="0" rIns="0" bIns="0" rtlCol="0" anchor="ctr">
+            <a:normAutofit/>
+          </a:bodyPr>
+          <a:lstStyle/>
+          <a:p>
+            <a:pPr indent="0" marL="0">
+              <a:buNone/>
+            </a:pPr>
+            <a:r>
+              <a:rPr lang="en-US" sz="3600" b="1" dirty="0">
                 <a:solidFill>
                   <a:schemeClr val="accent1"/>
                 </a:solidFill>
@@ -3709,22 +4295,22 @@
                 <a:ea typeface="Consolas" pitchFamily="34" charset="-122"/>
                 <a:cs typeface="Consolas" pitchFamily="34" charset="-120"/>
               </a:rPr>
-              <a:t>CODE</a:t>
-            </a:r>
-            <a:endParaRPr lang="en-US" sz="1100" dirty="0"/>
-          </a:p>
-        </p:txBody>
-      </p:sp>
-      <p:sp>
-        <p:nvSpPr>
-          <p:cNvPr id="10" name="Text 8"/>
-          <p:cNvSpPr txBox="1"/>
-          <p:nvPr/>
-        </p:nvSpPr>
-        <p:spPr>
-          <a:xfrm>
-            <a:off x="5349240" y="5029200"/>
-            <a:ext cx="3840480" cy="411480"/>
+              <a:t>4</a:t>
+            </a:r>
+            <a:endParaRPr lang="en-US" sz="3600" dirty="0"/>
+          </a:p>
+        </p:txBody>
+      </p:sp>
+      <p:sp>
+        <p:nvSpPr>
+          <p:cNvPr id="9" name="Text 7"/>
+          <p:cNvSpPr txBox="1"/>
+          <p:nvPr/>
+        </p:nvSpPr>
+        <p:spPr>
+          <a:xfrm>
+            <a:off x="3665144" y="2633472"/>
+            <a:ext cx="2110664" cy="640080"/>
           </a:xfrm>
           <a:prstGeom prst="rect">
             <a:avLst/>
@@ -3737,37 +4323,40 @@
           <a:lstStyle/>
           <a:p>
             <a:pPr indent="0" marL="0">
-              <a:buNone/>
-            </a:pPr>
-            <a:r>
-              <a:rPr lang="en-US" sz="1250" dirty="0">
-                <a:solidFill>
-                  <a:schemeClr val="accent6"/>
-                </a:solidFill>
-                <a:latin typeface="Consolas" pitchFamily="34" charset="0"/>
-                <a:ea typeface="Consolas" pitchFamily="34" charset="-122"/>
-                <a:cs typeface="Consolas" pitchFamily="34" charset="-120"/>
-              </a:rPr>
-              <a:t>github.com/tamrachan/ledger-hackathon</a:t>
-            </a:r>
-            <a:endParaRPr lang="en-US" sz="1250" dirty="0"/>
-          </a:p>
-        </p:txBody>
-      </p:sp>
-      <p:sp>
-        <p:nvSpPr>
-          <p:cNvPr id="11" name="Link 3"/>
+              <a:lnSpc>
+                <a:spcPct val="105000"/>
+              </a:lnSpc>
+              <a:buNone/>
+            </a:pPr>
+            <a:r>
+              <a:rPr lang="en-US" sz="1350" dirty="0">
+                <a:solidFill>
+                  <a:schemeClr val="bg2"/>
+                </a:solidFill>
+                <a:latin typeface="Calibri" pitchFamily="34" charset="0"/>
+                <a:ea typeface="Calibri" pitchFamily="34" charset="-122"/>
+                <a:cs typeface="Calibri" pitchFamily="34" charset="-120"/>
+              </a:rPr>
+              <a:t>Ledger tools: DMK, Signer Kit, clear signing, Key Ring</a:t>
+            </a:r>
+            <a:endParaRPr lang="en-US" sz="1350" dirty="0"/>
+          </a:p>
+        </p:txBody>
+      </p:sp>
+      <p:sp>
+        <p:nvSpPr>
+          <p:cNvPr id="10" name="Stat 3"/>
           <p:cNvSpPr/>
           <p:nvPr/>
         </p:nvSpPr>
         <p:spPr>
           <a:xfrm>
-            <a:off x="9601200" y="4526280"/>
-            <a:ext cx="2041855" cy="1097280"/>
+            <a:off x="6233008" y="1783080"/>
+            <a:ext cx="2567864" cy="1554480"/>
           </a:xfrm>
           <a:prstGeom prst="roundRect">
             <a:avLst>
-              <a:gd name="adj" fmla="val 10000"/>
+              <a:gd name="adj" fmla="val 7059"/>
             </a:avLst>
           </a:prstGeom>
           <a:solidFill>
@@ -3783,30 +4372,32 @@
       </p:sp>
       <p:sp>
         <p:nvSpPr>
-          <p:cNvPr id="12" name="Text 10"/>
-          <p:cNvSpPr txBox="1"/>
-          <p:nvPr/>
-        </p:nvSpPr>
-        <p:spPr>
-          <a:xfrm>
-            <a:off x="9875520" y="4690872"/>
-            <a:ext cx="1584655" cy="274320"/>
-          </a:xfrm>
-          <a:prstGeom prst="rect">
-            <a:avLst/>
-          </a:prstGeom>
-          <a:noFill/>
-          <a:ln/>
-        </p:spPr>
-        <p:txBody>
-          <a:bodyPr wrap="square" lIns="0" tIns="0" rIns="0" bIns="0" rtlCol="0" anchor="t"/>
-          <a:lstStyle/>
-          <a:p>
-            <a:pPr indent="0" marL="0">
-              <a:buNone/>
-            </a:pPr>
-            <a:r>
-              <a:rPr lang="en-US" sz="1100" spc="200" kern="0" dirty="0">
+          <p:cNvPr id="11" name="Text 9"/>
+          <p:cNvSpPr txBox="1"/>
+          <p:nvPr/>
+        </p:nvSpPr>
+        <p:spPr>
+          <a:xfrm>
+            <a:off x="6507328" y="1920240"/>
+            <a:ext cx="2110664" cy="685800"/>
+          </a:xfrm>
+          <a:prstGeom prst="rect">
+            <a:avLst/>
+          </a:prstGeom>
+          <a:noFill/>
+          <a:ln/>
+        </p:spPr>
+        <p:txBody>
+          <a:bodyPr wrap="square" lIns="0" tIns="0" rIns="0" bIns="0" rtlCol="0" anchor="ctr">
+            <a:normAutofit/>
+          </a:bodyPr>
+          <a:lstStyle/>
+          <a:p>
+            <a:pPr indent="0" marL="0">
+              <a:buNone/>
+            </a:pPr>
+            <a:r>
+              <a:rPr lang="en-US" sz="3600" b="1" dirty="0">
                 <a:solidFill>
                   <a:schemeClr val="accent1"/>
                 </a:solidFill>
@@ -3814,22 +4405,22 @@
                 <a:ea typeface="Consolas" pitchFamily="34" charset="-122"/>
                 <a:cs typeface="Consolas" pitchFamily="34" charset="-120"/>
               </a:rPr>
-              <a:t>TEAM</a:t>
-            </a:r>
-            <a:endParaRPr lang="en-US" sz="1100" dirty="0"/>
-          </a:p>
-        </p:txBody>
-      </p:sp>
-      <p:sp>
-        <p:nvSpPr>
-          <p:cNvPr id="13" name="Text 11"/>
-          <p:cNvSpPr txBox="1"/>
-          <p:nvPr/>
-        </p:nvSpPr>
-        <p:spPr>
-          <a:xfrm>
-            <a:off x="9875520" y="5029200"/>
-            <a:ext cx="1630375" cy="411480"/>
+              <a:t>8</a:t>
+            </a:r>
+            <a:endParaRPr lang="en-US" sz="3600" dirty="0"/>
+          </a:p>
+        </p:txBody>
+      </p:sp>
+      <p:sp>
+        <p:nvSpPr>
+          <p:cNvPr id="12" name="Text 10"/>
+          <p:cNvSpPr txBox="1"/>
+          <p:nvPr/>
+        </p:nvSpPr>
+        <p:spPr>
+          <a:xfrm>
+            <a:off x="6507328" y="2633472"/>
+            <a:ext cx="2110664" cy="640080"/>
           </a:xfrm>
           <a:prstGeom prst="rect">
             <a:avLst/>
@@ -3842,20 +4433,457 @@
           <a:lstStyle/>
           <a:p>
             <a:pPr indent="0" marL="0">
-              <a:buNone/>
-            </a:pPr>
-            <a:r>
-              <a:rPr lang="en-US" sz="1250" dirty="0">
-                <a:solidFill>
-                  <a:schemeClr val="accent6"/>
+              <a:lnSpc>
+                <a:spcPct val="105000"/>
+              </a:lnSpc>
+              <a:buNone/>
+            </a:pPr>
+            <a:r>
+              <a:rPr lang="en-US" sz="1350" dirty="0">
+                <a:solidFill>
+                  <a:schemeClr val="bg2"/>
+                </a:solidFill>
+                <a:latin typeface="Calibri" pitchFamily="34" charset="0"/>
+                <a:ea typeface="Calibri" pitchFamily="34" charset="-122"/>
+                <a:cs typeface="Calibri" pitchFamily="34" charset="-120"/>
+              </a:rPr>
+              <a:t>checks on every claim: 7 in code, 1 by the LLM agent</a:t>
+            </a:r>
+            <a:endParaRPr lang="en-US" sz="1350" dirty="0"/>
+          </a:p>
+        </p:txBody>
+      </p:sp>
+      <p:sp>
+        <p:nvSpPr>
+          <p:cNvPr id="13" name="Stat 4"/>
+          <p:cNvSpPr/>
+          <p:nvPr/>
+        </p:nvSpPr>
+        <p:spPr>
+          <a:xfrm>
+            <a:off x="9075191" y="1783080"/>
+            <a:ext cx="2567864" cy="1554480"/>
+          </a:xfrm>
+          <a:prstGeom prst="roundRect">
+            <a:avLst>
+              <a:gd name="adj" fmla="val 7059"/>
+            </a:avLst>
+          </a:prstGeom>
+          <a:solidFill>
+            <a:schemeClr val="tx2"/>
+          </a:solidFill>
+          <a:ln w="12700">
+            <a:solidFill>
+              <a:schemeClr val="accent5"/>
+            </a:solidFill>
+            <a:prstDash val="solid"/>
+          </a:ln>
+        </p:spPr>
+      </p:sp>
+      <p:sp>
+        <p:nvSpPr>
+          <p:cNvPr id="14" name="Text 12"/>
+          <p:cNvSpPr txBox="1"/>
+          <p:nvPr/>
+        </p:nvSpPr>
+        <p:spPr>
+          <a:xfrm>
+            <a:off x="9349511" y="1920240"/>
+            <a:ext cx="2110664" cy="685800"/>
+          </a:xfrm>
+          <a:prstGeom prst="rect">
+            <a:avLst/>
+          </a:prstGeom>
+          <a:noFill/>
+          <a:ln/>
+        </p:spPr>
+        <p:txBody>
+          <a:bodyPr wrap="square" lIns="0" tIns="0" rIns="0" bIns="0" rtlCol="0" anchor="ctr">
+            <a:normAutofit/>
+          </a:bodyPr>
+          <a:lstStyle/>
+          <a:p>
+            <a:pPr indent="0" marL="0">
+              <a:buNone/>
+            </a:pPr>
+            <a:r>
+              <a:rPr lang="en-US" sz="3600" b="1" dirty="0">
+                <a:solidFill>
+                  <a:schemeClr val="accent1"/>
                 </a:solidFill>
                 <a:latin typeface="Consolas" pitchFamily="34" charset="0"/>
                 <a:ea typeface="Consolas" pitchFamily="34" charset="-122"/>
                 <a:cs typeface="Consolas" pitchFamily="34" charset="-120"/>
               </a:rPr>
-              <a:t>[Names]</a:t>
-            </a:r>
-            <a:endParaRPr lang="en-US" sz="1250" dirty="0"/>
+              <a:t>7</a:t>
+            </a:r>
+            <a:endParaRPr lang="en-US" sz="3600" dirty="0"/>
+          </a:p>
+        </p:txBody>
+      </p:sp>
+      <p:sp>
+        <p:nvSpPr>
+          <p:cNvPr id="15" name="Text 13"/>
+          <p:cNvSpPr txBox="1"/>
+          <p:nvPr/>
+        </p:nvSpPr>
+        <p:spPr>
+          <a:xfrm>
+            <a:off x="9349511" y="2633472"/>
+            <a:ext cx="2110664" cy="640080"/>
+          </a:xfrm>
+          <a:prstGeom prst="rect">
+            <a:avLst/>
+          </a:prstGeom>
+          <a:noFill/>
+          <a:ln/>
+        </p:spPr>
+        <p:txBody>
+          <a:bodyPr wrap="square" lIns="0" tIns="0" rIns="0" bIns="0" rtlCol="0" anchor="t"/>
+          <a:lstStyle/>
+          <a:p>
+            <a:pPr indent="0" marL="0">
+              <a:lnSpc>
+                <a:spcPct val="105000"/>
+              </a:lnSpc>
+              <a:buNone/>
+            </a:pPr>
+            <a:r>
+              <a:rPr lang="en-US" sz="1350" dirty="0">
+                <a:solidFill>
+                  <a:schemeClr val="bg2"/>
+                </a:solidFill>
+                <a:latin typeface="Calibri" pitchFamily="34" charset="0"/>
+                <a:ea typeface="Calibri" pitchFamily="34" charset="-122"/>
+                <a:cs typeface="Calibri" pitchFamily="34" charset="-120"/>
+              </a:rPr>
+              <a:t>attacks on the system, each with a named defence</a:t>
+            </a:r>
+            <a:endParaRPr lang="en-US" sz="1350" dirty="0"/>
+          </a:p>
+        </p:txBody>
+      </p:sp>
+      <p:sp>
+        <p:nvSpPr>
+          <p:cNvPr id="16" name="Proof ring 1"/>
+          <p:cNvSpPr/>
+          <p:nvPr/>
+        </p:nvSpPr>
+        <p:spPr>
+          <a:xfrm>
+            <a:off x="548640" y="3657600"/>
+            <a:ext cx="530352" cy="530352"/>
+          </a:xfrm>
+          <a:prstGeom prst="ellipse">
+            <a:avLst/>
+          </a:prstGeom>
+          <a:solidFill>
+            <a:schemeClr val="tx2"/>
+          </a:solidFill>
+          <a:ln w="12700">
+            <a:solidFill>
+              <a:schemeClr val="accent1"/>
+            </a:solidFill>
+            <a:prstDash val="solid"/>
+          </a:ln>
+        </p:spPr>
+      </p:sp>
+      <p:pic>
+        <p:nvPicPr>
+          <p:cNvPr id="17" name="Proof icon 1" descr="preencoded.png">    </p:cNvPr>
+          <p:cNvPicPr>
+            <a:picLocks noChangeAspect="1"/>
+          </p:cNvPicPr>
+          <p:nvPr/>
+        </p:nvPicPr>
+        <p:blipFill>
+          <a:blip r:embed="rId1"/>
+          <a:stretch>
+            <a:fillRect/>
+          </a:stretch>
+        </p:blipFill>
+        <p:spPr>
+          <a:xfrm>
+            <a:off x="690372" y="3799332"/>
+            <a:ext cx="246888" cy="246888"/>
+          </a:xfrm>
+          <a:prstGeom prst="rect">
+            <a:avLst/>
+          </a:prstGeom>
+        </p:spPr>
+      </p:pic>
+      <p:sp>
+        <p:nvSpPr>
+          <p:cNvPr id="18" name="Text 15"/>
+          <p:cNvSpPr txBox="1"/>
+          <p:nvPr/>
+        </p:nvSpPr>
+        <p:spPr>
+          <a:xfrm>
+            <a:off x="1325880" y="3621024"/>
+            <a:ext cx="10317175" cy="640080"/>
+          </a:xfrm>
+          <a:prstGeom prst="rect">
+            <a:avLst/>
+          </a:prstGeom>
+          <a:noFill/>
+          <a:ln/>
+        </p:spPr>
+        <p:txBody>
+          <a:bodyPr wrap="square" lIns="0" tIns="0" rIns="0" bIns="0" rtlCol="0" anchor="ctr"/>
+          <a:lstStyle/>
+          <a:p>
+            <a:pPr indent="0" marL="0">
+              <a:lnSpc>
+                <a:spcPct val="105000"/>
+              </a:lnSpc>
+              <a:buNone/>
+            </a:pPr>
+            <a:r>
+              <a:rPr lang="en-US" sz="1550" b="1" dirty="0">
+                <a:solidFill>
+                  <a:schemeClr val="accent6"/>
+                </a:solidFill>
+                <a:latin typeface="Calibri" pitchFamily="34" charset="0"/>
+                <a:ea typeface="Calibri" pitchFamily="34" charset="-122"/>
+                <a:cs typeface="Calibri" pitchFamily="34" charset="-120"/>
+              </a:rPr>
+              <a:t>End to end, for real. </a:t>
+            </a:r>
+            <a:pPr indent="0" marL="0">
+              <a:lnSpc>
+                <a:spcPct val="105000"/>
+              </a:lnSpc>
+              <a:buNone/>
+            </a:pPr>
+            <a:r>
+              <a:rPr lang="en-US" sz="1550" dirty="0">
+                <a:solidFill>
+                  <a:schemeClr val="bg2"/>
+                </a:solidFill>
+                <a:latin typeface="Calibri" pitchFamily="34" charset="0"/>
+                <a:ea typeface="Calibri" pitchFamily="34" charset="-122"/>
+                <a:cs typeface="Calibri" pitchFamily="34" charset="-120"/>
+              </a:rPr>
+              <a:t>A claim from the app, approved by the agent, clear-signed on an emulated Ledger Nano S Plus and paid in test USDC on Base Sepolia.</a:t>
+            </a:r>
+            <a:endParaRPr lang="en-US" sz="1550" dirty="0"/>
+          </a:p>
+        </p:txBody>
+      </p:sp>
+      <p:sp>
+        <p:nvSpPr>
+          <p:cNvPr id="19" name="Proof ring 2"/>
+          <p:cNvSpPr/>
+          <p:nvPr/>
+        </p:nvSpPr>
+        <p:spPr>
+          <a:xfrm>
+            <a:off x="548640" y="4480560"/>
+            <a:ext cx="530352" cy="530352"/>
+          </a:xfrm>
+          <a:prstGeom prst="ellipse">
+            <a:avLst/>
+          </a:prstGeom>
+          <a:solidFill>
+            <a:schemeClr val="tx2"/>
+          </a:solidFill>
+          <a:ln w="12700">
+            <a:solidFill>
+              <a:schemeClr val="accent1"/>
+            </a:solidFill>
+            <a:prstDash val="solid"/>
+          </a:ln>
+        </p:spPr>
+      </p:sp>
+      <p:pic>
+        <p:nvPicPr>
+          <p:cNvPr id="20" name="Proof icon 2" descr="preencoded.png">    </p:cNvPr>
+          <p:cNvPicPr>
+            <a:picLocks noChangeAspect="1"/>
+          </p:cNvPicPr>
+          <p:nvPr/>
+        </p:nvPicPr>
+        <p:blipFill>
+          <a:blip r:embed="rId2"/>
+          <a:stretch>
+            <a:fillRect/>
+          </a:stretch>
+        </p:blipFill>
+        <p:spPr>
+          <a:xfrm>
+            <a:off x="690372" y="4622292"/>
+            <a:ext cx="246888" cy="246888"/>
+          </a:xfrm>
+          <a:prstGeom prst="rect">
+            <a:avLst/>
+          </a:prstGeom>
+        </p:spPr>
+      </p:pic>
+      <p:sp>
+        <p:nvSpPr>
+          <p:cNvPr id="21" name="Text 17"/>
+          <p:cNvSpPr txBox="1"/>
+          <p:nvPr/>
+        </p:nvSpPr>
+        <p:spPr>
+          <a:xfrm>
+            <a:off x="1325880" y="4443984"/>
+            <a:ext cx="10317175" cy="640080"/>
+          </a:xfrm>
+          <a:prstGeom prst="rect">
+            <a:avLst/>
+          </a:prstGeom>
+          <a:noFill/>
+          <a:ln/>
+        </p:spPr>
+        <p:txBody>
+          <a:bodyPr wrap="square" lIns="0" tIns="0" rIns="0" bIns="0" rtlCol="0" anchor="ctr"/>
+          <a:lstStyle/>
+          <a:p>
+            <a:pPr indent="0" marL="0">
+              <a:lnSpc>
+                <a:spcPct val="105000"/>
+              </a:lnSpc>
+              <a:buNone/>
+            </a:pPr>
+            <a:r>
+              <a:rPr lang="en-US" sz="1550" b="1" dirty="0">
+                <a:solidFill>
+                  <a:schemeClr val="accent6"/>
+                </a:solidFill>
+                <a:latin typeface="Calibri" pitchFamily="34" charset="0"/>
+                <a:ea typeface="Calibri" pitchFamily="34" charset="-122"/>
+                <a:cs typeface="Calibri" pitchFamily="34" charset="-120"/>
+              </a:rPr>
+              <a:t>Key Ring with no hardware. </a:t>
+            </a:r>
+            <a:pPr indent="0" marL="0">
+              <a:lnSpc>
+                <a:spcPct val="105000"/>
+              </a:lnSpc>
+              <a:buNone/>
+            </a:pPr>
+            <a:r>
+              <a:rPr lang="en-US" sz="1550" dirty="0">
+                <a:solidFill>
+                  <a:schemeClr val="bg2"/>
+                </a:solidFill>
+                <a:latin typeface="Calibri" pitchFamily="34" charset="0"/>
+                <a:ea typeface="Calibri" pitchFamily="34" charset="-122"/>
+                <a:cs typeface="Calibri" pitchFamily="34" charset="-120"/>
+              </a:rPr>
+              <a:t>There was no documented way to use it on an emulator, so we built Ledger Sync for Speculos. The agent’s API key is sealed by a Ledger, not left in a .env file.</a:t>
+            </a:r>
+            <a:endParaRPr lang="en-US" sz="1550" dirty="0"/>
+          </a:p>
+        </p:txBody>
+      </p:sp>
+      <p:sp>
+        <p:nvSpPr>
+          <p:cNvPr id="22" name="Proof ring 3"/>
+          <p:cNvSpPr/>
+          <p:nvPr/>
+        </p:nvSpPr>
+        <p:spPr>
+          <a:xfrm>
+            <a:off x="548640" y="5303520"/>
+            <a:ext cx="530352" cy="530352"/>
+          </a:xfrm>
+          <a:prstGeom prst="ellipse">
+            <a:avLst/>
+          </a:prstGeom>
+          <a:solidFill>
+            <a:schemeClr val="tx2"/>
+          </a:solidFill>
+          <a:ln w="12700">
+            <a:solidFill>
+              <a:schemeClr val="accent1"/>
+            </a:solidFill>
+            <a:prstDash val="solid"/>
+          </a:ln>
+        </p:spPr>
+      </p:sp>
+      <p:pic>
+        <p:nvPicPr>
+          <p:cNvPr id="23" name="Proof icon 3" descr="preencoded.png">    </p:cNvPr>
+          <p:cNvPicPr>
+            <a:picLocks noChangeAspect="1"/>
+          </p:cNvPicPr>
+          <p:nvPr/>
+        </p:nvPicPr>
+        <p:blipFill>
+          <a:blip r:embed="rId3"/>
+          <a:stretch>
+            <a:fillRect/>
+          </a:stretch>
+        </p:blipFill>
+        <p:spPr>
+          <a:xfrm>
+            <a:off x="690372" y="5445252"/>
+            <a:ext cx="246888" cy="246888"/>
+          </a:xfrm>
+          <a:prstGeom prst="rect">
+            <a:avLst/>
+          </a:prstGeom>
+        </p:spPr>
+      </p:pic>
+      <p:sp>
+        <p:nvSpPr>
+          <p:cNvPr id="24" name="Text 19"/>
+          <p:cNvSpPr txBox="1"/>
+          <p:nvPr/>
+        </p:nvSpPr>
+        <p:spPr>
+          <a:xfrm>
+            <a:off x="1325880" y="5266944"/>
+            <a:ext cx="10317175" cy="640080"/>
+          </a:xfrm>
+          <a:prstGeom prst="rect">
+            <a:avLst/>
+          </a:prstGeom>
+          <a:noFill/>
+          <a:ln/>
+        </p:spPr>
+        <p:txBody>
+          <a:bodyPr wrap="square" lIns="0" tIns="0" rIns="0" bIns="0" rtlCol="0" anchor="ctr"/>
+          <a:lstStyle/>
+          <a:p>
+            <a:pPr indent="0" marL="0">
+              <a:lnSpc>
+                <a:spcPct val="105000"/>
+              </a:lnSpc>
+              <a:buNone/>
+            </a:pPr>
+            <a:r>
+              <a:rPr lang="en-US" sz="1550" b="1" dirty="0">
+                <a:solidFill>
+                  <a:schemeClr val="accent6"/>
+                </a:solidFill>
+                <a:latin typeface="Calibri" pitchFamily="34" charset="0"/>
+                <a:ea typeface="Calibri" pitchFamily="34" charset="-122"/>
+                <a:cs typeface="Calibri" pitchFamily="34" charset="-120"/>
+              </a:rPr>
+              <a:t>Built to fail safe. </a:t>
+            </a:r>
+            <a:pPr indent="0" marL="0">
+              <a:lnSpc>
+                <a:spcPct val="105000"/>
+              </a:lnSpc>
+              <a:buNone/>
+            </a:pPr>
+            <a:r>
+              <a:rPr lang="en-US" sz="1550" dirty="0">
+                <a:solidFill>
+                  <a:schemeClr val="bg2"/>
+                </a:solidFill>
+                <a:latin typeface="Calibri" pitchFamily="34" charset="0"/>
+                <a:ea typeface="Calibri" pitchFamily="34" charset="-122"/>
+                <a:cs typeface="Calibri" pitchFamily="34" charset="-120"/>
+              </a:rPr>
+              <a:t>Schema-locked AI output, idempotent signing, on-chain reconciliation before any retry, and the claim cap enforced again at signing.</a:t>
+            </a:r>
+            <a:endParaRPr lang="en-US" sz="1550" dirty="0"/>
           </a:p>
         </p:txBody>
       </p:sp>
@@ -3902,6 +4930,5168 @@
             <a:fld id="{F7021451-1387-4CA6-816F-3879F97B5CBC}" type="slidenum">
               <a:rPr b="0" lang="en-US"/>
               <a:t>11</a:t>
+            </a:fld>
+            <a:endParaRPr lang="en-US"/>
+          </a:p>
+        </p:txBody>
+      </p:sp>
+    </p:spTree>
+  </p:cSld>
+  <p:clrMapOvr>
+    <a:masterClrMapping/>
+  </p:clrMapOvr>
+</p:sld>
+</file>
+
+<file path=ppt/slides/slide12.xml><?xml version="1.0" encoding="utf-8"?>
+<p:sld xmlns:a="http://schemas.openxmlformats.org/drawingml/2006/main" xmlns:r="http://schemas.openxmlformats.org/officeDocument/2006/relationships" xmlns:p="http://schemas.openxmlformats.org/presentationml/2006/main">
+  <p:cSld name="Slide 12">
+    <p:spTree>
+      <p:nvGrpSpPr>
+        <p:cNvPr id="1" name=""/>
+        <p:cNvGrpSpPr/>
+        <p:nvPr/>
+      </p:nvGrpSpPr>
+      <p:grpSpPr>
+        <a:xfrm>
+          <a:off x="0" y="0"/>
+          <a:ext cx="0" cy="0"/>
+          <a:chOff x="0" y="0"/>
+          <a:chExt cx="0" cy="0"/>
+        </a:xfrm>
+      </p:grpSpPr>
+      <p:sp>
+        <p:nvSpPr>
+          <p:cNvPr id="2" name="Text 4"/>
+          <p:cNvSpPr/>
+          <p:nvPr>
+            <p:ph idx="104" type="body" hasCustomPrompt="1"/>
+          </p:nvPr>
+        </p:nvSpPr>
+        <p:spPr>
+          <a:xfrm>
+            <a:off x="548640" y="457200"/>
+            <a:ext cx="8229600" cy="274320"/>
+          </a:xfrm>
+          <a:prstGeom prst="rect">
+            <a:avLst/>
+          </a:prstGeom>
+          <a:noFill/>
+          <a:ln/>
+        </p:spPr>
+        <p:txBody>
+          <a:bodyPr wrap="square" lIns="0" tIns="0" rIns="0" bIns="0" rtlCol="0" anchor="ctr"/>
+          <a:lstStyle/>
+          <a:p>
+            <a:pPr indent="0" marL="0">
+              <a:buNone/>
+            </a:pPr>
+            <a:r>
+              <a:rPr lang="en-US" sz="1200" spc="300" kern="0" dirty="0">
+                <a:solidFill>
+                  <a:schemeClr val="accent1"/>
+                </a:solidFill>
+                <a:latin typeface="Consolas" pitchFamily="34" charset="0"/>
+                <a:ea typeface="Consolas" pitchFamily="34" charset="-122"/>
+                <a:cs typeface="Consolas" pitchFamily="34" charset="-120"/>
+              </a:rPr>
+              <a:t>JUDGED ON · USEFULNESS AND RELEVANCE FOR LEDGER · 20%</a:t>
+            </a:r>
+            <a:endParaRPr lang="en-US" sz="1200" dirty="0"/>
+          </a:p>
+        </p:txBody>
+      </p:sp>
+      <p:sp>
+        <p:nvSpPr>
+          <p:cNvPr id="3" name="Text 4"/>
+          <p:cNvSpPr/>
+          <p:nvPr>
+            <p:ph idx="105" type="title" hasCustomPrompt="1"/>
+          </p:nvPr>
+        </p:nvSpPr>
+        <p:spPr>
+          <a:xfrm>
+            <a:off x="548640" y="777240"/>
+            <a:ext cx="11094415" cy="777240"/>
+          </a:xfrm>
+          <a:prstGeom prst="rect">
+            <a:avLst/>
+          </a:prstGeom>
+          <a:noFill/>
+          <a:ln/>
+        </p:spPr>
+        <p:txBody>
+          <a:bodyPr wrap="square" lIns="0" tIns="0" rIns="0" bIns="0" rtlCol="0" anchor="t"/>
+          <a:lstStyle/>
+          <a:p>
+            <a:pPr algn="l" indent="0" marL="0">
+              <a:buNone/>
+            </a:pPr>
+            <a:r>
+              <a:rPr lang="en-US" sz="3200" b="1" dirty="0">
+                <a:solidFill>
+                  <a:schemeClr val="bg1"/>
+                </a:solidFill>
+                <a:latin typeface="Consolas" pitchFamily="34" charset="0"/>
+                <a:ea typeface="Consolas" pitchFamily="34" charset="-122"/>
+                <a:cs typeface="Consolas" pitchFamily="34" charset="-120"/>
+              </a:rPr>
+              <a:t>EVERY PAYOUT GOES THROUGH A LEDGER</a:t>
+            </a:r>
+            <a:endParaRPr lang="en-US" sz="3200" dirty="0"/>
+          </a:p>
+        </p:txBody>
+      </p:sp>
+      <p:sp>
+        <p:nvSpPr>
+          <p:cNvPr id="4" name="Stat 1"/>
+          <p:cNvSpPr/>
+          <p:nvPr/>
+        </p:nvSpPr>
+        <p:spPr>
+          <a:xfrm>
+            <a:off x="548640" y="1783080"/>
+            <a:ext cx="2567864" cy="1554480"/>
+          </a:xfrm>
+          <a:prstGeom prst="roundRect">
+            <a:avLst>
+              <a:gd name="adj" fmla="val 7059"/>
+            </a:avLst>
+          </a:prstGeom>
+          <a:solidFill>
+            <a:schemeClr val="tx2"/>
+          </a:solidFill>
+          <a:ln w="12700">
+            <a:solidFill>
+              <a:schemeClr val="accent5"/>
+            </a:solidFill>
+            <a:prstDash val="solid"/>
+          </a:ln>
+        </p:spPr>
+      </p:sp>
+      <p:sp>
+        <p:nvSpPr>
+          <p:cNvPr id="5" name="Text 3"/>
+          <p:cNvSpPr txBox="1"/>
+          <p:nvPr/>
+        </p:nvSpPr>
+        <p:spPr>
+          <a:xfrm>
+            <a:off x="822960" y="1920240"/>
+            <a:ext cx="2110664" cy="685800"/>
+          </a:xfrm>
+          <a:prstGeom prst="rect">
+            <a:avLst/>
+          </a:prstGeom>
+          <a:noFill/>
+          <a:ln/>
+        </p:spPr>
+        <p:txBody>
+          <a:bodyPr wrap="square" lIns="0" tIns="0" rIns="0" bIns="0" rtlCol="0" anchor="ctr">
+            <a:normAutofit/>
+          </a:bodyPr>
+          <a:lstStyle/>
+          <a:p>
+            <a:pPr indent="0" marL="0">
+              <a:buNone/>
+            </a:pPr>
+            <a:r>
+              <a:rPr lang="en-US" sz="3600" b="1" dirty="0">
+                <a:solidFill>
+                  <a:schemeClr val="accent1"/>
+                </a:solidFill>
+                <a:latin typeface="Consolas" pitchFamily="34" charset="0"/>
+                <a:ea typeface="Consolas" pitchFamily="34" charset="-122"/>
+                <a:cs typeface="Consolas" pitchFamily="34" charset="-120"/>
+              </a:rPr>
+              <a:t>0</a:t>
+            </a:r>
+            <a:endParaRPr lang="en-US" sz="3600" dirty="0"/>
+          </a:p>
+        </p:txBody>
+      </p:sp>
+      <p:sp>
+        <p:nvSpPr>
+          <p:cNvPr id="6" name="Text 4"/>
+          <p:cNvSpPr txBox="1"/>
+          <p:nvPr/>
+        </p:nvSpPr>
+        <p:spPr>
+          <a:xfrm>
+            <a:off x="822960" y="2633472"/>
+            <a:ext cx="2110664" cy="640080"/>
+          </a:xfrm>
+          <a:prstGeom prst="rect">
+            <a:avLst/>
+          </a:prstGeom>
+          <a:noFill/>
+          <a:ln/>
+        </p:spPr>
+        <p:txBody>
+          <a:bodyPr wrap="square" lIns="0" tIns="0" rIns="0" bIns="0" rtlCol="0" anchor="t"/>
+          <a:lstStyle/>
+          <a:p>
+            <a:pPr indent="0" marL="0">
+              <a:lnSpc>
+                <a:spcPct val="105000"/>
+              </a:lnSpc>
+              <a:buNone/>
+            </a:pPr>
+            <a:r>
+              <a:rPr lang="en-US" sz="1350" dirty="0">
+                <a:solidFill>
+                  <a:schemeClr val="bg2"/>
+                </a:solidFill>
+                <a:latin typeface="Calibri" pitchFamily="34" charset="0"/>
+                <a:ea typeface="Calibri" pitchFamily="34" charset="-122"/>
+                <a:cs typeface="Calibri" pitchFamily="34" charset="-120"/>
+              </a:rPr>
+              <a:t>private keys on any server</a:t>
+            </a:r>
+            <a:endParaRPr lang="en-US" sz="1350" dirty="0"/>
+          </a:p>
+        </p:txBody>
+      </p:sp>
+      <p:sp>
+        <p:nvSpPr>
+          <p:cNvPr id="7" name="Stat 2"/>
+          <p:cNvSpPr/>
+          <p:nvPr/>
+        </p:nvSpPr>
+        <p:spPr>
+          <a:xfrm>
+            <a:off x="3390824" y="1783080"/>
+            <a:ext cx="2567864" cy="1554480"/>
+          </a:xfrm>
+          <a:prstGeom prst="roundRect">
+            <a:avLst>
+              <a:gd name="adj" fmla="val 7059"/>
+            </a:avLst>
+          </a:prstGeom>
+          <a:solidFill>
+            <a:schemeClr val="tx2"/>
+          </a:solidFill>
+          <a:ln w="12700">
+            <a:solidFill>
+              <a:schemeClr val="accent5"/>
+            </a:solidFill>
+            <a:prstDash val="solid"/>
+          </a:ln>
+        </p:spPr>
+      </p:sp>
+      <p:sp>
+        <p:nvSpPr>
+          <p:cNvPr id="8" name="Text 6"/>
+          <p:cNvSpPr txBox="1"/>
+          <p:nvPr/>
+        </p:nvSpPr>
+        <p:spPr>
+          <a:xfrm>
+            <a:off x="3665144" y="1920240"/>
+            <a:ext cx="2110664" cy="685800"/>
+          </a:xfrm>
+          <a:prstGeom prst="rect">
+            <a:avLst/>
+          </a:prstGeom>
+          <a:noFill/>
+          <a:ln/>
+        </p:spPr>
+        <p:txBody>
+          <a:bodyPr wrap="square" lIns="0" tIns="0" rIns="0" bIns="0" rtlCol="0" anchor="ctr">
+            <a:normAutofit/>
+          </a:bodyPr>
+          <a:lstStyle/>
+          <a:p>
+            <a:pPr indent="0" marL="0">
+              <a:buNone/>
+            </a:pPr>
+            <a:r>
+              <a:rPr lang="en-US" sz="3600" b="1" dirty="0">
+                <a:solidFill>
+                  <a:schemeClr val="accent1"/>
+                </a:solidFill>
+                <a:latin typeface="Consolas" pitchFamily="34" charset="0"/>
+                <a:ea typeface="Consolas" pitchFamily="34" charset="-122"/>
+                <a:cs typeface="Consolas" pitchFamily="34" charset="-120"/>
+              </a:rPr>
+              <a:t>100%</a:t>
+            </a:r>
+            <a:endParaRPr lang="en-US" sz="3600" dirty="0"/>
+          </a:p>
+        </p:txBody>
+      </p:sp>
+      <p:sp>
+        <p:nvSpPr>
+          <p:cNvPr id="9" name="Text 7"/>
+          <p:cNvSpPr txBox="1"/>
+          <p:nvPr/>
+        </p:nvSpPr>
+        <p:spPr>
+          <a:xfrm>
+            <a:off x="3665144" y="2633472"/>
+            <a:ext cx="2110664" cy="640080"/>
+          </a:xfrm>
+          <a:prstGeom prst="rect">
+            <a:avLst/>
+          </a:prstGeom>
+          <a:noFill/>
+          <a:ln/>
+        </p:spPr>
+        <p:txBody>
+          <a:bodyPr wrap="square" lIns="0" tIns="0" rIns="0" bIns="0" rtlCol="0" anchor="t"/>
+          <a:lstStyle/>
+          <a:p>
+            <a:pPr indent="0" marL="0">
+              <a:lnSpc>
+                <a:spcPct val="105000"/>
+              </a:lnSpc>
+              <a:buNone/>
+            </a:pPr>
+            <a:r>
+              <a:rPr lang="en-US" sz="1350" dirty="0">
+                <a:solidFill>
+                  <a:schemeClr val="bg2"/>
+                </a:solidFill>
+                <a:latin typeface="Calibri" pitchFamily="34" charset="0"/>
+                <a:ea typeface="Calibri" pitchFamily="34" charset="-122"/>
+                <a:cs typeface="Calibri" pitchFamily="34" charset="-120"/>
+              </a:rPr>
+              <a:t>of payouts confirmed on the device’s own screen</a:t>
+            </a:r>
+            <a:endParaRPr lang="en-US" sz="1350" dirty="0"/>
+          </a:p>
+        </p:txBody>
+      </p:sp>
+      <p:sp>
+        <p:nvSpPr>
+          <p:cNvPr id="10" name="Stat 3"/>
+          <p:cNvSpPr/>
+          <p:nvPr/>
+        </p:nvSpPr>
+        <p:spPr>
+          <a:xfrm>
+            <a:off x="6233008" y="1783080"/>
+            <a:ext cx="2567864" cy="1554480"/>
+          </a:xfrm>
+          <a:prstGeom prst="roundRect">
+            <a:avLst>
+              <a:gd name="adj" fmla="val 7059"/>
+            </a:avLst>
+          </a:prstGeom>
+          <a:solidFill>
+            <a:schemeClr val="tx2"/>
+          </a:solidFill>
+          <a:ln w="12700">
+            <a:solidFill>
+              <a:schemeClr val="accent5"/>
+            </a:solidFill>
+            <a:prstDash val="solid"/>
+          </a:ln>
+        </p:spPr>
+      </p:sp>
+      <p:sp>
+        <p:nvSpPr>
+          <p:cNvPr id="11" name="Text 9"/>
+          <p:cNvSpPr txBox="1"/>
+          <p:nvPr/>
+        </p:nvSpPr>
+        <p:spPr>
+          <a:xfrm>
+            <a:off x="6507328" y="1920240"/>
+            <a:ext cx="2110664" cy="685800"/>
+          </a:xfrm>
+          <a:prstGeom prst="rect">
+            <a:avLst/>
+          </a:prstGeom>
+          <a:noFill/>
+          <a:ln/>
+        </p:spPr>
+        <p:txBody>
+          <a:bodyPr wrap="square" lIns="0" tIns="0" rIns="0" bIns="0" rtlCol="0" anchor="ctr">
+            <a:normAutofit/>
+          </a:bodyPr>
+          <a:lstStyle/>
+          <a:p>
+            <a:pPr indent="0" marL="0">
+              <a:buNone/>
+            </a:pPr>
+            <a:r>
+              <a:rPr lang="en-US" sz="3600" b="1" dirty="0">
+                <a:solidFill>
+                  <a:schemeClr val="accent1"/>
+                </a:solidFill>
+                <a:latin typeface="Consolas" pitchFamily="34" charset="0"/>
+                <a:ea typeface="Consolas" pitchFamily="34" charset="-122"/>
+                <a:cs typeface="Consolas" pitchFamily="34" charset="-120"/>
+              </a:rPr>
+              <a:t>~200</a:t>
+            </a:r>
+            <a:endParaRPr lang="en-US" sz="3600" dirty="0"/>
+          </a:p>
+        </p:txBody>
+      </p:sp>
+      <p:sp>
+        <p:nvSpPr>
+          <p:cNvPr id="12" name="Text 10"/>
+          <p:cNvSpPr txBox="1"/>
+          <p:nvPr/>
+        </p:nvSpPr>
+        <p:spPr>
+          <a:xfrm>
+            <a:off x="6507328" y="2633472"/>
+            <a:ext cx="2110664" cy="640080"/>
+          </a:xfrm>
+          <a:prstGeom prst="rect">
+            <a:avLst/>
+          </a:prstGeom>
+          <a:noFill/>
+          <a:ln/>
+        </p:spPr>
+        <p:txBody>
+          <a:bodyPr wrap="square" lIns="0" tIns="0" rIns="0" bIns="0" rtlCol="0" anchor="t"/>
+          <a:lstStyle/>
+          <a:p>
+            <a:pPr indent="0" marL="0">
+              <a:lnSpc>
+                <a:spcPct val="105000"/>
+              </a:lnSpc>
+              <a:buNone/>
+            </a:pPr>
+            <a:r>
+              <a:rPr lang="en-US" sz="1350" dirty="0">
+                <a:solidFill>
+                  <a:schemeClr val="bg2"/>
+                </a:solidFill>
+                <a:latin typeface="Calibri" pitchFamily="34" charset="0"/>
+                <a:ea typeface="Calibri" pitchFamily="34" charset="-122"/>
+                <a:cs typeface="Calibri" pitchFamily="34" charset="-120"/>
+              </a:rPr>
+              <a:t>societies at St Andrews alone, one Union wallet</a:t>
+            </a:r>
+            <a:endParaRPr lang="en-US" sz="1350" dirty="0"/>
+          </a:p>
+        </p:txBody>
+      </p:sp>
+      <p:sp>
+        <p:nvSpPr>
+          <p:cNvPr id="13" name="Stat 4"/>
+          <p:cNvSpPr/>
+          <p:nvPr/>
+        </p:nvSpPr>
+        <p:spPr>
+          <a:xfrm>
+            <a:off x="9075191" y="1783080"/>
+            <a:ext cx="2567864" cy="1554480"/>
+          </a:xfrm>
+          <a:prstGeom prst="roundRect">
+            <a:avLst>
+              <a:gd name="adj" fmla="val 7059"/>
+            </a:avLst>
+          </a:prstGeom>
+          <a:solidFill>
+            <a:schemeClr val="tx2"/>
+          </a:solidFill>
+          <a:ln w="12700">
+            <a:solidFill>
+              <a:schemeClr val="accent5"/>
+            </a:solidFill>
+            <a:prstDash val="solid"/>
+          </a:ln>
+        </p:spPr>
+      </p:sp>
+      <p:sp>
+        <p:nvSpPr>
+          <p:cNvPr id="14" name="Text 12"/>
+          <p:cNvSpPr txBox="1"/>
+          <p:nvPr/>
+        </p:nvSpPr>
+        <p:spPr>
+          <a:xfrm>
+            <a:off x="9349511" y="1920240"/>
+            <a:ext cx="2110664" cy="685800"/>
+          </a:xfrm>
+          <a:prstGeom prst="rect">
+            <a:avLst/>
+          </a:prstGeom>
+          <a:noFill/>
+          <a:ln/>
+        </p:spPr>
+        <p:txBody>
+          <a:bodyPr wrap="square" lIns="0" tIns="0" rIns="0" bIns="0" rtlCol="0" anchor="ctr">
+            <a:normAutofit/>
+          </a:bodyPr>
+          <a:lstStyle/>
+          <a:p>
+            <a:pPr indent="0" marL="0">
+              <a:buNone/>
+            </a:pPr>
+            <a:r>
+              <a:rPr lang="en-US" sz="3600" b="1" dirty="0">
+                <a:solidFill>
+                  <a:schemeClr val="accent1"/>
+                </a:solidFill>
+                <a:latin typeface="Consolas" pitchFamily="34" charset="0"/>
+                <a:ea typeface="Consolas" pitchFamily="34" charset="-122"/>
+                <a:cs typeface="Consolas" pitchFamily="34" charset="-120"/>
+              </a:rPr>
+              <a:t>1</a:t>
+            </a:r>
+            <a:endParaRPr lang="en-US" sz="3600" dirty="0"/>
+          </a:p>
+        </p:txBody>
+      </p:sp>
+      <p:sp>
+        <p:nvSpPr>
+          <p:cNvPr id="15" name="Text 13"/>
+          <p:cNvSpPr txBox="1"/>
+          <p:nvPr/>
+        </p:nvSpPr>
+        <p:spPr>
+          <a:xfrm>
+            <a:off x="9349511" y="2633472"/>
+            <a:ext cx="2110664" cy="640080"/>
+          </a:xfrm>
+          <a:prstGeom prst="rect">
+            <a:avLst/>
+          </a:prstGeom>
+          <a:noFill/>
+          <a:ln/>
+        </p:spPr>
+        <p:txBody>
+          <a:bodyPr wrap="square" lIns="0" tIns="0" rIns="0" bIns="0" rtlCol="0" anchor="t"/>
+          <a:lstStyle/>
+          <a:p>
+            <a:pPr indent="0" marL="0">
+              <a:lnSpc>
+                <a:spcPct val="105000"/>
+              </a:lnSpc>
+              <a:buNone/>
+            </a:pPr>
+            <a:r>
+              <a:rPr lang="en-US" sz="1350" dirty="0">
+                <a:solidFill>
+                  <a:schemeClr val="bg2"/>
+                </a:solidFill>
+                <a:latin typeface="Calibri" pitchFamily="34" charset="0"/>
+                <a:ea typeface="Calibri" pitchFamily="34" charset="-122"/>
+                <a:cs typeface="Calibri" pitchFamily="34" charset="-120"/>
+              </a:rPr>
+              <a:t>Ledger protects every society in a union</a:t>
+            </a:r>
+            <a:endParaRPr lang="en-US" sz="1350" dirty="0"/>
+          </a:p>
+        </p:txBody>
+      </p:sp>
+      <p:sp>
+        <p:nvSpPr>
+          <p:cNvPr id="16" name="Proof ring 1"/>
+          <p:cNvSpPr/>
+          <p:nvPr/>
+        </p:nvSpPr>
+        <p:spPr>
+          <a:xfrm>
+            <a:off x="548640" y="3657600"/>
+            <a:ext cx="530352" cy="530352"/>
+          </a:xfrm>
+          <a:prstGeom prst="ellipse">
+            <a:avLst/>
+          </a:prstGeom>
+          <a:solidFill>
+            <a:schemeClr val="tx2"/>
+          </a:solidFill>
+          <a:ln w="12700">
+            <a:solidFill>
+              <a:schemeClr val="accent1"/>
+            </a:solidFill>
+            <a:prstDash val="solid"/>
+          </a:ln>
+        </p:spPr>
+      </p:sp>
+      <p:pic>
+        <p:nvPicPr>
+          <p:cNvPr id="17" name="Proof icon 1" descr="preencoded.png">    </p:cNvPr>
+          <p:cNvPicPr>
+            <a:picLocks noChangeAspect="1"/>
+          </p:cNvPicPr>
+          <p:nvPr/>
+        </p:nvPicPr>
+        <p:blipFill>
+          <a:blip r:embed="rId1"/>
+          <a:stretch>
+            <a:fillRect/>
+          </a:stretch>
+        </p:blipFill>
+        <p:spPr>
+          <a:xfrm>
+            <a:off x="690372" y="3799332"/>
+            <a:ext cx="246888" cy="246888"/>
+          </a:xfrm>
+          <a:prstGeom prst="rect">
+            <a:avLst/>
+          </a:prstGeom>
+        </p:spPr>
+      </p:pic>
+      <p:sp>
+        <p:nvSpPr>
+          <p:cNvPr id="18" name="Text 15"/>
+          <p:cNvSpPr txBox="1"/>
+          <p:nvPr/>
+        </p:nvSpPr>
+        <p:spPr>
+          <a:xfrm>
+            <a:off x="1325880" y="3621024"/>
+            <a:ext cx="10317175" cy="640080"/>
+          </a:xfrm>
+          <a:prstGeom prst="rect">
+            <a:avLst/>
+          </a:prstGeom>
+          <a:noFill/>
+          <a:ln/>
+        </p:spPr>
+        <p:txBody>
+          <a:bodyPr wrap="square" lIns="0" tIns="0" rIns="0" bIns="0" rtlCol="0" anchor="ctr"/>
+          <a:lstStyle/>
+          <a:p>
+            <a:pPr indent="0" marL="0">
+              <a:lnSpc>
+                <a:spcPct val="105000"/>
+              </a:lnSpc>
+              <a:buNone/>
+            </a:pPr>
+            <a:r>
+              <a:rPr lang="en-US" sz="1550" b="1" dirty="0">
+                <a:solidFill>
+                  <a:schemeClr val="accent6"/>
+                </a:solidFill>
+                <a:latin typeface="Calibri" pitchFamily="34" charset="0"/>
+                <a:ea typeface="Calibri" pitchFamily="34" charset="-122"/>
+                <a:cs typeface="Calibri" pitchFamily="34" charset="-120"/>
+              </a:rPr>
+              <a:t>A way into universities. </a:t>
+            </a:r>
+            <a:pPr indent="0" marL="0">
+              <a:lnSpc>
+                <a:spcPct val="105000"/>
+              </a:lnSpc>
+              <a:buNone/>
+            </a:pPr>
+            <a:r>
+              <a:rPr lang="en-US" sz="1550" dirty="0">
+                <a:solidFill>
+                  <a:schemeClr val="bg2"/>
+                </a:solidFill>
+                <a:latin typeface="Calibri" pitchFamily="34" charset="0"/>
+                <a:ea typeface="Calibri" pitchFamily="34" charset="-122"/>
+                <a:cs typeface="Calibri" pitchFamily="34" charset="-120"/>
+              </a:rPr>
+              <a:t>One Ledger per students’ union guards every society’s money, and makes Ledger a partner on every campus.</a:t>
+            </a:r>
+            <a:endParaRPr lang="en-US" sz="1550" dirty="0"/>
+          </a:p>
+        </p:txBody>
+      </p:sp>
+      <p:sp>
+        <p:nvSpPr>
+          <p:cNvPr id="19" name="Proof ring 2"/>
+          <p:cNvSpPr/>
+          <p:nvPr/>
+        </p:nvSpPr>
+        <p:spPr>
+          <a:xfrm>
+            <a:off x="548640" y="4480560"/>
+            <a:ext cx="530352" cy="530352"/>
+          </a:xfrm>
+          <a:prstGeom prst="ellipse">
+            <a:avLst/>
+          </a:prstGeom>
+          <a:solidFill>
+            <a:schemeClr val="tx2"/>
+          </a:solidFill>
+          <a:ln w="12700">
+            <a:solidFill>
+              <a:schemeClr val="accent1"/>
+            </a:solidFill>
+            <a:prstDash val="solid"/>
+          </a:ln>
+        </p:spPr>
+      </p:sp>
+      <p:pic>
+        <p:nvPicPr>
+          <p:cNvPr id="20" name="Proof icon 2" descr="preencoded.png">    </p:cNvPr>
+          <p:cNvPicPr>
+            <a:picLocks noChangeAspect="1"/>
+          </p:cNvPicPr>
+          <p:nvPr/>
+        </p:nvPicPr>
+        <p:blipFill>
+          <a:blip r:embed="rId2"/>
+          <a:stretch>
+            <a:fillRect/>
+          </a:stretch>
+        </p:blipFill>
+        <p:spPr>
+          <a:xfrm>
+            <a:off x="690372" y="4622292"/>
+            <a:ext cx="246888" cy="246888"/>
+          </a:xfrm>
+          <a:prstGeom prst="rect">
+            <a:avLst/>
+          </a:prstGeom>
+        </p:spPr>
+      </p:pic>
+      <p:sp>
+        <p:nvSpPr>
+          <p:cNvPr id="21" name="Text 17"/>
+          <p:cNvSpPr txBox="1"/>
+          <p:nvPr/>
+        </p:nvSpPr>
+        <p:spPr>
+          <a:xfrm>
+            <a:off x="1325880" y="4443984"/>
+            <a:ext cx="10317175" cy="640080"/>
+          </a:xfrm>
+          <a:prstGeom prst="rect">
+            <a:avLst/>
+          </a:prstGeom>
+          <a:noFill/>
+          <a:ln/>
+        </p:spPr>
+        <p:txBody>
+          <a:bodyPr wrap="square" lIns="0" tIns="0" rIns="0" bIns="0" rtlCol="0" anchor="ctr"/>
+          <a:lstStyle/>
+          <a:p>
+            <a:pPr indent="0" marL="0">
+              <a:lnSpc>
+                <a:spcPct val="105000"/>
+              </a:lnSpc>
+              <a:buNone/>
+            </a:pPr>
+            <a:r>
+              <a:rPr lang="en-US" sz="1550" b="1" dirty="0">
+                <a:solidFill>
+                  <a:schemeClr val="accent6"/>
+                </a:solidFill>
+                <a:latin typeface="Calibri" pitchFamily="34" charset="0"/>
+                <a:ea typeface="Calibri" pitchFamily="34" charset="-122"/>
+                <a:cs typeface="Calibri" pitchFamily="34" charset="-120"/>
+              </a:rPr>
+              <a:t>Reaches young people. </a:t>
+            </a:r>
+            <a:pPr indent="0" marL="0">
+              <a:lnSpc>
+                <a:spcPct val="105000"/>
+              </a:lnSpc>
+              <a:buNone/>
+            </a:pPr>
+            <a:r>
+              <a:rPr lang="en-US" sz="1550" dirty="0">
+                <a:solidFill>
+                  <a:schemeClr val="bg2"/>
+                </a:solidFill>
+                <a:latin typeface="Calibri" pitchFamily="34" charset="0"/>
+                <a:ea typeface="Calibri" pitchFamily="34" charset="-122"/>
+                <a:cs typeface="Calibri" pitchFamily="34" charset="-120"/>
+              </a:rPr>
+              <a:t>Society committees are students. They first meet Ledger as the device that keeps their society’s money safe.</a:t>
+            </a:r>
+            <a:endParaRPr lang="en-US" sz="1550" dirty="0"/>
+          </a:p>
+        </p:txBody>
+      </p:sp>
+      <p:sp>
+        <p:nvSpPr>
+          <p:cNvPr id="22" name="Proof ring 3"/>
+          <p:cNvSpPr/>
+          <p:nvPr/>
+        </p:nvSpPr>
+        <p:spPr>
+          <a:xfrm>
+            <a:off x="548640" y="5303520"/>
+            <a:ext cx="530352" cy="530352"/>
+          </a:xfrm>
+          <a:prstGeom prst="ellipse">
+            <a:avLst/>
+          </a:prstGeom>
+          <a:solidFill>
+            <a:schemeClr val="tx2"/>
+          </a:solidFill>
+          <a:ln w="12700">
+            <a:solidFill>
+              <a:schemeClr val="accent1"/>
+            </a:solidFill>
+            <a:prstDash val="solid"/>
+          </a:ln>
+        </p:spPr>
+      </p:sp>
+      <p:pic>
+        <p:nvPicPr>
+          <p:cNvPr id="23" name="Proof icon 3" descr="preencoded.png">    </p:cNvPr>
+          <p:cNvPicPr>
+            <a:picLocks noChangeAspect="1"/>
+          </p:cNvPicPr>
+          <p:nvPr/>
+        </p:nvPicPr>
+        <p:blipFill>
+          <a:blip r:embed="rId3"/>
+          <a:stretch>
+            <a:fillRect/>
+          </a:stretch>
+        </p:blipFill>
+        <p:spPr>
+          <a:xfrm>
+            <a:off x="690372" y="5445252"/>
+            <a:ext cx="246888" cy="246888"/>
+          </a:xfrm>
+          <a:prstGeom prst="rect">
+            <a:avLst/>
+          </a:prstGeom>
+        </p:spPr>
+      </p:pic>
+      <p:sp>
+        <p:nvSpPr>
+          <p:cNvPr id="24" name="Text 19"/>
+          <p:cNvSpPr txBox="1"/>
+          <p:nvPr/>
+        </p:nvSpPr>
+        <p:spPr>
+          <a:xfrm>
+            <a:off x="1325880" y="5266944"/>
+            <a:ext cx="10317175" cy="640080"/>
+          </a:xfrm>
+          <a:prstGeom prst="rect">
+            <a:avLst/>
+          </a:prstGeom>
+          <a:noFill/>
+          <a:ln/>
+        </p:spPr>
+        <p:txBody>
+          <a:bodyPr wrap="square" lIns="0" tIns="0" rIns="0" bIns="0" rtlCol="0" anchor="ctr"/>
+          <a:lstStyle/>
+          <a:p>
+            <a:pPr indent="0" marL="0">
+              <a:lnSpc>
+                <a:spcPct val="105000"/>
+              </a:lnSpc>
+              <a:buNone/>
+            </a:pPr>
+            <a:r>
+              <a:rPr lang="en-US" sz="1550" b="1" dirty="0">
+                <a:solidFill>
+                  <a:schemeClr val="accent6"/>
+                </a:solidFill>
+                <a:latin typeface="Calibri" pitchFamily="34" charset="0"/>
+                <a:ea typeface="Calibri" pitchFamily="34" charset="-122"/>
+                <a:cs typeface="Calibri" pitchFamily="34" charset="-120"/>
+              </a:rPr>
+              <a:t>Teaches by doing. </a:t>
+            </a:r>
+            <a:pPr indent="0" marL="0">
+              <a:lnSpc>
+                <a:spcPct val="105000"/>
+              </a:lnSpc>
+              <a:buNone/>
+            </a:pPr>
+            <a:r>
+              <a:rPr lang="en-US" sz="1550" dirty="0">
+                <a:solidFill>
+                  <a:schemeClr val="bg2"/>
+                </a:solidFill>
+                <a:latin typeface="Calibri" pitchFamily="34" charset="0"/>
+                <a:ea typeface="Calibri" pitchFamily="34" charset="-122"/>
+                <a:cs typeface="Calibri" pitchFamily="34" charset="-120"/>
+              </a:rPr>
+              <a:t>Every year a new committee learns what a hardware wallet is and why clear signing matters. Today’s treasurer is tomorrow’s customer.</a:t>
+            </a:r>
+            <a:endParaRPr lang="en-US" sz="1550" dirty="0"/>
+          </a:p>
+        </p:txBody>
+      </p:sp>
+      <p:sp>
+        <p:nvSpPr>
+          <p:cNvPr id="25" name="Slide Number Placeholder 0"/>
+          <p:cNvSpPr>
+            <a:spLocks noGrp="1"/>
+          </p:cNvSpPr>
+          <p:nvPr>
+            <p:ph type="sldNum" sz="quarter" idx="4294967295"/>
+          </p:nvPr>
+        </p:nvSpPr>
+        <p:spPr>
+          <a:xfrm>
+            <a:off x="11094415" y="6272784"/>
+            <a:ext cx="548640" cy="274320"/>
+          </a:xfrm>
+          <a:prstGeom prst="rect">
+            <a:avLst/>
+          </a:prstGeom>
+          <a:extLst>
+            <a:ext uri="{C572A759-6A51-4108-AA02-DFA0A04FC94B}">
+              <ma14:wrappingTextBoxFlag xmlns:ma14="http://schemas.microsoft.com/office/mac/drawingml/2011/main" val="0"/>
+            </a:ext>
+          </a:extLst>
+        </p:spPr>
+        <p:txBody>
+          <a:bodyPr/>
+          <a:lstStyle>
+            <a:lvl1pPr>
+              <a:defRPr sz="1000">
+                <a:solidFill>
+                  <a:schemeClr val="bg2"/>
+                </a:solidFill>
+                <a:latin typeface="Consolas"/>
+                <a:ea typeface="Consolas"/>
+                <a:cs typeface="Consolas"/>
+              </a:defRPr>
+            </a:lvl1pPr>
+          </a:lstStyle>
+          <a:p>
+            <a:pPr algn="r"/>
+            <a:fld id="{F7021451-1387-4CA6-816F-3879F97B5CBC}" type="slidenum">
+              <a:rPr b="0" lang="en-US"/>
+              <a:t>12</a:t>
+            </a:fld>
+            <a:endParaRPr lang="en-US"/>
+          </a:p>
+        </p:txBody>
+      </p:sp>
+    </p:spTree>
+  </p:cSld>
+  <p:clrMapOvr>
+    <a:masterClrMapping/>
+  </p:clrMapOvr>
+</p:sld>
+</file>
+
+<file path=ppt/slides/slide13.xml><?xml version="1.0" encoding="utf-8"?>
+<p:sld xmlns:a="http://schemas.openxmlformats.org/drawingml/2006/main" xmlns:r="http://schemas.openxmlformats.org/officeDocument/2006/relationships" xmlns:p="http://schemas.openxmlformats.org/presentationml/2006/main">
+  <p:cSld name="Slide 13">
+    <p:spTree>
+      <p:nvGrpSpPr>
+        <p:cNvPr id="1" name=""/>
+        <p:cNvGrpSpPr/>
+        <p:nvPr/>
+      </p:nvGrpSpPr>
+      <p:grpSpPr>
+        <a:xfrm>
+          <a:off x="0" y="0"/>
+          <a:ext cx="0" cy="0"/>
+          <a:chOff x="0" y="0"/>
+          <a:chExt cx="0" cy="0"/>
+        </a:xfrm>
+      </p:grpSpPr>
+      <p:sp>
+        <p:nvSpPr>
+          <p:cNvPr id="2" name="Text 4"/>
+          <p:cNvSpPr/>
+          <p:nvPr>
+            <p:ph idx="104" type="body" hasCustomPrompt="1"/>
+          </p:nvPr>
+        </p:nvSpPr>
+        <p:spPr>
+          <a:xfrm>
+            <a:off x="548640" y="457200"/>
+            <a:ext cx="8229600" cy="274320"/>
+          </a:xfrm>
+          <a:prstGeom prst="rect">
+            <a:avLst/>
+          </a:prstGeom>
+          <a:noFill/>
+          <a:ln/>
+        </p:spPr>
+        <p:txBody>
+          <a:bodyPr wrap="square" lIns="0" tIns="0" rIns="0" bIns="0" rtlCol="0" anchor="ctr"/>
+          <a:lstStyle/>
+          <a:p>
+            <a:pPr indent="0" marL="0">
+              <a:buNone/>
+            </a:pPr>
+            <a:r>
+              <a:rPr lang="en-US" sz="1200" spc="300" kern="0" dirty="0">
+                <a:solidFill>
+                  <a:schemeClr val="accent1"/>
+                </a:solidFill>
+                <a:latin typeface="Consolas" pitchFamily="34" charset="0"/>
+                <a:ea typeface="Consolas" pitchFamily="34" charset="-122"/>
+                <a:cs typeface="Consolas" pitchFamily="34" charset="-120"/>
+              </a:rPr>
+              <a:t>JUDGED ON · INNOVATION / ORIGINALITY · 20%</a:t>
+            </a:r>
+            <a:endParaRPr lang="en-US" sz="1200" dirty="0"/>
+          </a:p>
+        </p:txBody>
+      </p:sp>
+      <p:sp>
+        <p:nvSpPr>
+          <p:cNvPr id="3" name="Text 4"/>
+          <p:cNvSpPr/>
+          <p:nvPr>
+            <p:ph idx="105" type="title" hasCustomPrompt="1"/>
+          </p:nvPr>
+        </p:nvSpPr>
+        <p:spPr>
+          <a:xfrm>
+            <a:off x="548640" y="777240"/>
+            <a:ext cx="11094415" cy="777240"/>
+          </a:xfrm>
+          <a:prstGeom prst="rect">
+            <a:avLst/>
+          </a:prstGeom>
+          <a:noFill/>
+          <a:ln/>
+        </p:spPr>
+        <p:txBody>
+          <a:bodyPr wrap="square" lIns="0" tIns="0" rIns="0" bIns="0" rtlCol="0" anchor="t"/>
+          <a:lstStyle/>
+          <a:p>
+            <a:pPr algn="l" indent="0" marL="0">
+              <a:buNone/>
+            </a:pPr>
+            <a:r>
+              <a:rPr lang="en-US" sz="3200" b="1" dirty="0">
+                <a:solidFill>
+                  <a:schemeClr val="bg1"/>
+                </a:solidFill>
+                <a:latin typeface="Consolas" pitchFamily="34" charset="0"/>
+                <a:ea typeface="Consolas" pitchFamily="34" charset="-122"/>
+                <a:cs typeface="Consolas" pitchFamily="34" charset="-120"/>
+              </a:rPr>
+              <a:t>A GLOBAL PROBLEM NOBODY HAS SOLVED</a:t>
+            </a:r>
+            <a:endParaRPr lang="en-US" sz="3200" dirty="0"/>
+          </a:p>
+        </p:txBody>
+      </p:sp>
+      <p:sp>
+        <p:nvSpPr>
+          <p:cNvPr id="4" name="Stat 1"/>
+          <p:cNvSpPr/>
+          <p:nvPr/>
+        </p:nvSpPr>
+        <p:spPr>
+          <a:xfrm>
+            <a:off x="548640" y="1783080"/>
+            <a:ext cx="2567864" cy="1554480"/>
+          </a:xfrm>
+          <a:prstGeom prst="roundRect">
+            <a:avLst>
+              <a:gd name="adj" fmla="val 7059"/>
+            </a:avLst>
+          </a:prstGeom>
+          <a:solidFill>
+            <a:schemeClr val="tx2"/>
+          </a:solidFill>
+          <a:ln w="12700">
+            <a:solidFill>
+              <a:schemeClr val="accent5"/>
+            </a:solidFill>
+            <a:prstDash val="solid"/>
+          </a:ln>
+        </p:spPr>
+      </p:sp>
+      <p:sp>
+        <p:nvSpPr>
+          <p:cNvPr id="5" name="Text 3"/>
+          <p:cNvSpPr txBox="1"/>
+          <p:nvPr/>
+        </p:nvSpPr>
+        <p:spPr>
+          <a:xfrm>
+            <a:off x="822960" y="1920240"/>
+            <a:ext cx="2110664" cy="685800"/>
+          </a:xfrm>
+          <a:prstGeom prst="rect">
+            <a:avLst/>
+          </a:prstGeom>
+          <a:noFill/>
+          <a:ln/>
+        </p:spPr>
+        <p:txBody>
+          <a:bodyPr wrap="square" lIns="0" tIns="0" rIns="0" bIns="0" rtlCol="0" anchor="ctr">
+            <a:normAutofit/>
+          </a:bodyPr>
+          <a:lstStyle/>
+          <a:p>
+            <a:pPr indent="0" marL="0">
+              <a:buNone/>
+            </a:pPr>
+            <a:r>
+              <a:rPr lang="en-US" sz="3600" b="1" dirty="0">
+                <a:solidFill>
+                  <a:schemeClr val="accent1"/>
+                </a:solidFill>
+                <a:latin typeface="Consolas" pitchFamily="34" charset="0"/>
+                <a:ea typeface="Consolas" pitchFamily="34" charset="-122"/>
+                <a:cs typeface="Consolas" pitchFamily="34" charset="-120"/>
+              </a:rPr>
+              <a:t>Months</a:t>
+            </a:r>
+            <a:endParaRPr lang="en-US" sz="3600" dirty="0"/>
+          </a:p>
+        </p:txBody>
+      </p:sp>
+      <p:sp>
+        <p:nvSpPr>
+          <p:cNvPr id="6" name="Text 4"/>
+          <p:cNvSpPr txBox="1"/>
+          <p:nvPr/>
+        </p:nvSpPr>
+        <p:spPr>
+          <a:xfrm>
+            <a:off x="822960" y="2633472"/>
+            <a:ext cx="2110664" cy="640080"/>
+          </a:xfrm>
+          <a:prstGeom prst="rect">
+            <a:avLst/>
+          </a:prstGeom>
+          <a:noFill/>
+          <a:ln/>
+        </p:spPr>
+        <p:txBody>
+          <a:bodyPr wrap="square" lIns="0" tIns="0" rIns="0" bIns="0" rtlCol="0" anchor="t"/>
+          <a:lstStyle/>
+          <a:p>
+            <a:pPr indent="0" marL="0">
+              <a:lnSpc>
+                <a:spcPct val="105000"/>
+              </a:lnSpc>
+              <a:buNone/>
+            </a:pPr>
+            <a:r>
+              <a:rPr lang="en-US" sz="1350" dirty="0">
+                <a:solidFill>
+                  <a:schemeClr val="bg2"/>
+                </a:solidFill>
+                <a:latin typeface="Calibri" pitchFamily="34" charset="0"/>
+                <a:ea typeface="Calibri" pitchFamily="34" charset="-122"/>
+                <a:cs typeface="Calibri" pitchFamily="34" charset="-120"/>
+              </a:rPr>
+              <a:t>some students wait to be paid back today</a:t>
+            </a:r>
+            <a:endParaRPr lang="en-US" sz="1350" dirty="0"/>
+          </a:p>
+        </p:txBody>
+      </p:sp>
+      <p:sp>
+        <p:nvSpPr>
+          <p:cNvPr id="7" name="Stat 2"/>
+          <p:cNvSpPr/>
+          <p:nvPr/>
+        </p:nvSpPr>
+        <p:spPr>
+          <a:xfrm>
+            <a:off x="3390824" y="1783080"/>
+            <a:ext cx="2567864" cy="1554480"/>
+          </a:xfrm>
+          <a:prstGeom prst="roundRect">
+            <a:avLst>
+              <a:gd name="adj" fmla="val 7059"/>
+            </a:avLst>
+          </a:prstGeom>
+          <a:solidFill>
+            <a:schemeClr val="tx2"/>
+          </a:solidFill>
+          <a:ln w="12700">
+            <a:solidFill>
+              <a:schemeClr val="accent5"/>
+            </a:solidFill>
+            <a:prstDash val="solid"/>
+          </a:ln>
+        </p:spPr>
+      </p:sp>
+      <p:sp>
+        <p:nvSpPr>
+          <p:cNvPr id="8" name="Text 6"/>
+          <p:cNvSpPr txBox="1"/>
+          <p:nvPr/>
+        </p:nvSpPr>
+        <p:spPr>
+          <a:xfrm>
+            <a:off x="3665144" y="1920240"/>
+            <a:ext cx="2110664" cy="685800"/>
+          </a:xfrm>
+          <a:prstGeom prst="rect">
+            <a:avLst/>
+          </a:prstGeom>
+          <a:noFill/>
+          <a:ln/>
+        </p:spPr>
+        <p:txBody>
+          <a:bodyPr wrap="square" lIns="0" tIns="0" rIns="0" bIns="0" rtlCol="0" anchor="ctr">
+            <a:normAutofit/>
+          </a:bodyPr>
+          <a:lstStyle/>
+          <a:p>
+            <a:pPr indent="0" marL="0">
+              <a:buNone/>
+            </a:pPr>
+            <a:r>
+              <a:rPr lang="en-US" sz="3600" b="1" dirty="0">
+                <a:solidFill>
+                  <a:schemeClr val="accent1"/>
+                </a:solidFill>
+                <a:latin typeface="Consolas" pitchFamily="34" charset="0"/>
+                <a:ea typeface="Consolas" pitchFamily="34" charset="-122"/>
+                <a:cs typeface="Consolas" pitchFamily="34" charset="-120"/>
+              </a:rPr>
+              <a:t>Minutes</a:t>
+            </a:r>
+            <a:endParaRPr lang="en-US" sz="3600" dirty="0"/>
+          </a:p>
+        </p:txBody>
+      </p:sp>
+      <p:sp>
+        <p:nvSpPr>
+          <p:cNvPr id="9" name="Text 7"/>
+          <p:cNvSpPr txBox="1"/>
+          <p:nvPr/>
+        </p:nvSpPr>
+        <p:spPr>
+          <a:xfrm>
+            <a:off x="3665144" y="2633472"/>
+            <a:ext cx="2110664" cy="640080"/>
+          </a:xfrm>
+          <a:prstGeom prst="rect">
+            <a:avLst/>
+          </a:prstGeom>
+          <a:noFill/>
+          <a:ln/>
+        </p:spPr>
+        <p:txBody>
+          <a:bodyPr wrap="square" lIns="0" tIns="0" rIns="0" bIns="0" rtlCol="0" anchor="t"/>
+          <a:lstStyle/>
+          <a:p>
+            <a:pPr indent="0" marL="0">
+              <a:lnSpc>
+                <a:spcPct val="105000"/>
+              </a:lnSpc>
+              <a:buNone/>
+            </a:pPr>
+            <a:r>
+              <a:rPr lang="en-US" sz="1350" dirty="0">
+                <a:solidFill>
+                  <a:schemeClr val="bg2"/>
+                </a:solidFill>
+                <a:latin typeface="Calibri" pitchFamily="34" charset="0"/>
+                <a:ea typeface="Calibri" pitchFamily="34" charset="-122"/>
+                <a:cs typeface="Calibri" pitchFamily="34" charset="-120"/>
+              </a:rPr>
+              <a:t>with SocFi, from receipt photo to wallet</a:t>
+            </a:r>
+            <a:endParaRPr lang="en-US" sz="1350" dirty="0"/>
+          </a:p>
+        </p:txBody>
+      </p:sp>
+      <p:sp>
+        <p:nvSpPr>
+          <p:cNvPr id="10" name="Stat 3"/>
+          <p:cNvSpPr/>
+          <p:nvPr/>
+        </p:nvSpPr>
+        <p:spPr>
+          <a:xfrm>
+            <a:off x="6233008" y="1783080"/>
+            <a:ext cx="2567864" cy="1554480"/>
+          </a:xfrm>
+          <a:prstGeom prst="roundRect">
+            <a:avLst>
+              <a:gd name="adj" fmla="val 7059"/>
+            </a:avLst>
+          </a:prstGeom>
+          <a:solidFill>
+            <a:schemeClr val="tx2"/>
+          </a:solidFill>
+          <a:ln w="12700">
+            <a:solidFill>
+              <a:schemeClr val="accent5"/>
+            </a:solidFill>
+            <a:prstDash val="solid"/>
+          </a:ln>
+        </p:spPr>
+      </p:sp>
+      <p:sp>
+        <p:nvSpPr>
+          <p:cNvPr id="11" name="Text 9"/>
+          <p:cNvSpPr txBox="1"/>
+          <p:nvPr/>
+        </p:nvSpPr>
+        <p:spPr>
+          <a:xfrm>
+            <a:off x="6507328" y="1920240"/>
+            <a:ext cx="2110664" cy="685800"/>
+          </a:xfrm>
+          <a:prstGeom prst="rect">
+            <a:avLst/>
+          </a:prstGeom>
+          <a:noFill/>
+          <a:ln/>
+        </p:spPr>
+        <p:txBody>
+          <a:bodyPr wrap="square" lIns="0" tIns="0" rIns="0" bIns="0" rtlCol="0" anchor="ctr">
+            <a:normAutofit/>
+          </a:bodyPr>
+          <a:lstStyle/>
+          <a:p>
+            <a:pPr indent="0" marL="0">
+              <a:buNone/>
+            </a:pPr>
+            <a:r>
+              <a:rPr lang="en-US" sz="3600" b="1" dirty="0">
+                <a:solidFill>
+                  <a:schemeClr val="accent1"/>
+                </a:solidFill>
+                <a:latin typeface="Consolas" pitchFamily="34" charset="0"/>
+                <a:ea typeface="Consolas" pitchFamily="34" charset="-122"/>
+                <a:cs typeface="Consolas" pitchFamily="34" charset="-120"/>
+              </a:rPr>
+              <a:t>400+</a:t>
+            </a:r>
+            <a:endParaRPr lang="en-US" sz="3600" dirty="0"/>
+          </a:p>
+        </p:txBody>
+      </p:sp>
+      <p:sp>
+        <p:nvSpPr>
+          <p:cNvPr id="12" name="Text 10"/>
+          <p:cNvSpPr txBox="1"/>
+          <p:nvPr/>
+        </p:nvSpPr>
+        <p:spPr>
+          <a:xfrm>
+            <a:off x="6507328" y="2633472"/>
+            <a:ext cx="2110664" cy="640080"/>
+          </a:xfrm>
+          <a:prstGeom prst="rect">
+            <a:avLst/>
+          </a:prstGeom>
+          <a:noFill/>
+          <a:ln/>
+        </p:spPr>
+        <p:txBody>
+          <a:bodyPr wrap="square" lIns="0" tIns="0" rIns="0" bIns="0" rtlCol="0" anchor="t"/>
+          <a:lstStyle/>
+          <a:p>
+            <a:pPr indent="0" marL="0">
+              <a:lnSpc>
+                <a:spcPct val="105000"/>
+              </a:lnSpc>
+              <a:buNone/>
+            </a:pPr>
+            <a:r>
+              <a:rPr lang="en-US" sz="1350" dirty="0">
+                <a:solidFill>
+                  <a:schemeClr val="bg2"/>
+                </a:solidFill>
+                <a:latin typeface="Calibri" pitchFamily="34" charset="0"/>
+                <a:ea typeface="Calibri" pitchFamily="34" charset="-122"/>
+                <a:cs typeface="Calibri" pitchFamily="34" charset="-120"/>
+              </a:rPr>
+              <a:t>societies at a single UK union (Manchester)</a:t>
+            </a:r>
+            <a:endParaRPr lang="en-US" sz="1350" dirty="0"/>
+          </a:p>
+        </p:txBody>
+      </p:sp>
+      <p:sp>
+        <p:nvSpPr>
+          <p:cNvPr id="13" name="Stat 4"/>
+          <p:cNvSpPr/>
+          <p:nvPr/>
+        </p:nvSpPr>
+        <p:spPr>
+          <a:xfrm>
+            <a:off x="9075191" y="1783080"/>
+            <a:ext cx="2567864" cy="1554480"/>
+          </a:xfrm>
+          <a:prstGeom prst="roundRect">
+            <a:avLst>
+              <a:gd name="adj" fmla="val 7059"/>
+            </a:avLst>
+          </a:prstGeom>
+          <a:solidFill>
+            <a:schemeClr val="tx2"/>
+          </a:solidFill>
+          <a:ln w="12700">
+            <a:solidFill>
+              <a:schemeClr val="accent5"/>
+            </a:solidFill>
+            <a:prstDash val="solid"/>
+          </a:ln>
+        </p:spPr>
+      </p:sp>
+      <p:sp>
+        <p:nvSpPr>
+          <p:cNvPr id="14" name="Text 12"/>
+          <p:cNvSpPr txBox="1"/>
+          <p:nvPr/>
+        </p:nvSpPr>
+        <p:spPr>
+          <a:xfrm>
+            <a:off x="9349511" y="1920240"/>
+            <a:ext cx="2110664" cy="685800"/>
+          </a:xfrm>
+          <a:prstGeom prst="rect">
+            <a:avLst/>
+          </a:prstGeom>
+          <a:noFill/>
+          <a:ln/>
+        </p:spPr>
+        <p:txBody>
+          <a:bodyPr wrap="square" lIns="0" tIns="0" rIns="0" bIns="0" rtlCol="0" anchor="ctr">
+            <a:normAutofit/>
+          </a:bodyPr>
+          <a:lstStyle/>
+          <a:p>
+            <a:pPr indent="0" marL="0">
+              <a:buNone/>
+            </a:pPr>
+            <a:r>
+              <a:rPr lang="en-US" sz="3600" b="1" dirty="0">
+                <a:solidFill>
+                  <a:schemeClr val="accent1"/>
+                </a:solidFill>
+                <a:latin typeface="Consolas" pitchFamily="34" charset="0"/>
+                <a:ea typeface="Consolas" pitchFamily="34" charset="-122"/>
+                <a:cs typeface="Consolas" pitchFamily="34" charset="-120"/>
+              </a:rPr>
+              <a:t>0</a:t>
+            </a:r>
+            <a:endParaRPr lang="en-US" sz="3600" dirty="0"/>
+          </a:p>
+        </p:txBody>
+      </p:sp>
+      <p:sp>
+        <p:nvSpPr>
+          <p:cNvPr id="15" name="Text 13"/>
+          <p:cNvSpPr txBox="1"/>
+          <p:nvPr/>
+        </p:nvSpPr>
+        <p:spPr>
+          <a:xfrm>
+            <a:off x="9349511" y="2633472"/>
+            <a:ext cx="2110664" cy="640080"/>
+          </a:xfrm>
+          <a:prstGeom prst="rect">
+            <a:avLst/>
+          </a:prstGeom>
+          <a:noFill/>
+          <a:ln/>
+        </p:spPr>
+        <p:txBody>
+          <a:bodyPr wrap="square" lIns="0" tIns="0" rIns="0" bIns="0" rtlCol="0" anchor="t"/>
+          <a:lstStyle/>
+          <a:p>
+            <a:pPr indent="0" marL="0">
+              <a:lnSpc>
+                <a:spcPct val="105000"/>
+              </a:lnSpc>
+              <a:buNone/>
+            </a:pPr>
+            <a:r>
+              <a:rPr lang="en-US" sz="1350" dirty="0">
+                <a:solidFill>
+                  <a:schemeClr val="bg2"/>
+                </a:solidFill>
+                <a:latin typeface="Calibri" pitchFamily="34" charset="0"/>
+                <a:ea typeface="Calibri" pitchFamily="34" charset="-122"/>
+                <a:cs typeface="Calibri" pitchFamily="34" charset="-120"/>
+              </a:rPr>
+              <a:t>payments the AI can make on its own</a:t>
+            </a:r>
+            <a:endParaRPr lang="en-US" sz="1350" dirty="0"/>
+          </a:p>
+        </p:txBody>
+      </p:sp>
+      <p:sp>
+        <p:nvSpPr>
+          <p:cNvPr id="16" name="Proof ring 1"/>
+          <p:cNvSpPr/>
+          <p:nvPr/>
+        </p:nvSpPr>
+        <p:spPr>
+          <a:xfrm>
+            <a:off x="548640" y="3657600"/>
+            <a:ext cx="530352" cy="530352"/>
+          </a:xfrm>
+          <a:prstGeom prst="ellipse">
+            <a:avLst/>
+          </a:prstGeom>
+          <a:solidFill>
+            <a:schemeClr val="tx2"/>
+          </a:solidFill>
+          <a:ln w="12700">
+            <a:solidFill>
+              <a:schemeClr val="accent1"/>
+            </a:solidFill>
+            <a:prstDash val="solid"/>
+          </a:ln>
+        </p:spPr>
+      </p:sp>
+      <p:pic>
+        <p:nvPicPr>
+          <p:cNvPr id="17" name="Proof icon 1" descr="preencoded.png">    </p:cNvPr>
+          <p:cNvPicPr>
+            <a:picLocks noChangeAspect="1"/>
+          </p:cNvPicPr>
+          <p:nvPr/>
+        </p:nvPicPr>
+        <p:blipFill>
+          <a:blip r:embed="rId1"/>
+          <a:stretch>
+            <a:fillRect/>
+          </a:stretch>
+        </p:blipFill>
+        <p:spPr>
+          <a:xfrm>
+            <a:off x="690372" y="3799332"/>
+            <a:ext cx="246888" cy="246888"/>
+          </a:xfrm>
+          <a:prstGeom prst="rect">
+            <a:avLst/>
+          </a:prstGeom>
+        </p:spPr>
+      </p:pic>
+      <p:sp>
+        <p:nvSpPr>
+          <p:cNvPr id="18" name="Text 15"/>
+          <p:cNvSpPr txBox="1"/>
+          <p:nvPr/>
+        </p:nvSpPr>
+        <p:spPr>
+          <a:xfrm>
+            <a:off x="1325880" y="3621024"/>
+            <a:ext cx="10317175" cy="640080"/>
+          </a:xfrm>
+          <a:prstGeom prst="rect">
+            <a:avLst/>
+          </a:prstGeom>
+          <a:noFill/>
+          <a:ln/>
+        </p:spPr>
+        <p:txBody>
+          <a:bodyPr wrap="square" lIns="0" tIns="0" rIns="0" bIns="0" rtlCol="0" anchor="ctr"/>
+          <a:lstStyle/>
+          <a:p>
+            <a:pPr indent="0" marL="0">
+              <a:lnSpc>
+                <a:spcPct val="105000"/>
+              </a:lnSpc>
+              <a:buNone/>
+            </a:pPr>
+            <a:r>
+              <a:rPr lang="en-US" sz="1550" b="1" dirty="0">
+                <a:solidFill>
+                  <a:schemeClr val="accent6"/>
+                </a:solidFill>
+                <a:latin typeface="Calibri" pitchFamily="34" charset="0"/>
+                <a:ea typeface="Calibri" pitchFamily="34" charset="-122"/>
+                <a:cs typeface="Calibri" pitchFamily="34" charset="-120"/>
+              </a:rPr>
+              <a:t>Still paper and email. </a:t>
+            </a:r>
+            <a:pPr indent="0" marL="0">
+              <a:lnSpc>
+                <a:spcPct val="105000"/>
+              </a:lnSpc>
+              <a:buNone/>
+            </a:pPr>
+            <a:r>
+              <a:rPr lang="en-US" sz="1550" dirty="0">
+                <a:solidFill>
+                  <a:schemeClr val="bg2"/>
+                </a:solidFill>
+                <a:latin typeface="Calibri" pitchFamily="34" charset="0"/>
+                <a:ea typeface="Calibri" pitchFamily="34" charset="-122"/>
+                <a:cs typeface="Calibri" pitchFamily="34" charset="-120"/>
+              </a:rPr>
+              <a:t>At universities everywhere, students front the money for events, then chase forms and inboxes for weeks, sometimes months.</a:t>
+            </a:r>
+            <a:endParaRPr lang="en-US" sz="1550" dirty="0"/>
+          </a:p>
+        </p:txBody>
+      </p:sp>
+      <p:sp>
+        <p:nvSpPr>
+          <p:cNvPr id="19" name="Proof ring 2"/>
+          <p:cNvSpPr/>
+          <p:nvPr/>
+        </p:nvSpPr>
+        <p:spPr>
+          <a:xfrm>
+            <a:off x="548640" y="4480560"/>
+            <a:ext cx="530352" cy="530352"/>
+          </a:xfrm>
+          <a:prstGeom prst="ellipse">
+            <a:avLst/>
+          </a:prstGeom>
+          <a:solidFill>
+            <a:schemeClr val="tx2"/>
+          </a:solidFill>
+          <a:ln w="12700">
+            <a:solidFill>
+              <a:schemeClr val="accent1"/>
+            </a:solidFill>
+            <a:prstDash val="solid"/>
+          </a:ln>
+        </p:spPr>
+      </p:sp>
+      <p:pic>
+        <p:nvPicPr>
+          <p:cNvPr id="20" name="Proof icon 2" descr="preencoded.png">    </p:cNvPr>
+          <p:cNvPicPr>
+            <a:picLocks noChangeAspect="1"/>
+          </p:cNvPicPr>
+          <p:nvPr/>
+        </p:nvPicPr>
+        <p:blipFill>
+          <a:blip r:embed="rId2"/>
+          <a:stretch>
+            <a:fillRect/>
+          </a:stretch>
+        </p:blipFill>
+        <p:spPr>
+          <a:xfrm>
+            <a:off x="690372" y="4622292"/>
+            <a:ext cx="246888" cy="246888"/>
+          </a:xfrm>
+          <a:prstGeom prst="rect">
+            <a:avLst/>
+          </a:prstGeom>
+        </p:spPr>
+      </p:pic>
+      <p:sp>
+        <p:nvSpPr>
+          <p:cNvPr id="21" name="Text 17"/>
+          <p:cNvSpPr txBox="1"/>
+          <p:nvPr/>
+        </p:nvSpPr>
+        <p:spPr>
+          <a:xfrm>
+            <a:off x="1325880" y="4443984"/>
+            <a:ext cx="10317175" cy="640080"/>
+          </a:xfrm>
+          <a:prstGeom prst="rect">
+            <a:avLst/>
+          </a:prstGeom>
+          <a:noFill/>
+          <a:ln/>
+        </p:spPr>
+        <p:txBody>
+          <a:bodyPr wrap="square" lIns="0" tIns="0" rIns="0" bIns="0" rtlCol="0" anchor="ctr"/>
+          <a:lstStyle/>
+          <a:p>
+            <a:pPr indent="0" marL="0">
+              <a:lnSpc>
+                <a:spcPct val="105000"/>
+              </a:lnSpc>
+              <a:buNone/>
+            </a:pPr>
+            <a:r>
+              <a:rPr lang="en-US" sz="1550" b="1" dirty="0">
+                <a:solidFill>
+                  <a:schemeClr val="accent6"/>
+                </a:solidFill>
+                <a:latin typeface="Calibri" pitchFamily="34" charset="0"/>
+                <a:ea typeface="Calibri" pitchFamily="34" charset="-122"/>
+                <a:cs typeface="Calibri" pitchFamily="34" charset="-120"/>
+              </a:rPr>
+              <a:t>A new split of trust. </a:t>
+            </a:r>
+            <a:pPr indent="0" marL="0">
+              <a:lnSpc>
+                <a:spcPct val="105000"/>
+              </a:lnSpc>
+              <a:buNone/>
+            </a:pPr>
+            <a:r>
+              <a:rPr lang="en-US" sz="1550" dirty="0">
+                <a:solidFill>
+                  <a:schemeClr val="bg2"/>
+                </a:solidFill>
+                <a:latin typeface="Calibri" pitchFamily="34" charset="0"/>
+                <a:ea typeface="Calibri" pitchFamily="34" charset="-122"/>
+                <a:cs typeface="Calibri" pitchFamily="34" charset="-120"/>
+              </a:rPr>
+              <a:t>The AI decides each claim on its own, but it cannot pay. Only a person holding a Ledger can release the money.</a:t>
+            </a:r>
+            <a:endParaRPr lang="en-US" sz="1550" dirty="0"/>
+          </a:p>
+        </p:txBody>
+      </p:sp>
+      <p:sp>
+        <p:nvSpPr>
+          <p:cNvPr id="22" name="Proof ring 3"/>
+          <p:cNvSpPr/>
+          <p:nvPr/>
+        </p:nvSpPr>
+        <p:spPr>
+          <a:xfrm>
+            <a:off x="548640" y="5303520"/>
+            <a:ext cx="530352" cy="530352"/>
+          </a:xfrm>
+          <a:prstGeom prst="ellipse">
+            <a:avLst/>
+          </a:prstGeom>
+          <a:solidFill>
+            <a:schemeClr val="tx2"/>
+          </a:solidFill>
+          <a:ln w="12700">
+            <a:solidFill>
+              <a:schemeClr val="accent1"/>
+            </a:solidFill>
+            <a:prstDash val="solid"/>
+          </a:ln>
+        </p:spPr>
+      </p:sp>
+      <p:pic>
+        <p:nvPicPr>
+          <p:cNvPr id="23" name="Proof icon 3" descr="preencoded.png">    </p:cNvPr>
+          <p:cNvPicPr>
+            <a:picLocks noChangeAspect="1"/>
+          </p:cNvPicPr>
+          <p:nvPr/>
+        </p:nvPicPr>
+        <p:blipFill>
+          <a:blip r:embed="rId3"/>
+          <a:stretch>
+            <a:fillRect/>
+          </a:stretch>
+        </p:blipFill>
+        <p:spPr>
+          <a:xfrm>
+            <a:off x="690372" y="5445252"/>
+            <a:ext cx="246888" cy="246888"/>
+          </a:xfrm>
+          <a:prstGeom prst="rect">
+            <a:avLst/>
+          </a:prstGeom>
+        </p:spPr>
+      </p:pic>
+      <p:sp>
+        <p:nvSpPr>
+          <p:cNvPr id="24" name="Text 19"/>
+          <p:cNvSpPr txBox="1"/>
+          <p:nvPr/>
+        </p:nvSpPr>
+        <p:spPr>
+          <a:xfrm>
+            <a:off x="1325880" y="5266944"/>
+            <a:ext cx="10317175" cy="640080"/>
+          </a:xfrm>
+          <a:prstGeom prst="rect">
+            <a:avLst/>
+          </a:prstGeom>
+          <a:noFill/>
+          <a:ln/>
+        </p:spPr>
+        <p:txBody>
+          <a:bodyPr wrap="square" lIns="0" tIns="0" rIns="0" bIns="0" rtlCol="0" anchor="ctr"/>
+          <a:lstStyle/>
+          <a:p>
+            <a:pPr indent="0" marL="0">
+              <a:lnSpc>
+                <a:spcPct val="105000"/>
+              </a:lnSpc>
+              <a:buNone/>
+            </a:pPr>
+            <a:r>
+              <a:rPr lang="en-US" sz="1550" b="1" dirty="0">
+                <a:solidFill>
+                  <a:schemeClr val="accent6"/>
+                </a:solidFill>
+                <a:latin typeface="Calibri" pitchFamily="34" charset="0"/>
+                <a:ea typeface="Calibri" pitchFamily="34" charset="-122"/>
+                <a:cs typeface="Calibri" pitchFamily="34" charset="-120"/>
+              </a:rPr>
+              <a:t>Proved with an attack. </a:t>
+            </a:r>
+            <a:pPr indent="0" marL="0">
+              <a:lnSpc>
+                <a:spcPct val="105000"/>
+              </a:lnSpc>
+              <a:buNone/>
+            </a:pPr>
+            <a:r>
+              <a:rPr lang="en-US" sz="1550" dirty="0">
+                <a:solidFill>
+                  <a:schemeClr val="bg2"/>
+                </a:solidFill>
+                <a:latin typeface="Calibri" pitchFamily="34" charset="0"/>
+                <a:ea typeface="Calibri" pitchFamily="34" charset="-122"/>
+                <a:cs typeface="Calibri" pitchFamily="34" charset="-120"/>
+              </a:rPr>
+              <a:t>Our attack demo switches the safeguards off and lets the AI be fooled. The Ledger screen still shows the wrong wallet, and the payout is rejected.</a:t>
+            </a:r>
+            <a:endParaRPr lang="en-US" sz="1550" dirty="0"/>
+          </a:p>
+        </p:txBody>
+      </p:sp>
+      <p:sp>
+        <p:nvSpPr>
+          <p:cNvPr id="25" name="Slide Number Placeholder 0"/>
+          <p:cNvSpPr>
+            <a:spLocks noGrp="1"/>
+          </p:cNvSpPr>
+          <p:nvPr>
+            <p:ph type="sldNum" sz="quarter" idx="4294967295"/>
+          </p:nvPr>
+        </p:nvSpPr>
+        <p:spPr>
+          <a:xfrm>
+            <a:off x="11094415" y="6272784"/>
+            <a:ext cx="548640" cy="274320"/>
+          </a:xfrm>
+          <a:prstGeom prst="rect">
+            <a:avLst/>
+          </a:prstGeom>
+          <a:extLst>
+            <a:ext uri="{C572A759-6A51-4108-AA02-DFA0A04FC94B}">
+              <ma14:wrappingTextBoxFlag xmlns:ma14="http://schemas.microsoft.com/office/mac/drawingml/2011/main" val="0"/>
+            </a:ext>
+          </a:extLst>
+        </p:spPr>
+        <p:txBody>
+          <a:bodyPr/>
+          <a:lstStyle>
+            <a:lvl1pPr>
+              <a:defRPr sz="1000">
+                <a:solidFill>
+                  <a:schemeClr val="bg2"/>
+                </a:solidFill>
+                <a:latin typeface="Consolas"/>
+                <a:ea typeface="Consolas"/>
+                <a:cs typeface="Consolas"/>
+              </a:defRPr>
+            </a:lvl1pPr>
+          </a:lstStyle>
+          <a:p>
+            <a:pPr algn="r"/>
+            <a:fld id="{F7021451-1387-4CA6-816F-3879F97B5CBC}" type="slidenum">
+              <a:rPr b="0" lang="en-US"/>
+              <a:t>13</a:t>
+            </a:fld>
+            <a:endParaRPr lang="en-US"/>
+          </a:p>
+        </p:txBody>
+      </p:sp>
+    </p:spTree>
+  </p:cSld>
+  <p:clrMapOvr>
+    <a:masterClrMapping/>
+  </p:clrMapOvr>
+</p:sld>
+</file>
+
+<file path=ppt/slides/slide14.xml><?xml version="1.0" encoding="utf-8"?>
+<p:sld xmlns:a="http://schemas.openxmlformats.org/drawingml/2006/main" xmlns:r="http://schemas.openxmlformats.org/officeDocument/2006/relationships" xmlns:p="http://schemas.openxmlformats.org/presentationml/2006/main">
+  <p:cSld name="Slide 14">
+    <p:spTree>
+      <p:nvGrpSpPr>
+        <p:cNvPr id="1" name=""/>
+        <p:cNvGrpSpPr/>
+        <p:nvPr/>
+      </p:nvGrpSpPr>
+      <p:grpSpPr>
+        <a:xfrm>
+          <a:off x="0" y="0"/>
+          <a:ext cx="0" cy="0"/>
+          <a:chOff x="0" y="0"/>
+          <a:chExt cx="0" cy="0"/>
+        </a:xfrm>
+      </p:grpSpPr>
+      <p:sp>
+        <p:nvSpPr>
+          <p:cNvPr id="2" name="Text 4"/>
+          <p:cNvSpPr/>
+          <p:nvPr>
+            <p:ph idx="104" type="body" hasCustomPrompt="1"/>
+          </p:nvPr>
+        </p:nvSpPr>
+        <p:spPr>
+          <a:xfrm>
+            <a:off x="548640" y="457200"/>
+            <a:ext cx="8229600" cy="274320"/>
+          </a:xfrm>
+          <a:prstGeom prst="rect">
+            <a:avLst/>
+          </a:prstGeom>
+          <a:noFill/>
+          <a:ln/>
+        </p:spPr>
+        <p:txBody>
+          <a:bodyPr wrap="square" lIns="0" tIns="0" rIns="0" bIns="0" rtlCol="0" anchor="ctr"/>
+          <a:lstStyle/>
+          <a:p>
+            <a:pPr indent="0" marL="0">
+              <a:buNone/>
+            </a:pPr>
+            <a:r>
+              <a:rPr lang="en-US" sz="1200" spc="300" kern="0" dirty="0">
+                <a:solidFill>
+                  <a:schemeClr val="accent1"/>
+                </a:solidFill>
+                <a:latin typeface="Consolas" pitchFamily="34" charset="0"/>
+                <a:ea typeface="Consolas" pitchFamily="34" charset="-122"/>
+                <a:cs typeface="Consolas" pitchFamily="34" charset="-120"/>
+              </a:rPr>
+              <a:t>JUDGED ON · USER EXPERIENCE · 15%</a:t>
+            </a:r>
+            <a:endParaRPr lang="en-US" sz="1200" dirty="0"/>
+          </a:p>
+        </p:txBody>
+      </p:sp>
+      <p:sp>
+        <p:nvSpPr>
+          <p:cNvPr id="3" name="Text 4"/>
+          <p:cNvSpPr/>
+          <p:nvPr>
+            <p:ph idx="105" type="title" hasCustomPrompt="1"/>
+          </p:nvPr>
+        </p:nvSpPr>
+        <p:spPr>
+          <a:xfrm>
+            <a:off x="548640" y="777240"/>
+            <a:ext cx="11094415" cy="777240"/>
+          </a:xfrm>
+          <a:prstGeom prst="rect">
+            <a:avLst/>
+          </a:prstGeom>
+          <a:noFill/>
+          <a:ln/>
+        </p:spPr>
+        <p:txBody>
+          <a:bodyPr wrap="square" lIns="0" tIns="0" rIns="0" bIns="0" rtlCol="0" anchor="t"/>
+          <a:lstStyle/>
+          <a:p>
+            <a:pPr algn="l" indent="0" marL="0">
+              <a:buNone/>
+            </a:pPr>
+            <a:r>
+              <a:rPr lang="en-US" sz="3200" b="1" dirty="0">
+                <a:solidFill>
+                  <a:schemeClr val="bg1"/>
+                </a:solidFill>
+                <a:latin typeface="Consolas" pitchFamily="34" charset="0"/>
+                <a:ea typeface="Consolas" pitchFamily="34" charset="-122"/>
+                <a:cs typeface="Consolas" pitchFamily="34" charset="-120"/>
+              </a:rPr>
+              <a:t>UNDER A MINUTE, FROM A PHONE</a:t>
+            </a:r>
+            <a:endParaRPr lang="en-US" sz="3200" dirty="0"/>
+          </a:p>
+        </p:txBody>
+      </p:sp>
+      <p:sp>
+        <p:nvSpPr>
+          <p:cNvPr id="4" name="Stat 1"/>
+          <p:cNvSpPr/>
+          <p:nvPr/>
+        </p:nvSpPr>
+        <p:spPr>
+          <a:xfrm>
+            <a:off x="548640" y="1783080"/>
+            <a:ext cx="2567864" cy="1554480"/>
+          </a:xfrm>
+          <a:prstGeom prst="roundRect">
+            <a:avLst>
+              <a:gd name="adj" fmla="val 7059"/>
+            </a:avLst>
+          </a:prstGeom>
+          <a:solidFill>
+            <a:schemeClr val="tx2"/>
+          </a:solidFill>
+          <a:ln w="12700">
+            <a:solidFill>
+              <a:schemeClr val="accent5"/>
+            </a:solidFill>
+            <a:prstDash val="solid"/>
+          </a:ln>
+        </p:spPr>
+      </p:sp>
+      <p:sp>
+        <p:nvSpPr>
+          <p:cNvPr id="5" name="Text 3"/>
+          <p:cNvSpPr txBox="1"/>
+          <p:nvPr/>
+        </p:nvSpPr>
+        <p:spPr>
+          <a:xfrm>
+            <a:off x="822960" y="1920240"/>
+            <a:ext cx="2110664" cy="685800"/>
+          </a:xfrm>
+          <a:prstGeom prst="rect">
+            <a:avLst/>
+          </a:prstGeom>
+          <a:noFill/>
+          <a:ln/>
+        </p:spPr>
+        <p:txBody>
+          <a:bodyPr wrap="square" lIns="0" tIns="0" rIns="0" bIns="0" rtlCol="0" anchor="ctr">
+            <a:normAutofit/>
+          </a:bodyPr>
+          <a:lstStyle/>
+          <a:p>
+            <a:pPr indent="0" marL="0">
+              <a:buNone/>
+            </a:pPr>
+            <a:r>
+              <a:rPr lang="en-US" sz="3600" b="1" dirty="0">
+                <a:solidFill>
+                  <a:schemeClr val="accent1"/>
+                </a:solidFill>
+                <a:latin typeface="Consolas" pitchFamily="34" charset="0"/>
+                <a:ea typeface="Consolas" pitchFamily="34" charset="-122"/>
+                <a:cs typeface="Consolas" pitchFamily="34" charset="-120"/>
+              </a:rPr>
+              <a:t>&lt;1 min</a:t>
+            </a:r>
+            <a:endParaRPr lang="en-US" sz="3600" dirty="0"/>
+          </a:p>
+        </p:txBody>
+      </p:sp>
+      <p:sp>
+        <p:nvSpPr>
+          <p:cNvPr id="6" name="Text 4"/>
+          <p:cNvSpPr txBox="1"/>
+          <p:nvPr/>
+        </p:nvSpPr>
+        <p:spPr>
+          <a:xfrm>
+            <a:off x="822960" y="2633472"/>
+            <a:ext cx="2110664" cy="640080"/>
+          </a:xfrm>
+          <a:prstGeom prst="rect">
+            <a:avLst/>
+          </a:prstGeom>
+          <a:noFill/>
+          <a:ln/>
+        </p:spPr>
+        <p:txBody>
+          <a:bodyPr wrap="square" lIns="0" tIns="0" rIns="0" bIns="0" rtlCol="0" anchor="t"/>
+          <a:lstStyle/>
+          <a:p>
+            <a:pPr indent="0" marL="0">
+              <a:lnSpc>
+                <a:spcPct val="105000"/>
+              </a:lnSpc>
+              <a:buNone/>
+            </a:pPr>
+            <a:r>
+              <a:rPr lang="en-US" sz="1350" dirty="0">
+                <a:solidFill>
+                  <a:schemeClr val="bg2"/>
+                </a:solidFill>
+                <a:latin typeface="Calibri" pitchFamily="34" charset="0"/>
+                <a:ea typeface="Calibri" pitchFamily="34" charset="-122"/>
+                <a:cs typeface="Calibri" pitchFamily="34" charset="-120"/>
+              </a:rPr>
+              <a:t>to submit a claim from a receipt photo</a:t>
+            </a:r>
+            <a:endParaRPr lang="en-US" sz="1350" dirty="0"/>
+          </a:p>
+        </p:txBody>
+      </p:sp>
+      <p:sp>
+        <p:nvSpPr>
+          <p:cNvPr id="7" name="Stat 2"/>
+          <p:cNvSpPr/>
+          <p:nvPr/>
+        </p:nvSpPr>
+        <p:spPr>
+          <a:xfrm>
+            <a:off x="3390824" y="1783080"/>
+            <a:ext cx="2567864" cy="1554480"/>
+          </a:xfrm>
+          <a:prstGeom prst="roundRect">
+            <a:avLst>
+              <a:gd name="adj" fmla="val 7059"/>
+            </a:avLst>
+          </a:prstGeom>
+          <a:solidFill>
+            <a:schemeClr val="tx2"/>
+          </a:solidFill>
+          <a:ln w="12700">
+            <a:solidFill>
+              <a:schemeClr val="accent5"/>
+            </a:solidFill>
+            <a:prstDash val="solid"/>
+          </a:ln>
+        </p:spPr>
+      </p:sp>
+      <p:sp>
+        <p:nvSpPr>
+          <p:cNvPr id="8" name="Text 6"/>
+          <p:cNvSpPr txBox="1"/>
+          <p:nvPr/>
+        </p:nvSpPr>
+        <p:spPr>
+          <a:xfrm>
+            <a:off x="3665144" y="1920240"/>
+            <a:ext cx="2110664" cy="685800"/>
+          </a:xfrm>
+          <a:prstGeom prst="rect">
+            <a:avLst/>
+          </a:prstGeom>
+          <a:noFill/>
+          <a:ln/>
+        </p:spPr>
+        <p:txBody>
+          <a:bodyPr wrap="square" lIns="0" tIns="0" rIns="0" bIns="0" rtlCol="0" anchor="ctr">
+            <a:normAutofit/>
+          </a:bodyPr>
+          <a:lstStyle/>
+          <a:p>
+            <a:pPr indent="0" marL="0">
+              <a:buNone/>
+            </a:pPr>
+            <a:r>
+              <a:rPr lang="en-US" sz="3600" b="1" dirty="0">
+                <a:solidFill>
+                  <a:schemeClr val="accent1"/>
+                </a:solidFill>
+                <a:latin typeface="Consolas" pitchFamily="34" charset="0"/>
+                <a:ea typeface="Consolas" pitchFamily="34" charset="-122"/>
+                <a:cs typeface="Consolas" pitchFamily="34" charset="-120"/>
+              </a:rPr>
+              <a:t>Seconds</a:t>
+            </a:r>
+            <a:endParaRPr lang="en-US" sz="3600" dirty="0"/>
+          </a:p>
+        </p:txBody>
+      </p:sp>
+      <p:sp>
+        <p:nvSpPr>
+          <p:cNvPr id="9" name="Text 7"/>
+          <p:cNvSpPr txBox="1"/>
+          <p:nvPr/>
+        </p:nvSpPr>
+        <p:spPr>
+          <a:xfrm>
+            <a:off x="3665144" y="2633472"/>
+            <a:ext cx="2110664" cy="640080"/>
+          </a:xfrm>
+          <a:prstGeom prst="rect">
+            <a:avLst/>
+          </a:prstGeom>
+          <a:noFill/>
+          <a:ln/>
+        </p:spPr>
+        <p:txBody>
+          <a:bodyPr wrap="square" lIns="0" tIns="0" rIns="0" bIns="0" rtlCol="0" anchor="t"/>
+          <a:lstStyle/>
+          <a:p>
+            <a:pPr indent="0" marL="0">
+              <a:lnSpc>
+                <a:spcPct val="105000"/>
+              </a:lnSpc>
+              <a:buNone/>
+            </a:pPr>
+            <a:r>
+              <a:rPr lang="en-US" sz="1350" dirty="0">
+                <a:solidFill>
+                  <a:schemeClr val="bg2"/>
+                </a:solidFill>
+                <a:latin typeface="Calibri" pitchFamily="34" charset="0"/>
+                <a:ea typeface="Calibri" pitchFamily="34" charset="-122"/>
+                <a:cs typeface="Calibri" pitchFamily="34" charset="-120"/>
+              </a:rPr>
+              <a:t>for the agent’s decision, with its reasons</a:t>
+            </a:r>
+            <a:endParaRPr lang="en-US" sz="1350" dirty="0"/>
+          </a:p>
+        </p:txBody>
+      </p:sp>
+      <p:sp>
+        <p:nvSpPr>
+          <p:cNvPr id="10" name="Stat 3"/>
+          <p:cNvSpPr/>
+          <p:nvPr/>
+        </p:nvSpPr>
+        <p:spPr>
+          <a:xfrm>
+            <a:off x="6233008" y="1783080"/>
+            <a:ext cx="2567864" cy="1554480"/>
+          </a:xfrm>
+          <a:prstGeom prst="roundRect">
+            <a:avLst>
+              <a:gd name="adj" fmla="val 7059"/>
+            </a:avLst>
+          </a:prstGeom>
+          <a:solidFill>
+            <a:schemeClr val="tx2"/>
+          </a:solidFill>
+          <a:ln w="12700">
+            <a:solidFill>
+              <a:schemeClr val="accent5"/>
+            </a:solidFill>
+            <a:prstDash val="solid"/>
+          </a:ln>
+        </p:spPr>
+      </p:sp>
+      <p:sp>
+        <p:nvSpPr>
+          <p:cNvPr id="11" name="Text 9"/>
+          <p:cNvSpPr txBox="1"/>
+          <p:nvPr/>
+        </p:nvSpPr>
+        <p:spPr>
+          <a:xfrm>
+            <a:off x="6507328" y="1920240"/>
+            <a:ext cx="2110664" cy="685800"/>
+          </a:xfrm>
+          <a:prstGeom prst="rect">
+            <a:avLst/>
+          </a:prstGeom>
+          <a:noFill/>
+          <a:ln/>
+        </p:spPr>
+        <p:txBody>
+          <a:bodyPr wrap="square" lIns="0" tIns="0" rIns="0" bIns="0" rtlCol="0" anchor="ctr">
+            <a:normAutofit/>
+          </a:bodyPr>
+          <a:lstStyle/>
+          <a:p>
+            <a:pPr indent="0" marL="0">
+              <a:buNone/>
+            </a:pPr>
+            <a:r>
+              <a:rPr lang="en-US" sz="3600" b="1" dirty="0">
+                <a:solidFill>
+                  <a:schemeClr val="accent1"/>
+                </a:solidFill>
+                <a:latin typeface="Consolas" pitchFamily="34" charset="0"/>
+                <a:ea typeface="Consolas" pitchFamily="34" charset="-122"/>
+                <a:cs typeface="Consolas" pitchFamily="34" charset="-120"/>
+              </a:rPr>
+              <a:t>0</a:t>
+            </a:r>
+            <a:endParaRPr lang="en-US" sz="3600" dirty="0"/>
+          </a:p>
+        </p:txBody>
+      </p:sp>
+      <p:sp>
+        <p:nvSpPr>
+          <p:cNvPr id="12" name="Text 10"/>
+          <p:cNvSpPr txBox="1"/>
+          <p:nvPr/>
+        </p:nvSpPr>
+        <p:spPr>
+          <a:xfrm>
+            <a:off x="6507328" y="2633472"/>
+            <a:ext cx="2110664" cy="640080"/>
+          </a:xfrm>
+          <a:prstGeom prst="rect">
+            <a:avLst/>
+          </a:prstGeom>
+          <a:noFill/>
+          <a:ln/>
+        </p:spPr>
+        <p:txBody>
+          <a:bodyPr wrap="square" lIns="0" tIns="0" rIns="0" bIns="0" rtlCol="0" anchor="t"/>
+          <a:lstStyle/>
+          <a:p>
+            <a:pPr indent="0" marL="0">
+              <a:lnSpc>
+                <a:spcPct val="105000"/>
+              </a:lnSpc>
+              <a:buNone/>
+            </a:pPr>
+            <a:r>
+              <a:rPr lang="en-US" sz="1350" dirty="0">
+                <a:solidFill>
+                  <a:schemeClr val="bg2"/>
+                </a:solidFill>
+                <a:latin typeface="Calibri" pitchFamily="34" charset="0"/>
+                <a:ea typeface="Calibri" pitchFamily="34" charset="-122"/>
+                <a:cs typeface="Calibri" pitchFamily="34" charset="-120"/>
+              </a:rPr>
+              <a:t>app-store installs: it’s an installable web app</a:t>
+            </a:r>
+            <a:endParaRPr lang="en-US" sz="1350" dirty="0"/>
+          </a:p>
+        </p:txBody>
+      </p:sp>
+      <p:sp>
+        <p:nvSpPr>
+          <p:cNvPr id="13" name="Stat 4"/>
+          <p:cNvSpPr/>
+          <p:nvPr/>
+        </p:nvSpPr>
+        <p:spPr>
+          <a:xfrm>
+            <a:off x="9075191" y="1783080"/>
+            <a:ext cx="2567864" cy="1554480"/>
+          </a:xfrm>
+          <a:prstGeom prst="roundRect">
+            <a:avLst>
+              <a:gd name="adj" fmla="val 7059"/>
+            </a:avLst>
+          </a:prstGeom>
+          <a:solidFill>
+            <a:schemeClr val="tx2"/>
+          </a:solidFill>
+          <a:ln w="12700">
+            <a:solidFill>
+              <a:schemeClr val="accent5"/>
+            </a:solidFill>
+            <a:prstDash val="solid"/>
+          </a:ln>
+        </p:spPr>
+      </p:sp>
+      <p:sp>
+        <p:nvSpPr>
+          <p:cNvPr id="14" name="Text 12"/>
+          <p:cNvSpPr txBox="1"/>
+          <p:nvPr/>
+        </p:nvSpPr>
+        <p:spPr>
+          <a:xfrm>
+            <a:off x="9349511" y="1920240"/>
+            <a:ext cx="2110664" cy="685800"/>
+          </a:xfrm>
+          <a:prstGeom prst="rect">
+            <a:avLst/>
+          </a:prstGeom>
+          <a:noFill/>
+          <a:ln/>
+        </p:spPr>
+        <p:txBody>
+          <a:bodyPr wrap="square" lIns="0" tIns="0" rIns="0" bIns="0" rtlCol="0" anchor="ctr">
+            <a:normAutofit/>
+          </a:bodyPr>
+          <a:lstStyle/>
+          <a:p>
+            <a:pPr indent="0" marL="0">
+              <a:buNone/>
+            </a:pPr>
+            <a:r>
+              <a:rPr lang="en-US" sz="3600" b="1" dirty="0">
+                <a:solidFill>
+                  <a:schemeClr val="accent1"/>
+                </a:solidFill>
+                <a:latin typeface="Consolas" pitchFamily="34" charset="0"/>
+                <a:ea typeface="Consolas" pitchFamily="34" charset="-122"/>
+                <a:cs typeface="Consolas" pitchFamily="34" charset="-120"/>
+              </a:rPr>
+              <a:t>£0</a:t>
+            </a:r>
+            <a:endParaRPr lang="en-US" sz="3600" dirty="0"/>
+          </a:p>
+        </p:txBody>
+      </p:sp>
+      <p:sp>
+        <p:nvSpPr>
+          <p:cNvPr id="15" name="Text 13"/>
+          <p:cNvSpPr txBox="1"/>
+          <p:nvPr/>
+        </p:nvSpPr>
+        <p:spPr>
+          <a:xfrm>
+            <a:off x="9349511" y="2633472"/>
+            <a:ext cx="2110664" cy="640080"/>
+          </a:xfrm>
+          <a:prstGeom prst="rect">
+            <a:avLst/>
+          </a:prstGeom>
+          <a:noFill/>
+          <a:ln/>
+        </p:spPr>
+        <p:txBody>
+          <a:bodyPr wrap="square" lIns="0" tIns="0" rIns="0" bIns="0" rtlCol="0" anchor="t"/>
+          <a:lstStyle/>
+          <a:p>
+            <a:pPr indent="0" marL="0">
+              <a:lnSpc>
+                <a:spcPct val="105000"/>
+              </a:lnSpc>
+              <a:buNone/>
+            </a:pPr>
+            <a:r>
+              <a:rPr lang="en-US" sz="1350" dirty="0">
+                <a:solidFill>
+                  <a:schemeClr val="bg2"/>
+                </a:solidFill>
+                <a:latin typeface="Calibri" pitchFamily="34" charset="0"/>
+                <a:ea typeface="Calibri" pitchFamily="34" charset="-122"/>
+                <a:cs typeface="Calibri" pitchFamily="34" charset="-120"/>
+              </a:rPr>
+              <a:t>to read a receipt: OCR runs on the phone</a:t>
+            </a:r>
+            <a:endParaRPr lang="en-US" sz="1350" dirty="0"/>
+          </a:p>
+        </p:txBody>
+      </p:sp>
+      <p:sp>
+        <p:nvSpPr>
+          <p:cNvPr id="16" name="Proof ring 1"/>
+          <p:cNvSpPr/>
+          <p:nvPr/>
+        </p:nvSpPr>
+        <p:spPr>
+          <a:xfrm>
+            <a:off x="548640" y="3657600"/>
+            <a:ext cx="530352" cy="530352"/>
+          </a:xfrm>
+          <a:prstGeom prst="ellipse">
+            <a:avLst/>
+          </a:prstGeom>
+          <a:solidFill>
+            <a:schemeClr val="tx2"/>
+          </a:solidFill>
+          <a:ln w="12700">
+            <a:solidFill>
+              <a:schemeClr val="accent1"/>
+            </a:solidFill>
+            <a:prstDash val="solid"/>
+          </a:ln>
+        </p:spPr>
+      </p:sp>
+      <p:pic>
+        <p:nvPicPr>
+          <p:cNvPr id="17" name="Proof icon 1" descr="preencoded.png">    </p:cNvPr>
+          <p:cNvPicPr>
+            <a:picLocks noChangeAspect="1"/>
+          </p:cNvPicPr>
+          <p:nvPr/>
+        </p:nvPicPr>
+        <p:blipFill>
+          <a:blip r:embed="rId1"/>
+          <a:stretch>
+            <a:fillRect/>
+          </a:stretch>
+        </p:blipFill>
+        <p:spPr>
+          <a:xfrm>
+            <a:off x="690372" y="3799332"/>
+            <a:ext cx="246888" cy="246888"/>
+          </a:xfrm>
+          <a:prstGeom prst="rect">
+            <a:avLst/>
+          </a:prstGeom>
+        </p:spPr>
+      </p:pic>
+      <p:sp>
+        <p:nvSpPr>
+          <p:cNvPr id="18" name="Text 15"/>
+          <p:cNvSpPr txBox="1"/>
+          <p:nvPr/>
+        </p:nvSpPr>
+        <p:spPr>
+          <a:xfrm>
+            <a:off x="1325880" y="3621024"/>
+            <a:ext cx="10317175" cy="640080"/>
+          </a:xfrm>
+          <a:prstGeom prst="rect">
+            <a:avLst/>
+          </a:prstGeom>
+          <a:noFill/>
+          <a:ln/>
+        </p:spPr>
+        <p:txBody>
+          <a:bodyPr wrap="square" lIns="0" tIns="0" rIns="0" bIns="0" rtlCol="0" anchor="ctr"/>
+          <a:lstStyle/>
+          <a:p>
+            <a:pPr indent="0" marL="0">
+              <a:lnSpc>
+                <a:spcPct val="105000"/>
+              </a:lnSpc>
+              <a:buNone/>
+            </a:pPr>
+            <a:r>
+              <a:rPr lang="en-US" sz="1550" b="1" dirty="0">
+                <a:solidFill>
+                  <a:schemeClr val="accent6"/>
+                </a:solidFill>
+                <a:latin typeface="Calibri" pitchFamily="34" charset="0"/>
+                <a:ea typeface="Calibri" pitchFamily="34" charset="-122"/>
+                <a:cs typeface="Calibri" pitchFamily="34" charset="-120"/>
+              </a:rPr>
+              <a:t>Snap, check, submit. </a:t>
+            </a:r>
+            <a:pPr indent="0" marL="0">
+              <a:lnSpc>
+                <a:spcPct val="105000"/>
+              </a:lnSpc>
+              <a:buNone/>
+            </a:pPr>
+            <a:r>
+              <a:rPr lang="en-US" sz="1550" dirty="0">
+                <a:solidFill>
+                  <a:schemeClr val="bg2"/>
+                </a:solidFill>
+                <a:latin typeface="Calibri" pitchFamily="34" charset="0"/>
+                <a:ea typeface="Calibri" pitchFamily="34" charset="-122"/>
+                <a:cs typeface="Calibri" pitchFamily="34" charset="-120"/>
+              </a:rPr>
+              <a:t>The phone fills in the claim. A wrong reading is corrected and flagged for the treasurer, never a dead end.</a:t>
+            </a:r>
+            <a:endParaRPr lang="en-US" sz="1550" dirty="0"/>
+          </a:p>
+        </p:txBody>
+      </p:sp>
+      <p:sp>
+        <p:nvSpPr>
+          <p:cNvPr id="19" name="Proof ring 2"/>
+          <p:cNvSpPr/>
+          <p:nvPr/>
+        </p:nvSpPr>
+        <p:spPr>
+          <a:xfrm>
+            <a:off x="548640" y="4480560"/>
+            <a:ext cx="530352" cy="530352"/>
+          </a:xfrm>
+          <a:prstGeom prst="ellipse">
+            <a:avLst/>
+          </a:prstGeom>
+          <a:solidFill>
+            <a:schemeClr val="tx2"/>
+          </a:solidFill>
+          <a:ln w="12700">
+            <a:solidFill>
+              <a:schemeClr val="accent1"/>
+            </a:solidFill>
+            <a:prstDash val="solid"/>
+          </a:ln>
+        </p:spPr>
+      </p:sp>
+      <p:pic>
+        <p:nvPicPr>
+          <p:cNvPr id="20" name="Proof icon 2" descr="preencoded.png">    </p:cNvPr>
+          <p:cNvPicPr>
+            <a:picLocks noChangeAspect="1"/>
+          </p:cNvPicPr>
+          <p:nvPr/>
+        </p:nvPicPr>
+        <p:blipFill>
+          <a:blip r:embed="rId2"/>
+          <a:stretch>
+            <a:fillRect/>
+          </a:stretch>
+        </p:blipFill>
+        <p:spPr>
+          <a:xfrm>
+            <a:off x="690372" y="4622292"/>
+            <a:ext cx="246888" cy="246888"/>
+          </a:xfrm>
+          <a:prstGeom prst="rect">
+            <a:avLst/>
+          </a:prstGeom>
+        </p:spPr>
+      </p:pic>
+      <p:sp>
+        <p:nvSpPr>
+          <p:cNvPr id="21" name="Text 17"/>
+          <p:cNvSpPr txBox="1"/>
+          <p:nvPr/>
+        </p:nvSpPr>
+        <p:spPr>
+          <a:xfrm>
+            <a:off x="1325880" y="4443984"/>
+            <a:ext cx="10317175" cy="640080"/>
+          </a:xfrm>
+          <a:prstGeom prst="rect">
+            <a:avLst/>
+          </a:prstGeom>
+          <a:noFill/>
+          <a:ln/>
+        </p:spPr>
+        <p:txBody>
+          <a:bodyPr wrap="square" lIns="0" tIns="0" rIns="0" bIns="0" rtlCol="0" anchor="ctr"/>
+          <a:lstStyle/>
+          <a:p>
+            <a:pPr indent="0" marL="0">
+              <a:lnSpc>
+                <a:spcPct val="105000"/>
+              </a:lnSpc>
+              <a:buNone/>
+            </a:pPr>
+            <a:r>
+              <a:rPr lang="en-US" sz="1550" b="1" dirty="0">
+                <a:solidFill>
+                  <a:schemeClr val="accent6"/>
+                </a:solidFill>
+                <a:latin typeface="Calibri" pitchFamily="34" charset="0"/>
+                <a:ea typeface="Calibri" pitchFamily="34" charset="-122"/>
+                <a:cs typeface="Calibri" pitchFamily="34" charset="-120"/>
+              </a:rPr>
+              <a:t>Every “no” has a reason. </a:t>
+            </a:r>
+            <a:pPr indent="0" marL="0">
+              <a:lnSpc>
+                <a:spcPct val="105000"/>
+              </a:lnSpc>
+              <a:buNone/>
+            </a:pPr>
+            <a:r>
+              <a:rPr lang="en-US" sz="1550" dirty="0">
+                <a:solidFill>
+                  <a:schemeClr val="bg2"/>
+                </a:solidFill>
+                <a:latin typeface="Calibri" pitchFamily="34" charset="0"/>
+                <a:ea typeface="Calibri" pitchFamily="34" charset="-122"/>
+                <a:cs typeface="Calibri" pitchFamily="34" charset="-120"/>
+              </a:rPr>
+              <a:t>A declined claim says which check failed, in plain words, and offers fix-and-resubmit or a one-tap appeal.</a:t>
+            </a:r>
+            <a:endParaRPr lang="en-US" sz="1550" dirty="0"/>
+          </a:p>
+        </p:txBody>
+      </p:sp>
+      <p:sp>
+        <p:nvSpPr>
+          <p:cNvPr id="22" name="Proof ring 3"/>
+          <p:cNvSpPr/>
+          <p:nvPr/>
+        </p:nvSpPr>
+        <p:spPr>
+          <a:xfrm>
+            <a:off x="548640" y="5303520"/>
+            <a:ext cx="530352" cy="530352"/>
+          </a:xfrm>
+          <a:prstGeom prst="ellipse">
+            <a:avLst/>
+          </a:prstGeom>
+          <a:solidFill>
+            <a:schemeClr val="tx2"/>
+          </a:solidFill>
+          <a:ln w="12700">
+            <a:solidFill>
+              <a:schemeClr val="accent1"/>
+            </a:solidFill>
+            <a:prstDash val="solid"/>
+          </a:ln>
+        </p:spPr>
+      </p:sp>
+      <p:pic>
+        <p:nvPicPr>
+          <p:cNvPr id="23" name="Proof icon 3" descr="preencoded.png">    </p:cNvPr>
+          <p:cNvPicPr>
+            <a:picLocks noChangeAspect="1"/>
+          </p:cNvPicPr>
+          <p:nvPr/>
+        </p:nvPicPr>
+        <p:blipFill>
+          <a:blip r:embed="rId3"/>
+          <a:stretch>
+            <a:fillRect/>
+          </a:stretch>
+        </p:blipFill>
+        <p:spPr>
+          <a:xfrm>
+            <a:off x="690372" y="5445252"/>
+            <a:ext cx="246888" cy="246888"/>
+          </a:xfrm>
+          <a:prstGeom prst="rect">
+            <a:avLst/>
+          </a:prstGeom>
+        </p:spPr>
+      </p:pic>
+      <p:sp>
+        <p:nvSpPr>
+          <p:cNvPr id="24" name="Text 19"/>
+          <p:cNvSpPr txBox="1"/>
+          <p:nvPr/>
+        </p:nvSpPr>
+        <p:spPr>
+          <a:xfrm>
+            <a:off x="1325880" y="5266944"/>
+            <a:ext cx="10317175" cy="640080"/>
+          </a:xfrm>
+          <a:prstGeom prst="rect">
+            <a:avLst/>
+          </a:prstGeom>
+          <a:noFill/>
+          <a:ln/>
+        </p:spPr>
+        <p:txBody>
+          <a:bodyPr wrap="square" lIns="0" tIns="0" rIns="0" bIns="0" rtlCol="0" anchor="ctr"/>
+          <a:lstStyle/>
+          <a:p>
+            <a:pPr indent="0" marL="0">
+              <a:lnSpc>
+                <a:spcPct val="105000"/>
+              </a:lnSpc>
+              <a:buNone/>
+            </a:pPr>
+            <a:r>
+              <a:rPr lang="en-US" sz="1550" b="1" dirty="0">
+                <a:solidFill>
+                  <a:schemeClr val="accent6"/>
+                </a:solidFill>
+                <a:latin typeface="Calibri" pitchFamily="34" charset="0"/>
+                <a:ea typeface="Calibri" pitchFamily="34" charset="-122"/>
+                <a:cs typeface="Calibri" pitchFamily="34" charset="-120"/>
+              </a:rPr>
+              <a:t>One job for the treasurer. </a:t>
+            </a:r>
+            <a:pPr indent="0" marL="0">
+              <a:lnSpc>
+                <a:spcPct val="105000"/>
+              </a:lnSpc>
+              <a:buNone/>
+            </a:pPr>
+            <a:r>
+              <a:rPr lang="en-US" sz="1550" dirty="0">
+                <a:solidFill>
+                  <a:schemeClr val="bg2"/>
+                </a:solidFill>
+                <a:latin typeface="Calibri" pitchFamily="34" charset="0"/>
+                <a:ea typeface="Calibri" pitchFamily="34" charset="-122"/>
+                <a:cs typeface="Calibri" pitchFamily="34" charset="-120"/>
+              </a:rPr>
+              <a:t>One queue for every society, the warning beside the field that needs a human, then one press on the Ledger.</a:t>
+            </a:r>
+            <a:endParaRPr lang="en-US" sz="1550" dirty="0"/>
+          </a:p>
+        </p:txBody>
+      </p:sp>
+      <p:sp>
+        <p:nvSpPr>
+          <p:cNvPr id="25" name="Slide Number Placeholder 0"/>
+          <p:cNvSpPr>
+            <a:spLocks noGrp="1"/>
+          </p:cNvSpPr>
+          <p:nvPr>
+            <p:ph type="sldNum" sz="quarter" idx="4294967295"/>
+          </p:nvPr>
+        </p:nvSpPr>
+        <p:spPr>
+          <a:xfrm>
+            <a:off x="11094415" y="6272784"/>
+            <a:ext cx="548640" cy="274320"/>
+          </a:xfrm>
+          <a:prstGeom prst="rect">
+            <a:avLst/>
+          </a:prstGeom>
+          <a:extLst>
+            <a:ext uri="{C572A759-6A51-4108-AA02-DFA0A04FC94B}">
+              <ma14:wrappingTextBoxFlag xmlns:ma14="http://schemas.microsoft.com/office/mac/drawingml/2011/main" val="0"/>
+            </a:ext>
+          </a:extLst>
+        </p:spPr>
+        <p:txBody>
+          <a:bodyPr/>
+          <a:lstStyle>
+            <a:lvl1pPr>
+              <a:defRPr sz="1000">
+                <a:solidFill>
+                  <a:schemeClr val="bg2"/>
+                </a:solidFill>
+                <a:latin typeface="Consolas"/>
+                <a:ea typeface="Consolas"/>
+                <a:cs typeface="Consolas"/>
+              </a:defRPr>
+            </a:lvl1pPr>
+          </a:lstStyle>
+          <a:p>
+            <a:pPr algn="r"/>
+            <a:fld id="{F7021451-1387-4CA6-816F-3879F97B5CBC}" type="slidenum">
+              <a:rPr b="0" lang="en-US"/>
+              <a:t>14</a:t>
+            </a:fld>
+            <a:endParaRPr lang="en-US"/>
+          </a:p>
+        </p:txBody>
+      </p:sp>
+    </p:spTree>
+  </p:cSld>
+  <p:clrMapOvr>
+    <a:masterClrMapping/>
+  </p:clrMapOvr>
+</p:sld>
+</file>
+
+<file path=ppt/slides/slide15.xml><?xml version="1.0" encoding="utf-8"?>
+<p:sld xmlns:a="http://schemas.openxmlformats.org/drawingml/2006/main" xmlns:r="http://schemas.openxmlformats.org/officeDocument/2006/relationships" xmlns:p="http://schemas.openxmlformats.org/presentationml/2006/main">
+  <p:cSld name="Slide 15">
+    <p:spTree>
+      <p:nvGrpSpPr>
+        <p:cNvPr id="1" name=""/>
+        <p:cNvGrpSpPr/>
+        <p:nvPr/>
+      </p:nvGrpSpPr>
+      <p:grpSpPr>
+        <a:xfrm>
+          <a:off x="0" y="0"/>
+          <a:ext cx="0" cy="0"/>
+          <a:chOff x="0" y="0"/>
+          <a:chExt cx="0" cy="0"/>
+        </a:xfrm>
+      </p:grpSpPr>
+      <p:sp>
+        <p:nvSpPr>
+          <p:cNvPr id="2" name="Text 4"/>
+          <p:cNvSpPr/>
+          <p:nvPr>
+            <p:ph idx="104" type="body" hasCustomPrompt="1"/>
+          </p:nvPr>
+        </p:nvSpPr>
+        <p:spPr>
+          <a:xfrm>
+            <a:off x="548640" y="457200"/>
+            <a:ext cx="8229600" cy="274320"/>
+          </a:xfrm>
+          <a:prstGeom prst="rect">
+            <a:avLst/>
+          </a:prstGeom>
+          <a:noFill/>
+          <a:ln/>
+        </p:spPr>
+        <p:txBody>
+          <a:bodyPr wrap="square" lIns="0" tIns="0" rIns="0" bIns="0" rtlCol="0" anchor="ctr"/>
+          <a:lstStyle/>
+          <a:p>
+            <a:pPr indent="0" marL="0">
+              <a:buNone/>
+            </a:pPr>
+            <a:r>
+              <a:rPr lang="en-US" sz="1200" spc="300" kern="0" dirty="0">
+                <a:solidFill>
+                  <a:schemeClr val="accent1"/>
+                </a:solidFill>
+                <a:latin typeface="Consolas" pitchFamily="34" charset="0"/>
+                <a:ea typeface="Consolas" pitchFamily="34" charset="-122"/>
+                <a:cs typeface="Consolas" pitchFamily="34" charset="-120"/>
+              </a:rPr>
+              <a:t>JUDGED ON · NEW USE CASES FOR LEDGER · 10%</a:t>
+            </a:r>
+            <a:endParaRPr lang="en-US" sz="1200" dirty="0"/>
+          </a:p>
+        </p:txBody>
+      </p:sp>
+      <p:sp>
+        <p:nvSpPr>
+          <p:cNvPr id="3" name="Text 4"/>
+          <p:cNvSpPr/>
+          <p:nvPr>
+            <p:ph idx="105" type="title" hasCustomPrompt="1"/>
+          </p:nvPr>
+        </p:nvSpPr>
+        <p:spPr>
+          <a:xfrm>
+            <a:off x="548640" y="777240"/>
+            <a:ext cx="11094415" cy="777240"/>
+          </a:xfrm>
+          <a:prstGeom prst="rect">
+            <a:avLst/>
+          </a:prstGeom>
+          <a:noFill/>
+          <a:ln/>
+        </p:spPr>
+        <p:txBody>
+          <a:bodyPr wrap="square" lIns="0" tIns="0" rIns="0" bIns="0" rtlCol="0" anchor="t"/>
+          <a:lstStyle/>
+          <a:p>
+            <a:pPr algn="l" indent="0" marL="0">
+              <a:buNone/>
+            </a:pPr>
+            <a:r>
+              <a:rPr lang="en-US" sz="3200" b="1" dirty="0">
+                <a:solidFill>
+                  <a:schemeClr val="bg1"/>
+                </a:solidFill>
+                <a:latin typeface="Consolas" pitchFamily="34" charset="0"/>
+                <a:ea typeface="Consolas" pitchFamily="34" charset="-122"/>
+                <a:cs typeface="Consolas" pitchFamily="34" charset="-120"/>
+              </a:rPr>
+              <a:t>HARDWARE APPROVAL FOR ANY AI AGENT</a:t>
+            </a:r>
+            <a:endParaRPr lang="en-US" sz="3200" dirty="0"/>
+          </a:p>
+        </p:txBody>
+      </p:sp>
+      <p:sp>
+        <p:nvSpPr>
+          <p:cNvPr id="4" name="Stat 1"/>
+          <p:cNvSpPr/>
+          <p:nvPr/>
+        </p:nvSpPr>
+        <p:spPr>
+          <a:xfrm>
+            <a:off x="548640" y="1783080"/>
+            <a:ext cx="2567864" cy="1554480"/>
+          </a:xfrm>
+          <a:prstGeom prst="roundRect">
+            <a:avLst>
+              <a:gd name="adj" fmla="val 7059"/>
+            </a:avLst>
+          </a:prstGeom>
+          <a:solidFill>
+            <a:schemeClr val="tx2"/>
+          </a:solidFill>
+          <a:ln w="12700">
+            <a:solidFill>
+              <a:schemeClr val="accent5"/>
+            </a:solidFill>
+            <a:prstDash val="solid"/>
+          </a:ln>
+        </p:spPr>
+      </p:sp>
+      <p:sp>
+        <p:nvSpPr>
+          <p:cNvPr id="5" name="Text 3"/>
+          <p:cNvSpPr txBox="1"/>
+          <p:nvPr/>
+        </p:nvSpPr>
+        <p:spPr>
+          <a:xfrm>
+            <a:off x="822960" y="1920240"/>
+            <a:ext cx="2110664" cy="685800"/>
+          </a:xfrm>
+          <a:prstGeom prst="rect">
+            <a:avLst/>
+          </a:prstGeom>
+          <a:noFill/>
+          <a:ln/>
+        </p:spPr>
+        <p:txBody>
+          <a:bodyPr wrap="square" lIns="0" tIns="0" rIns="0" bIns="0" rtlCol="0" anchor="ctr">
+            <a:normAutofit/>
+          </a:bodyPr>
+          <a:lstStyle/>
+          <a:p>
+            <a:pPr indent="0" marL="0">
+              <a:buNone/>
+            </a:pPr>
+            <a:r>
+              <a:rPr lang="en-US" sz="3600" b="1" dirty="0">
+                <a:solidFill>
+                  <a:schemeClr val="accent1"/>
+                </a:solidFill>
+                <a:latin typeface="Consolas" pitchFamily="34" charset="0"/>
+                <a:ea typeface="Consolas" pitchFamily="34" charset="-122"/>
+                <a:cs typeface="Consolas" pitchFamily="34" charset="-120"/>
+              </a:rPr>
+              <a:t>1</a:t>
+            </a:r>
+            <a:endParaRPr lang="en-US" sz="3600" dirty="0"/>
+          </a:p>
+        </p:txBody>
+      </p:sp>
+      <p:sp>
+        <p:nvSpPr>
+          <p:cNvPr id="6" name="Text 4"/>
+          <p:cNvSpPr txBox="1"/>
+          <p:nvPr/>
+        </p:nvSpPr>
+        <p:spPr>
+          <a:xfrm>
+            <a:off x="822960" y="2633472"/>
+            <a:ext cx="2110664" cy="640080"/>
+          </a:xfrm>
+          <a:prstGeom prst="rect">
+            <a:avLst/>
+          </a:prstGeom>
+          <a:noFill/>
+          <a:ln/>
+        </p:spPr>
+        <p:txBody>
+          <a:bodyPr wrap="square" lIns="0" tIns="0" rIns="0" bIns="0" rtlCol="0" anchor="t"/>
+          <a:lstStyle/>
+          <a:p>
+            <a:pPr indent="0" marL="0">
+              <a:lnSpc>
+                <a:spcPct val="105000"/>
+              </a:lnSpc>
+              <a:buNone/>
+            </a:pPr>
+            <a:r>
+              <a:rPr lang="en-US" sz="1350" dirty="0">
+                <a:solidFill>
+                  <a:schemeClr val="bg2"/>
+                </a:solidFill>
+                <a:latin typeface="Calibri" pitchFamily="34" charset="0"/>
+                <a:ea typeface="Calibri" pitchFamily="34" charset="-122"/>
+                <a:cs typeface="Calibri" pitchFamily="34" charset="-120"/>
+              </a:rPr>
+              <a:t>pattern: the agent proposes, a person signs</a:t>
+            </a:r>
+            <a:endParaRPr lang="en-US" sz="1350" dirty="0"/>
+          </a:p>
+        </p:txBody>
+      </p:sp>
+      <p:sp>
+        <p:nvSpPr>
+          <p:cNvPr id="7" name="Stat 2"/>
+          <p:cNvSpPr/>
+          <p:nvPr/>
+        </p:nvSpPr>
+        <p:spPr>
+          <a:xfrm>
+            <a:off x="3390824" y="1783080"/>
+            <a:ext cx="2567864" cy="1554480"/>
+          </a:xfrm>
+          <a:prstGeom prst="roundRect">
+            <a:avLst>
+              <a:gd name="adj" fmla="val 7059"/>
+            </a:avLst>
+          </a:prstGeom>
+          <a:solidFill>
+            <a:schemeClr val="tx2"/>
+          </a:solidFill>
+          <a:ln w="12700">
+            <a:solidFill>
+              <a:schemeClr val="accent5"/>
+            </a:solidFill>
+            <a:prstDash val="solid"/>
+          </a:ln>
+        </p:spPr>
+      </p:sp>
+      <p:sp>
+        <p:nvSpPr>
+          <p:cNvPr id="8" name="Text 6"/>
+          <p:cNvSpPr txBox="1"/>
+          <p:nvPr/>
+        </p:nvSpPr>
+        <p:spPr>
+          <a:xfrm>
+            <a:off x="3665144" y="1920240"/>
+            <a:ext cx="2110664" cy="685800"/>
+          </a:xfrm>
+          <a:prstGeom prst="rect">
+            <a:avLst/>
+          </a:prstGeom>
+          <a:noFill/>
+          <a:ln/>
+        </p:spPr>
+        <p:txBody>
+          <a:bodyPr wrap="square" lIns="0" tIns="0" rIns="0" bIns="0" rtlCol="0" anchor="ctr">
+            <a:normAutofit/>
+          </a:bodyPr>
+          <a:lstStyle/>
+          <a:p>
+            <a:pPr indent="0" marL="0">
+              <a:buNone/>
+            </a:pPr>
+            <a:r>
+              <a:rPr lang="en-US" sz="3600" b="1" dirty="0">
+                <a:solidFill>
+                  <a:schemeClr val="accent1"/>
+                </a:solidFill>
+                <a:latin typeface="Consolas" pitchFamily="34" charset="0"/>
+                <a:ea typeface="Consolas" pitchFamily="34" charset="-122"/>
+                <a:cs typeface="Consolas" pitchFamily="34" charset="-120"/>
+              </a:rPr>
+              <a:t>6</a:t>
+            </a:r>
+            <a:endParaRPr lang="en-US" sz="3600" dirty="0"/>
+          </a:p>
+        </p:txBody>
+      </p:sp>
+      <p:sp>
+        <p:nvSpPr>
+          <p:cNvPr id="9" name="Text 7"/>
+          <p:cNvSpPr txBox="1"/>
+          <p:nvPr/>
+        </p:nvSpPr>
+        <p:spPr>
+          <a:xfrm>
+            <a:off x="3665144" y="2633472"/>
+            <a:ext cx="2110664" cy="640080"/>
+          </a:xfrm>
+          <a:prstGeom prst="rect">
+            <a:avLst/>
+          </a:prstGeom>
+          <a:noFill/>
+          <a:ln/>
+        </p:spPr>
+        <p:txBody>
+          <a:bodyPr wrap="square" lIns="0" tIns="0" rIns="0" bIns="0" rtlCol="0" anchor="t"/>
+          <a:lstStyle/>
+          <a:p>
+            <a:pPr indent="0" marL="0">
+              <a:lnSpc>
+                <a:spcPct val="105000"/>
+              </a:lnSpc>
+              <a:buNone/>
+            </a:pPr>
+            <a:r>
+              <a:rPr lang="en-US" sz="1350" dirty="0">
+                <a:solidFill>
+                  <a:schemeClr val="bg2"/>
+                </a:solidFill>
+                <a:latin typeface="Calibri" pitchFamily="34" charset="0"/>
+                <a:ea typeface="Calibri" pitchFamily="34" charset="-122"/>
+                <a:cs typeface="Calibri" pitchFamily="34" charset="-120"/>
+              </a:rPr>
+              <a:t>markets ready for it, from unions to DAOs</a:t>
+            </a:r>
+            <a:endParaRPr lang="en-US" sz="1350" dirty="0"/>
+          </a:p>
+        </p:txBody>
+      </p:sp>
+      <p:sp>
+        <p:nvSpPr>
+          <p:cNvPr id="10" name="Stat 3"/>
+          <p:cNvSpPr/>
+          <p:nvPr/>
+        </p:nvSpPr>
+        <p:spPr>
+          <a:xfrm>
+            <a:off x="6233008" y="1783080"/>
+            <a:ext cx="2567864" cy="1554480"/>
+          </a:xfrm>
+          <a:prstGeom prst="roundRect">
+            <a:avLst>
+              <a:gd name="adj" fmla="val 7059"/>
+            </a:avLst>
+          </a:prstGeom>
+          <a:solidFill>
+            <a:schemeClr val="tx2"/>
+          </a:solidFill>
+          <a:ln w="12700">
+            <a:solidFill>
+              <a:schemeClr val="accent5"/>
+            </a:solidFill>
+            <a:prstDash val="solid"/>
+          </a:ln>
+        </p:spPr>
+      </p:sp>
+      <p:sp>
+        <p:nvSpPr>
+          <p:cNvPr id="11" name="Text 9"/>
+          <p:cNvSpPr txBox="1"/>
+          <p:nvPr/>
+        </p:nvSpPr>
+        <p:spPr>
+          <a:xfrm>
+            <a:off x="6507328" y="1920240"/>
+            <a:ext cx="2110664" cy="685800"/>
+          </a:xfrm>
+          <a:prstGeom prst="rect">
+            <a:avLst/>
+          </a:prstGeom>
+          <a:noFill/>
+          <a:ln/>
+        </p:spPr>
+        <p:txBody>
+          <a:bodyPr wrap="square" lIns="0" tIns="0" rIns="0" bIns="0" rtlCol="0" anchor="ctr">
+            <a:normAutofit/>
+          </a:bodyPr>
+          <a:lstStyle/>
+          <a:p>
+            <a:pPr indent="0" marL="0">
+              <a:buNone/>
+            </a:pPr>
+            <a:r>
+              <a:rPr lang="en-US" sz="3600" b="1" dirty="0">
+                <a:solidFill>
+                  <a:schemeClr val="accent1"/>
+                </a:solidFill>
+                <a:latin typeface="Consolas" pitchFamily="34" charset="0"/>
+                <a:ea typeface="Consolas" pitchFamily="34" charset="-122"/>
+                <a:cs typeface="Consolas" pitchFamily="34" charset="-120"/>
+              </a:rPr>
+              <a:t>2</a:t>
+            </a:r>
+            <a:endParaRPr lang="en-US" sz="3600" dirty="0"/>
+          </a:p>
+        </p:txBody>
+      </p:sp>
+      <p:sp>
+        <p:nvSpPr>
+          <p:cNvPr id="12" name="Text 10"/>
+          <p:cNvSpPr txBox="1"/>
+          <p:nvPr/>
+        </p:nvSpPr>
+        <p:spPr>
+          <a:xfrm>
+            <a:off x="6507328" y="2633472"/>
+            <a:ext cx="2110664" cy="640080"/>
+          </a:xfrm>
+          <a:prstGeom prst="rect">
+            <a:avLst/>
+          </a:prstGeom>
+          <a:noFill/>
+          <a:ln/>
+        </p:spPr>
+        <p:txBody>
+          <a:bodyPr wrap="square" lIns="0" tIns="0" rIns="0" bIns="0" rtlCol="0" anchor="t"/>
+          <a:lstStyle/>
+          <a:p>
+            <a:pPr indent="0" marL="0">
+              <a:lnSpc>
+                <a:spcPct val="105000"/>
+              </a:lnSpc>
+              <a:buNone/>
+            </a:pPr>
+            <a:r>
+              <a:rPr lang="en-US" sz="1350" dirty="0">
+                <a:solidFill>
+                  <a:schemeClr val="bg2"/>
+                </a:solidFill>
+                <a:latin typeface="Calibri" pitchFamily="34" charset="0"/>
+                <a:ea typeface="Calibri" pitchFamily="34" charset="-122"/>
+                <a:cs typeface="Calibri" pitchFamily="34" charset="-120"/>
+              </a:rPr>
+              <a:t>Ledger jobs: sign payouts, seal the agent’s keys</a:t>
+            </a:r>
+            <a:endParaRPr lang="en-US" sz="1350" dirty="0"/>
+          </a:p>
+        </p:txBody>
+      </p:sp>
+      <p:sp>
+        <p:nvSpPr>
+          <p:cNvPr id="13" name="Stat 4"/>
+          <p:cNvSpPr/>
+          <p:nvPr/>
+        </p:nvSpPr>
+        <p:spPr>
+          <a:xfrm>
+            <a:off x="9075191" y="1783080"/>
+            <a:ext cx="2567864" cy="1554480"/>
+          </a:xfrm>
+          <a:prstGeom prst="roundRect">
+            <a:avLst>
+              <a:gd name="adj" fmla="val 7059"/>
+            </a:avLst>
+          </a:prstGeom>
+          <a:solidFill>
+            <a:schemeClr val="tx2"/>
+          </a:solidFill>
+          <a:ln w="12700">
+            <a:solidFill>
+              <a:schemeClr val="accent5"/>
+            </a:solidFill>
+            <a:prstDash val="solid"/>
+          </a:ln>
+        </p:spPr>
+      </p:sp>
+      <p:sp>
+        <p:nvSpPr>
+          <p:cNvPr id="14" name="Text 12"/>
+          <p:cNvSpPr txBox="1"/>
+          <p:nvPr/>
+        </p:nvSpPr>
+        <p:spPr>
+          <a:xfrm>
+            <a:off x="9349511" y="1920240"/>
+            <a:ext cx="2110664" cy="685800"/>
+          </a:xfrm>
+          <a:prstGeom prst="rect">
+            <a:avLst/>
+          </a:prstGeom>
+          <a:noFill/>
+          <a:ln/>
+        </p:spPr>
+        <p:txBody>
+          <a:bodyPr wrap="square" lIns="0" tIns="0" rIns="0" bIns="0" rtlCol="0" anchor="ctr">
+            <a:normAutofit/>
+          </a:bodyPr>
+          <a:lstStyle/>
+          <a:p>
+            <a:pPr indent="0" marL="0">
+              <a:buNone/>
+            </a:pPr>
+            <a:r>
+              <a:rPr lang="en-US" sz="3600" b="1" dirty="0">
+                <a:solidFill>
+                  <a:schemeClr val="accent1"/>
+                </a:solidFill>
+                <a:latin typeface="Consolas" pitchFamily="34" charset="0"/>
+                <a:ea typeface="Consolas" pitchFamily="34" charset="-122"/>
+                <a:cs typeface="Consolas" pitchFamily="34" charset="-120"/>
+              </a:rPr>
+              <a:t>Every</a:t>
+            </a:r>
+            <a:endParaRPr lang="en-US" sz="3600" dirty="0"/>
+          </a:p>
+        </p:txBody>
+      </p:sp>
+      <p:sp>
+        <p:nvSpPr>
+          <p:cNvPr id="15" name="Text 13"/>
+          <p:cNvSpPr txBox="1"/>
+          <p:nvPr/>
+        </p:nvSpPr>
+        <p:spPr>
+          <a:xfrm>
+            <a:off x="9349511" y="2633472"/>
+            <a:ext cx="2110664" cy="640080"/>
+          </a:xfrm>
+          <a:prstGeom prst="rect">
+            <a:avLst/>
+          </a:prstGeom>
+          <a:noFill/>
+          <a:ln/>
+        </p:spPr>
+        <p:txBody>
+          <a:bodyPr wrap="square" lIns="0" tIns="0" rIns="0" bIns="0" rtlCol="0" anchor="t"/>
+          <a:lstStyle/>
+          <a:p>
+            <a:pPr indent="0" marL="0">
+              <a:lnSpc>
+                <a:spcPct val="105000"/>
+              </a:lnSpc>
+              <a:buNone/>
+            </a:pPr>
+            <a:r>
+              <a:rPr lang="en-US" sz="1350" dirty="0">
+                <a:solidFill>
+                  <a:schemeClr val="bg2"/>
+                </a:solidFill>
+                <a:latin typeface="Calibri" pitchFamily="34" charset="0"/>
+                <a:ea typeface="Calibri" pitchFamily="34" charset="-122"/>
+                <a:cs typeface="Calibri" pitchFamily="34" charset="-120"/>
+              </a:rPr>
+              <a:t>organisation that lets AI near its money</a:t>
+            </a:r>
+            <a:endParaRPr lang="en-US" sz="1350" dirty="0"/>
+          </a:p>
+        </p:txBody>
+      </p:sp>
+      <p:sp>
+        <p:nvSpPr>
+          <p:cNvPr id="16" name="Proof ring 1"/>
+          <p:cNvSpPr/>
+          <p:nvPr/>
+        </p:nvSpPr>
+        <p:spPr>
+          <a:xfrm>
+            <a:off x="548640" y="3657600"/>
+            <a:ext cx="530352" cy="530352"/>
+          </a:xfrm>
+          <a:prstGeom prst="ellipse">
+            <a:avLst/>
+          </a:prstGeom>
+          <a:solidFill>
+            <a:schemeClr val="tx2"/>
+          </a:solidFill>
+          <a:ln w="12700">
+            <a:solidFill>
+              <a:schemeClr val="accent1"/>
+            </a:solidFill>
+            <a:prstDash val="solid"/>
+          </a:ln>
+        </p:spPr>
+      </p:sp>
+      <p:pic>
+        <p:nvPicPr>
+          <p:cNvPr id="17" name="Proof icon 1" descr="preencoded.png">    </p:cNvPr>
+          <p:cNvPicPr>
+            <a:picLocks noChangeAspect="1"/>
+          </p:cNvPicPr>
+          <p:nvPr/>
+        </p:nvPicPr>
+        <p:blipFill>
+          <a:blip r:embed="rId1"/>
+          <a:stretch>
+            <a:fillRect/>
+          </a:stretch>
+        </p:blipFill>
+        <p:spPr>
+          <a:xfrm>
+            <a:off x="690372" y="3799332"/>
+            <a:ext cx="246888" cy="246888"/>
+          </a:xfrm>
+          <a:prstGeom prst="rect">
+            <a:avLst/>
+          </a:prstGeom>
+        </p:spPr>
+      </p:pic>
+      <p:sp>
+        <p:nvSpPr>
+          <p:cNvPr id="18" name="Text 15"/>
+          <p:cNvSpPr txBox="1"/>
+          <p:nvPr/>
+        </p:nvSpPr>
+        <p:spPr>
+          <a:xfrm>
+            <a:off x="1325880" y="3621024"/>
+            <a:ext cx="10317175" cy="640080"/>
+          </a:xfrm>
+          <a:prstGeom prst="rect">
+            <a:avLst/>
+          </a:prstGeom>
+          <a:noFill/>
+          <a:ln/>
+        </p:spPr>
+        <p:txBody>
+          <a:bodyPr wrap="square" lIns="0" tIns="0" rIns="0" bIns="0" rtlCol="0" anchor="ctr"/>
+          <a:lstStyle/>
+          <a:p>
+            <a:pPr indent="0" marL="0">
+              <a:lnSpc>
+                <a:spcPct val="105000"/>
+              </a:lnSpc>
+              <a:buNone/>
+            </a:pPr>
+            <a:r>
+              <a:rPr lang="en-US" sz="1550" b="1" dirty="0">
+                <a:solidFill>
+                  <a:schemeClr val="accent6"/>
+                </a:solidFill>
+                <a:latin typeface="Calibri" pitchFamily="34" charset="0"/>
+                <a:ea typeface="Calibri" pitchFamily="34" charset="-122"/>
+                <a:cs typeface="Calibri" pitchFamily="34" charset="-120"/>
+              </a:rPr>
+              <a:t>Universities first. </a:t>
+            </a:r>
+            <a:pPr indent="0" marL="0">
+              <a:lnSpc>
+                <a:spcPct val="105000"/>
+              </a:lnSpc>
+              <a:buNone/>
+            </a:pPr>
+            <a:r>
+              <a:rPr lang="en-US" sz="1550" dirty="0">
+                <a:solidFill>
+                  <a:schemeClr val="bg2"/>
+                </a:solidFill>
+                <a:latin typeface="Calibri" pitchFamily="34" charset="0"/>
+                <a:ea typeface="Calibri" pitchFamily="34" charset="-122"/>
+                <a:cs typeface="Calibri" pitchFamily="34" charset="-120"/>
+              </a:rPr>
+              <a:t>Partnerships with students’ unions put a Ledger on every campus, with hundreds of societies behind each one.</a:t>
+            </a:r>
+            <a:endParaRPr lang="en-US" sz="1550" dirty="0"/>
+          </a:p>
+        </p:txBody>
+      </p:sp>
+      <p:sp>
+        <p:nvSpPr>
+          <p:cNvPr id="19" name="Proof ring 2"/>
+          <p:cNvSpPr/>
+          <p:nvPr/>
+        </p:nvSpPr>
+        <p:spPr>
+          <a:xfrm>
+            <a:off x="548640" y="4480560"/>
+            <a:ext cx="530352" cy="530352"/>
+          </a:xfrm>
+          <a:prstGeom prst="ellipse">
+            <a:avLst/>
+          </a:prstGeom>
+          <a:solidFill>
+            <a:schemeClr val="tx2"/>
+          </a:solidFill>
+          <a:ln w="12700">
+            <a:solidFill>
+              <a:schemeClr val="accent1"/>
+            </a:solidFill>
+            <a:prstDash val="solid"/>
+          </a:ln>
+        </p:spPr>
+      </p:sp>
+      <p:pic>
+        <p:nvPicPr>
+          <p:cNvPr id="20" name="Proof icon 2" descr="preencoded.png">    </p:cNvPr>
+          <p:cNvPicPr>
+            <a:picLocks noChangeAspect="1"/>
+          </p:cNvPicPr>
+          <p:nvPr/>
+        </p:nvPicPr>
+        <p:blipFill>
+          <a:blip r:embed="rId2"/>
+          <a:stretch>
+            <a:fillRect/>
+          </a:stretch>
+        </p:blipFill>
+        <p:spPr>
+          <a:xfrm>
+            <a:off x="690372" y="4622292"/>
+            <a:ext cx="246888" cy="246888"/>
+          </a:xfrm>
+          <a:prstGeom prst="rect">
+            <a:avLst/>
+          </a:prstGeom>
+        </p:spPr>
+      </p:pic>
+      <p:sp>
+        <p:nvSpPr>
+          <p:cNvPr id="21" name="Text 17"/>
+          <p:cNvSpPr txBox="1"/>
+          <p:nvPr/>
+        </p:nvSpPr>
+        <p:spPr>
+          <a:xfrm>
+            <a:off x="1325880" y="4443984"/>
+            <a:ext cx="10317175" cy="640080"/>
+          </a:xfrm>
+          <a:prstGeom prst="rect">
+            <a:avLst/>
+          </a:prstGeom>
+          <a:noFill/>
+          <a:ln/>
+        </p:spPr>
+        <p:txBody>
+          <a:bodyPr wrap="square" lIns="0" tIns="0" rIns="0" bIns="0" rtlCol="0" anchor="ctr"/>
+          <a:lstStyle/>
+          <a:p>
+            <a:pPr indent="0" marL="0">
+              <a:lnSpc>
+                <a:spcPct val="105000"/>
+              </a:lnSpc>
+              <a:buNone/>
+            </a:pPr>
+            <a:r>
+              <a:rPr lang="en-US" sz="1550" b="1" dirty="0">
+                <a:solidFill>
+                  <a:schemeClr val="accent6"/>
+                </a:solidFill>
+                <a:latin typeface="Calibri" pitchFamily="34" charset="0"/>
+                <a:ea typeface="Calibri" pitchFamily="34" charset="-122"/>
+                <a:cs typeface="Calibri" pitchFamily="34" charset="-120"/>
+              </a:rPr>
+              <a:t>Then anyone with expenses. </a:t>
+            </a:r>
+            <a:pPr indent="0" marL="0">
+              <a:lnSpc>
+                <a:spcPct val="105000"/>
+              </a:lnSpc>
+              <a:buNone/>
+            </a:pPr>
+            <a:r>
+              <a:rPr lang="en-US" sz="1550" dirty="0">
+                <a:solidFill>
+                  <a:schemeClr val="bg2"/>
+                </a:solidFill>
+                <a:latin typeface="Calibri" pitchFamily="34" charset="0"/>
+                <a:ea typeface="Calibri" pitchFamily="34" charset="-122"/>
+                <a:cs typeface="Calibri" pitchFamily="34" charset="-120"/>
+              </a:rPr>
+              <a:t>Charities, sports clubs, company expenses and grants: an AI auditor does the checking, a finance lead with a Ledger releases the money.</a:t>
+            </a:r>
+            <a:endParaRPr lang="en-US" sz="1550" dirty="0"/>
+          </a:p>
+        </p:txBody>
+      </p:sp>
+      <p:sp>
+        <p:nvSpPr>
+          <p:cNvPr id="22" name="Proof ring 3"/>
+          <p:cNvSpPr/>
+          <p:nvPr/>
+        </p:nvSpPr>
+        <p:spPr>
+          <a:xfrm>
+            <a:off x="548640" y="5303520"/>
+            <a:ext cx="530352" cy="530352"/>
+          </a:xfrm>
+          <a:prstGeom prst="ellipse">
+            <a:avLst/>
+          </a:prstGeom>
+          <a:solidFill>
+            <a:schemeClr val="tx2"/>
+          </a:solidFill>
+          <a:ln w="12700">
+            <a:solidFill>
+              <a:schemeClr val="accent1"/>
+            </a:solidFill>
+            <a:prstDash val="solid"/>
+          </a:ln>
+        </p:spPr>
+      </p:sp>
+      <p:pic>
+        <p:nvPicPr>
+          <p:cNvPr id="23" name="Proof icon 3" descr="preencoded.png">    </p:cNvPr>
+          <p:cNvPicPr>
+            <a:picLocks noChangeAspect="1"/>
+          </p:cNvPicPr>
+          <p:nvPr/>
+        </p:nvPicPr>
+        <p:blipFill>
+          <a:blip r:embed="rId3"/>
+          <a:stretch>
+            <a:fillRect/>
+          </a:stretch>
+        </p:blipFill>
+        <p:spPr>
+          <a:xfrm>
+            <a:off x="690372" y="5445252"/>
+            <a:ext cx="246888" cy="246888"/>
+          </a:xfrm>
+          <a:prstGeom prst="rect">
+            <a:avLst/>
+          </a:prstGeom>
+        </p:spPr>
+      </p:pic>
+      <p:sp>
+        <p:nvSpPr>
+          <p:cNvPr id="24" name="Text 19"/>
+          <p:cNvSpPr txBox="1"/>
+          <p:nvPr/>
+        </p:nvSpPr>
+        <p:spPr>
+          <a:xfrm>
+            <a:off x="1325880" y="5266944"/>
+            <a:ext cx="10317175" cy="640080"/>
+          </a:xfrm>
+          <a:prstGeom prst="rect">
+            <a:avLst/>
+          </a:prstGeom>
+          <a:noFill/>
+          <a:ln/>
+        </p:spPr>
+        <p:txBody>
+          <a:bodyPr wrap="square" lIns="0" tIns="0" rIns="0" bIns="0" rtlCol="0" anchor="ctr"/>
+          <a:lstStyle/>
+          <a:p>
+            <a:pPr indent="0" marL="0">
+              <a:lnSpc>
+                <a:spcPct val="105000"/>
+              </a:lnSpc>
+              <a:buNone/>
+            </a:pPr>
+            <a:r>
+              <a:rPr lang="en-US" sz="1550" b="1" dirty="0">
+                <a:solidFill>
+                  <a:schemeClr val="accent6"/>
+                </a:solidFill>
+                <a:latin typeface="Calibri" pitchFamily="34" charset="0"/>
+                <a:ea typeface="Calibri" pitchFamily="34" charset="-122"/>
+                <a:cs typeface="Calibri" pitchFamily="34" charset="-120"/>
+              </a:rPr>
+              <a:t>Agents that hold secrets. </a:t>
+            </a:r>
+            <a:pPr indent="0" marL="0">
+              <a:lnSpc>
+                <a:spcPct val="105000"/>
+              </a:lnSpc>
+              <a:buNone/>
+            </a:pPr>
+            <a:r>
+              <a:rPr lang="en-US" sz="1550" dirty="0">
+                <a:solidFill>
+                  <a:schemeClr val="bg2"/>
+                </a:solidFill>
+                <a:latin typeface="Calibri" pitchFamily="34" charset="0"/>
+                <a:ea typeface="Calibri" pitchFamily="34" charset="-122"/>
+                <a:cs typeface="Calibri" pitchFamily="34" charset="-120"/>
+              </a:rPr>
+              <a:t>Key Ring seals an agent’s credentials to a Ledger, so even the agent’s API keys answer to hardware.</a:t>
+            </a:r>
+            <a:endParaRPr lang="en-US" sz="1550" dirty="0"/>
+          </a:p>
+        </p:txBody>
+      </p:sp>
+      <p:sp>
+        <p:nvSpPr>
+          <p:cNvPr id="25" name="Slide Number Placeholder 0"/>
+          <p:cNvSpPr>
+            <a:spLocks noGrp="1"/>
+          </p:cNvSpPr>
+          <p:nvPr>
+            <p:ph type="sldNum" sz="quarter" idx="4294967295"/>
+          </p:nvPr>
+        </p:nvSpPr>
+        <p:spPr>
+          <a:xfrm>
+            <a:off x="11094415" y="6272784"/>
+            <a:ext cx="548640" cy="274320"/>
+          </a:xfrm>
+          <a:prstGeom prst="rect">
+            <a:avLst/>
+          </a:prstGeom>
+          <a:extLst>
+            <a:ext uri="{C572A759-6A51-4108-AA02-DFA0A04FC94B}">
+              <ma14:wrappingTextBoxFlag xmlns:ma14="http://schemas.microsoft.com/office/mac/drawingml/2011/main" val="0"/>
+            </a:ext>
+          </a:extLst>
+        </p:spPr>
+        <p:txBody>
+          <a:bodyPr/>
+          <a:lstStyle>
+            <a:lvl1pPr>
+              <a:defRPr sz="1000">
+                <a:solidFill>
+                  <a:schemeClr val="bg2"/>
+                </a:solidFill>
+                <a:latin typeface="Consolas"/>
+                <a:ea typeface="Consolas"/>
+                <a:cs typeface="Consolas"/>
+              </a:defRPr>
+            </a:lvl1pPr>
+          </a:lstStyle>
+          <a:p>
+            <a:pPr algn="r"/>
+            <a:fld id="{F7021451-1387-4CA6-816F-3879F97B5CBC}" type="slidenum">
+              <a:rPr b="0" lang="en-US"/>
+              <a:t>15</a:t>
+            </a:fld>
+            <a:endParaRPr lang="en-US"/>
+          </a:p>
+        </p:txBody>
+      </p:sp>
+    </p:spTree>
+  </p:cSld>
+  <p:clrMapOvr>
+    <a:masterClrMapping/>
+  </p:clrMapOvr>
+</p:sld>
+</file>
+
+<file path=ppt/slides/slide16.xml><?xml version="1.0" encoding="utf-8"?>
+<p:sld xmlns:a="http://schemas.openxmlformats.org/drawingml/2006/main" xmlns:r="http://schemas.openxmlformats.org/officeDocument/2006/relationships" xmlns:p="http://schemas.openxmlformats.org/presentationml/2006/main">
+  <p:cSld name="Slide 16">
+    <p:spTree>
+      <p:nvGrpSpPr>
+        <p:cNvPr id="1" name=""/>
+        <p:cNvGrpSpPr/>
+        <p:nvPr/>
+      </p:nvGrpSpPr>
+      <p:grpSpPr>
+        <a:xfrm>
+          <a:off x="0" y="0"/>
+          <a:ext cx="0" cy="0"/>
+          <a:chOff x="0" y="0"/>
+          <a:chExt cx="0" cy="0"/>
+        </a:xfrm>
+      </p:grpSpPr>
+      <p:sp>
+        <p:nvSpPr>
+          <p:cNvPr id="2" name="Text 4"/>
+          <p:cNvSpPr/>
+          <p:nvPr>
+            <p:ph idx="104" type="body" hasCustomPrompt="1"/>
+          </p:nvPr>
+        </p:nvSpPr>
+        <p:spPr>
+          <a:xfrm>
+            <a:off x="548640" y="457200"/>
+            <a:ext cx="8229600" cy="274320"/>
+          </a:xfrm>
+          <a:prstGeom prst="rect">
+            <a:avLst/>
+          </a:prstGeom>
+          <a:noFill/>
+          <a:ln/>
+        </p:spPr>
+        <p:txBody>
+          <a:bodyPr wrap="square" lIns="0" tIns="0" rIns="0" bIns="0" rtlCol="0" anchor="ctr"/>
+          <a:lstStyle/>
+          <a:p>
+            <a:pPr indent="0" marL="0">
+              <a:buNone/>
+            </a:pPr>
+            <a:r>
+              <a:rPr lang="en-US" sz="1200" spc="300" kern="0" dirty="0">
+                <a:solidFill>
+                  <a:schemeClr val="accent1"/>
+                </a:solidFill>
+                <a:latin typeface="Consolas" pitchFamily="34" charset="0"/>
+                <a:ea typeface="Consolas" pitchFamily="34" charset="-122"/>
+                <a:cs typeface="Consolas" pitchFamily="34" charset="-120"/>
+              </a:rPr>
+              <a:t>JUDGED ON · CLARITY, PRESENTATION AND DOCUMENTATION · 10%</a:t>
+            </a:r>
+            <a:endParaRPr lang="en-US" sz="1200" dirty="0"/>
+          </a:p>
+        </p:txBody>
+      </p:sp>
+      <p:sp>
+        <p:nvSpPr>
+          <p:cNvPr id="3" name="Text 4"/>
+          <p:cNvSpPr/>
+          <p:nvPr>
+            <p:ph idx="105" type="title" hasCustomPrompt="1"/>
+          </p:nvPr>
+        </p:nvSpPr>
+        <p:spPr>
+          <a:xfrm>
+            <a:off x="548640" y="777240"/>
+            <a:ext cx="11094415" cy="777240"/>
+          </a:xfrm>
+          <a:prstGeom prst="rect">
+            <a:avLst/>
+          </a:prstGeom>
+          <a:noFill/>
+          <a:ln/>
+        </p:spPr>
+        <p:txBody>
+          <a:bodyPr wrap="square" lIns="0" tIns="0" rIns="0" bIns="0" rtlCol="0" anchor="t"/>
+          <a:lstStyle/>
+          <a:p>
+            <a:pPr algn="l" indent="0" marL="0">
+              <a:buNone/>
+            </a:pPr>
+            <a:r>
+              <a:rPr lang="en-US" sz="3200" b="1" dirty="0">
+                <a:solidFill>
+                  <a:schemeClr val="bg1"/>
+                </a:solidFill>
+                <a:latin typeface="Consolas" pitchFamily="34" charset="0"/>
+                <a:ea typeface="Consolas" pitchFamily="34" charset="-122"/>
+                <a:cs typeface="Consolas" pitchFamily="34" charset="-120"/>
+              </a:rPr>
+              <a:t>TRY IT, RUN IT, READ IT</a:t>
+            </a:r>
+            <a:endParaRPr lang="en-US" sz="3200" dirty="0"/>
+          </a:p>
+        </p:txBody>
+      </p:sp>
+      <p:sp>
+        <p:nvSpPr>
+          <p:cNvPr id="4" name="Stat 1"/>
+          <p:cNvSpPr/>
+          <p:nvPr/>
+        </p:nvSpPr>
+        <p:spPr>
+          <a:xfrm>
+            <a:off x="548640" y="1783080"/>
+            <a:ext cx="2567864" cy="1554480"/>
+          </a:xfrm>
+          <a:prstGeom prst="roundRect">
+            <a:avLst>
+              <a:gd name="adj" fmla="val 7059"/>
+            </a:avLst>
+          </a:prstGeom>
+          <a:solidFill>
+            <a:schemeClr val="tx2"/>
+          </a:solidFill>
+          <a:ln w="12700">
+            <a:solidFill>
+              <a:schemeClr val="accent5"/>
+            </a:solidFill>
+            <a:prstDash val="solid"/>
+          </a:ln>
+        </p:spPr>
+      </p:sp>
+      <p:sp>
+        <p:nvSpPr>
+          <p:cNvPr id="5" name="Text 3"/>
+          <p:cNvSpPr txBox="1"/>
+          <p:nvPr/>
+        </p:nvSpPr>
+        <p:spPr>
+          <a:xfrm>
+            <a:off x="822960" y="1920240"/>
+            <a:ext cx="2110664" cy="685800"/>
+          </a:xfrm>
+          <a:prstGeom prst="rect">
+            <a:avLst/>
+          </a:prstGeom>
+          <a:noFill/>
+          <a:ln/>
+        </p:spPr>
+        <p:txBody>
+          <a:bodyPr wrap="square" lIns="0" tIns="0" rIns="0" bIns="0" rtlCol="0" anchor="ctr">
+            <a:normAutofit/>
+          </a:bodyPr>
+          <a:lstStyle/>
+          <a:p>
+            <a:pPr indent="0" marL="0">
+              <a:buNone/>
+            </a:pPr>
+            <a:r>
+              <a:rPr lang="en-US" sz="3600" b="1" dirty="0">
+                <a:solidFill>
+                  <a:schemeClr val="accent1"/>
+                </a:solidFill>
+                <a:latin typeface="Consolas" pitchFamily="34" charset="0"/>
+                <a:ea typeface="Consolas" pitchFamily="34" charset="-122"/>
+                <a:cs typeface="Consolas" pitchFamily="34" charset="-120"/>
+              </a:rPr>
+              <a:t>2,100+</a:t>
+            </a:r>
+            <a:endParaRPr lang="en-US" sz="3600" dirty="0"/>
+          </a:p>
+        </p:txBody>
+      </p:sp>
+      <p:sp>
+        <p:nvSpPr>
+          <p:cNvPr id="6" name="Text 4"/>
+          <p:cNvSpPr txBox="1"/>
+          <p:nvPr/>
+        </p:nvSpPr>
+        <p:spPr>
+          <a:xfrm>
+            <a:off x="822960" y="2633472"/>
+            <a:ext cx="2110664" cy="640080"/>
+          </a:xfrm>
+          <a:prstGeom prst="rect">
+            <a:avLst/>
+          </a:prstGeom>
+          <a:noFill/>
+          <a:ln/>
+        </p:spPr>
+        <p:txBody>
+          <a:bodyPr wrap="square" lIns="0" tIns="0" rIns="0" bIns="0" rtlCol="0" anchor="t"/>
+          <a:lstStyle/>
+          <a:p>
+            <a:pPr indent="0" marL="0">
+              <a:lnSpc>
+                <a:spcPct val="105000"/>
+              </a:lnSpc>
+              <a:buNone/>
+            </a:pPr>
+            <a:r>
+              <a:rPr lang="en-US" sz="1350" dirty="0">
+                <a:solidFill>
+                  <a:schemeClr val="bg2"/>
+                </a:solidFill>
+                <a:latin typeface="Calibri" pitchFamily="34" charset="0"/>
+                <a:ea typeface="Calibri" pitchFamily="34" charset="-122"/>
+                <a:cs typeface="Calibri" pitchFamily="34" charset="-120"/>
+              </a:rPr>
+              <a:t>lines of documentation in the repo</a:t>
+            </a:r>
+            <a:endParaRPr lang="en-US" sz="1350" dirty="0"/>
+          </a:p>
+        </p:txBody>
+      </p:sp>
+      <p:sp>
+        <p:nvSpPr>
+          <p:cNvPr id="7" name="Stat 2"/>
+          <p:cNvSpPr/>
+          <p:nvPr/>
+        </p:nvSpPr>
+        <p:spPr>
+          <a:xfrm>
+            <a:off x="3390824" y="1783080"/>
+            <a:ext cx="2567864" cy="1554480"/>
+          </a:xfrm>
+          <a:prstGeom prst="roundRect">
+            <a:avLst>
+              <a:gd name="adj" fmla="val 7059"/>
+            </a:avLst>
+          </a:prstGeom>
+          <a:solidFill>
+            <a:schemeClr val="tx2"/>
+          </a:solidFill>
+          <a:ln w="12700">
+            <a:solidFill>
+              <a:schemeClr val="accent5"/>
+            </a:solidFill>
+            <a:prstDash val="solid"/>
+          </a:ln>
+        </p:spPr>
+      </p:sp>
+      <p:sp>
+        <p:nvSpPr>
+          <p:cNvPr id="8" name="Text 6"/>
+          <p:cNvSpPr txBox="1"/>
+          <p:nvPr/>
+        </p:nvSpPr>
+        <p:spPr>
+          <a:xfrm>
+            <a:off x="3665144" y="1920240"/>
+            <a:ext cx="2110664" cy="685800"/>
+          </a:xfrm>
+          <a:prstGeom prst="rect">
+            <a:avLst/>
+          </a:prstGeom>
+          <a:noFill/>
+          <a:ln/>
+        </p:spPr>
+        <p:txBody>
+          <a:bodyPr wrap="square" lIns="0" tIns="0" rIns="0" bIns="0" rtlCol="0" anchor="ctr">
+            <a:normAutofit/>
+          </a:bodyPr>
+          <a:lstStyle/>
+          <a:p>
+            <a:pPr indent="0" marL="0">
+              <a:buNone/>
+            </a:pPr>
+            <a:r>
+              <a:rPr lang="en-US" sz="3600" b="1" dirty="0">
+                <a:solidFill>
+                  <a:schemeClr val="accent1"/>
+                </a:solidFill>
+                <a:latin typeface="Consolas" pitchFamily="34" charset="0"/>
+                <a:ea typeface="Consolas" pitchFamily="34" charset="-122"/>
+                <a:cs typeface="Consolas" pitchFamily="34" charset="-120"/>
+              </a:rPr>
+              <a:t>1 link</a:t>
+            </a:r>
+            <a:endParaRPr lang="en-US" sz="3600" dirty="0"/>
+          </a:p>
+        </p:txBody>
+      </p:sp>
+      <p:sp>
+        <p:nvSpPr>
+          <p:cNvPr id="9" name="Text 7"/>
+          <p:cNvSpPr txBox="1"/>
+          <p:nvPr/>
+        </p:nvSpPr>
+        <p:spPr>
+          <a:xfrm>
+            <a:off x="3665144" y="2633472"/>
+            <a:ext cx="2110664" cy="640080"/>
+          </a:xfrm>
+          <a:prstGeom prst="rect">
+            <a:avLst/>
+          </a:prstGeom>
+          <a:noFill/>
+          <a:ln/>
+        </p:spPr>
+        <p:txBody>
+          <a:bodyPr wrap="square" lIns="0" tIns="0" rIns="0" bIns="0" rtlCol="0" anchor="t"/>
+          <a:lstStyle/>
+          <a:p>
+            <a:pPr indent="0" marL="0">
+              <a:lnSpc>
+                <a:spcPct val="105000"/>
+              </a:lnSpc>
+              <a:buNone/>
+            </a:pPr>
+            <a:r>
+              <a:rPr lang="en-US" sz="1350" dirty="0">
+                <a:solidFill>
+                  <a:schemeClr val="bg2"/>
+                </a:solidFill>
+                <a:latin typeface="Calibri" pitchFamily="34" charset="0"/>
+                <a:ea typeface="Calibri" pitchFamily="34" charset="-122"/>
+                <a:cs typeface="Calibri" pitchFamily="34" charset="-120"/>
+              </a:rPr>
+              <a:t>live demo on GitHub Pages, works on a phone</a:t>
+            </a:r>
+            <a:endParaRPr lang="en-US" sz="1350" dirty="0"/>
+          </a:p>
+        </p:txBody>
+      </p:sp>
+      <p:sp>
+        <p:nvSpPr>
+          <p:cNvPr id="10" name="Stat 3"/>
+          <p:cNvSpPr/>
+          <p:nvPr/>
+        </p:nvSpPr>
+        <p:spPr>
+          <a:xfrm>
+            <a:off x="6233008" y="1783080"/>
+            <a:ext cx="2567864" cy="1554480"/>
+          </a:xfrm>
+          <a:prstGeom prst="roundRect">
+            <a:avLst>
+              <a:gd name="adj" fmla="val 7059"/>
+            </a:avLst>
+          </a:prstGeom>
+          <a:solidFill>
+            <a:schemeClr val="tx2"/>
+          </a:solidFill>
+          <a:ln w="12700">
+            <a:solidFill>
+              <a:schemeClr val="accent5"/>
+            </a:solidFill>
+            <a:prstDash val="solid"/>
+          </a:ln>
+        </p:spPr>
+      </p:sp>
+      <p:sp>
+        <p:nvSpPr>
+          <p:cNvPr id="11" name="Text 9"/>
+          <p:cNvSpPr txBox="1"/>
+          <p:nvPr/>
+        </p:nvSpPr>
+        <p:spPr>
+          <a:xfrm>
+            <a:off x="6507328" y="1920240"/>
+            <a:ext cx="2110664" cy="685800"/>
+          </a:xfrm>
+          <a:prstGeom prst="rect">
+            <a:avLst/>
+          </a:prstGeom>
+          <a:noFill/>
+          <a:ln/>
+        </p:spPr>
+        <p:txBody>
+          <a:bodyPr wrap="square" lIns="0" tIns="0" rIns="0" bIns="0" rtlCol="0" anchor="ctr">
+            <a:normAutofit/>
+          </a:bodyPr>
+          <a:lstStyle/>
+          <a:p>
+            <a:pPr indent="0" marL="0">
+              <a:buNone/>
+            </a:pPr>
+            <a:r>
+              <a:rPr lang="en-US" sz="3600" b="1" dirty="0">
+                <a:solidFill>
+                  <a:schemeClr val="accent1"/>
+                </a:solidFill>
+                <a:latin typeface="Consolas" pitchFamily="34" charset="0"/>
+                <a:ea typeface="Consolas" pitchFamily="34" charset="-122"/>
+                <a:cs typeface="Consolas" pitchFamily="34" charset="-120"/>
+              </a:rPr>
+              <a:t>17</a:t>
+            </a:r>
+            <a:endParaRPr lang="en-US" sz="3600" dirty="0"/>
+          </a:p>
+        </p:txBody>
+      </p:sp>
+      <p:sp>
+        <p:nvSpPr>
+          <p:cNvPr id="12" name="Text 10"/>
+          <p:cNvSpPr txBox="1"/>
+          <p:nvPr/>
+        </p:nvSpPr>
+        <p:spPr>
+          <a:xfrm>
+            <a:off x="6507328" y="2633472"/>
+            <a:ext cx="2110664" cy="640080"/>
+          </a:xfrm>
+          <a:prstGeom prst="rect">
+            <a:avLst/>
+          </a:prstGeom>
+          <a:noFill/>
+          <a:ln/>
+        </p:spPr>
+        <p:txBody>
+          <a:bodyPr wrap="square" lIns="0" tIns="0" rIns="0" bIns="0" rtlCol="0" anchor="t"/>
+          <a:lstStyle/>
+          <a:p>
+            <a:pPr indent="0" marL="0">
+              <a:lnSpc>
+                <a:spcPct val="105000"/>
+              </a:lnSpc>
+              <a:buNone/>
+            </a:pPr>
+            <a:r>
+              <a:rPr lang="en-US" sz="1350" dirty="0">
+                <a:solidFill>
+                  <a:schemeClr val="bg2"/>
+                </a:solidFill>
+                <a:latin typeface="Calibri" pitchFamily="34" charset="0"/>
+                <a:ea typeface="Calibri" pitchFamily="34" charset="-122"/>
+                <a:cs typeface="Calibri" pitchFamily="34" charset="-120"/>
+              </a:rPr>
+              <a:t>demo steps, each saying what it proves</a:t>
+            </a:r>
+            <a:endParaRPr lang="en-US" sz="1350" dirty="0"/>
+          </a:p>
+        </p:txBody>
+      </p:sp>
+      <p:sp>
+        <p:nvSpPr>
+          <p:cNvPr id="13" name="Stat 4"/>
+          <p:cNvSpPr/>
+          <p:nvPr/>
+        </p:nvSpPr>
+        <p:spPr>
+          <a:xfrm>
+            <a:off x="9075191" y="1783080"/>
+            <a:ext cx="2567864" cy="1554480"/>
+          </a:xfrm>
+          <a:prstGeom prst="roundRect">
+            <a:avLst>
+              <a:gd name="adj" fmla="val 7059"/>
+            </a:avLst>
+          </a:prstGeom>
+          <a:solidFill>
+            <a:schemeClr val="tx2"/>
+          </a:solidFill>
+          <a:ln w="12700">
+            <a:solidFill>
+              <a:schemeClr val="accent5"/>
+            </a:solidFill>
+            <a:prstDash val="solid"/>
+          </a:ln>
+        </p:spPr>
+      </p:sp>
+      <p:sp>
+        <p:nvSpPr>
+          <p:cNvPr id="14" name="Text 12"/>
+          <p:cNvSpPr txBox="1"/>
+          <p:nvPr/>
+        </p:nvSpPr>
+        <p:spPr>
+          <a:xfrm>
+            <a:off x="9349511" y="1920240"/>
+            <a:ext cx="2110664" cy="685800"/>
+          </a:xfrm>
+          <a:prstGeom prst="rect">
+            <a:avLst/>
+          </a:prstGeom>
+          <a:noFill/>
+          <a:ln/>
+        </p:spPr>
+        <p:txBody>
+          <a:bodyPr wrap="square" lIns="0" tIns="0" rIns="0" bIns="0" rtlCol="0" anchor="ctr">
+            <a:normAutofit/>
+          </a:bodyPr>
+          <a:lstStyle/>
+          <a:p>
+            <a:pPr indent="0" marL="0">
+              <a:buNone/>
+            </a:pPr>
+            <a:r>
+              <a:rPr lang="en-US" sz="3600" b="1" dirty="0">
+                <a:solidFill>
+                  <a:schemeClr val="accent1"/>
+                </a:solidFill>
+                <a:latin typeface="Consolas" pitchFamily="34" charset="0"/>
+                <a:ea typeface="Consolas" pitchFamily="34" charset="-122"/>
+                <a:cs typeface="Consolas" pitchFamily="34" charset="-120"/>
+              </a:rPr>
+              <a:t>2</a:t>
+            </a:r>
+            <a:endParaRPr lang="en-US" sz="3600" dirty="0"/>
+          </a:p>
+        </p:txBody>
+      </p:sp>
+      <p:sp>
+        <p:nvSpPr>
+          <p:cNvPr id="15" name="Text 13"/>
+          <p:cNvSpPr txBox="1"/>
+          <p:nvPr/>
+        </p:nvSpPr>
+        <p:spPr>
+          <a:xfrm>
+            <a:off x="9349511" y="2633472"/>
+            <a:ext cx="2110664" cy="640080"/>
+          </a:xfrm>
+          <a:prstGeom prst="rect">
+            <a:avLst/>
+          </a:prstGeom>
+          <a:noFill/>
+          <a:ln/>
+        </p:spPr>
+        <p:txBody>
+          <a:bodyPr wrap="square" lIns="0" tIns="0" rIns="0" bIns="0" rtlCol="0" anchor="t"/>
+          <a:lstStyle/>
+          <a:p>
+            <a:pPr indent="0" marL="0">
+              <a:lnSpc>
+                <a:spcPct val="105000"/>
+              </a:lnSpc>
+              <a:buNone/>
+            </a:pPr>
+            <a:r>
+              <a:rPr lang="en-US" sz="1350" dirty="0">
+                <a:solidFill>
+                  <a:schemeClr val="bg2"/>
+                </a:solidFill>
+                <a:latin typeface="Calibri" pitchFamily="34" charset="0"/>
+                <a:ea typeface="Calibri" pitchFamily="34" charset="-122"/>
+                <a:cs typeface="Calibri" pitchFamily="34" charset="-120"/>
+              </a:rPr>
+              <a:t>setups documented: macOS / Linux and Windows</a:t>
+            </a:r>
+            <a:endParaRPr lang="en-US" sz="1350" dirty="0"/>
+          </a:p>
+        </p:txBody>
+      </p:sp>
+      <p:sp>
+        <p:nvSpPr>
+          <p:cNvPr id="16" name="Proof ring 1"/>
+          <p:cNvSpPr/>
+          <p:nvPr/>
+        </p:nvSpPr>
+        <p:spPr>
+          <a:xfrm>
+            <a:off x="548640" y="3657600"/>
+            <a:ext cx="530352" cy="530352"/>
+          </a:xfrm>
+          <a:prstGeom prst="ellipse">
+            <a:avLst/>
+          </a:prstGeom>
+          <a:solidFill>
+            <a:schemeClr val="tx2"/>
+          </a:solidFill>
+          <a:ln w="12700">
+            <a:solidFill>
+              <a:schemeClr val="accent1"/>
+            </a:solidFill>
+            <a:prstDash val="solid"/>
+          </a:ln>
+        </p:spPr>
+      </p:sp>
+      <p:pic>
+        <p:nvPicPr>
+          <p:cNvPr id="17" name="Proof icon 1" descr="preencoded.png">    </p:cNvPr>
+          <p:cNvPicPr>
+            <a:picLocks noChangeAspect="1"/>
+          </p:cNvPicPr>
+          <p:nvPr/>
+        </p:nvPicPr>
+        <p:blipFill>
+          <a:blip r:embed="rId1"/>
+          <a:stretch>
+            <a:fillRect/>
+          </a:stretch>
+        </p:blipFill>
+        <p:spPr>
+          <a:xfrm>
+            <a:off x="690372" y="3799332"/>
+            <a:ext cx="246888" cy="246888"/>
+          </a:xfrm>
+          <a:prstGeom prst="rect">
+            <a:avLst/>
+          </a:prstGeom>
+        </p:spPr>
+      </p:pic>
+      <p:sp>
+        <p:nvSpPr>
+          <p:cNvPr id="18" name="Text 15"/>
+          <p:cNvSpPr txBox="1"/>
+          <p:nvPr/>
+        </p:nvSpPr>
+        <p:spPr>
+          <a:xfrm>
+            <a:off x="1325880" y="3621024"/>
+            <a:ext cx="10317175" cy="640080"/>
+          </a:xfrm>
+          <a:prstGeom prst="rect">
+            <a:avLst/>
+          </a:prstGeom>
+          <a:noFill/>
+          <a:ln/>
+        </p:spPr>
+        <p:txBody>
+          <a:bodyPr wrap="square" lIns="0" tIns="0" rIns="0" bIns="0" rtlCol="0" anchor="ctr"/>
+          <a:lstStyle/>
+          <a:p>
+            <a:pPr indent="0" marL="0">
+              <a:lnSpc>
+                <a:spcPct val="105000"/>
+              </a:lnSpc>
+              <a:buNone/>
+            </a:pPr>
+            <a:r>
+              <a:rPr lang="en-US" sz="1550" b="1" dirty="0">
+                <a:solidFill>
+                  <a:schemeClr val="accent6"/>
+                </a:solidFill>
+                <a:latin typeface="Calibri" pitchFamily="34" charset="0"/>
+                <a:ea typeface="Calibri" pitchFamily="34" charset="-122"/>
+                <a:cs typeface="Calibri" pitchFamily="34" charset="-120"/>
+              </a:rPr>
+              <a:t>Code: </a:t>
+            </a:r>
+            <a:pPr indent="0" marL="0">
+              <a:lnSpc>
+                <a:spcPct val="105000"/>
+              </a:lnSpc>
+              <a:buNone/>
+            </a:pPr>
+            <a:r>
+              <a:rPr lang="en-US" sz="1550" u="sng" dirty="0">
+                <a:solidFill>
+                  <a:schemeClr val="accent1"/>
+                </a:solidFill>
+                <a:latin typeface="Calibri" pitchFamily="34" charset="0"/>
+                <a:ea typeface="Calibri" pitchFamily="34" charset="-122"/>
+                <a:cs typeface="Calibri" pitchFamily="34" charset="-120"/>
+                <a:hlinkClick r:id="rId2" invalidUrl="" action="" tgtFrame="" tooltip="https://github.com/tamrachan/ledger-hackathon" history="1" highlightClick="0" endSnd="0">
+                  <a:extLst>
+                    <a:ext uri="{A12FA001-AC4F-418D-AE19-62706E023703}">
+                      <ahyp:hlinkClr xmlns:ahyp="http://schemas.microsoft.com/office/drawing/2018/hyperlinkcolor" val="tx"/>
+                    </a:ext>
+                  </a:extLst>
+                </a:hlinkClick>
+              </a:rPr>
+              <a:t>github.com/tamrachan/ledger-hackathon</a:t>
+            </a:r>
+            <a:pPr indent="0" marL="0">
+              <a:lnSpc>
+                <a:spcPct val="105000"/>
+              </a:lnSpc>
+              <a:buNone/>
+            </a:pPr>
+            <a:r>
+              <a:rPr lang="en-US" sz="1550" dirty="0">
+                <a:solidFill>
+                  <a:schemeClr val="bg2"/>
+                </a:solidFill>
+                <a:latin typeface="Calibri" pitchFamily="34" charset="0"/>
+                <a:ea typeface="Calibri" pitchFamily="34" charset="-122"/>
+                <a:cs typeface="Calibri" pitchFamily="34" charset="-120"/>
+              </a:rPr>
+              <a:t>. Start here: what is real and what is mock, how to run it, and a map from each criterion to the code.</a:t>
+            </a:r>
+            <a:endParaRPr lang="en-US" sz="1550" dirty="0"/>
+          </a:p>
+        </p:txBody>
+      </p:sp>
+      <p:sp>
+        <p:nvSpPr>
+          <p:cNvPr id="19" name="Proof ring 2"/>
+          <p:cNvSpPr/>
+          <p:nvPr/>
+        </p:nvSpPr>
+        <p:spPr>
+          <a:xfrm>
+            <a:off x="548640" y="4480560"/>
+            <a:ext cx="530352" cy="530352"/>
+          </a:xfrm>
+          <a:prstGeom prst="ellipse">
+            <a:avLst/>
+          </a:prstGeom>
+          <a:solidFill>
+            <a:schemeClr val="tx2"/>
+          </a:solidFill>
+          <a:ln w="12700">
+            <a:solidFill>
+              <a:schemeClr val="accent1"/>
+            </a:solidFill>
+            <a:prstDash val="solid"/>
+          </a:ln>
+        </p:spPr>
+      </p:sp>
+      <p:pic>
+        <p:nvPicPr>
+          <p:cNvPr id="20" name="Proof icon 2" descr="preencoded.png">    </p:cNvPr>
+          <p:cNvPicPr>
+            <a:picLocks noChangeAspect="1"/>
+          </p:cNvPicPr>
+          <p:nvPr/>
+        </p:nvPicPr>
+        <p:blipFill>
+          <a:blip r:embed="rId3"/>
+          <a:stretch>
+            <a:fillRect/>
+          </a:stretch>
+        </p:blipFill>
+        <p:spPr>
+          <a:xfrm>
+            <a:off x="690372" y="4622292"/>
+            <a:ext cx="246888" cy="246888"/>
+          </a:xfrm>
+          <a:prstGeom prst="rect">
+            <a:avLst/>
+          </a:prstGeom>
+        </p:spPr>
+      </p:pic>
+      <p:sp>
+        <p:nvSpPr>
+          <p:cNvPr id="21" name="Text 17"/>
+          <p:cNvSpPr txBox="1"/>
+          <p:nvPr/>
+        </p:nvSpPr>
+        <p:spPr>
+          <a:xfrm>
+            <a:off x="1325880" y="4443984"/>
+            <a:ext cx="10317175" cy="640080"/>
+          </a:xfrm>
+          <a:prstGeom prst="rect">
+            <a:avLst/>
+          </a:prstGeom>
+          <a:noFill/>
+          <a:ln/>
+        </p:spPr>
+        <p:txBody>
+          <a:bodyPr wrap="square" lIns="0" tIns="0" rIns="0" bIns="0" rtlCol="0" anchor="ctr"/>
+          <a:lstStyle/>
+          <a:p>
+            <a:pPr indent="0" marL="0">
+              <a:lnSpc>
+                <a:spcPct val="105000"/>
+              </a:lnSpc>
+              <a:buNone/>
+            </a:pPr>
+            <a:r>
+              <a:rPr lang="en-US" sz="1550" b="1" dirty="0">
+                <a:solidFill>
+                  <a:schemeClr val="accent6"/>
+                </a:solidFill>
+                <a:latin typeface="Calibri" pitchFamily="34" charset="0"/>
+                <a:ea typeface="Calibri" pitchFamily="34" charset="-122"/>
+                <a:cs typeface="Calibri" pitchFamily="34" charset="-120"/>
+              </a:rPr>
+              <a:t>Try it: </a:t>
+            </a:r>
+            <a:pPr indent="0" marL="0">
+              <a:lnSpc>
+                <a:spcPct val="105000"/>
+              </a:lnSpc>
+              <a:buNone/>
+            </a:pPr>
+            <a:r>
+              <a:rPr lang="en-US" sz="1550" u="sng" dirty="0">
+                <a:solidFill>
+                  <a:schemeClr val="accent1"/>
+                </a:solidFill>
+                <a:latin typeface="Calibri" pitchFamily="34" charset="0"/>
+                <a:ea typeface="Calibri" pitchFamily="34" charset="-122"/>
+                <a:cs typeface="Calibri" pitchFamily="34" charset="-120"/>
+                <a:hlinkClick r:id="rId4" invalidUrl="" action="" tgtFrame="" tooltip="https://tamrachan.github.io/ledger-hackathon/" history="1" highlightClick="0" endSnd="0">
+                  <a:extLst>
+                    <a:ext uri="{A12FA001-AC4F-418D-AE19-62706E023703}">
+                      <ahyp:hlinkClr xmlns:ahyp="http://schemas.microsoft.com/office/drawing/2018/hyperlinkcolor" val="tx"/>
+                    </a:ext>
+                  </a:extLst>
+                </a:hlinkClick>
+              </a:rPr>
+              <a:t>tamrachan.github.io/ledger-hackathon</a:t>
+            </a:r>
+            <a:pPr indent="0" marL="0">
+              <a:lnSpc>
+                <a:spcPct val="105000"/>
+              </a:lnSpc>
+              <a:buNone/>
+            </a:pPr>
+            <a:r>
+              <a:rPr lang="en-US" sz="1550" dirty="0">
+                <a:solidFill>
+                  <a:schemeClr val="bg2"/>
+                </a:solidFill>
+                <a:latin typeface="Calibri" pitchFamily="34" charset="0"/>
+                <a:ea typeface="Calibri" pitchFamily="34" charset="-122"/>
+                <a:cs typeface="Calibri" pitchFamily="34" charset="-120"/>
+              </a:rPr>
+              <a:t> in demo mode, on any phone. Switch personas and reset the data from the bar at the top.</a:t>
+            </a:r>
+            <a:endParaRPr lang="en-US" sz="1550" dirty="0"/>
+          </a:p>
+        </p:txBody>
+      </p:sp>
+      <p:sp>
+        <p:nvSpPr>
+          <p:cNvPr id="22" name="Proof ring 3"/>
+          <p:cNvSpPr/>
+          <p:nvPr/>
+        </p:nvSpPr>
+        <p:spPr>
+          <a:xfrm>
+            <a:off x="548640" y="5303520"/>
+            <a:ext cx="530352" cy="530352"/>
+          </a:xfrm>
+          <a:prstGeom prst="ellipse">
+            <a:avLst/>
+          </a:prstGeom>
+          <a:solidFill>
+            <a:schemeClr val="tx2"/>
+          </a:solidFill>
+          <a:ln w="12700">
+            <a:solidFill>
+              <a:schemeClr val="accent1"/>
+            </a:solidFill>
+            <a:prstDash val="solid"/>
+          </a:ln>
+        </p:spPr>
+      </p:sp>
+      <p:pic>
+        <p:nvPicPr>
+          <p:cNvPr id="23" name="Proof icon 3" descr="preencoded.png">    </p:cNvPr>
+          <p:cNvPicPr>
+            <a:picLocks noChangeAspect="1"/>
+          </p:cNvPicPr>
+          <p:nvPr/>
+        </p:nvPicPr>
+        <p:blipFill>
+          <a:blip r:embed="rId5"/>
+          <a:stretch>
+            <a:fillRect/>
+          </a:stretch>
+        </p:blipFill>
+        <p:spPr>
+          <a:xfrm>
+            <a:off x="690372" y="5445252"/>
+            <a:ext cx="246888" cy="246888"/>
+          </a:xfrm>
+          <a:prstGeom prst="rect">
+            <a:avLst/>
+          </a:prstGeom>
+        </p:spPr>
+      </p:pic>
+      <p:sp>
+        <p:nvSpPr>
+          <p:cNvPr id="24" name="Text 19"/>
+          <p:cNvSpPr txBox="1"/>
+          <p:nvPr/>
+        </p:nvSpPr>
+        <p:spPr>
+          <a:xfrm>
+            <a:off x="1325880" y="5266944"/>
+            <a:ext cx="10317175" cy="640080"/>
+          </a:xfrm>
+          <a:prstGeom prst="rect">
+            <a:avLst/>
+          </a:prstGeom>
+          <a:noFill/>
+          <a:ln/>
+        </p:spPr>
+        <p:txBody>
+          <a:bodyPr wrap="square" lIns="0" tIns="0" rIns="0" bIns="0" rtlCol="0" anchor="ctr"/>
+          <a:lstStyle/>
+          <a:p>
+            <a:pPr indent="0" marL="0">
+              <a:lnSpc>
+                <a:spcPct val="105000"/>
+              </a:lnSpc>
+              <a:buNone/>
+            </a:pPr>
+            <a:r>
+              <a:rPr lang="en-US" sz="1550" b="1" dirty="0">
+                <a:solidFill>
+                  <a:schemeClr val="accent6"/>
+                </a:solidFill>
+                <a:latin typeface="Calibri" pitchFamily="34" charset="0"/>
+                <a:ea typeface="Calibri" pitchFamily="34" charset="-122"/>
+                <a:cs typeface="Calibri" pitchFamily="34" charset="-120"/>
+              </a:rPr>
+              <a:t>For builders. </a:t>
+            </a:r>
+            <a:pPr indent="0" marL="0">
+              <a:lnSpc>
+                <a:spcPct val="105000"/>
+              </a:lnSpc>
+              <a:buNone/>
+            </a:pPr>
+            <a:r>
+              <a:rPr lang="en-US" sz="1550" dirty="0">
+                <a:solidFill>
+                  <a:schemeClr val="bg2"/>
+                </a:solidFill>
+                <a:latin typeface="Calibri" pitchFamily="34" charset="0"/>
+                <a:ea typeface="Calibri" pitchFamily="34" charset="-122"/>
+                <a:cs typeface="Calibri" pitchFamily="34" charset="-120"/>
+              </a:rPr>
+              <a:t>The backend API and gotchas, the data schemas and claim status machine, and a frank developer-experience write-up for Ledger.</a:t>
+            </a:r>
+            <a:endParaRPr lang="en-US" sz="1550" dirty="0"/>
+          </a:p>
+        </p:txBody>
+      </p:sp>
+      <p:sp>
+        <p:nvSpPr>
+          <p:cNvPr id="25" name="Slide Number Placeholder 0"/>
+          <p:cNvSpPr>
+            <a:spLocks noGrp="1"/>
+          </p:cNvSpPr>
+          <p:nvPr>
+            <p:ph type="sldNum" sz="quarter" idx="4294967295"/>
+          </p:nvPr>
+        </p:nvSpPr>
+        <p:spPr>
+          <a:xfrm>
+            <a:off x="11094415" y="6272784"/>
+            <a:ext cx="548640" cy="274320"/>
+          </a:xfrm>
+          <a:prstGeom prst="rect">
+            <a:avLst/>
+          </a:prstGeom>
+          <a:extLst>
+            <a:ext uri="{C572A759-6A51-4108-AA02-DFA0A04FC94B}">
+              <ma14:wrappingTextBoxFlag xmlns:ma14="http://schemas.microsoft.com/office/mac/drawingml/2011/main" val="0"/>
+            </a:ext>
+          </a:extLst>
+        </p:spPr>
+        <p:txBody>
+          <a:bodyPr/>
+          <a:lstStyle>
+            <a:lvl1pPr>
+              <a:defRPr sz="1000">
+                <a:solidFill>
+                  <a:schemeClr val="bg2"/>
+                </a:solidFill>
+                <a:latin typeface="Consolas"/>
+                <a:ea typeface="Consolas"/>
+                <a:cs typeface="Consolas"/>
+              </a:defRPr>
+            </a:lvl1pPr>
+          </a:lstStyle>
+          <a:p>
+            <a:pPr algn="r"/>
+            <a:fld id="{F7021451-1387-4CA6-816F-3879F97B5CBC}" type="slidenum">
+              <a:rPr b="0" lang="en-US"/>
+              <a:t>16</a:t>
+            </a:fld>
+            <a:endParaRPr lang="en-US"/>
+          </a:p>
+        </p:txBody>
+      </p:sp>
+    </p:spTree>
+  </p:cSld>
+  <p:clrMapOvr>
+    <a:masterClrMapping/>
+  </p:clrMapOvr>
+</p:sld>
+</file>
+
+<file path=ppt/slides/slide17.xml><?xml version="1.0" encoding="utf-8"?>
+<p:sld xmlns:a="http://schemas.openxmlformats.org/drawingml/2006/main" xmlns:r="http://schemas.openxmlformats.org/officeDocument/2006/relationships" xmlns:p="http://schemas.openxmlformats.org/presentationml/2006/main">
+  <p:cSld name="Slide 17">
+    <p:spTree>
+      <p:nvGrpSpPr>
+        <p:cNvPr id="1" name=""/>
+        <p:cNvGrpSpPr/>
+        <p:nvPr/>
+      </p:nvGrpSpPr>
+      <p:grpSpPr>
+        <a:xfrm>
+          <a:off x="0" y="0"/>
+          <a:ext cx="0" cy="0"/>
+          <a:chOff x="0" y="0"/>
+          <a:chExt cx="0" cy="0"/>
+        </a:xfrm>
+      </p:grpSpPr>
+      <p:sp>
+        <p:nvSpPr>
+          <p:cNvPr id="2" name="Text 0"/>
+          <p:cNvSpPr txBox="1"/>
+          <p:nvPr/>
+        </p:nvSpPr>
+        <p:spPr>
+          <a:xfrm>
+            <a:off x="548640" y="1645920"/>
+            <a:ext cx="10972800" cy="822960"/>
+          </a:xfrm>
+          <a:prstGeom prst="rect">
+            <a:avLst/>
+          </a:prstGeom>
+          <a:noFill/>
+          <a:ln/>
+        </p:spPr>
+        <p:txBody>
+          <a:bodyPr wrap="square" lIns="0" tIns="0" rIns="0" bIns="0" rtlCol="0" anchor="t"/>
+          <a:lstStyle/>
+          <a:p>
+            <a:pPr indent="0" marL="0">
+              <a:buNone/>
+            </a:pPr>
+            <a:r>
+              <a:rPr lang="en-US" sz="4400" b="1" dirty="0">
+                <a:solidFill>
+                  <a:schemeClr val="accent6"/>
+                </a:solidFill>
+                <a:latin typeface="Consolas" pitchFamily="34" charset="0"/>
+                <a:ea typeface="Consolas" pitchFamily="34" charset="-122"/>
+                <a:cs typeface="Consolas" pitchFamily="34" charset="-120"/>
+              </a:rPr>
+              <a:t>THE AGENT DOES THE WORK.</a:t>
+            </a:r>
+            <a:endParaRPr lang="en-US" sz="4400" dirty="0"/>
+          </a:p>
+        </p:txBody>
+      </p:sp>
+      <p:sp>
+        <p:nvSpPr>
+          <p:cNvPr id="3" name="Text 1"/>
+          <p:cNvSpPr txBox="1"/>
+          <p:nvPr/>
+        </p:nvSpPr>
+        <p:spPr>
+          <a:xfrm>
+            <a:off x="548640" y="2468880"/>
+            <a:ext cx="10972800" cy="822960"/>
+          </a:xfrm>
+          <a:prstGeom prst="rect">
+            <a:avLst/>
+          </a:prstGeom>
+          <a:noFill/>
+          <a:ln/>
+        </p:spPr>
+        <p:txBody>
+          <a:bodyPr wrap="square" lIns="0" tIns="0" rIns="0" bIns="0" rtlCol="0" anchor="t"/>
+          <a:lstStyle/>
+          <a:p>
+            <a:pPr indent="0" marL="0">
+              <a:buNone/>
+            </a:pPr>
+            <a:r>
+              <a:rPr lang="en-US" sz="4400" b="1" dirty="0">
+                <a:solidFill>
+                  <a:schemeClr val="accent1"/>
+                </a:solidFill>
+                <a:latin typeface="Consolas" pitchFamily="34" charset="0"/>
+                <a:ea typeface="Consolas" pitchFamily="34" charset="-122"/>
+                <a:cs typeface="Consolas" pitchFamily="34" charset="-120"/>
+              </a:rPr>
+              <a:t>THE LEDGER KEEPS THE KEYS.</a:t>
+            </a:r>
+            <a:endParaRPr lang="en-US" sz="4400" dirty="0"/>
+          </a:p>
+        </p:txBody>
+      </p:sp>
+      <p:sp>
+        <p:nvSpPr>
+          <p:cNvPr id="4" name="Text 2"/>
+          <p:cNvSpPr txBox="1"/>
+          <p:nvPr/>
+        </p:nvSpPr>
+        <p:spPr>
+          <a:xfrm>
+            <a:off x="548640" y="3520440"/>
+            <a:ext cx="9144000" cy="548640"/>
+          </a:xfrm>
+          <a:prstGeom prst="rect">
+            <a:avLst/>
+          </a:prstGeom>
+          <a:noFill/>
+          <a:ln/>
+        </p:spPr>
+        <p:txBody>
+          <a:bodyPr wrap="square" lIns="0" tIns="0" rIns="0" bIns="0" rtlCol="0" anchor="t"/>
+          <a:lstStyle/>
+          <a:p>
+            <a:pPr indent="0" marL="0">
+              <a:buNone/>
+            </a:pPr>
+            <a:r>
+              <a:rPr lang="en-US" sz="2000" dirty="0">
+                <a:solidFill>
+                  <a:schemeClr val="bg2"/>
+                </a:solidFill>
+                <a:latin typeface="Calibri" pitchFamily="34" charset="0"/>
+                <a:ea typeface="Calibri" pitchFamily="34" charset="-122"/>
+                <a:cs typeface="Calibri" pitchFamily="34" charset="-120"/>
+              </a:rPr>
+              <a:t>Students get paid back in minutes, and no AI can ever be talked into paying.</a:t>
+            </a:r>
+            <a:endParaRPr lang="en-US" sz="2000" dirty="0"/>
+          </a:p>
+        </p:txBody>
+      </p:sp>
+      <p:sp>
+        <p:nvSpPr>
+          <p:cNvPr id="5" name="Link 1"/>
+          <p:cNvSpPr/>
+          <p:nvPr/>
+        </p:nvSpPr>
+        <p:spPr>
+          <a:xfrm>
+            <a:off x="548640" y="4526280"/>
+            <a:ext cx="4251960" cy="1097280"/>
+          </a:xfrm>
+          <a:prstGeom prst="roundRect">
+            <a:avLst>
+              <a:gd name="adj" fmla="val 10000"/>
+            </a:avLst>
+          </a:prstGeom>
+          <a:solidFill>
+            <a:schemeClr val="tx2"/>
+          </a:solidFill>
+          <a:ln w="12700">
+            <a:solidFill>
+              <a:schemeClr val="accent5"/>
+            </a:solidFill>
+            <a:prstDash val="solid"/>
+          </a:ln>
+        </p:spPr>
+      </p:sp>
+      <p:sp>
+        <p:nvSpPr>
+          <p:cNvPr id="6" name="Text 4"/>
+          <p:cNvSpPr txBox="1"/>
+          <p:nvPr/>
+        </p:nvSpPr>
+        <p:spPr>
+          <a:xfrm>
+            <a:off x="822960" y="4690872"/>
+            <a:ext cx="3794760" cy="274320"/>
+          </a:xfrm>
+          <a:prstGeom prst="rect">
+            <a:avLst/>
+          </a:prstGeom>
+          <a:noFill/>
+          <a:ln/>
+        </p:spPr>
+        <p:txBody>
+          <a:bodyPr wrap="square" lIns="0" tIns="0" rIns="0" bIns="0" rtlCol="0" anchor="t"/>
+          <a:lstStyle/>
+          <a:p>
+            <a:pPr indent="0" marL="0">
+              <a:buNone/>
+            </a:pPr>
+            <a:r>
+              <a:rPr lang="en-US" sz="1100" spc="200" kern="0" dirty="0">
+                <a:solidFill>
+                  <a:schemeClr val="accent1"/>
+                </a:solidFill>
+                <a:latin typeface="Consolas" pitchFamily="34" charset="0"/>
+                <a:ea typeface="Consolas" pitchFamily="34" charset="-122"/>
+                <a:cs typeface="Consolas" pitchFamily="34" charset="-120"/>
+              </a:rPr>
+              <a:t>TRY IT</a:t>
+            </a:r>
+            <a:endParaRPr lang="en-US" sz="1100" dirty="0"/>
+          </a:p>
+        </p:txBody>
+      </p:sp>
+      <p:sp>
+        <p:nvSpPr>
+          <p:cNvPr id="7" name="Text 5"/>
+          <p:cNvSpPr txBox="1"/>
+          <p:nvPr/>
+        </p:nvSpPr>
+        <p:spPr>
+          <a:xfrm>
+            <a:off x="822960" y="5029200"/>
+            <a:ext cx="3840480" cy="411480"/>
+          </a:xfrm>
+          <a:prstGeom prst="rect">
+            <a:avLst/>
+          </a:prstGeom>
+          <a:noFill/>
+          <a:ln/>
+        </p:spPr>
+        <p:txBody>
+          <a:bodyPr wrap="square" lIns="0" tIns="0" rIns="0" bIns="0" rtlCol="0" anchor="t"/>
+          <a:lstStyle/>
+          <a:p>
+            <a:pPr indent="0" marL="0">
+              <a:buNone/>
+            </a:pPr>
+            <a:r>
+              <a:rPr lang="en-US" sz="1250" u="sng" dirty="0">
+                <a:solidFill>
+                  <a:schemeClr val="accent6"/>
+                </a:solidFill>
+                <a:latin typeface="Consolas" pitchFamily="34" charset="0"/>
+                <a:ea typeface="Consolas" pitchFamily="34" charset="-122"/>
+                <a:cs typeface="Consolas" pitchFamily="34" charset="-120"/>
+                <a:hlinkClick r:id="rId1" invalidUrl="" action="" tgtFrame="" tooltip="https://tamrachan.github.io/ledger-hackathon/" history="1" highlightClick="0" endSnd="0">
+                  <a:extLst>
+                    <a:ext uri="{A12FA001-AC4F-418D-AE19-62706E023703}">
+                      <ahyp:hlinkClr xmlns:ahyp="http://schemas.microsoft.com/office/drawing/2018/hyperlinkcolor" val="tx"/>
+                    </a:ext>
+                  </a:extLst>
+                </a:hlinkClick>
+              </a:rPr>
+              <a:t>tamrachan.github.io/ledger-hackathon</a:t>
+            </a:r>
+            <a:endParaRPr lang="en-US" sz="1250" dirty="0"/>
+          </a:p>
+        </p:txBody>
+      </p:sp>
+      <p:sp>
+        <p:nvSpPr>
+          <p:cNvPr id="8" name="Link 2"/>
+          <p:cNvSpPr/>
+          <p:nvPr/>
+        </p:nvSpPr>
+        <p:spPr>
+          <a:xfrm>
+            <a:off x="5074920" y="4526280"/>
+            <a:ext cx="4251960" cy="1097280"/>
+          </a:xfrm>
+          <a:prstGeom prst="roundRect">
+            <a:avLst>
+              <a:gd name="adj" fmla="val 10000"/>
+            </a:avLst>
+          </a:prstGeom>
+          <a:solidFill>
+            <a:schemeClr val="tx2"/>
+          </a:solidFill>
+          <a:ln w="12700">
+            <a:solidFill>
+              <a:schemeClr val="accent5"/>
+            </a:solidFill>
+            <a:prstDash val="solid"/>
+          </a:ln>
+        </p:spPr>
+      </p:sp>
+      <p:sp>
+        <p:nvSpPr>
+          <p:cNvPr id="9" name="Text 7"/>
+          <p:cNvSpPr txBox="1"/>
+          <p:nvPr/>
+        </p:nvSpPr>
+        <p:spPr>
+          <a:xfrm>
+            <a:off x="5349240" y="4690872"/>
+            <a:ext cx="3794760" cy="274320"/>
+          </a:xfrm>
+          <a:prstGeom prst="rect">
+            <a:avLst/>
+          </a:prstGeom>
+          <a:noFill/>
+          <a:ln/>
+        </p:spPr>
+        <p:txBody>
+          <a:bodyPr wrap="square" lIns="0" tIns="0" rIns="0" bIns="0" rtlCol="0" anchor="t"/>
+          <a:lstStyle/>
+          <a:p>
+            <a:pPr indent="0" marL="0">
+              <a:buNone/>
+            </a:pPr>
+            <a:r>
+              <a:rPr lang="en-US" sz="1100" spc="200" kern="0" dirty="0">
+                <a:solidFill>
+                  <a:schemeClr val="accent1"/>
+                </a:solidFill>
+                <a:latin typeface="Consolas" pitchFamily="34" charset="0"/>
+                <a:ea typeface="Consolas" pitchFamily="34" charset="-122"/>
+                <a:cs typeface="Consolas" pitchFamily="34" charset="-120"/>
+              </a:rPr>
+              <a:t>CODE</a:t>
+            </a:r>
+            <a:endParaRPr lang="en-US" sz="1100" dirty="0"/>
+          </a:p>
+        </p:txBody>
+      </p:sp>
+      <p:sp>
+        <p:nvSpPr>
+          <p:cNvPr id="10" name="Text 8"/>
+          <p:cNvSpPr txBox="1"/>
+          <p:nvPr/>
+        </p:nvSpPr>
+        <p:spPr>
+          <a:xfrm>
+            <a:off x="5349240" y="5029200"/>
+            <a:ext cx="3840480" cy="411480"/>
+          </a:xfrm>
+          <a:prstGeom prst="rect">
+            <a:avLst/>
+          </a:prstGeom>
+          <a:noFill/>
+          <a:ln/>
+        </p:spPr>
+        <p:txBody>
+          <a:bodyPr wrap="square" lIns="0" tIns="0" rIns="0" bIns="0" rtlCol="0" anchor="t"/>
+          <a:lstStyle/>
+          <a:p>
+            <a:pPr indent="0" marL="0">
+              <a:buNone/>
+            </a:pPr>
+            <a:r>
+              <a:rPr lang="en-US" sz="1250" u="sng" dirty="0">
+                <a:solidFill>
+                  <a:schemeClr val="accent6"/>
+                </a:solidFill>
+                <a:latin typeface="Consolas" pitchFamily="34" charset="0"/>
+                <a:ea typeface="Consolas" pitchFamily="34" charset="-122"/>
+                <a:cs typeface="Consolas" pitchFamily="34" charset="-120"/>
+                <a:hlinkClick r:id="rId2" invalidUrl="" action="" tgtFrame="" tooltip="https://github.com/tamrachan/ledger-hackathon" history="1" highlightClick="0" endSnd="0">
+                  <a:extLst>
+                    <a:ext uri="{A12FA001-AC4F-418D-AE19-62706E023703}">
+                      <ahyp:hlinkClr xmlns:ahyp="http://schemas.microsoft.com/office/drawing/2018/hyperlinkcolor" val="tx"/>
+                    </a:ext>
+                  </a:extLst>
+                </a:hlinkClick>
+              </a:rPr>
+              <a:t>github.com/tamrachan/ledger-hackathon</a:t>
+            </a:r>
+            <a:endParaRPr lang="en-US" sz="1250" dirty="0"/>
+          </a:p>
+        </p:txBody>
+      </p:sp>
+      <p:sp>
+        <p:nvSpPr>
+          <p:cNvPr id="11" name="Link 3"/>
+          <p:cNvSpPr/>
+          <p:nvPr/>
+        </p:nvSpPr>
+        <p:spPr>
+          <a:xfrm>
+            <a:off x="9601200" y="4526280"/>
+            <a:ext cx="2041855" cy="1097280"/>
+          </a:xfrm>
+          <a:prstGeom prst="roundRect">
+            <a:avLst>
+              <a:gd name="adj" fmla="val 10000"/>
+            </a:avLst>
+          </a:prstGeom>
+          <a:solidFill>
+            <a:schemeClr val="tx2"/>
+          </a:solidFill>
+          <a:ln w="12700">
+            <a:solidFill>
+              <a:schemeClr val="accent5"/>
+            </a:solidFill>
+            <a:prstDash val="solid"/>
+          </a:ln>
+        </p:spPr>
+      </p:sp>
+      <p:sp>
+        <p:nvSpPr>
+          <p:cNvPr id="12" name="Text 10"/>
+          <p:cNvSpPr txBox="1"/>
+          <p:nvPr/>
+        </p:nvSpPr>
+        <p:spPr>
+          <a:xfrm>
+            <a:off x="9875520" y="4690872"/>
+            <a:ext cx="1584655" cy="274320"/>
+          </a:xfrm>
+          <a:prstGeom prst="rect">
+            <a:avLst/>
+          </a:prstGeom>
+          <a:noFill/>
+          <a:ln/>
+        </p:spPr>
+        <p:txBody>
+          <a:bodyPr wrap="square" lIns="0" tIns="0" rIns="0" bIns="0" rtlCol="0" anchor="t"/>
+          <a:lstStyle/>
+          <a:p>
+            <a:pPr indent="0" marL="0">
+              <a:buNone/>
+            </a:pPr>
+            <a:r>
+              <a:rPr lang="en-US" sz="1100" spc="200" kern="0" dirty="0">
+                <a:solidFill>
+                  <a:schemeClr val="accent1"/>
+                </a:solidFill>
+                <a:latin typeface="Consolas" pitchFamily="34" charset="0"/>
+                <a:ea typeface="Consolas" pitchFamily="34" charset="-122"/>
+                <a:cs typeface="Consolas" pitchFamily="34" charset="-120"/>
+              </a:rPr>
+              <a:t>TEAM</a:t>
+            </a:r>
+            <a:endParaRPr lang="en-US" sz="1100" dirty="0"/>
+          </a:p>
+        </p:txBody>
+      </p:sp>
+      <p:sp>
+        <p:nvSpPr>
+          <p:cNvPr id="13" name="Text 11"/>
+          <p:cNvSpPr txBox="1"/>
+          <p:nvPr/>
+        </p:nvSpPr>
+        <p:spPr>
+          <a:xfrm>
+            <a:off x="9875520" y="5029200"/>
+            <a:ext cx="1630375" cy="411480"/>
+          </a:xfrm>
+          <a:prstGeom prst="rect">
+            <a:avLst/>
+          </a:prstGeom>
+          <a:noFill/>
+          <a:ln/>
+        </p:spPr>
+        <p:txBody>
+          <a:bodyPr wrap="square" lIns="0" tIns="0" rIns="0" bIns="0" rtlCol="0" anchor="t"/>
+          <a:lstStyle/>
+          <a:p>
+            <a:pPr indent="0" marL="0">
+              <a:buNone/>
+            </a:pPr>
+            <a:r>
+              <a:rPr lang="en-US" sz="1250" dirty="0">
+                <a:solidFill>
+                  <a:schemeClr val="accent6"/>
+                </a:solidFill>
+                <a:latin typeface="Consolas" pitchFamily="34" charset="0"/>
+                <a:ea typeface="Consolas" pitchFamily="34" charset="-122"/>
+                <a:cs typeface="Consolas" pitchFamily="34" charset="-120"/>
+              </a:rPr>
+              <a:t>[Names]</a:t>
+            </a:r>
+            <a:endParaRPr lang="en-US" sz="1250" dirty="0"/>
+          </a:p>
+        </p:txBody>
+      </p:sp>
+      <p:sp>
+        <p:nvSpPr>
+          <p:cNvPr id="25" name="Slide Number Placeholder 0"/>
+          <p:cNvSpPr>
+            <a:spLocks noGrp="1"/>
+          </p:cNvSpPr>
+          <p:nvPr>
+            <p:ph type="sldNum" sz="quarter" idx="4294967295"/>
+          </p:nvPr>
+        </p:nvSpPr>
+        <p:spPr>
+          <a:xfrm>
+            <a:off x="11094415" y="6272784"/>
+            <a:ext cx="548640" cy="274320"/>
+          </a:xfrm>
+          <a:prstGeom prst="rect">
+            <a:avLst/>
+          </a:prstGeom>
+          <a:extLst>
+            <a:ext uri="{C572A759-6A51-4108-AA02-DFA0A04FC94B}">
+              <ma14:wrappingTextBoxFlag xmlns:ma14="http://schemas.microsoft.com/office/mac/drawingml/2011/main" val="0"/>
+            </a:ext>
+          </a:extLst>
+        </p:spPr>
+        <p:txBody>
+          <a:bodyPr/>
+          <a:lstStyle>
+            <a:lvl1pPr>
+              <a:defRPr sz="1000">
+                <a:solidFill>
+                  <a:schemeClr val="bg2"/>
+                </a:solidFill>
+                <a:latin typeface="Consolas"/>
+                <a:ea typeface="Consolas"/>
+                <a:cs typeface="Consolas"/>
+              </a:defRPr>
+            </a:lvl1pPr>
+          </a:lstStyle>
+          <a:p>
+            <a:pPr algn="r"/>
+            <a:fld id="{F7021451-1387-4CA6-816F-3879F97B5CBC}" type="slidenum">
+              <a:rPr b="0" lang="en-US"/>
+              <a:t>17</a:t>
             </a:fld>
             <a:endParaRPr lang="en-US"/>
           </a:p>
@@ -9304,6 +15494,27 @@
                 <a:cs typeface="Calibri" pitchFamily="34" charset="-120"/>
               </a:rPr>
               <a:t>Clear signing (PKI prod)</a:t>
+            </a:r>
+            <a:endParaRPr lang="en-US" sz="1500" dirty="0"/>
+          </a:p>
+          <a:p>
+            <a:pPr marL="177800" indent="-177800">
+              <a:spcAft>
+                <a:spcPts val="900"/>
+              </a:spcAft>
+              <a:buSzPct val="100000"/>
+              <a:buChar char="•"/>
+            </a:pPr>
+            <a:r>
+              <a:rPr lang="en-US" sz="1500" dirty="0">
+                <a:solidFill>
+                  <a:schemeClr val="bg1"/>
+                </a:solidFill>
+                <a:latin typeface="Calibri" pitchFamily="34" charset="0"/>
+                <a:ea typeface="Calibri" pitchFamily="34" charset="-122"/>
+                <a:cs typeface="Calibri" pitchFamily="34" charset="-120"/>
+              </a:rPr>
+              <a:t>Key Ring: sealed agent key</a:t>
             </a:r>
             <a:endParaRPr lang="en-US" sz="1500" dirty="0"/>
           </a:p>

--- a/pitch/SocFi-pitch.pptx
+++ b/pitch/SocFi-pitch.pptx
@@ -4,6 +4,9 @@
   <p:sldMasterIdLst>
     <p:sldMasterId id="2147483648" r:id="rId1"/>
   </p:sldMasterIdLst>
+  <p:notesMasterIdLst>
+    <p:notesMasterId r:id="rId19"/>
+  </p:notesMasterIdLst>
   <p:sldIdLst>
     <p:sldId id="256" r:id="rId2"/>
     <p:sldId id="257" r:id="rId3"/>
@@ -23,9 +26,6 @@
     <p:sldId id="271" r:id="rId17"/>
     <p:sldId id="272" r:id="rId18"/>
   </p:sldIdLst>
-  <p:notesMasterIdLst>
-    <p:notesMasterId r:id="rId19"/>
-  </p:notesMasterIdLst>
   <p:sldSz cx="12192000" cy="6858000"/>
   <p:notesSz cx="6858000" cy="12192000"/>
   <p:defaultTextStyle>
@@ -123,42 +123,41 @@
   <p:extLst>
     <p:ext uri="{521415D9-36F7-43E2-AB2F-B90AF26B5E84}">
       <p14:sectionLst xmlns:p14="http://schemas.microsoft.com/office/powerpoint/2010/main">
-        <p14:section name="Opening" id="{ffd0c091-d95e-d9d3-7bcf-6b781f6e7e89}">
+        <p14:section name="Opening" id="{FFD0C091-D95E-D9D3-7BCF-6B781F6E7E89}">
           <p14:sldIdLst>
             <p14:sldId id="256"/>
           </p14:sldIdLst>
         </p14:section>
-        <p14:section name="Problem" id="{e8529a86-8bef-49cc-3aa3-0cee087bc41e}">
+        <p14:section name="Problem" id="{E8529A86-8BEF-49CC-3AA3-0CEE087BC41E}">
           <p14:sldIdLst>
             <p14:sldId id="257"/>
             <p14:sldId id="258"/>
           </p14:sldIdLst>
         </p14:section>
-        <p14:section name="Solution" id="{30a6e60e-0d75-5c61-60e7-cdfb88a1eda6}">
+        <p14:section name="Solution" id="{30A6E60E-0D75-5C61-60E7-CDFB88A1EDA6}">
           <p14:sldIdLst>
             <p14:sldId id="259"/>
             <p14:sldId id="260"/>
           </p14:sldIdLst>
         </p14:section>
-        <p14:section name="Ledger" id="{a12936e2-0d90-749e-7093-cc3a856f0858}">
+        <p14:section name="Ledger" id="{A12936E2-0D90-749E-7093-CC3A856F0858}">
           <p14:sldIdLst>
             <p14:sldId id="261"/>
             <p14:sldId id="262"/>
           </p14:sldIdLst>
         </p14:section>
-        <p14:section name="Build" id="{ca9fd98a-33b9-f315-5902-f113ecee4da5}">
+        <p14:section name="Build" id="{CA9FD98A-33B9-F315-5902-F113ECEE4DA5}">
           <p14:sldIdLst>
             <p14:sldId id="263"/>
           </p14:sldIdLst>
         </p14:section>
-        <p14:section name="Impact" id="{cb7cbeca-40e1-5202-d61e-a45e36b69726}">
+        <p14:section name="Impact" id="{CB7CBECA-40E1-5202-D61E-A45E36B69726}">
           <p14:sldIdLst>
             <p14:sldId id="264"/>
             <p14:sldId id="265"/>
-            <p14:sldId id="272"/>
           </p14:sldIdLst>
         </p14:section>
-        <p14:section name="Criteria" id="{f0a4bcc1-6edf-a6f0-c5b7-3ba4cfc990d0}">
+        <p14:section name="Criteria" id="{F0A4BCC1-6EDF-A6F0-C5B7-3BA4CFC990D0}">
           <p14:sldIdLst>
             <p14:sldId id="266"/>
             <p14:sldId id="267"/>
@@ -166,6 +165,7 @@
             <p14:sldId id="269"/>
             <p14:sldId id="270"/>
             <p14:sldId id="271"/>
+            <p14:sldId id="272"/>
           </p14:sldIdLst>
         </p14:section>
       </p14:sectionLst>
@@ -199,234 +199,10 @@
           <a:chExt cx="0" cy="0"/>
         </a:xfrm>
       </p:grpSpPr>
-      <p:sp>
-        <p:nvSpPr>
-          <p:cNvPr id="2" name="Header Placeholder 1"/>
-          <p:cNvSpPr>
-            <a:spLocks noGrp="1"/>
-          </p:cNvSpPr>
-          <p:nvPr>
-            <p:ph type="hdr" sz="quarter"/>
-          </p:nvPr>
-        </p:nvSpPr>
-        <p:spPr>
-          <a:xfrm>
-            <a:off x="0" y="0"/>
-            <a:ext cx="2971800" cy="458788"/>
-          </a:xfrm>
-          <a:prstGeom prst="rect">
-            <a:avLst/>
-          </a:prstGeom>
-        </p:spPr>
-        <p:txBody>
-          <a:bodyPr vert="horz" lIns="91440" tIns="45720" rIns="91440" bIns="45720" rtlCol="0"/>
-          <a:lstStyle>
-            <a:lvl1pPr algn="l">
-              <a:defRPr sz="1200"/>
-            </a:lvl1pPr>
-          </a:lstStyle>
-          <a:p>
-            <a:endParaRPr lang="en-US"/>
-          </a:p>
-        </p:txBody>
-      </p:sp>
-      <p:sp>
-        <p:nvSpPr>
-          <p:cNvPr id="3" name="Date Placeholder 2"/>
-          <p:cNvSpPr>
-            <a:spLocks noGrp="1"/>
-          </p:cNvSpPr>
-          <p:nvPr>
-            <p:ph type="dt" idx="1"/>
-          </p:nvPr>
-        </p:nvSpPr>
-        <p:spPr>
-          <a:xfrm>
-            <a:off x="3884613" y="0"/>
-            <a:ext cx="2971800" cy="458788"/>
-          </a:xfrm>
-          <a:prstGeom prst="rect">
-            <a:avLst/>
-          </a:prstGeom>
-        </p:spPr>
-        <p:txBody>
-          <a:bodyPr vert="horz" lIns="91440" tIns="45720" rIns="91440" bIns="45720" rtlCol="0"/>
-          <a:lstStyle>
-            <a:lvl1pPr algn="r">
-              <a:defRPr sz="1200"/>
-            </a:lvl1pPr>
-          </a:lstStyle>
-          <a:p>
-            <a:fld id="{5282F153-3F37-0F45-9E97-73ACFA13230C}" type="datetimeFigureOut">
-              <a:rPr lang="en-US"/>
-              <a:t>7/23/19</a:t>
-            </a:fld>
-            <a:endParaRPr lang="en-US"/>
-          </a:p>
-        </p:txBody>
-      </p:sp>
-      <p:sp>
-        <p:nvSpPr>
-          <p:cNvPr id="4" name="Slide Image Placeholder 3"/>
-          <p:cNvSpPr>
-            <a:spLocks noGrp="1" noRot="1" noChangeAspect="1"/>
-          </p:cNvSpPr>
-          <p:nvPr>
-            <p:ph type="sldImg" idx="2"/>
-          </p:nvPr>
-        </p:nvSpPr>
-        <p:spPr>
-          <a:xfrm>
-            <a:off x="685800" y="1143000"/>
-            <a:ext cx="5486400" cy="3086100"/>
-          </a:xfrm>
-          <a:prstGeom prst="rect">
-            <a:avLst/>
-          </a:prstGeom>
-          <a:noFill/>
-          <a:ln w="12700">
-            <a:solidFill>
-              <a:prstClr val="black"/>
-            </a:solidFill>
-          </a:ln>
-        </p:spPr>
-        <p:txBody>
-          <a:bodyPr vert="horz" lIns="91440" tIns="45720" rIns="91440" bIns="45720" rtlCol="0" anchor="ctr"/>
-          <a:lstStyle/>
-          <a:p>
-            <a:endParaRPr lang="en-US"/>
-          </a:p>
-        </p:txBody>
-      </p:sp>
-      <p:sp>
-        <p:nvSpPr>
-          <p:cNvPr id="5" name="Notes Placeholder 4"/>
-          <p:cNvSpPr>
-            <a:spLocks noGrp="1"/>
-          </p:cNvSpPr>
-          <p:nvPr>
-            <p:ph type="body" sz="quarter" idx="3"/>
-          </p:nvPr>
-        </p:nvSpPr>
-        <p:spPr>
-          <a:xfrm>
-            <a:off x="685800" y="4400550"/>
-            <a:ext cx="5486400" cy="3600450"/>
-          </a:xfrm>
-          <a:prstGeom prst="rect">
-            <a:avLst/>
-          </a:prstGeom>
-        </p:spPr>
-        <p:txBody>
-          <a:bodyPr vert="horz" lIns="91440" tIns="45720" rIns="91440" bIns="45720" rtlCol="0"/>
-          <a:lstStyle/>
-          <a:p>
-            <a:pPr lvl="0"/>
-            <a:r>
-              <a:rPr lang="en-US"/>
-              <a:t>Click to edit Master text styles</a:t>
-            </a:r>
-          </a:p>
-          <a:p>
-            <a:pPr lvl="1"/>
-            <a:r>
-              <a:rPr lang="en-US"/>
-              <a:t>Second level</a:t>
-            </a:r>
-          </a:p>
-          <a:p>
-            <a:pPr lvl="2"/>
-            <a:r>
-              <a:rPr lang="en-US"/>
-              <a:t>Third level</a:t>
-            </a:r>
-          </a:p>
-          <a:p>
-            <a:pPr lvl="3"/>
-            <a:r>
-              <a:rPr lang="en-US"/>
-              <a:t>Fourth level</a:t>
-            </a:r>
-          </a:p>
-          <a:p>
-            <a:pPr lvl="4"/>
-            <a:r>
-              <a:rPr lang="en-US"/>
-              <a:t>Fifth level</a:t>
-            </a:r>
-          </a:p>
-        </p:txBody>
-      </p:sp>
-      <p:sp>
-        <p:nvSpPr>
-          <p:cNvPr id="6" name="Footer Placeholder 5"/>
-          <p:cNvSpPr>
-            <a:spLocks noGrp="1"/>
-          </p:cNvSpPr>
-          <p:nvPr>
-            <p:ph type="ftr" sz="quarter" idx="4"/>
-          </p:nvPr>
-        </p:nvSpPr>
-        <p:spPr>
-          <a:xfrm>
-            <a:off x="0" y="8685213"/>
-            <a:ext cx="2971800" cy="458787"/>
-          </a:xfrm>
-          <a:prstGeom prst="rect">
-            <a:avLst/>
-          </a:prstGeom>
-        </p:spPr>
-        <p:txBody>
-          <a:bodyPr vert="horz" lIns="91440" tIns="45720" rIns="91440" bIns="45720" rtlCol="0" anchor="b"/>
-          <a:lstStyle>
-            <a:lvl1pPr algn="l">
-              <a:defRPr sz="1200"/>
-            </a:lvl1pPr>
-          </a:lstStyle>
-          <a:p>
-            <a:endParaRPr lang="en-US"/>
-          </a:p>
-        </p:txBody>
-      </p:sp>
-      <p:sp>
-        <p:nvSpPr>
-          <p:cNvPr id="7" name="Slide Number Placeholder 6"/>
-          <p:cNvSpPr>
-            <a:spLocks noGrp="1"/>
-          </p:cNvSpPr>
-          <p:nvPr>
-            <p:ph type="sldNum" sz="quarter" idx="5"/>
-          </p:nvPr>
-        </p:nvSpPr>
-        <p:spPr>
-          <a:xfrm>
-            <a:off x="3884613" y="8685213"/>
-            <a:ext cx="2971800" cy="458787"/>
-          </a:xfrm>
-          <a:prstGeom prst="rect">
-            <a:avLst/>
-          </a:prstGeom>
-        </p:spPr>
-        <p:txBody>
-          <a:bodyPr vert="horz" lIns="91440" tIns="45720" rIns="91440" bIns="45720" rtlCol="0" anchor="b"/>
-          <a:lstStyle>
-            <a:lvl1pPr algn="r">
-              <a:defRPr sz="1200"/>
-            </a:lvl1pPr>
-          </a:lstStyle>
-          <a:p>
-            <a:fld id="{CE5E9CC1-C706-0F49-92D6-E571CC5EEA8F}" type="slidenum">
-              <a:rPr lang="en-US"/>
-              <a:t>‹#›</a:t>
-            </a:fld>
-            <a:endParaRPr lang="en-US"/>
-          </a:p>
-        </p:txBody>
-      </p:sp>
     </p:spTree>
     <p:extLst>
       <p:ext uri="{BB962C8B-B14F-4D97-AF65-F5344CB8AC3E}">
-        <p14:creationId xmlns:p14="http://schemas.microsoft.com/office/powerpoint/2010/main" val="1024086991"/>
+        <p14:creationId xmlns:p14="http://schemas.microsoft.com/office/powerpoint/2010/main" val="3703805581"/>
       </p:ext>
     </p:extLst>
   </p:cSld>
@@ -577,7 +353,6 @@
 In one line: an AI agent checks every student-society expense claim in seconds, but it can’t pay anyone. Only the Union treasurer’s Ledger can release the money.
 [Scored here: clarity and presentation. Say the one-liner slowly; it is the thing judges should repeat.]</a:t>
             </a:r>
-            <a:endParaRPr lang="en-US" dirty="0"/>
           </a:p>
         </p:txBody>
       </p:sp>
@@ -669,7 +444,6 @@
 Then on-chain budgets, multi-signer approval for large claims, and a pilot with St Andrews societies.
 [Scored here: innovation and usefulness.]</a:t>
             </a:r>
-            <a:endParaRPr lang="en-US" dirty="0"/>
           </a:p>
         </p:txBody>
       </p:sp>
@@ -756,13 +530,12 @@
             <a:r>
               <a:rPr lang="en-US" dirty="0"/>
               <a:t>[~25s]
-Technical execution. Everything you saw is real code: over eight and a half thousand lines, written in four days.
+Technical execution. Everything you saw is real code: over eight and a half thousand lines, written in less than a week.
 We use four Ledger building blocks: the Device Management Kit, the Ethereum Signer Kit, clear signing, and Key Ring.
 It works end to end. A claim from the app, approved by the agent, clear-signed on an emulated Nano S Plus, and paid in real test USDC on Base Sepolia.
 Key Ring had no documented emulator route, so we built Ledger Sync for Speculos ourselves. Now the agent’s own API key is sealed by a Ledger.
 [Stat sources: line count of frontend/src, backend/src and backend/scripts on 13 Oct; first commit 10 Oct. Point at the 4 and the real payout.]</a:t>
             </a:r>
-            <a:endParaRPr lang="en-US" dirty="0"/>
           </a:p>
         </p:txBody>
       </p:sp>
@@ -850,12 +623,11 @@
               <a:rPr lang="en-US" dirty="0"/>
               <a:t>[~25s]
 Why this matters to Ledger. Ledger isn’t an add-on here: it is the only way money moves. No private key sits on any server, and every payout is confirmed on the device.
-One Ledger protects a whole union. St Andrews alone has nearly 200 societies.
+One Ledger protects a whole union, and St Andrews alone has nearly 200 societies.
 That makes it a route into universities: a partnership with each students’ union puts Ledger in front of young people.
 And committees change every year, so every year a new group of students learns what a hardware wallet is by using one. Today’s society treasurer is tomorrow’s Ledger customer.
 [Source: St Andrews Students’ Association freshers booklet 2026, “nearly 200 affiliated societies”.]</a:t>
             </a:r>
-            <a:endParaRPr lang="en-US" dirty="0"/>
           </a:p>
         </p:txBody>
       </p:sp>
@@ -942,12 +714,11 @@
             <a:r>
               <a:rPr lang="en-US" dirty="0"/>
               <a:t>[~25s]
-Innovation. This problem is everywhere: every university, every society, and it’s still paper forms and email. Students front the money and can wait weeks, sometimes months, to be paid back. One union in Manchester has over 400 societies.
+Innovation. This problem is everywhere: every university, every society, and it’s still paper forms and email. Students front the money and can wait weeks, sometimes months, to be paid back. One union in Manchester has over 400 societies – an organizational nightmare.
 Our idea is a new split of trust: the AI makes the decision on its own, so it’s fast, but it physically can’t pay. Only a person with a Ledger can.
 And we proved it: our attack demo turns the safeguards off on purpose. The AI is fooled, and the Ledger still catches it.
 [Source: University of Manchester Students’ Union, “over 400 societies”. “Months” is our committee members’ experience; say “can take”, not “always”.]</a:t>
             </a:r>
-            <a:endParaRPr lang="en-US" dirty="0"/>
           </a:p>
         </p:txBody>
       </p:sp>
@@ -1034,11 +805,10 @@
             <a:r>
               <a:rPr lang="en-US" dirty="0"/>
               <a:t>[~20s]
-User experience. A member submits a claim in under a minute, from their phone, with no app to install. Reading the receipt costs nothing and the photo never leaves the phone.
-If the agent says no, it says why, in plain words, and offers an appeal.
+User experience. A member submits a claim in under a minute on our website, with no app to install. Reading the receipt costs nothing and the photo never leaves the phone.
+If the agent says no, it explains why in plain words, and offers an appeal.
 And the Union treasurer has one simple job: check the flagged field, then press the button on the Ledger.</a:t>
             </a:r>
-            <a:endParaRPr lang="en-US" dirty="0"/>
           </a:p>
         </p:txBody>
       </p:sp>
@@ -1125,10 +895,36 @@
             <a:r>
               <a:rPr lang="en-US" dirty="0"/>
               <a:t>[~20s]
-New use cases. SocFi is one example of a pattern: an agent proposes, a person signs on hardware.
-Universities first, then charities, clubs, company expenses, grants and agent wallets.
-And Ledger does two jobs here, not one: it signs the payouts, and with Key Ring it holds the agent’s own secrets.</a:t>
-            </a:r>
+</a:t>
+            </a:r>
+            <a:r>
+              <a:rPr lang="en-GB" dirty="0" err="1"/>
+              <a:t>SocFi</a:t>
+            </a:r>
+            <a:r>
+              <a:rPr lang="en-GB" dirty="0"/>
+              <a:t> is just the beginning.</a:t>
+            </a:r>
+          </a:p>
+          <a:p>
+            <a:r>
+              <a:rPr lang="en-GB" dirty="0"/>
+              <a:t>Wherever AI agents handle money, they can propose the transaction — but a human stays in control.</a:t>
+            </a:r>
+          </a:p>
+          <a:p>
+            <a:r>
+              <a:rPr lang="en-GB" dirty="0"/>
+              <a:t>From university societies to charities, company expenses, grants and agent wallets.</a:t>
+            </a:r>
+          </a:p>
+          <a:p>
+            <a:r>
+              <a:rPr lang="en-GB" dirty="0"/>
+              <a:t>Ledger secures both sides: the agent’s secrets with Key Ring, and the money with hardware-backed approval.</a:t>
+            </a:r>
+          </a:p>
+          <a:p>
             <a:endParaRPr lang="en-US" dirty="0"/>
           </a:p>
         </p:txBody>
@@ -1220,7 +1016,6 @@
 And you can try it now on your phone at the link.
 [The links on this slide are clickable in the PDF and in PowerPoint.]</a:t>
             </a:r>
-            <a:endParaRPr lang="en-US" dirty="0"/>
           </a:p>
         </p:txBody>
       </p:sp>
@@ -1311,7 +1106,6 @@
 You can try it on your phone right now at the link. Thank you, we’d love your questions.
 [Likely questions: Why crypto and not bank transfer? (Instant, any day, programmable caps; members who want pounds stay on the normal route.) What if the treasurer just presses approve? (The device screen is their one job: amount and recipient. Multi-signer for large claims is on the roadmap.) Real Ledger? (Same DMK code; only the transport changes to WebHID.)]</a:t>
             </a:r>
-            <a:endParaRPr lang="en-US" dirty="0"/>
           </a:p>
         </p:txBody>
       </p:sp>
@@ -1403,7 +1197,6 @@
 Students who can’t afford that stop running events.
 [Scored here: usefulness. This is a real problem every judge recognises; keep it human.]</a:t>
             </a:r>
-            <a:endParaRPr lang="en-US" dirty="0"/>
           </a:p>
         </p:txBody>
       </p:sp>
@@ -1496,7 +1289,6 @@
 So we split the job.
 [Scored here: innovation. This is our insight: AI speed and hardware trust together. Pause on “So we split the job.”]</a:t>
             </a:r>
-            <a:endParaRPr lang="en-US" dirty="0"/>
           </a:p>
         </p:txBody>
       </p:sp>
@@ -1589,7 +1381,6 @@
 That dashed line is the boundary: the agent can propose anything, and execute nothing.
 [Scored here: technical execution and the “clearly named boundary” the brief asks for. Point at the dashed line.]</a:t>
             </a:r>
-            <a:endParaRPr lang="en-US" dirty="0"/>
           </a:p>
         </p:txBody>
       </p:sp>
@@ -1681,7 +1472,6 @@
 Then one press on the Ledger, and USDC moves from the Union’s wallet to the member’s.
 [Scored here: user experience. Mention it works on a phone, installable, no app store.]</a:t>
             </a:r>
-            <a:endParaRPr lang="en-US" dirty="0"/>
           </a:p>
         </p:txBody>
       </p:sp>
@@ -1775,7 +1565,6 @@
 And the agent’s own API key is encrypted with Ledger Key Ring, so even its credentials answer to a Ledger.
 [Scored here: relevance for Ledger and technical execution: “a concrete Ledger primitive actually implemented”.]</a:t>
             </a:r>
-            <a:endParaRPr lang="en-US" dirty="0"/>
           </a:p>
         </p:txBody>
       </p:sp>
@@ -1868,7 +1657,6 @@
 And if the treasurer’s laptop is compromised, the Ledger screen still shows the truth.
 [Scored here: technical execution and “a demonstration that device-backed trust matters”. Don’t read the table; pick two rows.]</a:t>
             </a:r>
-            <a:endParaRPr lang="en-US" dirty="0"/>
           </a:p>
         </p:txBody>
       </p:sp>
@@ -1958,7 +1746,6 @@
 The stack in one breath: a React web app for any phone with on-device OCR, a TypeScript agent on any OpenAI-compatible model, Ledger’s DMK and Signer Kit, and USDC on Base Sepolia.
 [Scored here: technical execution. Keep it to 15 seconds; the README has the detail.]</a:t>
             </a:r>
-            <a:endParaRPr lang="en-US" dirty="0"/>
           </a:p>
         </p:txBody>
       </p:sp>
@@ -2049,7 +1836,6 @@
 Students’ unions first, then charities, sports clubs, company expenses, grants, and agent wallets. Anywhere an agent could be talked into paying.
 [Scored here: new use cases for Ledger (10%) and relevance (20%). This is the slide to land the business case.]</a:t>
             </a:r>
-            <a:endParaRPr lang="en-US" dirty="0"/>
           </a:p>
         </p:txBody>
       </p:sp>
@@ -2127,6 +1913,7 @@
         <a:solidFill>
           <a:schemeClr val="tx1"/>
         </a:solidFill>
+        <a:effectLst/>
       </p:bgPr>
     </p:bg>
     <p:spTree>
@@ -2167,6 +1954,13 @@
             <a:prstDash val="solid"/>
           </a:ln>
         </p:spPr>
+        <p:txBody>
+          <a:bodyPr/>
+          <a:lstStyle/>
+          <a:p>
+            <a:endParaRPr lang="en-GB"/>
+          </a:p>
+        </p:txBody>
       </p:sp>
       <p:sp>
         <p:nvSpPr>
@@ -2192,6 +1986,13 @@
             <a:prstDash val="solid"/>
           </a:ln>
         </p:spPr>
+        <p:txBody>
+          <a:bodyPr/>
+          <a:lstStyle/>
+          <a:p>
+            <a:endParaRPr lang="en-GB"/>
+          </a:p>
+        </p:txBody>
       </p:sp>
       <p:sp>
         <p:nvSpPr>
@@ -2214,7 +2015,7 @@
           <a:bodyPr wrap="square" lIns="0" tIns="0" rIns="0" bIns="0" rtlCol="0" anchor="ctr"/>
           <a:lstStyle/>
           <a:p>
-            <a:pPr indent="0" marL="0">
+            <a:pPr marL="0" indent="0">
               <a:buNone/>
             </a:pPr>
             <a:r>
@@ -2253,11 +2054,11 @@
           <a:bodyPr wrap="square" lIns="0" tIns="0" rIns="0" bIns="0" rtlCol="0" anchor="ctr"/>
           <a:lstStyle/>
           <a:p>
-            <a:pPr indent="0" marL="0">
-              <a:buNone/>
-            </a:pPr>
-            <a:r>
-              <a:rPr lang="en-US" sz="900" spc="200" kern="0" dirty="0">
+            <a:pPr marL="0" indent="0">
+              <a:buNone/>
+            </a:pPr>
+            <a:r>
+              <a:rPr lang="en-US" sz="900" kern="0" spc="200" dirty="0">
                 <a:solidFill>
                   <a:schemeClr val="bg2"/>
                 </a:solidFill>
@@ -2274,9 +2075,11 @@
       <p:sp>
         <p:nvSpPr>
           <p:cNvPr id="6" name="Text 4"/>
-          <p:cNvSpPr/>
+          <p:cNvSpPr>
+            <a:spLocks noGrp="1"/>
+          </p:cNvSpPr>
           <p:nvPr>
-            <p:ph idx="104" type="body" hasCustomPrompt="1"/>
+            <p:ph type="body" idx="104" hasCustomPrompt="1"/>
           </p:nvPr>
         </p:nvSpPr>
         <p:spPr>
@@ -2293,9 +2096,9 @@
         <p:txBody>
           <a:bodyPr wrap="square" rtlCol="0"/>
           <a:lstStyle>
-            <a:lvl1pPr indent="0" marL="0">
-              <a:buNone/>
-              <a:defRPr lang="en-US" sz="1200" spc="300" kern="0" dirty="0">
+            <a:lvl1pPr marL="0" indent="0">
+              <a:buNone/>
+              <a:defRPr lang="en-US" sz="1200" kern="0" spc="300" dirty="0">
                 <a:solidFill>
                   <a:schemeClr val="accent1"/>
                 </a:solidFill>
@@ -2306,7 +2109,7 @@
             </a:lvl1pPr>
           </a:lstStyle>
           <a:p>
-            <a:pPr indent="0" marL="0">
+            <a:pPr marL="0" indent="0">
               <a:buNone/>
             </a:pPr>
             <a:endParaRPr lang="en-US" sz="1200" dirty="0"/>
@@ -2316,9 +2119,11 @@
       <p:sp>
         <p:nvSpPr>
           <p:cNvPr id="7" name="Text 4"/>
-          <p:cNvSpPr/>
+          <p:cNvSpPr>
+            <a:spLocks noGrp="1"/>
+          </p:cNvSpPr>
           <p:nvPr>
-            <p:ph idx="105" type="title" hasCustomPrompt="1"/>
+            <p:ph type="title" idx="105" hasCustomPrompt="1"/>
           </p:nvPr>
         </p:nvSpPr>
         <p:spPr>
@@ -2335,7 +2140,7 @@
         <p:txBody>
           <a:bodyPr wrap="square" rtlCol="0"/>
           <a:lstStyle>
-            <a:lvl1pPr algn="l" indent="0" marL="0">
+            <a:lvl1pPr marL="0" indent="0" algn="l">
               <a:buNone/>
               <a:defRPr lang="en-US" sz="3200" b="1" dirty="0">
                 <a:solidFill>
@@ -2348,7 +2153,7 @@
             </a:lvl1pPr>
           </a:lstStyle>
           <a:p>
-            <a:pPr algn="l" indent="0" marL="0">
+            <a:pPr marL="0" indent="0" algn="l">
               <a:buNone/>
             </a:pPr>
             <a:endParaRPr lang="en-US" sz="3200" dirty="0"/>
@@ -2375,7 +2180,7 @@
           </a:prstGeom>
           <a:extLst>
             <a:ext uri="{C572A759-6A51-4108-AA02-DFA0A04FC94B}">
-              <ma14:wrappingTextBoxFlag xmlns:ma14="http://schemas.microsoft.com/office/mac/drawingml/2011/main" val="0"/>
+              <ma14:wrappingTextBoxFlag xmlns:ma14="http://schemas.microsoft.com/office/mac/drawingml/2011/main" xmlns="" val="0"/>
             </a:ext>
           </a:extLst>
         </p:spPr>
@@ -2396,8 +2201,8 @@
           <a:p>
             <a:pPr algn="r"/>
             <a:fld id="{F7021451-1387-4CA6-816F-3879F97B5CBC}" type="slidenum">
-              <a:rPr b="0" lang="en-US"/>
-              <a:t>1002</a:t>
+              <a:rPr lang="en-US" b="0"/>
+              <a:t>‹#›</a:t>
             </a:fld>
             <a:endParaRPr lang="en-US"/>
           </a:p>
@@ -2419,6 +2224,7 @@
         <a:solidFill>
           <a:schemeClr val="tx1"/>
         </a:solidFill>
+        <a:effectLst/>
       </p:bgPr>
     </p:bg>
     <p:spTree>
@@ -2459,6 +2265,13 @@
             <a:prstDash val="solid"/>
           </a:ln>
         </p:spPr>
+        <p:txBody>
+          <a:bodyPr/>
+          <a:lstStyle/>
+          <a:p>
+            <a:endParaRPr lang="en-GB"/>
+          </a:p>
+        </p:txBody>
       </p:sp>
       <p:sp>
         <p:nvSpPr>
@@ -2484,6 +2297,13 @@
             <a:prstDash val="solid"/>
           </a:ln>
         </p:spPr>
+        <p:txBody>
+          <a:bodyPr/>
+          <a:lstStyle/>
+          <a:p>
+            <a:endParaRPr lang="en-GB"/>
+          </a:p>
+        </p:txBody>
       </p:sp>
       <p:sp>
         <p:nvSpPr>
@@ -2506,7 +2326,7 @@
           <a:bodyPr wrap="square" lIns="0" tIns="0" rIns="0" bIns="0" rtlCol="0" anchor="ctr"/>
           <a:lstStyle/>
           <a:p>
-            <a:pPr indent="0" marL="0">
+            <a:pPr marL="0" indent="0">
               <a:buNone/>
             </a:pPr>
             <a:r>
@@ -2545,11 +2365,11 @@
           <a:bodyPr wrap="square" lIns="0" tIns="0" rIns="0" bIns="0" rtlCol="0" anchor="ctr"/>
           <a:lstStyle/>
           <a:p>
-            <a:pPr indent="0" marL="0">
-              <a:buNone/>
-            </a:pPr>
-            <a:r>
-              <a:rPr lang="en-US" sz="900" spc="200" kern="0" dirty="0">
+            <a:pPr marL="0" indent="0">
+              <a:buNone/>
+            </a:pPr>
+            <a:r>
+              <a:rPr lang="en-US" sz="900" kern="0" spc="200" dirty="0">
                 <a:solidFill>
                   <a:schemeClr val="bg2"/>
                 </a:solidFill>
@@ -2583,7 +2403,7 @@
           </a:prstGeom>
           <a:extLst>
             <a:ext uri="{C572A759-6A51-4108-AA02-DFA0A04FC94B}">
-              <ma14:wrappingTextBoxFlag xmlns:ma14="http://schemas.microsoft.com/office/mac/drawingml/2011/main" val="0"/>
+              <ma14:wrappingTextBoxFlag xmlns:ma14="http://schemas.microsoft.com/office/mac/drawingml/2011/main" xmlns="" val="0"/>
             </a:ext>
           </a:extLst>
         </p:spPr>
@@ -2604,8 +2424,8 @@
           <a:p>
             <a:pPr algn="r"/>
             <a:fld id="{F7021451-1387-4CA6-816F-3879F97B5CBC}" type="slidenum">
-              <a:rPr b="0" lang="en-US"/>
-              <a:t>1003</a:t>
+              <a:rPr lang="en-US" b="0"/>
+              <a:t>‹#›</a:t>
             </a:fld>
             <a:endParaRPr lang="en-US"/>
           </a:p>
@@ -2627,6 +2447,7 @@
         <a:solidFill>
           <a:schemeClr val="tx1"/>
         </a:solidFill>
+        <a:effectLst/>
       </p:bgPr>
     </p:bg>
     <p:spTree>
@@ -2654,6 +2475,11 @@
 <file path=ppt/slideMasters/slideMaster1.xml><?xml version="1.0" encoding="utf-8"?>
 <p:sldMaster xmlns:a="http://schemas.openxmlformats.org/drawingml/2006/main" xmlns:r="http://schemas.openxmlformats.org/officeDocument/2006/relationships" xmlns:p="http://schemas.openxmlformats.org/presentationml/2006/main">
   <p:cSld>
+    <p:bg>
+      <p:bgRef idx="1001">
+        <a:schemeClr val="bg1"/>
+      </p:bgRef>
+    </p:bg>
     <p:spTree>
       <p:nvGrpSpPr>
         <p:cNvPr id="1" name=""/>
@@ -2688,7 +2514,7 @@
           </a:prstGeom>
           <a:extLst>
             <a:ext uri="{C572A759-6A51-4108-AA02-DFA0A04FC94B}">
-              <ma14:wrappingTextBoxFlag xmlns:ma14="http://schemas.microsoft.com/office/mac/drawingml/2011/main" val="0"/>
+              <ma14:wrappingTextBoxFlag xmlns:ma14="http://schemas.microsoft.com/office/mac/drawingml/2011/main" xmlns="" val="0"/>
             </a:ext>
           </a:extLst>
         </p:spPr>
@@ -2709,8 +2535,8 @@
           <a:p>
             <a:pPr algn="r"/>
             <a:fld id="{F7021451-1387-4CA6-816F-3879F97B5CBC}" type="slidenum">
-              <a:rPr b="0" lang="en-US"/>
-              <a:t>null</a:t>
+              <a:rPr lang="en-US" b="0"/>
+              <a:t>‹#›</a:t>
             </a:fld>
             <a:endParaRPr lang="en-US"/>
           </a:p>
@@ -3020,6 +2846,13 @@
             <a:prstDash val="solid"/>
           </a:ln>
         </p:spPr>
+        <p:txBody>
+          <a:bodyPr/>
+          <a:lstStyle/>
+          <a:p>
+            <a:endParaRPr lang="en-GB"/>
+          </a:p>
+        </p:txBody>
       </p:sp>
       <p:sp>
         <p:nvSpPr>
@@ -3045,6 +2878,13 @@
             <a:prstDash val="solid"/>
           </a:ln>
         </p:spPr>
+        <p:txBody>
+          <a:bodyPr/>
+          <a:lstStyle/>
+          <a:p>
+            <a:endParaRPr lang="en-GB"/>
+          </a:p>
+        </p:txBody>
       </p:sp>
       <p:sp>
         <p:nvSpPr>
@@ -3067,11 +2907,11 @@
           <a:bodyPr wrap="square" lIns="0" tIns="0" rIns="0" bIns="0" rtlCol="0" anchor="ctr"/>
           <a:lstStyle/>
           <a:p>
-            <a:pPr indent="0" marL="0">
-              <a:buNone/>
-            </a:pPr>
-            <a:r>
-              <a:rPr lang="en-US" sz="1200" spc="300" kern="0" dirty="0">
+            <a:pPr marL="0" indent="0">
+              <a:buNone/>
+            </a:pPr>
+            <a:r>
+              <a:rPr lang="en-US" sz="1200" kern="0" spc="300" dirty="0">
                 <a:solidFill>
                   <a:schemeClr val="accent1"/>
                 </a:solidFill>
@@ -3106,7 +2946,7 @@
           <a:bodyPr wrap="square" lIns="0" tIns="0" rIns="0" bIns="0" rtlCol="0" anchor="t"/>
           <a:lstStyle/>
           <a:p>
-            <a:pPr indent="0" marL="0">
+            <a:pPr marL="0" indent="0">
               <a:buNone/>
             </a:pPr>
             <a:r>
@@ -3145,7 +2985,7 @@
           <a:bodyPr wrap="square" lIns="0" tIns="0" rIns="0" bIns="0" rtlCol="0" anchor="t"/>
           <a:lstStyle/>
           <a:p>
-            <a:pPr indent="0" marL="0">
+            <a:pPr marL="0" indent="0">
               <a:buNone/>
             </a:pPr>
             <a:r>
@@ -3159,9 +2999,6 @@
               </a:rPr>
               <a:t>Society Finance, </a:t>
             </a:r>
-            <a:pPr indent="0" marL="0">
-              <a:buNone/>
-            </a:pPr>
             <a:r>
               <a:rPr lang="en-US" sz="3000" b="1" dirty="0">
                 <a:solidFill>
@@ -3198,7 +3035,7 @@
           <a:bodyPr wrap="square" lIns="0" tIns="0" rIns="0" bIns="0" rtlCol="0" anchor="t"/>
           <a:lstStyle/>
           <a:p>
-            <a:pPr indent="0" marL="0">
+            <a:pPr marL="0" indent="0">
               <a:lnSpc>
                 <a:spcPct val="115000"/>
               </a:lnSpc>
@@ -3227,8 +3064,8 @@
         </p:nvSpPr>
         <p:spPr>
           <a:xfrm>
-            <a:off x="548640" y="5989320"/>
-            <a:ext cx="6858000" cy="320040"/>
+            <a:off x="1783080" y="5596128"/>
+            <a:ext cx="5943600" cy="658368"/>
           </a:xfrm>
           <a:prstGeom prst="rect">
             <a:avLst/>
@@ -3240,57 +3077,77 @@
           <a:bodyPr wrap="square" lIns="0" tIns="0" rIns="0" bIns="0" rtlCol="0" anchor="t"/>
           <a:lstStyle/>
           <a:p>
-            <a:pPr indent="0" marL="0">
+            <a:pPr marL="0" indent="0">
+              <a:spcAft>
+                <a:spcPts val="400"/>
+              </a:spcAft>
               <a:buNone/>
             </a:pPr>
             <a:r>
               <a:rPr lang="en-US" sz="1200" dirty="0">
                 <a:solidFill>
-                  <a:schemeClr val="bg2"/>
+                  <a:schemeClr val="accent6"/>
                 </a:solidFill>
                 <a:latin typeface="Consolas" pitchFamily="34" charset="0"/>
                 <a:ea typeface="Consolas" pitchFamily="34" charset="-122"/>
                 <a:cs typeface="Consolas" pitchFamily="34" charset="-120"/>
               </a:rPr>
-              <a:t>[Team / club name]  ·  [Presenter 1]  ·  [Presenter 2]</a:t>
+              <a:t>St Andrews BlockChain Society</a:t>
             </a:r>
             <a:endParaRPr lang="en-US" sz="1200" dirty="0"/>
           </a:p>
-        </p:txBody>
-      </p:sp>
-      <p:sp>
-        <p:nvSpPr>
-          <p:cNvPr id="9" name="Text 7"/>
-          <p:cNvSpPr txBox="1"/>
-          <p:nvPr/>
-        </p:nvSpPr>
-        <p:spPr>
-          <a:xfrm>
-            <a:off x="548640" y="5577840"/>
-            <a:ext cx="6858000" cy="320040"/>
-          </a:xfrm>
-          <a:prstGeom prst="rect">
-            <a:avLst/>
-          </a:prstGeom>
-          <a:noFill/>
-          <a:ln/>
-        </p:spPr>
-        <p:txBody>
-          <a:bodyPr wrap="square" lIns="0" tIns="0" rIns="0" bIns="0" rtlCol="0" anchor="t"/>
-          <a:lstStyle/>
-          <a:p>
-            <a:pPr indent="0" marL="0">
-              <a:buNone/>
-            </a:pPr>
-            <a:r>
-              <a:rPr lang="en-US" sz="1200" u="sng" dirty="0">
-                <a:solidFill>
-                  <a:schemeClr val="accent1"/>
+          <a:p>
+            <a:pPr marL="0" indent="0">
+              <a:buNone/>
+            </a:pPr>
+            <a:r>
+              <a:rPr lang="en-US" sz="1200" dirty="0">
+                <a:solidFill>
+                  <a:schemeClr val="bg2"/>
                 </a:solidFill>
                 <a:latin typeface="Consolas" pitchFamily="34" charset="0"/>
                 <a:ea typeface="Consolas" pitchFamily="34" charset="-122"/>
                 <a:cs typeface="Consolas" pitchFamily="34" charset="-120"/>
-                <a:hlinkClick r:id="rId1" invalidUrl="" action="" tgtFrame="" tooltip="https://github.com/tamrachan/ledger-hackathon" history="1" highlightClick="0" endSnd="0">
+              </a:rPr>
+              <a:t>Hugo Okada  ·  Edison Zhou  ·  Tamra Chan  ·  Alex Prunea</a:t>
+            </a:r>
+            <a:endParaRPr lang="en-US" sz="1200" dirty="0"/>
+          </a:p>
+        </p:txBody>
+      </p:sp>
+      <p:sp>
+        <p:nvSpPr>
+          <p:cNvPr id="9" name="Text 7"/>
+          <p:cNvSpPr txBox="1"/>
+          <p:nvPr/>
+        </p:nvSpPr>
+        <p:spPr>
+          <a:xfrm>
+            <a:off x="1783080" y="5266944"/>
+            <a:ext cx="5943600" cy="320040"/>
+          </a:xfrm>
+          <a:prstGeom prst="rect">
+            <a:avLst/>
+          </a:prstGeom>
+          <a:noFill/>
+          <a:ln/>
+        </p:spPr>
+        <p:txBody>
+          <a:bodyPr wrap="square" lIns="0" tIns="0" rIns="0" bIns="0" rtlCol="0" anchor="t"/>
+          <a:lstStyle/>
+          <a:p>
+            <a:pPr marL="0" indent="0">
+              <a:buNone/>
+            </a:pPr>
+            <a:r>
+              <a:rPr lang="en-US" sz="1200" u="sng" dirty="0">
+                <a:solidFill>
+                  <a:schemeClr val="accent1"/>
+                </a:solidFill>
+                <a:latin typeface="Consolas" pitchFamily="34" charset="0"/>
+                <a:ea typeface="Consolas" pitchFamily="34" charset="-122"/>
+                <a:cs typeface="Consolas" pitchFamily="34" charset="-120"/>
+                <a:hlinkClick r:id="rId3" tooltip="https://github.com/tamrachan/soc-fi">
                   <a:extLst>
                     <a:ext uri="{A12FA001-AC4F-418D-AE19-62706E023703}">
                       <ahyp:hlinkClr xmlns:ahyp="http://schemas.microsoft.com/office/drawing/2018/hyperlinkcolor" val="tx"/>
@@ -3298,7 +3155,7 @@
                   </a:extLst>
                 </a:hlinkClick>
               </a:rPr>
-              <a:t>github.com/tamrachan/ledger-hackathon</a:t>
+              <a:t>github.com/tamrachan/soc-fi</a:t>
             </a:r>
             <a:endParaRPr lang="en-US" sz="1200" dirty="0"/>
           </a:p>
@@ -3306,14 +3163,14 @@
       </p:sp>
       <p:pic>
         <p:nvPicPr>
-          <p:cNvPr id="10" name="App on a phone" descr="C:\Users\tamra\AppData\Local\Temp\claude\c--Users-tamra-Documents-Projects-ledger-hackathon\fddb4cb0-085f-44b4-8227-1530ce90967d\scratchpad\deck\shots\c-phone.png">    </p:cNvPr>
+          <p:cNvPr id="10" name="App on a phone" descr="C:\Users\tamra\AppData\Local\Temp\claude\c--Users-tamra-Documents-Projects-ledger-hackathon\fddb4cb0-085f-44b4-8227-1530ce90967d\scratchpad\deck\shots\c-phone.png"/>
           <p:cNvPicPr>
             <a:picLocks noChangeAspect="1"/>
           </p:cNvPicPr>
           <p:nvPr/>
         </p:nvPicPr>
         <p:blipFill>
-          <a:blip r:embed="rId2"/>
+          <a:blip r:embed="rId4"/>
           <a:stretch>
             <a:fillRect/>
           </a:stretch>
@@ -3322,6 +3179,32 @@
           <a:xfrm>
             <a:off x="8458200" y="502920"/>
             <a:ext cx="3044067" cy="5852160"/>
+          </a:xfrm>
+          <a:prstGeom prst="rect">
+            <a:avLst/>
+          </a:prstGeom>
+        </p:spPr>
+      </p:pic>
+      <p:pic>
+        <p:nvPicPr>
+          <p:cNvPr id="90" name="QR code: repo" descr="QR code linking to github.com/tamrachan/soc-fi">
+            <a:hlinkClick r:id="rId3"/>
+          </p:cNvPr>
+          <p:cNvPicPr>
+            <a:picLocks noChangeAspect="1"/>
+          </p:cNvPicPr>
+          <p:nvPr/>
+        </p:nvPicPr>
+        <p:blipFill>
+          <a:blip r:embed="rId5"/>
+          <a:stretch>
+            <a:fillRect/>
+          </a:stretch>
+        </p:blipFill>
+        <p:spPr>
+          <a:xfrm>
+            <a:off x="548640" y="5230368"/>
+            <a:ext cx="1051560" cy="1051560"/>
           </a:xfrm>
           <a:prstGeom prst="rect">
             <a:avLst/>
@@ -3356,9 +3239,11 @@
       <p:sp>
         <p:nvSpPr>
           <p:cNvPr id="2" name="Text 4"/>
-          <p:cNvSpPr/>
+          <p:cNvSpPr>
+            <a:spLocks noGrp="1"/>
+          </p:cNvSpPr>
           <p:nvPr>
-            <p:ph idx="104" type="body" hasCustomPrompt="1"/>
+            <p:ph type="body" idx="104" hasCustomPrompt="1"/>
           </p:nvPr>
         </p:nvSpPr>
         <p:spPr>
@@ -3376,11 +3261,11 @@
           <a:bodyPr wrap="square" lIns="0" tIns="0" rIns="0" bIns="0" rtlCol="0" anchor="ctr"/>
           <a:lstStyle/>
           <a:p>
-            <a:pPr indent="0" marL="0">
-              <a:buNone/>
-            </a:pPr>
-            <a:r>
-              <a:rPr lang="en-US" sz="1200" spc="300" kern="0" dirty="0">
+            <a:pPr marL="0" indent="0">
+              <a:buNone/>
+            </a:pPr>
+            <a:r>
+              <a:rPr lang="en-US" sz="1200" kern="0" spc="300" dirty="0">
                 <a:solidFill>
                   <a:schemeClr val="accent1"/>
                 </a:solidFill>
@@ -3397,9 +3282,11 @@
       <p:sp>
         <p:nvSpPr>
           <p:cNvPr id="3" name="Text 4"/>
-          <p:cNvSpPr/>
+          <p:cNvSpPr>
+            <a:spLocks noGrp="1"/>
+          </p:cNvSpPr>
           <p:nvPr>
-            <p:ph idx="105" type="title" hasCustomPrompt="1"/>
+            <p:ph type="title" idx="105" hasCustomPrompt="1"/>
           </p:nvPr>
         </p:nvSpPr>
         <p:spPr>
@@ -3417,7 +3304,7 @@
           <a:bodyPr wrap="square" lIns="0" tIns="0" rIns="0" bIns="0" rtlCol="0" anchor="t"/>
           <a:lstStyle/>
           <a:p>
-            <a:pPr algn="l" indent="0" marL="0">
+            <a:pPr marL="0" indent="0" algn="l">
               <a:buNone/>
             </a:pPr>
             <a:r>
@@ -3457,6 +3344,13 @@
             <a:prstDash val="solid"/>
           </a:ln>
         </p:spPr>
+        <p:txBody>
+          <a:bodyPr/>
+          <a:lstStyle/>
+          <a:p>
+            <a:endParaRPr lang="en-GB"/>
+          </a:p>
+        </p:txBody>
       </p:sp>
       <p:sp>
         <p:nvSpPr>
@@ -3482,6 +3376,13 @@
             <a:prstDash val="solid"/>
           </a:ln>
         </p:spPr>
+        <p:txBody>
+          <a:bodyPr/>
+          <a:lstStyle/>
+          <a:p>
+            <a:endParaRPr lang="en-GB"/>
+          </a:p>
+        </p:txBody>
       </p:sp>
       <p:sp>
         <p:nvSpPr>
@@ -3504,7 +3405,7 @@
           <a:bodyPr wrap="square" lIns="0" tIns="0" rIns="0" bIns="0" rtlCol="0" anchor="t"/>
           <a:lstStyle/>
           <a:p>
-            <a:pPr indent="0" marL="0">
+            <a:pPr marL="0" indent="0">
               <a:buNone/>
             </a:pPr>
             <a:r>
@@ -3652,6 +3553,13 @@
             <a:prstDash val="solid"/>
           </a:ln>
         </p:spPr>
+        <p:txBody>
+          <a:bodyPr/>
+          <a:lstStyle/>
+          <a:p>
+            <a:endParaRPr lang="en-GB"/>
+          </a:p>
+        </p:txBody>
       </p:sp>
       <p:sp>
         <p:nvSpPr>
@@ -3674,7 +3582,7 @@
           <a:bodyPr wrap="square" lIns="0" tIns="0" rIns="0" bIns="0" rtlCol="0" anchor="t"/>
           <a:lstStyle/>
           <a:p>
-            <a:pPr indent="0" marL="0">
+            <a:pPr marL="0" indent="0">
               <a:buNone/>
             </a:pPr>
             <a:r>
@@ -3822,6 +3730,13 @@
             <a:prstDash val="solid"/>
           </a:ln>
         </p:spPr>
+        <p:txBody>
+          <a:bodyPr/>
+          <a:lstStyle/>
+          <a:p>
+            <a:endParaRPr lang="en-GB"/>
+          </a:p>
+        </p:txBody>
       </p:sp>
       <p:sp>
         <p:nvSpPr>
@@ -3844,7 +3759,7 @@
           <a:bodyPr wrap="square" lIns="0" tIns="0" rIns="0" bIns="0" rtlCol="0" anchor="t"/>
           <a:lstStyle/>
           <a:p>
-            <a:pPr indent="0" marL="0">
+            <a:pPr marL="0" indent="0">
               <a:buNone/>
             </a:pPr>
             <a:r>
@@ -3988,7 +3903,7 @@
           </a:prstGeom>
           <a:extLst>
             <a:ext uri="{C572A759-6A51-4108-AA02-DFA0A04FC94B}">
-              <ma14:wrappingTextBoxFlag xmlns:ma14="http://schemas.microsoft.com/office/mac/drawingml/2011/main" val="0"/>
+              <ma14:wrappingTextBoxFlag xmlns:ma14="http://schemas.microsoft.com/office/mac/drawingml/2011/main" xmlns="" val="0"/>
             </a:ext>
           </a:extLst>
         </p:spPr>
@@ -4009,7 +3924,7 @@
           <a:p>
             <a:pPr algn="r"/>
             <a:fld id="{F7021451-1387-4CA6-816F-3879F97B5CBC}" type="slidenum">
-              <a:rPr b="0" lang="en-US"/>
+              <a:rPr lang="en-US" b="0"/>
               <a:t>10</a:t>
             </a:fld>
             <a:endParaRPr lang="en-US"/>
@@ -4044,9 +3959,11 @@
       <p:sp>
         <p:nvSpPr>
           <p:cNvPr id="2" name="Text 4"/>
-          <p:cNvSpPr/>
+          <p:cNvSpPr>
+            <a:spLocks noGrp="1"/>
+          </p:cNvSpPr>
           <p:nvPr>
-            <p:ph idx="104" type="body" hasCustomPrompt="1"/>
+            <p:ph type="body" idx="104" hasCustomPrompt="1"/>
           </p:nvPr>
         </p:nvSpPr>
         <p:spPr>
@@ -4064,11 +3981,11 @@
           <a:bodyPr wrap="square" lIns="0" tIns="0" rIns="0" bIns="0" rtlCol="0" anchor="ctr"/>
           <a:lstStyle/>
           <a:p>
-            <a:pPr indent="0" marL="0">
-              <a:buNone/>
-            </a:pPr>
-            <a:r>
-              <a:rPr lang="en-US" sz="1200" spc="300" kern="0" dirty="0">
+            <a:pPr marL="0" indent="0">
+              <a:buNone/>
+            </a:pPr>
+            <a:r>
+              <a:rPr lang="en-US" sz="1200" kern="0" spc="300" dirty="0">
                 <a:solidFill>
                   <a:schemeClr val="accent1"/>
                 </a:solidFill>
@@ -4085,9 +4002,11 @@
       <p:sp>
         <p:nvSpPr>
           <p:cNvPr id="3" name="Text 4"/>
-          <p:cNvSpPr/>
+          <p:cNvSpPr>
+            <a:spLocks noGrp="1"/>
+          </p:cNvSpPr>
           <p:nvPr>
-            <p:ph idx="105" type="title" hasCustomPrompt="1"/>
+            <p:ph type="title" idx="105" hasCustomPrompt="1"/>
           </p:nvPr>
         </p:nvSpPr>
         <p:spPr>
@@ -4105,7 +4024,7 @@
           <a:bodyPr wrap="square" lIns="0" tIns="0" rIns="0" bIns="0" rtlCol="0" anchor="t"/>
           <a:lstStyle/>
           <a:p>
-            <a:pPr algn="l" indent="0" marL="0">
+            <a:pPr marL="0" indent="0" algn="l">
               <a:buNone/>
             </a:pPr>
             <a:r>
@@ -4149,6 +4068,13 @@
             <a:prstDash val="solid"/>
           </a:ln>
         </p:spPr>
+        <p:txBody>
+          <a:bodyPr/>
+          <a:lstStyle/>
+          <a:p>
+            <a:endParaRPr lang="en-GB"/>
+          </a:p>
+        </p:txBody>
       </p:sp>
       <p:sp>
         <p:nvSpPr>
@@ -4173,7 +4099,7 @@
           </a:bodyPr>
           <a:lstStyle/>
           <a:p>
-            <a:pPr indent="0" marL="0">
+            <a:pPr marL="0" indent="0">
               <a:buNone/>
             </a:pPr>
             <a:r>
@@ -4212,7 +4138,7 @@
           <a:bodyPr wrap="square" lIns="0" tIns="0" rIns="0" bIns="0" rtlCol="0" anchor="t"/>
           <a:lstStyle/>
           <a:p>
-            <a:pPr indent="0" marL="0">
+            <a:pPr marL="0" indent="0">
               <a:lnSpc>
                 <a:spcPct val="105000"/>
               </a:lnSpc>
@@ -4259,6 +4185,13 @@
             <a:prstDash val="solid"/>
           </a:ln>
         </p:spPr>
+        <p:txBody>
+          <a:bodyPr/>
+          <a:lstStyle/>
+          <a:p>
+            <a:endParaRPr lang="en-GB"/>
+          </a:p>
+        </p:txBody>
       </p:sp>
       <p:sp>
         <p:nvSpPr>
@@ -4283,7 +4216,7 @@
           </a:bodyPr>
           <a:lstStyle/>
           <a:p>
-            <a:pPr indent="0" marL="0">
+            <a:pPr marL="0" indent="0">
               <a:buNone/>
             </a:pPr>
             <a:r>
@@ -4322,7 +4255,7 @@
           <a:bodyPr wrap="square" lIns="0" tIns="0" rIns="0" bIns="0" rtlCol="0" anchor="t"/>
           <a:lstStyle/>
           <a:p>
-            <a:pPr indent="0" marL="0">
+            <a:pPr marL="0" indent="0">
               <a:lnSpc>
                 <a:spcPct val="105000"/>
               </a:lnSpc>
@@ -4369,6 +4302,13 @@
             <a:prstDash val="solid"/>
           </a:ln>
         </p:spPr>
+        <p:txBody>
+          <a:bodyPr/>
+          <a:lstStyle/>
+          <a:p>
+            <a:endParaRPr lang="en-GB"/>
+          </a:p>
+        </p:txBody>
       </p:sp>
       <p:sp>
         <p:nvSpPr>
@@ -4393,7 +4333,7 @@
           </a:bodyPr>
           <a:lstStyle/>
           <a:p>
-            <a:pPr indent="0" marL="0">
+            <a:pPr marL="0" indent="0">
               <a:buNone/>
             </a:pPr>
             <a:r>
@@ -4432,7 +4372,7 @@
           <a:bodyPr wrap="square" lIns="0" tIns="0" rIns="0" bIns="0" rtlCol="0" anchor="t"/>
           <a:lstStyle/>
           <a:p>
-            <a:pPr indent="0" marL="0">
+            <a:pPr marL="0" indent="0">
               <a:lnSpc>
                 <a:spcPct val="105000"/>
               </a:lnSpc>
@@ -4479,6 +4419,13 @@
             <a:prstDash val="solid"/>
           </a:ln>
         </p:spPr>
+        <p:txBody>
+          <a:bodyPr/>
+          <a:lstStyle/>
+          <a:p>
+            <a:endParaRPr lang="en-GB"/>
+          </a:p>
+        </p:txBody>
       </p:sp>
       <p:sp>
         <p:nvSpPr>
@@ -4503,7 +4450,7 @@
           </a:bodyPr>
           <a:lstStyle/>
           <a:p>
-            <a:pPr indent="0" marL="0">
+            <a:pPr marL="0" indent="0">
               <a:buNone/>
             </a:pPr>
             <a:r>
@@ -4542,7 +4489,7 @@
           <a:bodyPr wrap="square" lIns="0" tIns="0" rIns="0" bIns="0" rtlCol="0" anchor="t"/>
           <a:lstStyle/>
           <a:p>
-            <a:pPr indent="0" marL="0">
+            <a:pPr marL="0" indent="0">
               <a:lnSpc>
                 <a:spcPct val="105000"/>
               </a:lnSpc>
@@ -4587,17 +4534,24 @@
             <a:prstDash val="solid"/>
           </a:ln>
         </p:spPr>
+        <p:txBody>
+          <a:bodyPr/>
+          <a:lstStyle/>
+          <a:p>
+            <a:endParaRPr lang="en-GB"/>
+          </a:p>
+        </p:txBody>
       </p:sp>
       <p:pic>
         <p:nvPicPr>
-          <p:cNvPr id="17" name="Proof icon 1" descr="preencoded.png">    </p:cNvPr>
+          <p:cNvPr id="17" name="Proof icon 1" descr="preencoded.png"/>
           <p:cNvPicPr>
             <a:picLocks noChangeAspect="1"/>
           </p:cNvPicPr>
           <p:nvPr/>
         </p:nvPicPr>
         <p:blipFill>
-          <a:blip r:embed="rId1"/>
+          <a:blip r:embed="rId3"/>
           <a:stretch>
             <a:fillRect/>
           </a:stretch>
@@ -4633,7 +4587,7 @@
           <a:bodyPr wrap="square" lIns="0" tIns="0" rIns="0" bIns="0" rtlCol="0" anchor="ctr"/>
           <a:lstStyle/>
           <a:p>
-            <a:pPr indent="0" marL="0">
+            <a:pPr marL="0" indent="0">
               <a:lnSpc>
                 <a:spcPct val="105000"/>
               </a:lnSpc>
@@ -4650,12 +4604,6 @@
               </a:rPr>
               <a:t>End to end, for real. </a:t>
             </a:r>
-            <a:pPr indent="0" marL="0">
-              <a:lnSpc>
-                <a:spcPct val="105000"/>
-              </a:lnSpc>
-              <a:buNone/>
-            </a:pPr>
             <a:r>
               <a:rPr lang="en-US" sz="1550" dirty="0">
                 <a:solidFill>
@@ -4665,7 +4613,28 @@
                 <a:ea typeface="Calibri" pitchFamily="34" charset="-122"/>
                 <a:cs typeface="Calibri" pitchFamily="34" charset="-120"/>
               </a:rPr>
-              <a:t>A claim from the app, approved by the agent, clear-signed on an emulated Ledger Nano S Plus and paid in test USDC on Base Sepolia.</a:t>
+              <a:t>A claim from the app, approved by the agent, clear-signed on an emulated Ledger Nano S Plus and paid </a:t>
+            </a:r>
+            <a:br>
+              <a:rPr lang="en-US" sz="1550" dirty="0">
+                <a:solidFill>
+                  <a:schemeClr val="bg2"/>
+                </a:solidFill>
+                <a:latin typeface="Calibri" pitchFamily="34" charset="0"/>
+                <a:ea typeface="Calibri" pitchFamily="34" charset="-122"/>
+                <a:cs typeface="Calibri" pitchFamily="34" charset="-120"/>
+              </a:rPr>
+            </a:br>
+            <a:r>
+              <a:rPr lang="en-US" sz="1550" dirty="0">
+                <a:solidFill>
+                  <a:schemeClr val="bg2"/>
+                </a:solidFill>
+                <a:latin typeface="Calibri" pitchFamily="34" charset="0"/>
+                <a:ea typeface="Calibri" pitchFamily="34" charset="-122"/>
+                <a:cs typeface="Calibri" pitchFamily="34" charset="-120"/>
+              </a:rPr>
+              <a:t>in test USDC on Base Sepolia.</a:t>
             </a:r>
             <a:endParaRPr lang="en-US" sz="1550" dirty="0"/>
           </a:p>
@@ -4695,17 +4664,24 @@
             <a:prstDash val="solid"/>
           </a:ln>
         </p:spPr>
+        <p:txBody>
+          <a:bodyPr/>
+          <a:lstStyle/>
+          <a:p>
+            <a:endParaRPr lang="en-GB"/>
+          </a:p>
+        </p:txBody>
       </p:sp>
       <p:pic>
         <p:nvPicPr>
-          <p:cNvPr id="20" name="Proof icon 2" descr="preencoded.png">    </p:cNvPr>
+          <p:cNvPr id="20" name="Proof icon 2" descr="preencoded.png"/>
           <p:cNvPicPr>
             <a:picLocks noChangeAspect="1"/>
           </p:cNvPicPr>
           <p:nvPr/>
         </p:nvPicPr>
         <p:blipFill>
-          <a:blip r:embed="rId2"/>
+          <a:blip r:embed="rId4"/>
           <a:stretch>
             <a:fillRect/>
           </a:stretch>
@@ -4741,7 +4717,7 @@
           <a:bodyPr wrap="square" lIns="0" tIns="0" rIns="0" bIns="0" rtlCol="0" anchor="ctr"/>
           <a:lstStyle/>
           <a:p>
-            <a:pPr indent="0" marL="0">
+            <a:pPr marL="0" indent="0">
               <a:lnSpc>
                 <a:spcPct val="105000"/>
               </a:lnSpc>
@@ -4758,12 +4734,6 @@
               </a:rPr>
               <a:t>Key Ring with no hardware. </a:t>
             </a:r>
-            <a:pPr indent="0" marL="0">
-              <a:lnSpc>
-                <a:spcPct val="105000"/>
-              </a:lnSpc>
-              <a:buNone/>
-            </a:pPr>
             <a:r>
               <a:rPr lang="en-US" sz="1550" dirty="0">
                 <a:solidFill>
@@ -4773,7 +4743,28 @@
                 <a:ea typeface="Calibri" pitchFamily="34" charset="-122"/>
                 <a:cs typeface="Calibri" pitchFamily="34" charset="-120"/>
               </a:rPr>
-              <a:t>There was no documented way to use it on an emulator, so we built Ledger Sync for Speculos. The agent’s API key is sealed by a Ledger, not left in a .env file.</a:t>
+              <a:t>There was no documented way to use it on an emulator, so we built Ledger Sync for Speculos. </a:t>
+            </a:r>
+            <a:br>
+              <a:rPr lang="en-US" sz="1550" dirty="0">
+                <a:solidFill>
+                  <a:schemeClr val="bg2"/>
+                </a:solidFill>
+                <a:latin typeface="Calibri" pitchFamily="34" charset="0"/>
+                <a:ea typeface="Calibri" pitchFamily="34" charset="-122"/>
+                <a:cs typeface="Calibri" pitchFamily="34" charset="-120"/>
+              </a:rPr>
+            </a:br>
+            <a:r>
+              <a:rPr lang="en-US" sz="1550" dirty="0">
+                <a:solidFill>
+                  <a:schemeClr val="bg2"/>
+                </a:solidFill>
+                <a:latin typeface="Calibri" pitchFamily="34" charset="0"/>
+                <a:ea typeface="Calibri" pitchFamily="34" charset="-122"/>
+                <a:cs typeface="Calibri" pitchFamily="34" charset="-120"/>
+              </a:rPr>
+              <a:t>The agent’s API key is sealed by a Ledger, not left in a .env file.</a:t>
             </a:r>
             <a:endParaRPr lang="en-US" sz="1550" dirty="0"/>
           </a:p>
@@ -4803,17 +4794,24 @@
             <a:prstDash val="solid"/>
           </a:ln>
         </p:spPr>
+        <p:txBody>
+          <a:bodyPr/>
+          <a:lstStyle/>
+          <a:p>
+            <a:endParaRPr lang="en-GB"/>
+          </a:p>
+        </p:txBody>
       </p:sp>
       <p:pic>
         <p:nvPicPr>
-          <p:cNvPr id="23" name="Proof icon 3" descr="preencoded.png">    </p:cNvPr>
+          <p:cNvPr id="23" name="Proof icon 3" descr="preencoded.png"/>
           <p:cNvPicPr>
             <a:picLocks noChangeAspect="1"/>
           </p:cNvPicPr>
           <p:nvPr/>
         </p:nvPicPr>
         <p:blipFill>
-          <a:blip r:embed="rId3"/>
+          <a:blip r:embed="rId5"/>
           <a:stretch>
             <a:fillRect/>
           </a:stretch>
@@ -4849,7 +4847,7 @@
           <a:bodyPr wrap="square" lIns="0" tIns="0" rIns="0" bIns="0" rtlCol="0" anchor="ctr"/>
           <a:lstStyle/>
           <a:p>
-            <a:pPr indent="0" marL="0">
+            <a:pPr marL="0" indent="0">
               <a:lnSpc>
                 <a:spcPct val="105000"/>
               </a:lnSpc>
@@ -4866,12 +4864,6 @@
               </a:rPr>
               <a:t>Built to fail safe. </a:t>
             </a:r>
-            <a:pPr indent="0" marL="0">
-              <a:lnSpc>
-                <a:spcPct val="105000"/>
-              </a:lnSpc>
-              <a:buNone/>
-            </a:pPr>
             <a:r>
               <a:rPr lang="en-US" sz="1550" dirty="0">
                 <a:solidFill>
@@ -4907,7 +4899,7 @@
           </a:prstGeom>
           <a:extLst>
             <a:ext uri="{C572A759-6A51-4108-AA02-DFA0A04FC94B}">
-              <ma14:wrappingTextBoxFlag xmlns:ma14="http://schemas.microsoft.com/office/mac/drawingml/2011/main" val="0"/>
+              <ma14:wrappingTextBoxFlag xmlns:ma14="http://schemas.microsoft.com/office/mac/drawingml/2011/main" xmlns="" val="0"/>
             </a:ext>
           </a:extLst>
         </p:spPr>
@@ -4928,7 +4920,7 @@
           <a:p>
             <a:pPr algn="r"/>
             <a:fld id="{F7021451-1387-4CA6-816F-3879F97B5CBC}" type="slidenum">
-              <a:rPr b="0" lang="en-US"/>
+              <a:rPr lang="en-US" b="0"/>
               <a:t>11</a:t>
             </a:fld>
             <a:endParaRPr lang="en-US"/>
@@ -4963,9 +4955,11 @@
       <p:sp>
         <p:nvSpPr>
           <p:cNvPr id="2" name="Text 4"/>
-          <p:cNvSpPr/>
+          <p:cNvSpPr>
+            <a:spLocks noGrp="1"/>
+          </p:cNvSpPr>
           <p:nvPr>
-            <p:ph idx="104" type="body" hasCustomPrompt="1"/>
+            <p:ph type="body" idx="104" hasCustomPrompt="1"/>
           </p:nvPr>
         </p:nvSpPr>
         <p:spPr>
@@ -4983,11 +4977,11 @@
           <a:bodyPr wrap="square" lIns="0" tIns="0" rIns="0" bIns="0" rtlCol="0" anchor="ctr"/>
           <a:lstStyle/>
           <a:p>
-            <a:pPr indent="0" marL="0">
-              <a:buNone/>
-            </a:pPr>
-            <a:r>
-              <a:rPr lang="en-US" sz="1200" spc="300" kern="0" dirty="0">
+            <a:pPr marL="0" indent="0">
+              <a:buNone/>
+            </a:pPr>
+            <a:r>
+              <a:rPr lang="en-US" sz="1200" kern="0" spc="300" dirty="0">
                 <a:solidFill>
                   <a:schemeClr val="accent1"/>
                 </a:solidFill>
@@ -5004,9 +4998,11 @@
       <p:sp>
         <p:nvSpPr>
           <p:cNvPr id="3" name="Text 4"/>
-          <p:cNvSpPr/>
+          <p:cNvSpPr>
+            <a:spLocks noGrp="1"/>
+          </p:cNvSpPr>
           <p:nvPr>
-            <p:ph idx="105" type="title" hasCustomPrompt="1"/>
+            <p:ph type="title" idx="105" hasCustomPrompt="1"/>
           </p:nvPr>
         </p:nvSpPr>
         <p:spPr>
@@ -5024,7 +5020,7 @@
           <a:bodyPr wrap="square" lIns="0" tIns="0" rIns="0" bIns="0" rtlCol="0" anchor="t"/>
           <a:lstStyle/>
           <a:p>
-            <a:pPr algn="l" indent="0" marL="0">
+            <a:pPr marL="0" indent="0" algn="l">
               <a:buNone/>
             </a:pPr>
             <a:r>
@@ -5068,6 +5064,13 @@
             <a:prstDash val="solid"/>
           </a:ln>
         </p:spPr>
+        <p:txBody>
+          <a:bodyPr/>
+          <a:lstStyle/>
+          <a:p>
+            <a:endParaRPr lang="en-GB"/>
+          </a:p>
+        </p:txBody>
       </p:sp>
       <p:sp>
         <p:nvSpPr>
@@ -5092,7 +5095,7 @@
           </a:bodyPr>
           <a:lstStyle/>
           <a:p>
-            <a:pPr indent="0" marL="0">
+            <a:pPr marL="0" indent="0">
               <a:buNone/>
             </a:pPr>
             <a:r>
@@ -5131,7 +5134,7 @@
           <a:bodyPr wrap="square" lIns="0" tIns="0" rIns="0" bIns="0" rtlCol="0" anchor="t"/>
           <a:lstStyle/>
           <a:p>
-            <a:pPr indent="0" marL="0">
+            <a:pPr marL="0" indent="0">
               <a:lnSpc>
                 <a:spcPct val="105000"/>
               </a:lnSpc>
@@ -5178,6 +5181,13 @@
             <a:prstDash val="solid"/>
           </a:ln>
         </p:spPr>
+        <p:txBody>
+          <a:bodyPr/>
+          <a:lstStyle/>
+          <a:p>
+            <a:endParaRPr lang="en-GB"/>
+          </a:p>
+        </p:txBody>
       </p:sp>
       <p:sp>
         <p:nvSpPr>
@@ -5202,7 +5212,7 @@
           </a:bodyPr>
           <a:lstStyle/>
           <a:p>
-            <a:pPr indent="0" marL="0">
+            <a:pPr marL="0" indent="0">
               <a:buNone/>
             </a:pPr>
             <a:r>
@@ -5241,7 +5251,7 @@
           <a:bodyPr wrap="square" lIns="0" tIns="0" rIns="0" bIns="0" rtlCol="0" anchor="t"/>
           <a:lstStyle/>
           <a:p>
-            <a:pPr indent="0" marL="0">
+            <a:pPr marL="0" indent="0">
               <a:lnSpc>
                 <a:spcPct val="105000"/>
               </a:lnSpc>
@@ -5288,6 +5298,13 @@
             <a:prstDash val="solid"/>
           </a:ln>
         </p:spPr>
+        <p:txBody>
+          <a:bodyPr/>
+          <a:lstStyle/>
+          <a:p>
+            <a:endParaRPr lang="en-GB"/>
+          </a:p>
+        </p:txBody>
       </p:sp>
       <p:sp>
         <p:nvSpPr>
@@ -5312,7 +5329,7 @@
           </a:bodyPr>
           <a:lstStyle/>
           <a:p>
-            <a:pPr indent="0" marL="0">
+            <a:pPr marL="0" indent="0">
               <a:buNone/>
             </a:pPr>
             <a:r>
@@ -5351,7 +5368,7 @@
           <a:bodyPr wrap="square" lIns="0" tIns="0" rIns="0" bIns="0" rtlCol="0" anchor="t"/>
           <a:lstStyle/>
           <a:p>
-            <a:pPr indent="0" marL="0">
+            <a:pPr marL="0" indent="0">
               <a:lnSpc>
                 <a:spcPct val="105000"/>
               </a:lnSpc>
@@ -5398,6 +5415,13 @@
             <a:prstDash val="solid"/>
           </a:ln>
         </p:spPr>
+        <p:txBody>
+          <a:bodyPr/>
+          <a:lstStyle/>
+          <a:p>
+            <a:endParaRPr lang="en-GB"/>
+          </a:p>
+        </p:txBody>
       </p:sp>
       <p:sp>
         <p:nvSpPr>
@@ -5422,7 +5446,7 @@
           </a:bodyPr>
           <a:lstStyle/>
           <a:p>
-            <a:pPr indent="0" marL="0">
+            <a:pPr marL="0" indent="0">
               <a:buNone/>
             </a:pPr>
             <a:r>
@@ -5461,7 +5485,7 @@
           <a:bodyPr wrap="square" lIns="0" tIns="0" rIns="0" bIns="0" rtlCol="0" anchor="t"/>
           <a:lstStyle/>
           <a:p>
-            <a:pPr indent="0" marL="0">
+            <a:pPr marL="0" indent="0">
               <a:lnSpc>
                 <a:spcPct val="105000"/>
               </a:lnSpc>
@@ -5506,17 +5530,24 @@
             <a:prstDash val="solid"/>
           </a:ln>
         </p:spPr>
+        <p:txBody>
+          <a:bodyPr/>
+          <a:lstStyle/>
+          <a:p>
+            <a:endParaRPr lang="en-GB"/>
+          </a:p>
+        </p:txBody>
       </p:sp>
       <p:pic>
         <p:nvPicPr>
-          <p:cNvPr id="17" name="Proof icon 1" descr="preencoded.png">    </p:cNvPr>
+          <p:cNvPr id="17" name="Proof icon 1" descr="preencoded.png"/>
           <p:cNvPicPr>
             <a:picLocks noChangeAspect="1"/>
           </p:cNvPicPr>
           <p:nvPr/>
         </p:nvPicPr>
         <p:blipFill>
-          <a:blip r:embed="rId1"/>
+          <a:blip r:embed="rId3"/>
           <a:stretch>
             <a:fillRect/>
           </a:stretch>
@@ -5552,7 +5583,7 @@
           <a:bodyPr wrap="square" lIns="0" tIns="0" rIns="0" bIns="0" rtlCol="0" anchor="ctr"/>
           <a:lstStyle/>
           <a:p>
-            <a:pPr indent="0" marL="0">
+            <a:pPr marL="0" indent="0">
               <a:lnSpc>
                 <a:spcPct val="105000"/>
               </a:lnSpc>
@@ -5569,12 +5600,6 @@
               </a:rPr>
               <a:t>A way into universities. </a:t>
             </a:r>
-            <a:pPr indent="0" marL="0">
-              <a:lnSpc>
-                <a:spcPct val="105000"/>
-              </a:lnSpc>
-              <a:buNone/>
-            </a:pPr>
             <a:r>
               <a:rPr lang="en-US" sz="1550" dirty="0">
                 <a:solidFill>
@@ -5614,17 +5639,24 @@
             <a:prstDash val="solid"/>
           </a:ln>
         </p:spPr>
+        <p:txBody>
+          <a:bodyPr/>
+          <a:lstStyle/>
+          <a:p>
+            <a:endParaRPr lang="en-GB"/>
+          </a:p>
+        </p:txBody>
       </p:sp>
       <p:pic>
         <p:nvPicPr>
-          <p:cNvPr id="20" name="Proof icon 2" descr="preencoded.png">    </p:cNvPr>
+          <p:cNvPr id="20" name="Proof icon 2" descr="preencoded.png"/>
           <p:cNvPicPr>
             <a:picLocks noChangeAspect="1"/>
           </p:cNvPicPr>
           <p:nvPr/>
         </p:nvPicPr>
         <p:blipFill>
-          <a:blip r:embed="rId2"/>
+          <a:blip r:embed="rId4"/>
           <a:stretch>
             <a:fillRect/>
           </a:stretch>
@@ -5660,7 +5692,7 @@
           <a:bodyPr wrap="square" lIns="0" tIns="0" rIns="0" bIns="0" rtlCol="0" anchor="ctr"/>
           <a:lstStyle/>
           <a:p>
-            <a:pPr indent="0" marL="0">
+            <a:pPr marL="0" indent="0">
               <a:lnSpc>
                 <a:spcPct val="105000"/>
               </a:lnSpc>
@@ -5677,12 +5709,6 @@
               </a:rPr>
               <a:t>Reaches young people. </a:t>
             </a:r>
-            <a:pPr indent="0" marL="0">
-              <a:lnSpc>
-                <a:spcPct val="105000"/>
-              </a:lnSpc>
-              <a:buNone/>
-            </a:pPr>
             <a:r>
               <a:rPr lang="en-US" sz="1550" dirty="0">
                 <a:solidFill>
@@ -5722,17 +5748,24 @@
             <a:prstDash val="solid"/>
           </a:ln>
         </p:spPr>
+        <p:txBody>
+          <a:bodyPr/>
+          <a:lstStyle/>
+          <a:p>
+            <a:endParaRPr lang="en-GB"/>
+          </a:p>
+        </p:txBody>
       </p:sp>
       <p:pic>
         <p:nvPicPr>
-          <p:cNvPr id="23" name="Proof icon 3" descr="preencoded.png">    </p:cNvPr>
+          <p:cNvPr id="23" name="Proof icon 3" descr="preencoded.png"/>
           <p:cNvPicPr>
             <a:picLocks noChangeAspect="1"/>
           </p:cNvPicPr>
           <p:nvPr/>
         </p:nvPicPr>
         <p:blipFill>
-          <a:blip r:embed="rId3"/>
+          <a:blip r:embed="rId5"/>
           <a:stretch>
             <a:fillRect/>
           </a:stretch>
@@ -5768,7 +5801,7 @@
           <a:bodyPr wrap="square" lIns="0" tIns="0" rIns="0" bIns="0" rtlCol="0" anchor="ctr"/>
           <a:lstStyle/>
           <a:p>
-            <a:pPr indent="0" marL="0">
+            <a:pPr marL="0" indent="0">
               <a:lnSpc>
                 <a:spcPct val="105000"/>
               </a:lnSpc>
@@ -5785,12 +5818,6 @@
               </a:rPr>
               <a:t>Teaches by doing. </a:t>
             </a:r>
-            <a:pPr indent="0" marL="0">
-              <a:lnSpc>
-                <a:spcPct val="105000"/>
-              </a:lnSpc>
-              <a:buNone/>
-            </a:pPr>
             <a:r>
               <a:rPr lang="en-US" sz="1550" dirty="0">
                 <a:solidFill>
@@ -5826,7 +5853,7 @@
           </a:prstGeom>
           <a:extLst>
             <a:ext uri="{C572A759-6A51-4108-AA02-DFA0A04FC94B}">
-              <ma14:wrappingTextBoxFlag xmlns:ma14="http://schemas.microsoft.com/office/mac/drawingml/2011/main" val="0"/>
+              <ma14:wrappingTextBoxFlag xmlns:ma14="http://schemas.microsoft.com/office/mac/drawingml/2011/main" xmlns="" val="0"/>
             </a:ext>
           </a:extLst>
         </p:spPr>
@@ -5847,7 +5874,7 @@
           <a:p>
             <a:pPr algn="r"/>
             <a:fld id="{F7021451-1387-4CA6-816F-3879F97B5CBC}" type="slidenum">
-              <a:rPr b="0" lang="en-US"/>
+              <a:rPr lang="en-US" b="0"/>
               <a:t>12</a:t>
             </a:fld>
             <a:endParaRPr lang="en-US"/>
@@ -5882,9 +5909,11 @@
       <p:sp>
         <p:nvSpPr>
           <p:cNvPr id="2" name="Text 4"/>
-          <p:cNvSpPr/>
+          <p:cNvSpPr>
+            <a:spLocks noGrp="1"/>
+          </p:cNvSpPr>
           <p:nvPr>
-            <p:ph idx="104" type="body" hasCustomPrompt="1"/>
+            <p:ph type="body" idx="104" hasCustomPrompt="1"/>
           </p:nvPr>
         </p:nvSpPr>
         <p:spPr>
@@ -5902,11 +5931,11 @@
           <a:bodyPr wrap="square" lIns="0" tIns="0" rIns="0" bIns="0" rtlCol="0" anchor="ctr"/>
           <a:lstStyle/>
           <a:p>
-            <a:pPr indent="0" marL="0">
-              <a:buNone/>
-            </a:pPr>
-            <a:r>
-              <a:rPr lang="en-US" sz="1200" spc="300" kern="0" dirty="0">
+            <a:pPr marL="0" indent="0">
+              <a:buNone/>
+            </a:pPr>
+            <a:r>
+              <a:rPr lang="en-US" sz="1200" kern="0" spc="300" dirty="0">
                 <a:solidFill>
                   <a:schemeClr val="accent1"/>
                 </a:solidFill>
@@ -5923,9 +5952,11 @@
       <p:sp>
         <p:nvSpPr>
           <p:cNvPr id="3" name="Text 4"/>
-          <p:cNvSpPr/>
+          <p:cNvSpPr>
+            <a:spLocks noGrp="1"/>
+          </p:cNvSpPr>
           <p:nvPr>
-            <p:ph idx="105" type="title" hasCustomPrompt="1"/>
+            <p:ph type="title" idx="105" hasCustomPrompt="1"/>
           </p:nvPr>
         </p:nvSpPr>
         <p:spPr>
@@ -5943,7 +5974,7 @@
           <a:bodyPr wrap="square" lIns="0" tIns="0" rIns="0" bIns="0" rtlCol="0" anchor="t"/>
           <a:lstStyle/>
           <a:p>
-            <a:pPr algn="l" indent="0" marL="0">
+            <a:pPr marL="0" indent="0" algn="l">
               <a:buNone/>
             </a:pPr>
             <a:r>
@@ -5987,6 +6018,13 @@
             <a:prstDash val="solid"/>
           </a:ln>
         </p:spPr>
+        <p:txBody>
+          <a:bodyPr/>
+          <a:lstStyle/>
+          <a:p>
+            <a:endParaRPr lang="en-GB"/>
+          </a:p>
+        </p:txBody>
       </p:sp>
       <p:sp>
         <p:nvSpPr>
@@ -6011,7 +6049,7 @@
           </a:bodyPr>
           <a:lstStyle/>
           <a:p>
-            <a:pPr indent="0" marL="0">
+            <a:pPr marL="0" indent="0">
               <a:buNone/>
             </a:pPr>
             <a:r>
@@ -6050,7 +6088,7 @@
           <a:bodyPr wrap="square" lIns="0" tIns="0" rIns="0" bIns="0" rtlCol="0" anchor="t"/>
           <a:lstStyle/>
           <a:p>
-            <a:pPr indent="0" marL="0">
+            <a:pPr marL="0" indent="0">
               <a:lnSpc>
                 <a:spcPct val="105000"/>
               </a:lnSpc>
@@ -6097,6 +6135,13 @@
             <a:prstDash val="solid"/>
           </a:ln>
         </p:spPr>
+        <p:txBody>
+          <a:bodyPr/>
+          <a:lstStyle/>
+          <a:p>
+            <a:endParaRPr lang="en-GB"/>
+          </a:p>
+        </p:txBody>
       </p:sp>
       <p:sp>
         <p:nvSpPr>
@@ -6121,7 +6166,7 @@
           </a:bodyPr>
           <a:lstStyle/>
           <a:p>
-            <a:pPr indent="0" marL="0">
+            <a:pPr marL="0" indent="0">
               <a:buNone/>
             </a:pPr>
             <a:r>
@@ -6160,7 +6205,7 @@
           <a:bodyPr wrap="square" lIns="0" tIns="0" rIns="0" bIns="0" rtlCol="0" anchor="t"/>
           <a:lstStyle/>
           <a:p>
-            <a:pPr indent="0" marL="0">
+            <a:pPr marL="0" indent="0">
               <a:lnSpc>
                 <a:spcPct val="105000"/>
               </a:lnSpc>
@@ -6207,6 +6252,13 @@
             <a:prstDash val="solid"/>
           </a:ln>
         </p:spPr>
+        <p:txBody>
+          <a:bodyPr/>
+          <a:lstStyle/>
+          <a:p>
+            <a:endParaRPr lang="en-GB"/>
+          </a:p>
+        </p:txBody>
       </p:sp>
       <p:sp>
         <p:nvSpPr>
@@ -6231,7 +6283,7 @@
           </a:bodyPr>
           <a:lstStyle/>
           <a:p>
-            <a:pPr indent="0" marL="0">
+            <a:pPr marL="0" indent="0">
               <a:buNone/>
             </a:pPr>
             <a:r>
@@ -6270,7 +6322,7 @@
           <a:bodyPr wrap="square" lIns="0" tIns="0" rIns="0" bIns="0" rtlCol="0" anchor="t"/>
           <a:lstStyle/>
           <a:p>
-            <a:pPr indent="0" marL="0">
+            <a:pPr marL="0" indent="0">
               <a:lnSpc>
                 <a:spcPct val="105000"/>
               </a:lnSpc>
@@ -6317,6 +6369,13 @@
             <a:prstDash val="solid"/>
           </a:ln>
         </p:spPr>
+        <p:txBody>
+          <a:bodyPr/>
+          <a:lstStyle/>
+          <a:p>
+            <a:endParaRPr lang="en-GB"/>
+          </a:p>
+        </p:txBody>
       </p:sp>
       <p:sp>
         <p:nvSpPr>
@@ -6341,7 +6400,7 @@
           </a:bodyPr>
           <a:lstStyle/>
           <a:p>
-            <a:pPr indent="0" marL="0">
+            <a:pPr marL="0" indent="0">
               <a:buNone/>
             </a:pPr>
             <a:r>
@@ -6380,7 +6439,7 @@
           <a:bodyPr wrap="square" lIns="0" tIns="0" rIns="0" bIns="0" rtlCol="0" anchor="t"/>
           <a:lstStyle/>
           <a:p>
-            <a:pPr indent="0" marL="0">
+            <a:pPr marL="0" indent="0">
               <a:lnSpc>
                 <a:spcPct val="105000"/>
               </a:lnSpc>
@@ -6425,17 +6484,24 @@
             <a:prstDash val="solid"/>
           </a:ln>
         </p:spPr>
+        <p:txBody>
+          <a:bodyPr/>
+          <a:lstStyle/>
+          <a:p>
+            <a:endParaRPr lang="en-GB"/>
+          </a:p>
+        </p:txBody>
       </p:sp>
       <p:pic>
         <p:nvPicPr>
-          <p:cNvPr id="17" name="Proof icon 1" descr="preencoded.png">    </p:cNvPr>
+          <p:cNvPr id="17" name="Proof icon 1" descr="preencoded.png"/>
           <p:cNvPicPr>
             <a:picLocks noChangeAspect="1"/>
           </p:cNvPicPr>
           <p:nvPr/>
         </p:nvPicPr>
         <p:blipFill>
-          <a:blip r:embed="rId1"/>
+          <a:blip r:embed="rId3"/>
           <a:stretch>
             <a:fillRect/>
           </a:stretch>
@@ -6471,7 +6537,7 @@
           <a:bodyPr wrap="square" lIns="0" tIns="0" rIns="0" bIns="0" rtlCol="0" anchor="ctr"/>
           <a:lstStyle/>
           <a:p>
-            <a:pPr indent="0" marL="0">
+            <a:pPr marL="0" indent="0">
               <a:lnSpc>
                 <a:spcPct val="105000"/>
               </a:lnSpc>
@@ -6488,12 +6554,6 @@
               </a:rPr>
               <a:t>Still paper and email. </a:t>
             </a:r>
-            <a:pPr indent="0" marL="0">
-              <a:lnSpc>
-                <a:spcPct val="105000"/>
-              </a:lnSpc>
-              <a:buNone/>
-            </a:pPr>
             <a:r>
               <a:rPr lang="en-US" sz="1550" dirty="0">
                 <a:solidFill>
@@ -6533,17 +6593,24 @@
             <a:prstDash val="solid"/>
           </a:ln>
         </p:spPr>
+        <p:txBody>
+          <a:bodyPr/>
+          <a:lstStyle/>
+          <a:p>
+            <a:endParaRPr lang="en-GB"/>
+          </a:p>
+        </p:txBody>
       </p:sp>
       <p:pic>
         <p:nvPicPr>
-          <p:cNvPr id="20" name="Proof icon 2" descr="preencoded.png">    </p:cNvPr>
+          <p:cNvPr id="20" name="Proof icon 2" descr="preencoded.png"/>
           <p:cNvPicPr>
             <a:picLocks noChangeAspect="1"/>
           </p:cNvPicPr>
           <p:nvPr/>
         </p:nvPicPr>
         <p:blipFill>
-          <a:blip r:embed="rId2"/>
+          <a:blip r:embed="rId4"/>
           <a:stretch>
             <a:fillRect/>
           </a:stretch>
@@ -6579,7 +6646,7 @@
           <a:bodyPr wrap="square" lIns="0" tIns="0" rIns="0" bIns="0" rtlCol="0" anchor="ctr"/>
           <a:lstStyle/>
           <a:p>
-            <a:pPr indent="0" marL="0">
+            <a:pPr marL="0" indent="0">
               <a:lnSpc>
                 <a:spcPct val="105000"/>
               </a:lnSpc>
@@ -6596,12 +6663,6 @@
               </a:rPr>
               <a:t>A new split of trust. </a:t>
             </a:r>
-            <a:pPr indent="0" marL="0">
-              <a:lnSpc>
-                <a:spcPct val="105000"/>
-              </a:lnSpc>
-              <a:buNone/>
-            </a:pPr>
             <a:r>
               <a:rPr lang="en-US" sz="1550" dirty="0">
                 <a:solidFill>
@@ -6641,17 +6702,24 @@
             <a:prstDash val="solid"/>
           </a:ln>
         </p:spPr>
+        <p:txBody>
+          <a:bodyPr/>
+          <a:lstStyle/>
+          <a:p>
+            <a:endParaRPr lang="en-GB"/>
+          </a:p>
+        </p:txBody>
       </p:sp>
       <p:pic>
         <p:nvPicPr>
-          <p:cNvPr id="23" name="Proof icon 3" descr="preencoded.png">    </p:cNvPr>
+          <p:cNvPr id="23" name="Proof icon 3" descr="preencoded.png"/>
           <p:cNvPicPr>
             <a:picLocks noChangeAspect="1"/>
           </p:cNvPicPr>
           <p:nvPr/>
         </p:nvPicPr>
         <p:blipFill>
-          <a:blip r:embed="rId3"/>
+          <a:blip r:embed="rId5"/>
           <a:stretch>
             <a:fillRect/>
           </a:stretch>
@@ -6687,7 +6755,7 @@
           <a:bodyPr wrap="square" lIns="0" tIns="0" rIns="0" bIns="0" rtlCol="0" anchor="ctr"/>
           <a:lstStyle/>
           <a:p>
-            <a:pPr indent="0" marL="0">
+            <a:pPr marL="0" indent="0">
               <a:lnSpc>
                 <a:spcPct val="105000"/>
               </a:lnSpc>
@@ -6704,12 +6772,6 @@
               </a:rPr>
               <a:t>Proved with an attack. </a:t>
             </a:r>
-            <a:pPr indent="0" marL="0">
-              <a:lnSpc>
-                <a:spcPct val="105000"/>
-              </a:lnSpc>
-              <a:buNone/>
-            </a:pPr>
             <a:r>
               <a:rPr lang="en-US" sz="1550" dirty="0">
                 <a:solidFill>
@@ -6745,7 +6807,7 @@
           </a:prstGeom>
           <a:extLst>
             <a:ext uri="{C572A759-6A51-4108-AA02-DFA0A04FC94B}">
-              <ma14:wrappingTextBoxFlag xmlns:ma14="http://schemas.microsoft.com/office/mac/drawingml/2011/main" val="0"/>
+              <ma14:wrappingTextBoxFlag xmlns:ma14="http://schemas.microsoft.com/office/mac/drawingml/2011/main" xmlns="" val="0"/>
             </a:ext>
           </a:extLst>
         </p:spPr>
@@ -6766,7 +6828,7 @@
           <a:p>
             <a:pPr algn="r"/>
             <a:fld id="{F7021451-1387-4CA6-816F-3879F97B5CBC}" type="slidenum">
-              <a:rPr b="0" lang="en-US"/>
+              <a:rPr lang="en-US" b="0"/>
               <a:t>13</a:t>
             </a:fld>
             <a:endParaRPr lang="en-US"/>
@@ -6801,9 +6863,11 @@
       <p:sp>
         <p:nvSpPr>
           <p:cNvPr id="2" name="Text 4"/>
-          <p:cNvSpPr/>
+          <p:cNvSpPr>
+            <a:spLocks noGrp="1"/>
+          </p:cNvSpPr>
           <p:nvPr>
-            <p:ph idx="104" type="body" hasCustomPrompt="1"/>
+            <p:ph type="body" idx="104" hasCustomPrompt="1"/>
           </p:nvPr>
         </p:nvSpPr>
         <p:spPr>
@@ -6821,11 +6885,11 @@
           <a:bodyPr wrap="square" lIns="0" tIns="0" rIns="0" bIns="0" rtlCol="0" anchor="ctr"/>
           <a:lstStyle/>
           <a:p>
-            <a:pPr indent="0" marL="0">
-              <a:buNone/>
-            </a:pPr>
-            <a:r>
-              <a:rPr lang="en-US" sz="1200" spc="300" kern="0" dirty="0">
+            <a:pPr marL="0" indent="0">
+              <a:buNone/>
+            </a:pPr>
+            <a:r>
+              <a:rPr lang="en-US" sz="1200" kern="0" spc="300" dirty="0">
                 <a:solidFill>
                   <a:schemeClr val="accent1"/>
                 </a:solidFill>
@@ -6842,9 +6906,11 @@
       <p:sp>
         <p:nvSpPr>
           <p:cNvPr id="3" name="Text 4"/>
-          <p:cNvSpPr/>
+          <p:cNvSpPr>
+            <a:spLocks noGrp="1"/>
+          </p:cNvSpPr>
           <p:nvPr>
-            <p:ph idx="105" type="title" hasCustomPrompt="1"/>
+            <p:ph type="title" idx="105" hasCustomPrompt="1"/>
           </p:nvPr>
         </p:nvSpPr>
         <p:spPr>
@@ -6862,7 +6928,7 @@
           <a:bodyPr wrap="square" lIns="0" tIns="0" rIns="0" bIns="0" rtlCol="0" anchor="t"/>
           <a:lstStyle/>
           <a:p>
-            <a:pPr algn="l" indent="0" marL="0">
+            <a:pPr marL="0" indent="0" algn="l">
               <a:buNone/>
             </a:pPr>
             <a:r>
@@ -6906,6 +6972,13 @@
             <a:prstDash val="solid"/>
           </a:ln>
         </p:spPr>
+        <p:txBody>
+          <a:bodyPr/>
+          <a:lstStyle/>
+          <a:p>
+            <a:endParaRPr lang="en-GB"/>
+          </a:p>
+        </p:txBody>
       </p:sp>
       <p:sp>
         <p:nvSpPr>
@@ -6930,7 +7003,7 @@
           </a:bodyPr>
           <a:lstStyle/>
           <a:p>
-            <a:pPr indent="0" marL="0">
+            <a:pPr marL="0" indent="0">
               <a:buNone/>
             </a:pPr>
             <a:r>
@@ -6969,7 +7042,7 @@
           <a:bodyPr wrap="square" lIns="0" tIns="0" rIns="0" bIns="0" rtlCol="0" anchor="t"/>
           <a:lstStyle/>
           <a:p>
-            <a:pPr indent="0" marL="0">
+            <a:pPr marL="0" indent="0">
               <a:lnSpc>
                 <a:spcPct val="105000"/>
               </a:lnSpc>
@@ -7016,6 +7089,13 @@
             <a:prstDash val="solid"/>
           </a:ln>
         </p:spPr>
+        <p:txBody>
+          <a:bodyPr/>
+          <a:lstStyle/>
+          <a:p>
+            <a:endParaRPr lang="en-GB"/>
+          </a:p>
+        </p:txBody>
       </p:sp>
       <p:sp>
         <p:nvSpPr>
@@ -7040,7 +7120,7 @@
           </a:bodyPr>
           <a:lstStyle/>
           <a:p>
-            <a:pPr indent="0" marL="0">
+            <a:pPr marL="0" indent="0">
               <a:buNone/>
             </a:pPr>
             <a:r>
@@ -7079,7 +7159,7 @@
           <a:bodyPr wrap="square" lIns="0" tIns="0" rIns="0" bIns="0" rtlCol="0" anchor="t"/>
           <a:lstStyle/>
           <a:p>
-            <a:pPr indent="0" marL="0">
+            <a:pPr marL="0" indent="0">
               <a:lnSpc>
                 <a:spcPct val="105000"/>
               </a:lnSpc>
@@ -7094,7 +7174,26 @@
                 <a:ea typeface="Calibri" pitchFamily="34" charset="-122"/>
                 <a:cs typeface="Calibri" pitchFamily="34" charset="-120"/>
               </a:rPr>
-              <a:t>for the agent’s decision, with its reasons</a:t>
+              <a:t>for the agent’s decision, </a:t>
+            </a:r>
+          </a:p>
+          <a:p>
+            <a:pPr marL="0" indent="0">
+              <a:lnSpc>
+                <a:spcPct val="105000"/>
+              </a:lnSpc>
+              <a:buNone/>
+            </a:pPr>
+            <a:r>
+              <a:rPr lang="en-US" sz="1350" dirty="0">
+                <a:solidFill>
+                  <a:schemeClr val="bg2"/>
+                </a:solidFill>
+                <a:latin typeface="Calibri" pitchFamily="34" charset="0"/>
+                <a:ea typeface="Calibri" pitchFamily="34" charset="-122"/>
+                <a:cs typeface="Calibri" pitchFamily="34" charset="-120"/>
+              </a:rPr>
+              <a:t>with its reasons</a:t>
             </a:r>
             <a:endParaRPr lang="en-US" sz="1350" dirty="0"/>
           </a:p>
@@ -7126,6 +7225,13 @@
             <a:prstDash val="solid"/>
           </a:ln>
         </p:spPr>
+        <p:txBody>
+          <a:bodyPr/>
+          <a:lstStyle/>
+          <a:p>
+            <a:endParaRPr lang="en-GB"/>
+          </a:p>
+        </p:txBody>
       </p:sp>
       <p:sp>
         <p:nvSpPr>
@@ -7150,7 +7256,7 @@
           </a:bodyPr>
           <a:lstStyle/>
           <a:p>
-            <a:pPr indent="0" marL="0">
+            <a:pPr marL="0" indent="0">
               <a:buNone/>
             </a:pPr>
             <a:r>
@@ -7189,7 +7295,7 @@
           <a:bodyPr wrap="square" lIns="0" tIns="0" rIns="0" bIns="0" rtlCol="0" anchor="t"/>
           <a:lstStyle/>
           <a:p>
-            <a:pPr indent="0" marL="0">
+            <a:pPr marL="0" indent="0">
               <a:lnSpc>
                 <a:spcPct val="105000"/>
               </a:lnSpc>
@@ -7204,7 +7310,26 @@
                 <a:ea typeface="Calibri" pitchFamily="34" charset="-122"/>
                 <a:cs typeface="Calibri" pitchFamily="34" charset="-120"/>
               </a:rPr>
-              <a:t>app-store installs: it’s an installable web app</a:t>
+              <a:t>app-store installs: </a:t>
+            </a:r>
+          </a:p>
+          <a:p>
+            <a:pPr marL="0" indent="0">
+              <a:lnSpc>
+                <a:spcPct val="105000"/>
+              </a:lnSpc>
+              <a:buNone/>
+            </a:pPr>
+            <a:r>
+              <a:rPr lang="en-US" sz="1350" dirty="0">
+                <a:solidFill>
+                  <a:schemeClr val="bg2"/>
+                </a:solidFill>
+                <a:latin typeface="Calibri" pitchFamily="34" charset="0"/>
+                <a:ea typeface="Calibri" pitchFamily="34" charset="-122"/>
+                <a:cs typeface="Calibri" pitchFamily="34" charset="-120"/>
+              </a:rPr>
+              <a:t>it’s a web app</a:t>
             </a:r>
             <a:endParaRPr lang="en-US" sz="1350" dirty="0"/>
           </a:p>
@@ -7236,6 +7361,13 @@
             <a:prstDash val="solid"/>
           </a:ln>
         </p:spPr>
+        <p:txBody>
+          <a:bodyPr/>
+          <a:lstStyle/>
+          <a:p>
+            <a:endParaRPr lang="en-GB"/>
+          </a:p>
+        </p:txBody>
       </p:sp>
       <p:sp>
         <p:nvSpPr>
@@ -7260,7 +7392,7 @@
           </a:bodyPr>
           <a:lstStyle/>
           <a:p>
-            <a:pPr indent="0" marL="0">
+            <a:pPr marL="0" indent="0">
               <a:buNone/>
             </a:pPr>
             <a:r>
@@ -7299,7 +7431,7 @@
           <a:bodyPr wrap="square" lIns="0" tIns="0" rIns="0" bIns="0" rtlCol="0" anchor="t"/>
           <a:lstStyle/>
           <a:p>
-            <a:pPr indent="0" marL="0">
+            <a:pPr marL="0" indent="0">
               <a:lnSpc>
                 <a:spcPct val="105000"/>
               </a:lnSpc>
@@ -7314,7 +7446,26 @@
                 <a:ea typeface="Calibri" pitchFamily="34" charset="-122"/>
                 <a:cs typeface="Calibri" pitchFamily="34" charset="-120"/>
               </a:rPr>
-              <a:t>to read a receipt: OCR runs on the phone</a:t>
+              <a:t>to read a receipt: </a:t>
+            </a:r>
+          </a:p>
+          <a:p>
+            <a:pPr marL="0" indent="0">
+              <a:lnSpc>
+                <a:spcPct val="105000"/>
+              </a:lnSpc>
+              <a:buNone/>
+            </a:pPr>
+            <a:r>
+              <a:rPr lang="en-US" sz="1350" dirty="0">
+                <a:solidFill>
+                  <a:schemeClr val="bg2"/>
+                </a:solidFill>
+                <a:latin typeface="Calibri" pitchFamily="34" charset="0"/>
+                <a:ea typeface="Calibri" pitchFamily="34" charset="-122"/>
+                <a:cs typeface="Calibri" pitchFamily="34" charset="-120"/>
+              </a:rPr>
+              <a:t>OCR runs on the phone</a:t>
             </a:r>
             <a:endParaRPr lang="en-US" sz="1350" dirty="0"/>
           </a:p>
@@ -7344,17 +7495,24 @@
             <a:prstDash val="solid"/>
           </a:ln>
         </p:spPr>
+        <p:txBody>
+          <a:bodyPr/>
+          <a:lstStyle/>
+          <a:p>
+            <a:endParaRPr lang="en-GB"/>
+          </a:p>
+        </p:txBody>
       </p:sp>
       <p:pic>
         <p:nvPicPr>
-          <p:cNvPr id="17" name="Proof icon 1" descr="preencoded.png">    </p:cNvPr>
+          <p:cNvPr id="17" name="Proof icon 1" descr="preencoded.png"/>
           <p:cNvPicPr>
             <a:picLocks noChangeAspect="1"/>
           </p:cNvPicPr>
           <p:nvPr/>
         </p:nvPicPr>
         <p:blipFill>
-          <a:blip r:embed="rId1"/>
+          <a:blip r:embed="rId3"/>
           <a:stretch>
             <a:fillRect/>
           </a:stretch>
@@ -7390,7 +7548,7 @@
           <a:bodyPr wrap="square" lIns="0" tIns="0" rIns="0" bIns="0" rtlCol="0" anchor="ctr"/>
           <a:lstStyle/>
           <a:p>
-            <a:pPr indent="0" marL="0">
+            <a:pPr marL="0" indent="0">
               <a:lnSpc>
                 <a:spcPct val="105000"/>
               </a:lnSpc>
@@ -7407,12 +7565,6 @@
               </a:rPr>
               <a:t>Snap, check, submit. </a:t>
             </a:r>
-            <a:pPr indent="0" marL="0">
-              <a:lnSpc>
-                <a:spcPct val="105000"/>
-              </a:lnSpc>
-              <a:buNone/>
-            </a:pPr>
             <a:r>
               <a:rPr lang="en-US" sz="1550" dirty="0">
                 <a:solidFill>
@@ -7452,17 +7604,24 @@
             <a:prstDash val="solid"/>
           </a:ln>
         </p:spPr>
+        <p:txBody>
+          <a:bodyPr/>
+          <a:lstStyle/>
+          <a:p>
+            <a:endParaRPr lang="en-GB"/>
+          </a:p>
+        </p:txBody>
       </p:sp>
       <p:pic>
         <p:nvPicPr>
-          <p:cNvPr id="20" name="Proof icon 2" descr="preencoded.png">    </p:cNvPr>
+          <p:cNvPr id="20" name="Proof icon 2" descr="preencoded.png"/>
           <p:cNvPicPr>
             <a:picLocks noChangeAspect="1"/>
           </p:cNvPicPr>
           <p:nvPr/>
         </p:nvPicPr>
         <p:blipFill>
-          <a:blip r:embed="rId2"/>
+          <a:blip r:embed="rId4"/>
           <a:stretch>
             <a:fillRect/>
           </a:stretch>
@@ -7498,7 +7657,7 @@
           <a:bodyPr wrap="square" lIns="0" tIns="0" rIns="0" bIns="0" rtlCol="0" anchor="ctr"/>
           <a:lstStyle/>
           <a:p>
-            <a:pPr indent="0" marL="0">
+            <a:pPr marL="0" indent="0">
               <a:lnSpc>
                 <a:spcPct val="105000"/>
               </a:lnSpc>
@@ -7515,12 +7674,6 @@
               </a:rPr>
               <a:t>Every “no” has a reason. </a:t>
             </a:r>
-            <a:pPr indent="0" marL="0">
-              <a:lnSpc>
-                <a:spcPct val="105000"/>
-              </a:lnSpc>
-              <a:buNone/>
-            </a:pPr>
             <a:r>
               <a:rPr lang="en-US" sz="1550" dirty="0">
                 <a:solidFill>
@@ -7560,17 +7713,24 @@
             <a:prstDash val="solid"/>
           </a:ln>
         </p:spPr>
+        <p:txBody>
+          <a:bodyPr/>
+          <a:lstStyle/>
+          <a:p>
+            <a:endParaRPr lang="en-GB"/>
+          </a:p>
+        </p:txBody>
       </p:sp>
       <p:pic>
         <p:nvPicPr>
-          <p:cNvPr id="23" name="Proof icon 3" descr="preencoded.png">    </p:cNvPr>
+          <p:cNvPr id="23" name="Proof icon 3" descr="preencoded.png"/>
           <p:cNvPicPr>
             <a:picLocks noChangeAspect="1"/>
           </p:cNvPicPr>
           <p:nvPr/>
         </p:nvPicPr>
         <p:blipFill>
-          <a:blip r:embed="rId3"/>
+          <a:blip r:embed="rId5"/>
           <a:stretch>
             <a:fillRect/>
           </a:stretch>
@@ -7606,7 +7766,7 @@
           <a:bodyPr wrap="square" lIns="0" tIns="0" rIns="0" bIns="0" rtlCol="0" anchor="ctr"/>
           <a:lstStyle/>
           <a:p>
-            <a:pPr indent="0" marL="0">
+            <a:pPr marL="0" indent="0">
               <a:lnSpc>
                 <a:spcPct val="105000"/>
               </a:lnSpc>
@@ -7623,12 +7783,6 @@
               </a:rPr>
               <a:t>One job for the treasurer. </a:t>
             </a:r>
-            <a:pPr indent="0" marL="0">
-              <a:lnSpc>
-                <a:spcPct val="105000"/>
-              </a:lnSpc>
-              <a:buNone/>
-            </a:pPr>
             <a:r>
               <a:rPr lang="en-US" sz="1550" dirty="0">
                 <a:solidFill>
@@ -7664,7 +7818,7 @@
           </a:prstGeom>
           <a:extLst>
             <a:ext uri="{C572A759-6A51-4108-AA02-DFA0A04FC94B}">
-              <ma14:wrappingTextBoxFlag xmlns:ma14="http://schemas.microsoft.com/office/mac/drawingml/2011/main" val="0"/>
+              <ma14:wrappingTextBoxFlag xmlns:ma14="http://schemas.microsoft.com/office/mac/drawingml/2011/main" xmlns="" val="0"/>
             </a:ext>
           </a:extLst>
         </p:spPr>
@@ -7685,7 +7839,7 @@
           <a:p>
             <a:pPr algn="r"/>
             <a:fld id="{F7021451-1387-4CA6-816F-3879F97B5CBC}" type="slidenum">
-              <a:rPr b="0" lang="en-US"/>
+              <a:rPr lang="en-US" b="0"/>
               <a:t>14</a:t>
             </a:fld>
             <a:endParaRPr lang="en-US"/>
@@ -7720,9 +7874,11 @@
       <p:sp>
         <p:nvSpPr>
           <p:cNvPr id="2" name="Text 4"/>
-          <p:cNvSpPr/>
+          <p:cNvSpPr>
+            <a:spLocks noGrp="1"/>
+          </p:cNvSpPr>
           <p:nvPr>
-            <p:ph idx="104" type="body" hasCustomPrompt="1"/>
+            <p:ph type="body" idx="104" hasCustomPrompt="1"/>
           </p:nvPr>
         </p:nvSpPr>
         <p:spPr>
@@ -7740,11 +7896,11 @@
           <a:bodyPr wrap="square" lIns="0" tIns="0" rIns="0" bIns="0" rtlCol="0" anchor="ctr"/>
           <a:lstStyle/>
           <a:p>
-            <a:pPr indent="0" marL="0">
-              <a:buNone/>
-            </a:pPr>
-            <a:r>
-              <a:rPr lang="en-US" sz="1200" spc="300" kern="0" dirty="0">
+            <a:pPr marL="0" indent="0">
+              <a:buNone/>
+            </a:pPr>
+            <a:r>
+              <a:rPr lang="en-US" sz="1200" kern="0" spc="300" dirty="0">
                 <a:solidFill>
                   <a:schemeClr val="accent1"/>
                 </a:solidFill>
@@ -7761,9 +7917,11 @@
       <p:sp>
         <p:nvSpPr>
           <p:cNvPr id="3" name="Text 4"/>
-          <p:cNvSpPr/>
+          <p:cNvSpPr>
+            <a:spLocks noGrp="1"/>
+          </p:cNvSpPr>
           <p:nvPr>
-            <p:ph idx="105" type="title" hasCustomPrompt="1"/>
+            <p:ph type="title" idx="105" hasCustomPrompt="1"/>
           </p:nvPr>
         </p:nvSpPr>
         <p:spPr>
@@ -7781,7 +7939,7 @@
           <a:bodyPr wrap="square" lIns="0" tIns="0" rIns="0" bIns="0" rtlCol="0" anchor="t"/>
           <a:lstStyle/>
           <a:p>
-            <a:pPr algn="l" indent="0" marL="0">
+            <a:pPr marL="0" indent="0" algn="l">
               <a:buNone/>
             </a:pPr>
             <a:r>
@@ -7825,6 +7983,13 @@
             <a:prstDash val="solid"/>
           </a:ln>
         </p:spPr>
+        <p:txBody>
+          <a:bodyPr/>
+          <a:lstStyle/>
+          <a:p>
+            <a:endParaRPr lang="en-GB"/>
+          </a:p>
+        </p:txBody>
       </p:sp>
       <p:sp>
         <p:nvSpPr>
@@ -7849,7 +8014,7 @@
           </a:bodyPr>
           <a:lstStyle/>
           <a:p>
-            <a:pPr indent="0" marL="0">
+            <a:pPr marL="0" indent="0">
               <a:buNone/>
             </a:pPr>
             <a:r>
@@ -7888,7 +8053,7 @@
           <a:bodyPr wrap="square" lIns="0" tIns="0" rIns="0" bIns="0" rtlCol="0" anchor="t"/>
           <a:lstStyle/>
           <a:p>
-            <a:pPr indent="0" marL="0">
+            <a:pPr marL="0" indent="0">
               <a:lnSpc>
                 <a:spcPct val="105000"/>
               </a:lnSpc>
@@ -7935,6 +8100,13 @@
             <a:prstDash val="solid"/>
           </a:ln>
         </p:spPr>
+        <p:txBody>
+          <a:bodyPr/>
+          <a:lstStyle/>
+          <a:p>
+            <a:endParaRPr lang="en-GB"/>
+          </a:p>
+        </p:txBody>
       </p:sp>
       <p:sp>
         <p:nvSpPr>
@@ -7959,7 +8131,7 @@
           </a:bodyPr>
           <a:lstStyle/>
           <a:p>
-            <a:pPr indent="0" marL="0">
+            <a:pPr marL="0" indent="0">
               <a:buNone/>
             </a:pPr>
             <a:r>
@@ -7998,7 +8170,7 @@
           <a:bodyPr wrap="square" lIns="0" tIns="0" rIns="0" bIns="0" rtlCol="0" anchor="t"/>
           <a:lstStyle/>
           <a:p>
-            <a:pPr indent="0" marL="0">
+            <a:pPr marL="0" indent="0">
               <a:lnSpc>
                 <a:spcPct val="105000"/>
               </a:lnSpc>
@@ -8045,6 +8217,13 @@
             <a:prstDash val="solid"/>
           </a:ln>
         </p:spPr>
+        <p:txBody>
+          <a:bodyPr/>
+          <a:lstStyle/>
+          <a:p>
+            <a:endParaRPr lang="en-GB"/>
+          </a:p>
+        </p:txBody>
       </p:sp>
       <p:sp>
         <p:nvSpPr>
@@ -8069,7 +8248,7 @@
           </a:bodyPr>
           <a:lstStyle/>
           <a:p>
-            <a:pPr indent="0" marL="0">
+            <a:pPr marL="0" indent="0">
               <a:buNone/>
             </a:pPr>
             <a:r>
@@ -8108,7 +8287,7 @@
           <a:bodyPr wrap="square" lIns="0" tIns="0" rIns="0" bIns="0" rtlCol="0" anchor="t"/>
           <a:lstStyle/>
           <a:p>
-            <a:pPr indent="0" marL="0">
+            <a:pPr marL="0" indent="0">
               <a:lnSpc>
                 <a:spcPct val="105000"/>
               </a:lnSpc>
@@ -8123,7 +8302,26 @@
                 <a:ea typeface="Calibri" pitchFamily="34" charset="-122"/>
                 <a:cs typeface="Calibri" pitchFamily="34" charset="-120"/>
               </a:rPr>
-              <a:t>Ledger jobs: sign payouts, seal the agent’s keys</a:t>
+              <a:t>Ledger jobs: sign payouts, </a:t>
+            </a:r>
+          </a:p>
+          <a:p>
+            <a:pPr marL="0" indent="0">
+              <a:lnSpc>
+                <a:spcPct val="105000"/>
+              </a:lnSpc>
+              <a:buNone/>
+            </a:pPr>
+            <a:r>
+              <a:rPr lang="en-US" sz="1350" dirty="0">
+                <a:solidFill>
+                  <a:schemeClr val="bg2"/>
+                </a:solidFill>
+                <a:latin typeface="Calibri" pitchFamily="34" charset="0"/>
+                <a:ea typeface="Calibri" pitchFamily="34" charset="-122"/>
+                <a:cs typeface="Calibri" pitchFamily="34" charset="-120"/>
+              </a:rPr>
+              <a:t>seal the agent’s keys</a:t>
             </a:r>
             <a:endParaRPr lang="en-US" sz="1350" dirty="0"/>
           </a:p>
@@ -8155,6 +8353,13 @@
             <a:prstDash val="solid"/>
           </a:ln>
         </p:spPr>
+        <p:txBody>
+          <a:bodyPr/>
+          <a:lstStyle/>
+          <a:p>
+            <a:endParaRPr lang="en-GB"/>
+          </a:p>
+        </p:txBody>
       </p:sp>
       <p:sp>
         <p:nvSpPr>
@@ -8179,7 +8384,7 @@
           </a:bodyPr>
           <a:lstStyle/>
           <a:p>
-            <a:pPr indent="0" marL="0">
+            <a:pPr marL="0" indent="0">
               <a:buNone/>
             </a:pPr>
             <a:r>
@@ -8218,7 +8423,7 @@
           <a:bodyPr wrap="square" lIns="0" tIns="0" rIns="0" bIns="0" rtlCol="0" anchor="t"/>
           <a:lstStyle/>
           <a:p>
-            <a:pPr indent="0" marL="0">
+            <a:pPr marL="0" indent="0">
               <a:lnSpc>
                 <a:spcPct val="105000"/>
               </a:lnSpc>
@@ -8263,17 +8468,24 @@
             <a:prstDash val="solid"/>
           </a:ln>
         </p:spPr>
+        <p:txBody>
+          <a:bodyPr/>
+          <a:lstStyle/>
+          <a:p>
+            <a:endParaRPr lang="en-GB"/>
+          </a:p>
+        </p:txBody>
       </p:sp>
       <p:pic>
         <p:nvPicPr>
-          <p:cNvPr id="17" name="Proof icon 1" descr="preencoded.png">    </p:cNvPr>
+          <p:cNvPr id="17" name="Proof icon 1" descr="preencoded.png"/>
           <p:cNvPicPr>
             <a:picLocks noChangeAspect="1"/>
           </p:cNvPicPr>
           <p:nvPr/>
         </p:nvPicPr>
         <p:blipFill>
-          <a:blip r:embed="rId1"/>
+          <a:blip r:embed="rId3"/>
           <a:stretch>
             <a:fillRect/>
           </a:stretch>
@@ -8309,7 +8521,7 @@
           <a:bodyPr wrap="square" lIns="0" tIns="0" rIns="0" bIns="0" rtlCol="0" anchor="ctr"/>
           <a:lstStyle/>
           <a:p>
-            <a:pPr indent="0" marL="0">
+            <a:pPr marL="0" indent="0">
               <a:lnSpc>
                 <a:spcPct val="105000"/>
               </a:lnSpc>
@@ -8326,12 +8538,6 @@
               </a:rPr>
               <a:t>Universities first. </a:t>
             </a:r>
-            <a:pPr indent="0" marL="0">
-              <a:lnSpc>
-                <a:spcPct val="105000"/>
-              </a:lnSpc>
-              <a:buNone/>
-            </a:pPr>
             <a:r>
               <a:rPr lang="en-US" sz="1550" dirty="0">
                 <a:solidFill>
@@ -8371,17 +8577,24 @@
             <a:prstDash val="solid"/>
           </a:ln>
         </p:spPr>
+        <p:txBody>
+          <a:bodyPr/>
+          <a:lstStyle/>
+          <a:p>
+            <a:endParaRPr lang="en-GB"/>
+          </a:p>
+        </p:txBody>
       </p:sp>
       <p:pic>
         <p:nvPicPr>
-          <p:cNvPr id="20" name="Proof icon 2" descr="preencoded.png">    </p:cNvPr>
+          <p:cNvPr id="20" name="Proof icon 2" descr="preencoded.png"/>
           <p:cNvPicPr>
             <a:picLocks noChangeAspect="1"/>
           </p:cNvPicPr>
           <p:nvPr/>
         </p:nvPicPr>
         <p:blipFill>
-          <a:blip r:embed="rId2"/>
+          <a:blip r:embed="rId4"/>
           <a:stretch>
             <a:fillRect/>
           </a:stretch>
@@ -8417,7 +8630,7 @@
           <a:bodyPr wrap="square" lIns="0" tIns="0" rIns="0" bIns="0" rtlCol="0" anchor="ctr"/>
           <a:lstStyle/>
           <a:p>
-            <a:pPr indent="0" marL="0">
+            <a:pPr marL="0" indent="0">
               <a:lnSpc>
                 <a:spcPct val="105000"/>
               </a:lnSpc>
@@ -8434,12 +8647,6 @@
               </a:rPr>
               <a:t>Then anyone with expenses. </a:t>
             </a:r>
-            <a:pPr indent="0" marL="0">
-              <a:lnSpc>
-                <a:spcPct val="105000"/>
-              </a:lnSpc>
-              <a:buNone/>
-            </a:pPr>
             <a:r>
               <a:rPr lang="en-US" sz="1550" dirty="0">
                 <a:solidFill>
@@ -8479,17 +8686,24 @@
             <a:prstDash val="solid"/>
           </a:ln>
         </p:spPr>
+        <p:txBody>
+          <a:bodyPr/>
+          <a:lstStyle/>
+          <a:p>
+            <a:endParaRPr lang="en-GB"/>
+          </a:p>
+        </p:txBody>
       </p:sp>
       <p:pic>
         <p:nvPicPr>
-          <p:cNvPr id="23" name="Proof icon 3" descr="preencoded.png">    </p:cNvPr>
+          <p:cNvPr id="23" name="Proof icon 3" descr="preencoded.png"/>
           <p:cNvPicPr>
             <a:picLocks noChangeAspect="1"/>
           </p:cNvPicPr>
           <p:nvPr/>
         </p:nvPicPr>
         <p:blipFill>
-          <a:blip r:embed="rId3"/>
+          <a:blip r:embed="rId5"/>
           <a:stretch>
             <a:fillRect/>
           </a:stretch>
@@ -8525,7 +8739,7 @@
           <a:bodyPr wrap="square" lIns="0" tIns="0" rIns="0" bIns="0" rtlCol="0" anchor="ctr"/>
           <a:lstStyle/>
           <a:p>
-            <a:pPr indent="0" marL="0">
+            <a:pPr marL="0" indent="0">
               <a:lnSpc>
                 <a:spcPct val="105000"/>
               </a:lnSpc>
@@ -8542,12 +8756,6 @@
               </a:rPr>
               <a:t>Agents that hold secrets. </a:t>
             </a:r>
-            <a:pPr indent="0" marL="0">
-              <a:lnSpc>
-                <a:spcPct val="105000"/>
-              </a:lnSpc>
-              <a:buNone/>
-            </a:pPr>
             <a:r>
               <a:rPr lang="en-US" sz="1550" dirty="0">
                 <a:solidFill>
@@ -8583,7 +8791,7 @@
           </a:prstGeom>
           <a:extLst>
             <a:ext uri="{C572A759-6A51-4108-AA02-DFA0A04FC94B}">
-              <ma14:wrappingTextBoxFlag xmlns:ma14="http://schemas.microsoft.com/office/mac/drawingml/2011/main" val="0"/>
+              <ma14:wrappingTextBoxFlag xmlns:ma14="http://schemas.microsoft.com/office/mac/drawingml/2011/main" xmlns="" val="0"/>
             </a:ext>
           </a:extLst>
         </p:spPr>
@@ -8604,7 +8812,7 @@
           <a:p>
             <a:pPr algn="r"/>
             <a:fld id="{F7021451-1387-4CA6-816F-3879F97B5CBC}" type="slidenum">
-              <a:rPr b="0" lang="en-US"/>
+              <a:rPr lang="en-US" b="0"/>
               <a:t>15</a:t>
             </a:fld>
             <a:endParaRPr lang="en-US"/>
@@ -8639,9 +8847,11 @@
       <p:sp>
         <p:nvSpPr>
           <p:cNvPr id="2" name="Text 4"/>
-          <p:cNvSpPr/>
+          <p:cNvSpPr>
+            <a:spLocks noGrp="1"/>
+          </p:cNvSpPr>
           <p:nvPr>
-            <p:ph idx="104" type="body" hasCustomPrompt="1"/>
+            <p:ph type="body" idx="104" hasCustomPrompt="1"/>
           </p:nvPr>
         </p:nvSpPr>
         <p:spPr>
@@ -8659,11 +8869,11 @@
           <a:bodyPr wrap="square" lIns="0" tIns="0" rIns="0" bIns="0" rtlCol="0" anchor="ctr"/>
           <a:lstStyle/>
           <a:p>
-            <a:pPr indent="0" marL="0">
-              <a:buNone/>
-            </a:pPr>
-            <a:r>
-              <a:rPr lang="en-US" sz="1200" spc="300" kern="0" dirty="0">
+            <a:pPr marL="0" indent="0">
+              <a:buNone/>
+            </a:pPr>
+            <a:r>
+              <a:rPr lang="en-US" sz="1200" kern="0" spc="300" dirty="0">
                 <a:solidFill>
                   <a:schemeClr val="accent1"/>
                 </a:solidFill>
@@ -8680,9 +8890,11 @@
       <p:sp>
         <p:nvSpPr>
           <p:cNvPr id="3" name="Text 4"/>
-          <p:cNvSpPr/>
+          <p:cNvSpPr>
+            <a:spLocks noGrp="1"/>
+          </p:cNvSpPr>
           <p:nvPr>
-            <p:ph idx="105" type="title" hasCustomPrompt="1"/>
+            <p:ph type="title" idx="105" hasCustomPrompt="1"/>
           </p:nvPr>
         </p:nvSpPr>
         <p:spPr>
@@ -8700,7 +8912,7 @@
           <a:bodyPr wrap="square" lIns="0" tIns="0" rIns="0" bIns="0" rtlCol="0" anchor="t"/>
           <a:lstStyle/>
           <a:p>
-            <a:pPr algn="l" indent="0" marL="0">
+            <a:pPr marL="0" indent="0" algn="l">
               <a:buNone/>
             </a:pPr>
             <a:r>
@@ -8744,6 +8956,13 @@
             <a:prstDash val="solid"/>
           </a:ln>
         </p:spPr>
+        <p:txBody>
+          <a:bodyPr/>
+          <a:lstStyle/>
+          <a:p>
+            <a:endParaRPr lang="en-GB"/>
+          </a:p>
+        </p:txBody>
       </p:sp>
       <p:sp>
         <p:nvSpPr>
@@ -8768,7 +8987,7 @@
           </a:bodyPr>
           <a:lstStyle/>
           <a:p>
-            <a:pPr indent="0" marL="0">
+            <a:pPr marL="0" indent="0">
               <a:buNone/>
             </a:pPr>
             <a:r>
@@ -8807,7 +9026,7 @@
           <a:bodyPr wrap="square" lIns="0" tIns="0" rIns="0" bIns="0" rtlCol="0" anchor="t"/>
           <a:lstStyle/>
           <a:p>
-            <a:pPr indent="0" marL="0">
+            <a:pPr marL="0" indent="0">
               <a:lnSpc>
                 <a:spcPct val="105000"/>
               </a:lnSpc>
@@ -8854,6 +9073,13 @@
             <a:prstDash val="solid"/>
           </a:ln>
         </p:spPr>
+        <p:txBody>
+          <a:bodyPr/>
+          <a:lstStyle/>
+          <a:p>
+            <a:endParaRPr lang="en-GB"/>
+          </a:p>
+        </p:txBody>
       </p:sp>
       <p:sp>
         <p:nvSpPr>
@@ -8878,7 +9104,7 @@
           </a:bodyPr>
           <a:lstStyle/>
           <a:p>
-            <a:pPr indent="0" marL="0">
+            <a:pPr marL="0" indent="0">
               <a:buNone/>
             </a:pPr>
             <a:r>
@@ -8917,7 +9143,7 @@
           <a:bodyPr wrap="square" lIns="0" tIns="0" rIns="0" bIns="0" rtlCol="0" anchor="t"/>
           <a:lstStyle/>
           <a:p>
-            <a:pPr indent="0" marL="0">
+            <a:pPr marL="0" indent="0">
               <a:lnSpc>
                 <a:spcPct val="105000"/>
               </a:lnSpc>
@@ -8964,6 +9190,13 @@
             <a:prstDash val="solid"/>
           </a:ln>
         </p:spPr>
+        <p:txBody>
+          <a:bodyPr/>
+          <a:lstStyle/>
+          <a:p>
+            <a:endParaRPr lang="en-GB"/>
+          </a:p>
+        </p:txBody>
       </p:sp>
       <p:sp>
         <p:nvSpPr>
@@ -8988,7 +9221,7 @@
           </a:bodyPr>
           <a:lstStyle/>
           <a:p>
-            <a:pPr indent="0" marL="0">
+            <a:pPr marL="0" indent="0">
               <a:buNone/>
             </a:pPr>
             <a:r>
@@ -9027,7 +9260,7 @@
           <a:bodyPr wrap="square" lIns="0" tIns="0" rIns="0" bIns="0" rtlCol="0" anchor="t"/>
           <a:lstStyle/>
           <a:p>
-            <a:pPr indent="0" marL="0">
+            <a:pPr marL="0" indent="0">
               <a:lnSpc>
                 <a:spcPct val="105000"/>
               </a:lnSpc>
@@ -9074,6 +9307,13 @@
             <a:prstDash val="solid"/>
           </a:ln>
         </p:spPr>
+        <p:txBody>
+          <a:bodyPr/>
+          <a:lstStyle/>
+          <a:p>
+            <a:endParaRPr lang="en-GB"/>
+          </a:p>
+        </p:txBody>
       </p:sp>
       <p:sp>
         <p:nvSpPr>
@@ -9098,7 +9338,7 @@
           </a:bodyPr>
           <a:lstStyle/>
           <a:p>
-            <a:pPr indent="0" marL="0">
+            <a:pPr marL="0" indent="0">
               <a:buNone/>
             </a:pPr>
             <a:r>
@@ -9137,7 +9377,7 @@
           <a:bodyPr wrap="square" lIns="0" tIns="0" rIns="0" bIns="0" rtlCol="0" anchor="t"/>
           <a:lstStyle/>
           <a:p>
-            <a:pPr indent="0" marL="0">
+            <a:pPr marL="0" indent="0">
               <a:lnSpc>
                 <a:spcPct val="105000"/>
               </a:lnSpc>
@@ -9182,17 +9422,24 @@
             <a:prstDash val="solid"/>
           </a:ln>
         </p:spPr>
+        <p:txBody>
+          <a:bodyPr/>
+          <a:lstStyle/>
+          <a:p>
+            <a:endParaRPr lang="en-GB"/>
+          </a:p>
+        </p:txBody>
       </p:sp>
       <p:pic>
         <p:nvPicPr>
-          <p:cNvPr id="17" name="Proof icon 1" descr="preencoded.png">    </p:cNvPr>
+          <p:cNvPr id="17" name="Proof icon 1" descr="preencoded.png"/>
           <p:cNvPicPr>
             <a:picLocks noChangeAspect="1"/>
           </p:cNvPicPr>
           <p:nvPr/>
         </p:nvPicPr>
         <p:blipFill>
-          <a:blip r:embed="rId1"/>
+          <a:blip r:embed="rId3"/>
           <a:stretch>
             <a:fillRect/>
           </a:stretch>
@@ -9216,7 +9463,7 @@
         <p:spPr>
           <a:xfrm>
             <a:off x="1325880" y="3621024"/>
-            <a:ext cx="10317175" cy="640080"/>
+            <a:ext cx="7223760" cy="640080"/>
           </a:xfrm>
           <a:prstGeom prst="rect">
             <a:avLst/>
@@ -9228,7 +9475,7 @@
           <a:bodyPr wrap="square" lIns="0" tIns="0" rIns="0" bIns="0" rtlCol="0" anchor="ctr"/>
           <a:lstStyle/>
           <a:p>
-            <a:pPr indent="0" marL="0">
+            <a:pPr marL="0" indent="0">
               <a:lnSpc>
                 <a:spcPct val="105000"/>
               </a:lnSpc>
@@ -9245,12 +9492,6 @@
               </a:rPr>
               <a:t>Code: </a:t>
             </a:r>
-            <a:pPr indent="0" marL="0">
-              <a:lnSpc>
-                <a:spcPct val="105000"/>
-              </a:lnSpc>
-              <a:buNone/>
-            </a:pPr>
             <a:r>
               <a:rPr lang="en-US" sz="1550" u="sng" dirty="0">
                 <a:solidFill>
@@ -9259,7 +9500,7 @@
                 <a:latin typeface="Calibri" pitchFamily="34" charset="0"/>
                 <a:ea typeface="Calibri" pitchFamily="34" charset="-122"/>
                 <a:cs typeface="Calibri" pitchFamily="34" charset="-120"/>
-                <a:hlinkClick r:id="rId2" invalidUrl="" action="" tgtFrame="" tooltip="https://github.com/tamrachan/ledger-hackathon" history="1" highlightClick="0" endSnd="0">
+                <a:hlinkClick r:id="rId4" tooltip="https://github.com/tamrachan/soc-fi">
                   <a:extLst>
                     <a:ext uri="{A12FA001-AC4F-418D-AE19-62706E023703}">
                       <ahyp:hlinkClr xmlns:ahyp="http://schemas.microsoft.com/office/drawing/2018/hyperlinkcolor" val="tx"/>
@@ -9267,14 +9508,8 @@
                   </a:extLst>
                 </a:hlinkClick>
               </a:rPr>
-              <a:t>github.com/tamrachan/ledger-hackathon</a:t>
-            </a:r>
-            <a:pPr indent="0" marL="0">
-              <a:lnSpc>
-                <a:spcPct val="105000"/>
-              </a:lnSpc>
-              <a:buNone/>
-            </a:pPr>
+              <a:t>github.com/tamrachan/soc-fi</a:t>
+            </a:r>
             <a:r>
               <a:rPr lang="en-US" sz="1550" dirty="0">
                 <a:solidFill>
@@ -9314,17 +9549,24 @@
             <a:prstDash val="solid"/>
           </a:ln>
         </p:spPr>
+        <p:txBody>
+          <a:bodyPr/>
+          <a:lstStyle/>
+          <a:p>
+            <a:endParaRPr lang="en-GB"/>
+          </a:p>
+        </p:txBody>
       </p:sp>
       <p:pic>
         <p:nvPicPr>
-          <p:cNvPr id="20" name="Proof icon 2" descr="preencoded.png">    </p:cNvPr>
+          <p:cNvPr id="20" name="Proof icon 2" descr="preencoded.png"/>
           <p:cNvPicPr>
             <a:picLocks noChangeAspect="1"/>
           </p:cNvPicPr>
           <p:nvPr/>
         </p:nvPicPr>
         <p:blipFill>
-          <a:blip r:embed="rId3"/>
+          <a:blip r:embed="rId5"/>
           <a:stretch>
             <a:fillRect/>
           </a:stretch>
@@ -9348,7 +9590,7 @@
         <p:spPr>
           <a:xfrm>
             <a:off x="1325880" y="4443984"/>
-            <a:ext cx="10317175" cy="640080"/>
+            <a:ext cx="7223760" cy="640080"/>
           </a:xfrm>
           <a:prstGeom prst="rect">
             <a:avLst/>
@@ -9360,7 +9602,7 @@
           <a:bodyPr wrap="square" lIns="0" tIns="0" rIns="0" bIns="0" rtlCol="0" anchor="ctr"/>
           <a:lstStyle/>
           <a:p>
-            <a:pPr indent="0" marL="0">
+            <a:pPr marL="0" indent="0">
               <a:lnSpc>
                 <a:spcPct val="105000"/>
               </a:lnSpc>
@@ -9377,12 +9619,6 @@
               </a:rPr>
               <a:t>Try it: </a:t>
             </a:r>
-            <a:pPr indent="0" marL="0">
-              <a:lnSpc>
-                <a:spcPct val="105000"/>
-              </a:lnSpc>
-              <a:buNone/>
-            </a:pPr>
             <a:r>
               <a:rPr lang="en-US" sz="1550" u="sng" dirty="0">
                 <a:solidFill>
@@ -9391,7 +9627,7 @@
                 <a:latin typeface="Calibri" pitchFamily="34" charset="0"/>
                 <a:ea typeface="Calibri" pitchFamily="34" charset="-122"/>
                 <a:cs typeface="Calibri" pitchFamily="34" charset="-120"/>
-                <a:hlinkClick r:id="rId4" invalidUrl="" action="" tgtFrame="" tooltip="https://tamrachan.github.io/ledger-hackathon/" history="1" highlightClick="0" endSnd="0">
+                <a:hlinkClick r:id="rId6" tooltip="https://tamrachan.github.io/soc-fi/">
                   <a:extLst>
                     <a:ext uri="{A12FA001-AC4F-418D-AE19-62706E023703}">
                       <ahyp:hlinkClr xmlns:ahyp="http://schemas.microsoft.com/office/drawing/2018/hyperlinkcolor" val="tx"/>
@@ -9399,14 +9635,8 @@
                   </a:extLst>
                 </a:hlinkClick>
               </a:rPr>
-              <a:t>tamrachan.github.io/ledger-hackathon</a:t>
-            </a:r>
-            <a:pPr indent="0" marL="0">
-              <a:lnSpc>
-                <a:spcPct val="105000"/>
-              </a:lnSpc>
-              <a:buNone/>
-            </a:pPr>
+              <a:t>tamrachan.github.io/soc-fi</a:t>
+            </a:r>
             <a:r>
               <a:rPr lang="en-US" sz="1550" dirty="0">
                 <a:solidFill>
@@ -9446,17 +9676,24 @@
             <a:prstDash val="solid"/>
           </a:ln>
         </p:spPr>
+        <p:txBody>
+          <a:bodyPr/>
+          <a:lstStyle/>
+          <a:p>
+            <a:endParaRPr lang="en-GB"/>
+          </a:p>
+        </p:txBody>
       </p:sp>
       <p:pic>
         <p:nvPicPr>
-          <p:cNvPr id="23" name="Proof icon 3" descr="preencoded.png">    </p:cNvPr>
+          <p:cNvPr id="23" name="Proof icon 3" descr="preencoded.png"/>
           <p:cNvPicPr>
             <a:picLocks noChangeAspect="1"/>
           </p:cNvPicPr>
           <p:nvPr/>
         </p:nvPicPr>
         <p:blipFill>
-          <a:blip r:embed="rId5"/>
+          <a:blip r:embed="rId7"/>
           <a:stretch>
             <a:fillRect/>
           </a:stretch>
@@ -9480,7 +9717,7 @@
         <p:spPr>
           <a:xfrm>
             <a:off x="1325880" y="5266944"/>
-            <a:ext cx="10317175" cy="640080"/>
+            <a:ext cx="7223760" cy="640080"/>
           </a:xfrm>
           <a:prstGeom prst="rect">
             <a:avLst/>
@@ -9492,7 +9729,7 @@
           <a:bodyPr wrap="square" lIns="0" tIns="0" rIns="0" bIns="0" rtlCol="0" anchor="ctr"/>
           <a:lstStyle/>
           <a:p>
-            <a:pPr indent="0" marL="0">
+            <a:pPr marL="0" indent="0">
               <a:lnSpc>
                 <a:spcPct val="105000"/>
               </a:lnSpc>
@@ -9509,12 +9746,6 @@
               </a:rPr>
               <a:t>For builders. </a:t>
             </a:r>
-            <a:pPr indent="0" marL="0">
-              <a:lnSpc>
-                <a:spcPct val="105000"/>
-              </a:lnSpc>
-              <a:buNone/>
-            </a:pPr>
             <a:r>
               <a:rPr lang="en-US" sz="1550" dirty="0">
                 <a:solidFill>
@@ -9527,6 +9758,134 @@
               <a:t>The backend API and gotchas, the data schemas and claim status machine, and a frank developer-experience write-up for Ledger.</a:t>
             </a:r>
             <a:endParaRPr lang="en-US" sz="1550" dirty="0"/>
+          </a:p>
+        </p:txBody>
+      </p:sp>
+      <p:pic>
+        <p:nvPicPr>
+          <p:cNvPr id="90" name="QR code: repo" descr="QR code linking to github.com/tamrachan/soc-fi">
+            <a:hlinkClick r:id="rId4"/>
+          </p:cNvPr>
+          <p:cNvPicPr>
+            <a:picLocks noChangeAspect="1"/>
+          </p:cNvPicPr>
+          <p:nvPr/>
+        </p:nvPicPr>
+        <p:blipFill>
+          <a:blip r:embed="rId8"/>
+          <a:stretch>
+            <a:fillRect/>
+          </a:stretch>
+        </p:blipFill>
+        <p:spPr>
+          <a:xfrm>
+            <a:off x="9070848" y="3657600"/>
+            <a:ext cx="1188720" cy="1188720"/>
+          </a:xfrm>
+          <a:prstGeom prst="rect">
+            <a:avLst/>
+          </a:prstGeom>
+        </p:spPr>
+      </p:pic>
+      <p:pic>
+        <p:nvPicPr>
+          <p:cNvPr id="91" name="QR code: live demo" descr="QR code linking to tamrachan.github.io/soc-fi">
+            <a:hlinkClick r:id="rId6"/>
+          </p:cNvPr>
+          <p:cNvPicPr>
+            <a:picLocks noChangeAspect="1"/>
+          </p:cNvPicPr>
+          <p:nvPr/>
+        </p:nvPicPr>
+        <p:blipFill>
+          <a:blip r:embed="rId9"/>
+          <a:stretch>
+            <a:fillRect/>
+          </a:stretch>
+        </p:blipFill>
+        <p:spPr>
+          <a:xfrm>
+            <a:off x="10451592" y="3657600"/>
+            <a:ext cx="1188720" cy="1188720"/>
+          </a:xfrm>
+          <a:prstGeom prst="rect">
+            <a:avLst/>
+          </a:prstGeom>
+        </p:spPr>
+      </p:pic>
+      <p:sp>
+        <p:nvSpPr>
+          <p:cNvPr id="92" name="QR label repo"/>
+          <p:cNvSpPr txBox="1"/>
+          <p:nvPr/>
+        </p:nvSpPr>
+        <p:spPr>
+          <a:xfrm>
+            <a:off x="9070848" y="4956048"/>
+            <a:ext cx="1188720" cy="228600"/>
+          </a:xfrm>
+          <a:prstGeom prst="rect">
+            <a:avLst/>
+          </a:prstGeom>
+          <a:noFill/>
+          <a:ln/>
+        </p:spPr>
+        <p:txBody>
+          <a:bodyPr wrap="square" lIns="0" tIns="0" rIns="0" bIns="0" rtlCol="0" anchor="t"/>
+          <a:lstStyle/>
+          <a:p>
+            <a:pPr marL="0" indent="0" algn="ctr">
+              <a:buNone/>
+            </a:pPr>
+            <a:r>
+              <a:rPr lang="en-GB" sz="1000" spc="200" dirty="0">
+                <a:solidFill>
+                  <a:schemeClr val="accent1"/>
+                </a:solidFill>
+                <a:latin typeface="Consolas" pitchFamily="34" charset="0"/>
+                <a:ea typeface="Consolas" pitchFamily="34" charset="-122"/>
+                <a:cs typeface="Consolas" pitchFamily="34" charset="-120"/>
+              </a:rPr>
+              <a:t>CODE</a:t>
+            </a:r>
+          </a:p>
+        </p:txBody>
+      </p:sp>
+      <p:sp>
+        <p:nvSpPr>
+          <p:cNvPr id="93" name="QR label demo"/>
+          <p:cNvSpPr txBox="1"/>
+          <p:nvPr/>
+        </p:nvSpPr>
+        <p:spPr>
+          <a:xfrm>
+            <a:off x="10451592" y="4956048"/>
+            <a:ext cx="1188720" cy="228600"/>
+          </a:xfrm>
+          <a:prstGeom prst="rect">
+            <a:avLst/>
+          </a:prstGeom>
+          <a:noFill/>
+          <a:ln/>
+        </p:spPr>
+        <p:txBody>
+          <a:bodyPr wrap="square" lIns="0" tIns="0" rIns="0" bIns="0" rtlCol="0" anchor="t"/>
+          <a:lstStyle/>
+          <a:p>
+            <a:pPr marL="0" indent="0" algn="ctr">
+              <a:buNone/>
+            </a:pPr>
+            <a:r>
+              <a:rPr lang="en-GB" sz="1000" spc="200" dirty="0">
+                <a:solidFill>
+                  <a:schemeClr val="accent1"/>
+                </a:solidFill>
+                <a:latin typeface="Consolas" pitchFamily="34" charset="0"/>
+                <a:ea typeface="Consolas" pitchFamily="34" charset="-122"/>
+                <a:cs typeface="Consolas" pitchFamily="34" charset="-120"/>
+              </a:rPr>
+              <a:t>TRY IT</a:t>
+            </a:r>
           </a:p>
         </p:txBody>
       </p:sp>
@@ -9550,7 +9909,7 @@
           </a:prstGeom>
           <a:extLst>
             <a:ext uri="{C572A759-6A51-4108-AA02-DFA0A04FC94B}">
-              <ma14:wrappingTextBoxFlag xmlns:ma14="http://schemas.microsoft.com/office/mac/drawingml/2011/main" val="0"/>
+              <ma14:wrappingTextBoxFlag xmlns:ma14="http://schemas.microsoft.com/office/mac/drawingml/2011/main" xmlns="" val="0"/>
             </a:ext>
           </a:extLst>
         </p:spPr>
@@ -9571,7 +9930,7 @@
           <a:p>
             <a:pPr algn="r"/>
             <a:fld id="{F7021451-1387-4CA6-816F-3879F97B5CBC}" type="slidenum">
-              <a:rPr b="0" lang="en-US"/>
+              <a:rPr lang="en-US" b="0"/>
               <a:t>16</a:t>
             </a:fld>
             <a:endParaRPr lang="en-US"/>
@@ -9611,7 +9970,7 @@
         </p:nvSpPr>
         <p:spPr>
           <a:xfrm>
-            <a:off x="548640" y="1645920"/>
+            <a:off x="548640" y="685800"/>
             <a:ext cx="10972800" cy="822960"/>
           </a:xfrm>
           <a:prstGeom prst="rect">
@@ -9624,7 +9983,7 @@
           <a:bodyPr wrap="square" lIns="0" tIns="0" rIns="0" bIns="0" rtlCol="0" anchor="t"/>
           <a:lstStyle/>
           <a:p>
-            <a:pPr indent="0" marL="0">
+            <a:pPr marL="0" indent="0">
               <a:buNone/>
             </a:pPr>
             <a:r>
@@ -9650,7 +10009,7 @@
         </p:nvSpPr>
         <p:spPr>
           <a:xfrm>
-            <a:off x="548640" y="2468880"/>
+            <a:off x="548640" y="1463040"/>
             <a:ext cx="10972800" cy="822960"/>
           </a:xfrm>
           <a:prstGeom prst="rect">
@@ -9663,7 +10022,7 @@
           <a:bodyPr wrap="square" lIns="0" tIns="0" rIns="0" bIns="0" rtlCol="0" anchor="t"/>
           <a:lstStyle/>
           <a:p>
-            <a:pPr indent="0" marL="0">
+            <a:pPr marL="0" indent="0">
               <a:buNone/>
             </a:pPr>
             <a:r>
@@ -9689,8 +10048,8 @@
         </p:nvSpPr>
         <p:spPr>
           <a:xfrm>
-            <a:off x="548640" y="3520440"/>
-            <a:ext cx="9144000" cy="548640"/>
+            <a:off x="548640" y="2377440"/>
+            <a:ext cx="10515600" cy="548640"/>
           </a:xfrm>
           <a:prstGeom prst="rect">
             <a:avLst/>
@@ -9702,7 +10061,7 @@
           <a:bodyPr wrap="square" lIns="0" tIns="0" rIns="0" bIns="0" rtlCol="0" anchor="t"/>
           <a:lstStyle/>
           <a:p>
-            <a:pPr indent="0" marL="0">
+            <a:pPr marL="0" indent="0">
               <a:buNone/>
             </a:pPr>
             <a:r>
@@ -9722,18 +10081,18 @@
       </p:sp>
       <p:sp>
         <p:nvSpPr>
-          <p:cNvPr id="5" name="Link 1"/>
+          <p:cNvPr id="41" name="Link card 1"/>
           <p:cNvSpPr/>
           <p:nvPr/>
         </p:nvSpPr>
         <p:spPr>
           <a:xfrm>
-            <a:off x="548640" y="4526280"/>
-            <a:ext cx="4251960" cy="1097280"/>
+            <a:off x="548640" y="3063240"/>
+            <a:ext cx="2514600" cy="2971800"/>
           </a:xfrm>
           <a:prstGeom prst="roundRect">
             <a:avLst>
-              <a:gd name="adj" fmla="val 10000"/>
+              <a:gd name="adj" fmla="val 6000"/>
             </a:avLst>
           </a:prstGeom>
           <a:solidFill>
@@ -9743,20 +10102,26 @@
             <a:solidFill>
               <a:schemeClr val="accent5"/>
             </a:solidFill>
-            <a:prstDash val="solid"/>
           </a:ln>
         </p:spPr>
-      </p:sp>
-      <p:sp>
-        <p:nvSpPr>
-          <p:cNvPr id="6" name="Text 4"/>
-          <p:cNvSpPr txBox="1"/>
-          <p:nvPr/>
-        </p:nvSpPr>
-        <p:spPr>
-          <a:xfrm>
-            <a:off x="822960" y="4690872"/>
-            <a:ext cx="3794760" cy="274320"/>
+        <p:txBody>
+          <a:bodyPr/>
+          <a:lstStyle/>
+          <a:p>
+            <a:endParaRPr lang="en-GB"/>
+          </a:p>
+        </p:txBody>
+      </p:sp>
+      <p:sp>
+        <p:nvSpPr>
+          <p:cNvPr id="42" name="Link label 1"/>
+          <p:cNvSpPr txBox="1"/>
+          <p:nvPr/>
+        </p:nvSpPr>
+        <p:spPr>
+          <a:xfrm>
+            <a:off x="777240" y="3264408"/>
+            <a:ext cx="2057400" cy="228600"/>
           </a:xfrm>
           <a:prstGeom prst="rect">
             <a:avLst/>
@@ -9768,11 +10133,11 @@
           <a:bodyPr wrap="square" lIns="0" tIns="0" rIns="0" bIns="0" rtlCol="0" anchor="t"/>
           <a:lstStyle/>
           <a:p>
-            <a:pPr indent="0" marL="0">
-              <a:buNone/>
-            </a:pPr>
-            <a:r>
-              <a:rPr lang="en-US" sz="1100" spc="200" kern="0" dirty="0">
+            <a:pPr marL="0" indent="0" algn="l">
+              <a:buNone/>
+            </a:pPr>
+            <a:r>
+              <a:rPr lang="en-GB" sz="1100" spc="200" dirty="0">
                 <a:solidFill>
                   <a:schemeClr val="accent1"/>
                 </a:solidFill>
@@ -9782,20 +10147,45 @@
               </a:rPr>
               <a:t>TRY IT</a:t>
             </a:r>
-            <a:endParaRPr lang="en-US" sz="1100" dirty="0"/>
-          </a:p>
-        </p:txBody>
-      </p:sp>
-      <p:sp>
-        <p:nvSpPr>
-          <p:cNvPr id="7" name="Text 5"/>
-          <p:cNvSpPr txBox="1"/>
-          <p:nvPr/>
-        </p:nvSpPr>
-        <p:spPr>
-          <a:xfrm>
-            <a:off x="822960" y="5029200"/>
-            <a:ext cx="3840480" cy="411480"/>
+          </a:p>
+        </p:txBody>
+      </p:sp>
+      <p:pic>
+        <p:nvPicPr>
+          <p:cNvPr id="43" name="QR code: try it" descr="QR code linking to tamrachan.github.io/soc-fi">
+            <a:hlinkClick r:id="rId3"/>
+          </p:cNvPr>
+          <p:cNvPicPr>
+            <a:picLocks noChangeAspect="1"/>
+          </p:cNvPicPr>
+          <p:nvPr/>
+        </p:nvPicPr>
+        <p:blipFill>
+          <a:blip r:embed="rId4"/>
+          <a:stretch>
+            <a:fillRect/>
+          </a:stretch>
+        </p:blipFill>
+        <p:spPr>
+          <a:xfrm>
+            <a:off x="960120" y="3611880"/>
+            <a:ext cx="1691640" cy="1691640"/>
+          </a:xfrm>
+          <a:prstGeom prst="rect">
+            <a:avLst/>
+          </a:prstGeom>
+        </p:spPr>
+      </p:pic>
+      <p:sp>
+        <p:nvSpPr>
+          <p:cNvPr id="44" name="Link url 1"/>
+          <p:cNvSpPr txBox="1"/>
+          <p:nvPr/>
+        </p:nvSpPr>
+        <p:spPr>
+          <a:xfrm>
+            <a:off x="621792" y="5486400"/>
+            <a:ext cx="2368296" cy="274320"/>
           </a:xfrm>
           <a:prstGeom prst="rect">
             <a:avLst/>
@@ -9807,18 +10197,18 @@
           <a:bodyPr wrap="square" lIns="0" tIns="0" rIns="0" bIns="0" rtlCol="0" anchor="t"/>
           <a:lstStyle/>
           <a:p>
-            <a:pPr indent="0" marL="0">
-              <a:buNone/>
-            </a:pPr>
-            <a:r>
-              <a:rPr lang="en-US" sz="1250" u="sng" dirty="0">
+            <a:pPr marL="0" indent="0" algn="ctr">
+              <a:buNone/>
+            </a:pPr>
+            <a:r>
+              <a:rPr lang="en-GB" sz="1000" u="sng" dirty="0">
                 <a:solidFill>
                   <a:schemeClr val="accent6"/>
                 </a:solidFill>
                 <a:latin typeface="Consolas" pitchFamily="34" charset="0"/>
                 <a:ea typeface="Consolas" pitchFamily="34" charset="-122"/>
                 <a:cs typeface="Consolas" pitchFamily="34" charset="-120"/>
-                <a:hlinkClick r:id="rId1" invalidUrl="" action="" tgtFrame="" tooltip="https://tamrachan.github.io/ledger-hackathon/" history="1" highlightClick="0" endSnd="0">
+                <a:hlinkClick r:id="rId3">
                   <a:extLst>
                     <a:ext uri="{A12FA001-AC4F-418D-AE19-62706E023703}">
                       <ahyp:hlinkClr xmlns:ahyp="http://schemas.microsoft.com/office/drawing/2018/hyperlinkcolor" val="tx"/>
@@ -9826,26 +10216,25 @@
                   </a:extLst>
                 </a:hlinkClick>
               </a:rPr>
-              <a:t>tamrachan.github.io/ledger-hackathon</a:t>
-            </a:r>
-            <a:endParaRPr lang="en-US" sz="1250" dirty="0"/>
-          </a:p>
-        </p:txBody>
-      </p:sp>
-      <p:sp>
-        <p:nvSpPr>
-          <p:cNvPr id="8" name="Link 2"/>
+              <a:t>tamrachan.github.io/soc-fi</a:t>
+            </a:r>
+          </a:p>
+        </p:txBody>
+      </p:sp>
+      <p:sp>
+        <p:nvSpPr>
+          <p:cNvPr id="45" name="Link card 2"/>
           <p:cNvSpPr/>
           <p:nvPr/>
         </p:nvSpPr>
         <p:spPr>
           <a:xfrm>
-            <a:off x="5074920" y="4526280"/>
-            <a:ext cx="4251960" cy="1097280"/>
+            <a:off x="3291840" y="3063240"/>
+            <a:ext cx="2514600" cy="2971800"/>
           </a:xfrm>
           <a:prstGeom prst="roundRect">
             <a:avLst>
-              <a:gd name="adj" fmla="val 10000"/>
+              <a:gd name="adj" fmla="val 6000"/>
             </a:avLst>
           </a:prstGeom>
           <a:solidFill>
@@ -9855,20 +10244,26 @@
             <a:solidFill>
               <a:schemeClr val="accent5"/>
             </a:solidFill>
-            <a:prstDash val="solid"/>
           </a:ln>
         </p:spPr>
-      </p:sp>
-      <p:sp>
-        <p:nvSpPr>
-          <p:cNvPr id="9" name="Text 7"/>
-          <p:cNvSpPr txBox="1"/>
-          <p:nvPr/>
-        </p:nvSpPr>
-        <p:spPr>
-          <a:xfrm>
-            <a:off x="5349240" y="4690872"/>
-            <a:ext cx="3794760" cy="274320"/>
+        <p:txBody>
+          <a:bodyPr/>
+          <a:lstStyle/>
+          <a:p>
+            <a:endParaRPr lang="en-GB"/>
+          </a:p>
+        </p:txBody>
+      </p:sp>
+      <p:sp>
+        <p:nvSpPr>
+          <p:cNvPr id="46" name="Link label 2"/>
+          <p:cNvSpPr txBox="1"/>
+          <p:nvPr/>
+        </p:nvSpPr>
+        <p:spPr>
+          <a:xfrm>
+            <a:off x="3520440" y="3264408"/>
+            <a:ext cx="2057400" cy="228600"/>
           </a:xfrm>
           <a:prstGeom prst="rect">
             <a:avLst/>
@@ -9880,11 +10275,11 @@
           <a:bodyPr wrap="square" lIns="0" tIns="0" rIns="0" bIns="0" rtlCol="0" anchor="t"/>
           <a:lstStyle/>
           <a:p>
-            <a:pPr indent="0" marL="0">
-              <a:buNone/>
-            </a:pPr>
-            <a:r>
-              <a:rPr lang="en-US" sz="1100" spc="200" kern="0" dirty="0">
+            <a:pPr marL="0" indent="0" algn="l">
+              <a:buNone/>
+            </a:pPr>
+            <a:r>
+              <a:rPr lang="en-GB" sz="1100" spc="200" dirty="0">
                 <a:solidFill>
                   <a:schemeClr val="accent1"/>
                 </a:solidFill>
@@ -9894,20 +10289,45 @@
               </a:rPr>
               <a:t>CODE</a:t>
             </a:r>
-            <a:endParaRPr lang="en-US" sz="1100" dirty="0"/>
-          </a:p>
-        </p:txBody>
-      </p:sp>
-      <p:sp>
-        <p:nvSpPr>
-          <p:cNvPr id="10" name="Text 8"/>
-          <p:cNvSpPr txBox="1"/>
-          <p:nvPr/>
-        </p:nvSpPr>
-        <p:spPr>
-          <a:xfrm>
-            <a:off x="5349240" y="5029200"/>
-            <a:ext cx="3840480" cy="411480"/>
+          </a:p>
+        </p:txBody>
+      </p:sp>
+      <p:pic>
+        <p:nvPicPr>
+          <p:cNvPr id="47" name="QR code: code" descr="QR code linking to github.com/tamrachan/soc-fi">
+            <a:hlinkClick r:id="rId5"/>
+          </p:cNvPr>
+          <p:cNvPicPr>
+            <a:picLocks noChangeAspect="1"/>
+          </p:cNvPicPr>
+          <p:nvPr/>
+        </p:nvPicPr>
+        <p:blipFill>
+          <a:blip r:embed="rId6"/>
+          <a:stretch>
+            <a:fillRect/>
+          </a:stretch>
+        </p:blipFill>
+        <p:spPr>
+          <a:xfrm>
+            <a:off x="3703320" y="3611880"/>
+            <a:ext cx="1691640" cy="1691640"/>
+          </a:xfrm>
+          <a:prstGeom prst="rect">
+            <a:avLst/>
+          </a:prstGeom>
+        </p:spPr>
+      </p:pic>
+      <p:sp>
+        <p:nvSpPr>
+          <p:cNvPr id="48" name="Link url 2"/>
+          <p:cNvSpPr txBox="1"/>
+          <p:nvPr/>
+        </p:nvSpPr>
+        <p:spPr>
+          <a:xfrm>
+            <a:off x="3364992" y="5486400"/>
+            <a:ext cx="2368296" cy="274320"/>
           </a:xfrm>
           <a:prstGeom prst="rect">
             <a:avLst/>
@@ -9919,18 +10339,18 @@
           <a:bodyPr wrap="square" lIns="0" tIns="0" rIns="0" bIns="0" rtlCol="0" anchor="t"/>
           <a:lstStyle/>
           <a:p>
-            <a:pPr indent="0" marL="0">
-              <a:buNone/>
-            </a:pPr>
-            <a:r>
-              <a:rPr lang="en-US" sz="1250" u="sng" dirty="0">
+            <a:pPr marL="0" indent="0" algn="ctr">
+              <a:buNone/>
+            </a:pPr>
+            <a:r>
+              <a:rPr lang="en-GB" sz="1000" u="sng" dirty="0">
                 <a:solidFill>
                   <a:schemeClr val="accent6"/>
                 </a:solidFill>
                 <a:latin typeface="Consolas" pitchFamily="34" charset="0"/>
                 <a:ea typeface="Consolas" pitchFamily="34" charset="-122"/>
                 <a:cs typeface="Consolas" pitchFamily="34" charset="-120"/>
-                <a:hlinkClick r:id="rId2" invalidUrl="" action="" tgtFrame="" tooltip="https://github.com/tamrachan/ledger-hackathon" history="1" highlightClick="0" endSnd="0">
+                <a:hlinkClick r:id="rId5">
                   <a:extLst>
                     <a:ext uri="{A12FA001-AC4F-418D-AE19-62706E023703}">
                       <ahyp:hlinkClr xmlns:ahyp="http://schemas.microsoft.com/office/drawing/2018/hyperlinkcolor" val="tx"/>
@@ -9938,26 +10358,25 @@
                   </a:extLst>
                 </a:hlinkClick>
               </a:rPr>
-              <a:t>github.com/tamrachan/ledger-hackathon</a:t>
-            </a:r>
-            <a:endParaRPr lang="en-US" sz="1250" dirty="0"/>
-          </a:p>
-        </p:txBody>
-      </p:sp>
-      <p:sp>
-        <p:nvSpPr>
-          <p:cNvPr id="11" name="Link 3"/>
+              <a:t>github.com/tamrachan/soc-fi</a:t>
+            </a:r>
+          </a:p>
+        </p:txBody>
+      </p:sp>
+      <p:sp>
+        <p:nvSpPr>
+          <p:cNvPr id="49" name="Team card"/>
           <p:cNvSpPr/>
           <p:nvPr/>
         </p:nvSpPr>
         <p:spPr>
           <a:xfrm>
-            <a:off x="9601200" y="4526280"/>
-            <a:ext cx="2041855" cy="1097280"/>
+            <a:off x="6035040" y="3063240"/>
+            <a:ext cx="5605272" cy="2971800"/>
           </a:xfrm>
           <a:prstGeom prst="roundRect">
             <a:avLst>
-              <a:gd name="adj" fmla="val 10000"/>
+              <a:gd name="adj" fmla="val 6000"/>
             </a:avLst>
           </a:prstGeom>
           <a:solidFill>
@@ -9967,20 +10386,26 @@
             <a:solidFill>
               <a:schemeClr val="accent5"/>
             </a:solidFill>
-            <a:prstDash val="solid"/>
           </a:ln>
         </p:spPr>
-      </p:sp>
-      <p:sp>
-        <p:nvSpPr>
-          <p:cNvPr id="12" name="Text 10"/>
-          <p:cNvSpPr txBox="1"/>
-          <p:nvPr/>
-        </p:nvSpPr>
-        <p:spPr>
-          <a:xfrm>
-            <a:off x="9875520" y="4690872"/>
-            <a:ext cx="1584655" cy="274320"/>
+        <p:txBody>
+          <a:bodyPr/>
+          <a:lstStyle/>
+          <a:p>
+            <a:endParaRPr lang="en-GB"/>
+          </a:p>
+        </p:txBody>
+      </p:sp>
+      <p:sp>
+        <p:nvSpPr>
+          <p:cNvPr id="50" name="Team label"/>
+          <p:cNvSpPr txBox="1"/>
+          <p:nvPr/>
+        </p:nvSpPr>
+        <p:spPr>
+          <a:xfrm>
+            <a:off x="6309360" y="3264408"/>
+            <a:ext cx="1828800" cy="228600"/>
           </a:xfrm>
           <a:prstGeom prst="rect">
             <a:avLst/>
@@ -9992,11 +10417,11 @@
           <a:bodyPr wrap="square" lIns="0" tIns="0" rIns="0" bIns="0" rtlCol="0" anchor="t"/>
           <a:lstStyle/>
           <a:p>
-            <a:pPr indent="0" marL="0">
-              <a:buNone/>
-            </a:pPr>
-            <a:r>
-              <a:rPr lang="en-US" sz="1100" spc="200" kern="0" dirty="0">
+            <a:pPr marL="0" indent="0" algn="l">
+              <a:buNone/>
+            </a:pPr>
+            <a:r>
+              <a:rPr lang="en-GB" sz="1100" spc="200" dirty="0">
                 <a:solidFill>
                   <a:schemeClr val="accent1"/>
                 </a:solidFill>
@@ -10006,20 +10431,48 @@
               </a:rPr>
               <a:t>TEAM</a:t>
             </a:r>
-            <a:endParaRPr lang="en-US" sz="1100" dirty="0"/>
-          </a:p>
-        </p:txBody>
-      </p:sp>
-      <p:sp>
-        <p:nvSpPr>
-          <p:cNvPr id="13" name="Text 11"/>
-          <p:cNvSpPr txBox="1"/>
-          <p:nvPr/>
-        </p:nvSpPr>
-        <p:spPr>
-          <a:xfrm>
-            <a:off x="9875520" y="5029200"/>
-            <a:ext cx="1630375" cy="411480"/>
+          </a:p>
+        </p:txBody>
+      </p:sp>
+      <p:pic>
+        <p:nvPicPr>
+          <p:cNvPr id="51" name="Photo Hugo Okada" descr="Photo of Hugo Okada"/>
+          <p:cNvPicPr>
+            <a:picLocks noChangeAspect="1"/>
+          </p:cNvPicPr>
+          <p:nvPr/>
+        </p:nvPicPr>
+        <p:blipFill>
+          <a:blip r:embed="rId7"/>
+          <a:stretch>
+            <a:fillRect/>
+          </a:stretch>
+        </p:blipFill>
+        <p:spPr>
+          <a:xfrm>
+            <a:off x="6301359" y="3657600"/>
+            <a:ext cx="1143000" cy="1143000"/>
+          </a:xfrm>
+          <a:prstGeom prst="ellipse">
+            <a:avLst/>
+          </a:prstGeom>
+          <a:ln w="19050">
+            <a:solidFill>
+              <a:schemeClr val="accent1"/>
+            </a:solidFill>
+          </a:ln>
+        </p:spPr>
+      </p:pic>
+      <p:sp>
+        <p:nvSpPr>
+          <p:cNvPr id="52" name="Name Hugo Okada"/>
+          <p:cNvSpPr txBox="1"/>
+          <p:nvPr/>
+        </p:nvSpPr>
+        <p:spPr>
+          <a:xfrm>
+            <a:off x="6217920" y="5001768"/>
+            <a:ext cx="1309878" cy="274320"/>
           </a:xfrm>
           <a:prstGeom prst="rect">
             <a:avLst/>
@@ -10031,21 +10484,553 @@
           <a:bodyPr wrap="square" lIns="0" tIns="0" rIns="0" bIns="0" rtlCol="0" anchor="t"/>
           <a:lstStyle/>
           <a:p>
-            <a:pPr indent="0" marL="0">
-              <a:buNone/>
-            </a:pPr>
-            <a:r>
-              <a:rPr lang="en-US" sz="1250" dirty="0">
+            <a:pPr marL="0" indent="0" algn="ctr">
+              <a:buNone/>
+            </a:pPr>
+            <a:r>
+              <a:rPr lang="en-GB" sz="1400" b="1" dirty="0">
                 <a:solidFill>
                   <a:schemeClr val="accent6"/>
+                </a:solidFill>
+                <a:latin typeface="Calibri" pitchFamily="34" charset="0"/>
+                <a:ea typeface="Calibri" pitchFamily="34" charset="-122"/>
+                <a:cs typeface="Calibri" pitchFamily="34" charset="-120"/>
+              </a:rPr>
+              <a:t>Hugo Okada</a:t>
+            </a:r>
+          </a:p>
+        </p:txBody>
+      </p:sp>
+      <p:sp>
+        <p:nvSpPr>
+          <p:cNvPr id="53" name="LinkedIn label Hugo Okada"/>
+          <p:cNvSpPr txBox="1"/>
+          <p:nvPr/>
+        </p:nvSpPr>
+        <p:spPr>
+          <a:xfrm>
+            <a:off x="6217920" y="5330952"/>
+            <a:ext cx="1309878" cy="201168"/>
+          </a:xfrm>
+          <a:prstGeom prst="rect">
+            <a:avLst/>
+          </a:prstGeom>
+          <a:noFill/>
+          <a:ln/>
+        </p:spPr>
+        <p:txBody>
+          <a:bodyPr wrap="square" lIns="0" tIns="0" rIns="0" bIns="0" rtlCol="0" anchor="t"/>
+          <a:lstStyle/>
+          <a:p>
+            <a:pPr marL="0" indent="0" algn="ctr">
+              <a:buNone/>
+            </a:pPr>
+            <a:r>
+              <a:rPr lang="en-GB" sz="800" spc="200" dirty="0">
+                <a:solidFill>
+                  <a:schemeClr val="bg2"/>
                 </a:solidFill>
                 <a:latin typeface="Consolas" pitchFamily="34" charset="0"/>
                 <a:ea typeface="Consolas" pitchFamily="34" charset="-122"/>
                 <a:cs typeface="Consolas" pitchFamily="34" charset="-120"/>
               </a:rPr>
-              <a:t>[Names]</a:t>
-            </a:r>
-            <a:endParaRPr lang="en-US" sz="1250" dirty="0"/>
+              <a:t>LINKEDIN</a:t>
+            </a:r>
+          </a:p>
+        </p:txBody>
+      </p:sp>
+      <p:sp>
+        <p:nvSpPr>
+          <p:cNvPr id="54" name="LinkedIn Hugo Okada"/>
+          <p:cNvSpPr txBox="1"/>
+          <p:nvPr/>
+        </p:nvSpPr>
+        <p:spPr>
+          <a:xfrm>
+            <a:off x="6217920" y="5532120"/>
+            <a:ext cx="1309878" cy="228600"/>
+          </a:xfrm>
+          <a:prstGeom prst="rect">
+            <a:avLst/>
+          </a:prstGeom>
+          <a:noFill/>
+          <a:ln/>
+        </p:spPr>
+        <p:txBody>
+          <a:bodyPr wrap="square" lIns="0" tIns="0" rIns="0" bIns="0" rtlCol="0" anchor="t"/>
+          <a:lstStyle/>
+          <a:p>
+            <a:pPr marL="0" indent="0" algn="ctr">
+              <a:buNone/>
+            </a:pPr>
+            <a:r>
+              <a:rPr lang="en-GB" sz="1000" u="sng" dirty="0">
+                <a:solidFill>
+                  <a:schemeClr val="accent1"/>
+                </a:solidFill>
+                <a:latin typeface="Consolas" pitchFamily="34" charset="0"/>
+                <a:ea typeface="Consolas" pitchFamily="34" charset="-122"/>
+                <a:cs typeface="Consolas" pitchFamily="34" charset="-120"/>
+                <a:hlinkClick r:id="rId8">
+                  <a:extLst>
+                    <a:ext uri="{A12FA001-AC4F-418D-AE19-62706E023703}">
+                      <ahyp:hlinkClr xmlns:ahyp="http://schemas.microsoft.com/office/drawing/2018/hyperlinkcolor" val="tx"/>
+                    </a:ext>
+                  </a:extLst>
+                </a:hlinkClick>
+              </a:rPr>
+              <a:t>hugo-okada</a:t>
+            </a:r>
+          </a:p>
+        </p:txBody>
+      </p:sp>
+      <p:pic>
+        <p:nvPicPr>
+          <p:cNvPr id="55" name="Photo Edison Zhou" descr="Photo of Edison Zhou"/>
+          <p:cNvPicPr>
+            <a:picLocks noChangeAspect="1"/>
+          </p:cNvPicPr>
+          <p:nvPr/>
+        </p:nvPicPr>
+        <p:blipFill>
+          <a:blip r:embed="rId9"/>
+          <a:stretch>
+            <a:fillRect/>
+          </a:stretch>
+        </p:blipFill>
+        <p:spPr>
+          <a:xfrm>
+            <a:off x="7611237" y="3657600"/>
+            <a:ext cx="1143000" cy="1143000"/>
+          </a:xfrm>
+          <a:prstGeom prst="ellipse">
+            <a:avLst/>
+          </a:prstGeom>
+          <a:ln w="19050">
+            <a:solidFill>
+              <a:schemeClr val="accent1"/>
+            </a:solidFill>
+          </a:ln>
+        </p:spPr>
+      </p:pic>
+      <p:sp>
+        <p:nvSpPr>
+          <p:cNvPr id="56" name="Name Edison Zhou"/>
+          <p:cNvSpPr txBox="1"/>
+          <p:nvPr/>
+        </p:nvSpPr>
+        <p:spPr>
+          <a:xfrm>
+            <a:off x="7527798" y="5001768"/>
+            <a:ext cx="1309878" cy="274320"/>
+          </a:xfrm>
+          <a:prstGeom prst="rect">
+            <a:avLst/>
+          </a:prstGeom>
+          <a:noFill/>
+          <a:ln/>
+        </p:spPr>
+        <p:txBody>
+          <a:bodyPr wrap="square" lIns="0" tIns="0" rIns="0" bIns="0" rtlCol="0" anchor="t"/>
+          <a:lstStyle/>
+          <a:p>
+            <a:pPr marL="0" indent="0" algn="ctr">
+              <a:buNone/>
+            </a:pPr>
+            <a:r>
+              <a:rPr lang="en-GB" sz="1400" b="1" dirty="0">
+                <a:solidFill>
+                  <a:schemeClr val="accent6"/>
+                </a:solidFill>
+                <a:latin typeface="Calibri" pitchFamily="34" charset="0"/>
+                <a:ea typeface="Calibri" pitchFamily="34" charset="-122"/>
+                <a:cs typeface="Calibri" pitchFamily="34" charset="-120"/>
+              </a:rPr>
+              <a:t>Edison Zhou</a:t>
+            </a:r>
+          </a:p>
+        </p:txBody>
+      </p:sp>
+      <p:sp>
+        <p:nvSpPr>
+          <p:cNvPr id="57" name="LinkedIn label Edison Zhou"/>
+          <p:cNvSpPr txBox="1"/>
+          <p:nvPr/>
+        </p:nvSpPr>
+        <p:spPr>
+          <a:xfrm>
+            <a:off x="7527798" y="5330952"/>
+            <a:ext cx="1309878" cy="201168"/>
+          </a:xfrm>
+          <a:prstGeom prst="rect">
+            <a:avLst/>
+          </a:prstGeom>
+          <a:noFill/>
+          <a:ln/>
+        </p:spPr>
+        <p:txBody>
+          <a:bodyPr wrap="square" lIns="0" tIns="0" rIns="0" bIns="0" rtlCol="0" anchor="t"/>
+          <a:lstStyle/>
+          <a:p>
+            <a:pPr marL="0" indent="0" algn="ctr">
+              <a:buNone/>
+            </a:pPr>
+            <a:r>
+              <a:rPr lang="en-GB" sz="800" spc="200" dirty="0">
+                <a:solidFill>
+                  <a:schemeClr val="bg2"/>
+                </a:solidFill>
+                <a:latin typeface="Consolas" pitchFamily="34" charset="0"/>
+                <a:ea typeface="Consolas" pitchFamily="34" charset="-122"/>
+                <a:cs typeface="Consolas" pitchFamily="34" charset="-120"/>
+              </a:rPr>
+              <a:t>LINKEDIN</a:t>
+            </a:r>
+          </a:p>
+        </p:txBody>
+      </p:sp>
+      <p:sp>
+        <p:nvSpPr>
+          <p:cNvPr id="58" name="LinkedIn Edison Zhou"/>
+          <p:cNvSpPr txBox="1"/>
+          <p:nvPr/>
+        </p:nvSpPr>
+        <p:spPr>
+          <a:xfrm>
+            <a:off x="7527798" y="5532120"/>
+            <a:ext cx="1309878" cy="228600"/>
+          </a:xfrm>
+          <a:prstGeom prst="rect">
+            <a:avLst/>
+          </a:prstGeom>
+          <a:noFill/>
+          <a:ln/>
+        </p:spPr>
+        <p:txBody>
+          <a:bodyPr wrap="square" lIns="0" tIns="0" rIns="0" bIns="0" rtlCol="0" anchor="t"/>
+          <a:lstStyle/>
+          <a:p>
+            <a:pPr marL="0" indent="0" algn="ctr">
+              <a:buNone/>
+            </a:pPr>
+            <a:r>
+              <a:rPr lang="en-GB" sz="1000" u="sng" dirty="0">
+                <a:solidFill>
+                  <a:schemeClr val="accent1"/>
+                </a:solidFill>
+                <a:latin typeface="Consolas" pitchFamily="34" charset="0"/>
+                <a:ea typeface="Consolas" pitchFamily="34" charset="-122"/>
+                <a:cs typeface="Consolas" pitchFamily="34" charset="-120"/>
+                <a:hlinkClick r:id="rId10">
+                  <a:extLst>
+                    <a:ext uri="{A12FA001-AC4F-418D-AE19-62706E023703}">
+                      <ahyp:hlinkClr xmlns:ahyp="http://schemas.microsoft.com/office/drawing/2018/hyperlinkcolor" val="tx"/>
+                    </a:ext>
+                  </a:extLst>
+                </a:hlinkClick>
+              </a:rPr>
+              <a:t>edison-zhou501</a:t>
+            </a:r>
+          </a:p>
+        </p:txBody>
+      </p:sp>
+      <p:pic>
+        <p:nvPicPr>
+          <p:cNvPr id="59" name="Photo Tamra Chan" descr="Photo of Tamra Chan"/>
+          <p:cNvPicPr>
+            <a:picLocks noChangeAspect="1"/>
+          </p:cNvPicPr>
+          <p:nvPr/>
+        </p:nvPicPr>
+        <p:blipFill>
+          <a:blip r:embed="rId11"/>
+          <a:stretch>
+            <a:fillRect/>
+          </a:stretch>
+        </p:blipFill>
+        <p:spPr>
+          <a:xfrm>
+            <a:off x="8921115" y="3657600"/>
+            <a:ext cx="1143000" cy="1143000"/>
+          </a:xfrm>
+          <a:prstGeom prst="ellipse">
+            <a:avLst/>
+          </a:prstGeom>
+          <a:ln w="19050">
+            <a:solidFill>
+              <a:schemeClr val="accent1"/>
+            </a:solidFill>
+          </a:ln>
+        </p:spPr>
+      </p:pic>
+      <p:sp>
+        <p:nvSpPr>
+          <p:cNvPr id="60" name="Name Tamra Chan"/>
+          <p:cNvSpPr txBox="1"/>
+          <p:nvPr/>
+        </p:nvSpPr>
+        <p:spPr>
+          <a:xfrm>
+            <a:off x="8837676" y="5001768"/>
+            <a:ext cx="1309878" cy="274320"/>
+          </a:xfrm>
+          <a:prstGeom prst="rect">
+            <a:avLst/>
+          </a:prstGeom>
+          <a:noFill/>
+          <a:ln/>
+        </p:spPr>
+        <p:txBody>
+          <a:bodyPr wrap="square" lIns="0" tIns="0" rIns="0" bIns="0" rtlCol="0" anchor="t"/>
+          <a:lstStyle/>
+          <a:p>
+            <a:pPr marL="0" indent="0" algn="ctr">
+              <a:buNone/>
+            </a:pPr>
+            <a:r>
+              <a:rPr lang="en-GB" sz="1400" b="1" dirty="0">
+                <a:solidFill>
+                  <a:schemeClr val="accent6"/>
+                </a:solidFill>
+                <a:latin typeface="Calibri" pitchFamily="34" charset="0"/>
+                <a:ea typeface="Calibri" pitchFamily="34" charset="-122"/>
+                <a:cs typeface="Calibri" pitchFamily="34" charset="-120"/>
+              </a:rPr>
+              <a:t>Tamra Chan</a:t>
+            </a:r>
+          </a:p>
+        </p:txBody>
+      </p:sp>
+      <p:sp>
+        <p:nvSpPr>
+          <p:cNvPr id="61" name="LinkedIn label Tamra Chan"/>
+          <p:cNvSpPr txBox="1"/>
+          <p:nvPr/>
+        </p:nvSpPr>
+        <p:spPr>
+          <a:xfrm>
+            <a:off x="8837676" y="5330952"/>
+            <a:ext cx="1309878" cy="201168"/>
+          </a:xfrm>
+          <a:prstGeom prst="rect">
+            <a:avLst/>
+          </a:prstGeom>
+          <a:noFill/>
+          <a:ln/>
+        </p:spPr>
+        <p:txBody>
+          <a:bodyPr wrap="square" lIns="0" tIns="0" rIns="0" bIns="0" rtlCol="0" anchor="t"/>
+          <a:lstStyle/>
+          <a:p>
+            <a:pPr marL="0" indent="0" algn="ctr">
+              <a:buNone/>
+            </a:pPr>
+            <a:r>
+              <a:rPr lang="en-GB" sz="800" spc="200" dirty="0">
+                <a:solidFill>
+                  <a:schemeClr val="bg2"/>
+                </a:solidFill>
+                <a:latin typeface="Consolas" pitchFamily="34" charset="0"/>
+                <a:ea typeface="Consolas" pitchFamily="34" charset="-122"/>
+                <a:cs typeface="Consolas" pitchFamily="34" charset="-120"/>
+              </a:rPr>
+              <a:t>LINKEDIN</a:t>
+            </a:r>
+          </a:p>
+        </p:txBody>
+      </p:sp>
+      <p:sp>
+        <p:nvSpPr>
+          <p:cNvPr id="62" name="LinkedIn Tamra Chan"/>
+          <p:cNvSpPr txBox="1"/>
+          <p:nvPr/>
+        </p:nvSpPr>
+        <p:spPr>
+          <a:xfrm>
+            <a:off x="8837676" y="5532120"/>
+            <a:ext cx="1309878" cy="228600"/>
+          </a:xfrm>
+          <a:prstGeom prst="rect">
+            <a:avLst/>
+          </a:prstGeom>
+          <a:noFill/>
+          <a:ln/>
+        </p:spPr>
+        <p:txBody>
+          <a:bodyPr wrap="square" lIns="0" tIns="0" rIns="0" bIns="0" rtlCol="0" anchor="t"/>
+          <a:lstStyle/>
+          <a:p>
+            <a:pPr marL="0" indent="0" algn="ctr">
+              <a:buNone/>
+            </a:pPr>
+            <a:r>
+              <a:rPr lang="en-GB" sz="1000" u="sng" dirty="0">
+                <a:solidFill>
+                  <a:schemeClr val="accent1"/>
+                </a:solidFill>
+                <a:latin typeface="Consolas" pitchFamily="34" charset="0"/>
+                <a:ea typeface="Consolas" pitchFamily="34" charset="-122"/>
+                <a:cs typeface="Consolas" pitchFamily="34" charset="-120"/>
+                <a:hlinkClick r:id="rId12">
+                  <a:extLst>
+                    <a:ext uri="{A12FA001-AC4F-418D-AE19-62706E023703}">
+                      <ahyp:hlinkClr xmlns:ahyp="http://schemas.microsoft.com/office/drawing/2018/hyperlinkcolor" val="tx"/>
+                    </a:ext>
+                  </a:extLst>
+                </a:hlinkClick>
+              </a:rPr>
+              <a:t>tamra-chan</a:t>
+            </a:r>
+          </a:p>
+        </p:txBody>
+      </p:sp>
+      <p:pic>
+        <p:nvPicPr>
+          <p:cNvPr id="63" name="Photo Alex Prunea" descr="Photo of Alex Prunea"/>
+          <p:cNvPicPr>
+            <a:picLocks noChangeAspect="1"/>
+          </p:cNvPicPr>
+          <p:nvPr/>
+        </p:nvPicPr>
+        <p:blipFill>
+          <a:blip r:embed="rId13"/>
+          <a:stretch>
+            <a:fillRect/>
+          </a:stretch>
+        </p:blipFill>
+        <p:spPr>
+          <a:xfrm>
+            <a:off x="10230993" y="3657600"/>
+            <a:ext cx="1143000" cy="1143000"/>
+          </a:xfrm>
+          <a:prstGeom prst="ellipse">
+            <a:avLst/>
+          </a:prstGeom>
+          <a:ln w="19050">
+            <a:solidFill>
+              <a:schemeClr val="accent1"/>
+            </a:solidFill>
+          </a:ln>
+        </p:spPr>
+      </p:pic>
+      <p:sp>
+        <p:nvSpPr>
+          <p:cNvPr id="64" name="Name Alex Prunea"/>
+          <p:cNvSpPr txBox="1"/>
+          <p:nvPr/>
+        </p:nvSpPr>
+        <p:spPr>
+          <a:xfrm>
+            <a:off x="10147554" y="5001768"/>
+            <a:ext cx="1309878" cy="274320"/>
+          </a:xfrm>
+          <a:prstGeom prst="rect">
+            <a:avLst/>
+          </a:prstGeom>
+          <a:noFill/>
+          <a:ln/>
+        </p:spPr>
+        <p:txBody>
+          <a:bodyPr wrap="square" lIns="0" tIns="0" rIns="0" bIns="0" rtlCol="0" anchor="t"/>
+          <a:lstStyle/>
+          <a:p>
+            <a:pPr marL="0" indent="0" algn="ctr">
+              <a:buNone/>
+            </a:pPr>
+            <a:r>
+              <a:rPr lang="en-GB" sz="1400" b="1" dirty="0">
+                <a:solidFill>
+                  <a:schemeClr val="accent6"/>
+                </a:solidFill>
+                <a:latin typeface="Calibri" pitchFamily="34" charset="0"/>
+                <a:ea typeface="Calibri" pitchFamily="34" charset="-122"/>
+                <a:cs typeface="Calibri" pitchFamily="34" charset="-120"/>
+              </a:rPr>
+              <a:t>Alex Prunea</a:t>
+            </a:r>
+          </a:p>
+        </p:txBody>
+      </p:sp>
+      <p:sp>
+        <p:nvSpPr>
+          <p:cNvPr id="65" name="LinkedIn label Alex Prunea"/>
+          <p:cNvSpPr txBox="1"/>
+          <p:nvPr/>
+        </p:nvSpPr>
+        <p:spPr>
+          <a:xfrm>
+            <a:off x="10147554" y="5330952"/>
+            <a:ext cx="1309878" cy="201168"/>
+          </a:xfrm>
+          <a:prstGeom prst="rect">
+            <a:avLst/>
+          </a:prstGeom>
+          <a:noFill/>
+          <a:ln/>
+        </p:spPr>
+        <p:txBody>
+          <a:bodyPr wrap="square" lIns="0" tIns="0" rIns="0" bIns="0" rtlCol="0" anchor="t"/>
+          <a:lstStyle/>
+          <a:p>
+            <a:pPr marL="0" indent="0" algn="ctr">
+              <a:buNone/>
+            </a:pPr>
+            <a:r>
+              <a:rPr lang="en-GB" sz="800" spc="200" dirty="0">
+                <a:solidFill>
+                  <a:schemeClr val="bg2"/>
+                </a:solidFill>
+                <a:latin typeface="Consolas" pitchFamily="34" charset="0"/>
+                <a:ea typeface="Consolas" pitchFamily="34" charset="-122"/>
+                <a:cs typeface="Consolas" pitchFamily="34" charset="-120"/>
+              </a:rPr>
+              <a:t>LINKEDIN</a:t>
+            </a:r>
+          </a:p>
+        </p:txBody>
+      </p:sp>
+      <p:sp>
+        <p:nvSpPr>
+          <p:cNvPr id="66" name="LinkedIn Alex Prunea"/>
+          <p:cNvSpPr txBox="1"/>
+          <p:nvPr/>
+        </p:nvSpPr>
+        <p:spPr>
+          <a:xfrm>
+            <a:off x="10147554" y="5532120"/>
+            <a:ext cx="1309878" cy="228600"/>
+          </a:xfrm>
+          <a:prstGeom prst="rect">
+            <a:avLst/>
+          </a:prstGeom>
+          <a:noFill/>
+          <a:ln/>
+        </p:spPr>
+        <p:txBody>
+          <a:bodyPr wrap="square" lIns="0" tIns="0" rIns="0" bIns="0" rtlCol="0" anchor="t"/>
+          <a:lstStyle/>
+          <a:p>
+            <a:pPr marL="0" indent="0" algn="ctr">
+              <a:buNone/>
+            </a:pPr>
+            <a:r>
+              <a:rPr lang="en-GB" sz="1000" u="sng" dirty="0">
+                <a:solidFill>
+                  <a:schemeClr val="accent1"/>
+                </a:solidFill>
+                <a:latin typeface="Consolas" pitchFamily="34" charset="0"/>
+                <a:ea typeface="Consolas" pitchFamily="34" charset="-122"/>
+                <a:cs typeface="Consolas" pitchFamily="34" charset="-120"/>
+                <a:hlinkClick r:id="rId14">
+                  <a:extLst>
+                    <a:ext uri="{A12FA001-AC4F-418D-AE19-62706E023703}">
+                      <ahyp:hlinkClr xmlns:ahyp="http://schemas.microsoft.com/office/drawing/2018/hyperlinkcolor" val="tx"/>
+                    </a:ext>
+                  </a:extLst>
+                </a:hlinkClick>
+              </a:rPr>
+              <a:t>alexprunea</a:t>
+            </a:r>
           </a:p>
         </p:txBody>
       </p:sp>
@@ -10069,7 +11054,7 @@
           </a:prstGeom>
           <a:extLst>
             <a:ext uri="{C572A759-6A51-4108-AA02-DFA0A04FC94B}">
-              <ma14:wrappingTextBoxFlag xmlns:ma14="http://schemas.microsoft.com/office/mac/drawingml/2011/main" val="0"/>
+              <ma14:wrappingTextBoxFlag xmlns:ma14="http://schemas.microsoft.com/office/mac/drawingml/2011/main" xmlns="" val="0"/>
             </a:ext>
           </a:extLst>
         </p:spPr>
@@ -10090,7 +11075,7 @@
           <a:p>
             <a:pPr algn="r"/>
             <a:fld id="{F7021451-1387-4CA6-816F-3879F97B5CBC}" type="slidenum">
-              <a:rPr b="0" lang="en-US"/>
+              <a:rPr lang="en-US" b="0"/>
               <a:t>17</a:t>
             </a:fld>
             <a:endParaRPr lang="en-US"/>
@@ -10125,9 +11110,11 @@
       <p:sp>
         <p:nvSpPr>
           <p:cNvPr id="2" name="Text 4"/>
-          <p:cNvSpPr/>
+          <p:cNvSpPr>
+            <a:spLocks noGrp="1"/>
+          </p:cNvSpPr>
           <p:nvPr>
-            <p:ph idx="104" type="body" hasCustomPrompt="1"/>
+            <p:ph type="body" idx="104" hasCustomPrompt="1"/>
           </p:nvPr>
         </p:nvSpPr>
         <p:spPr>
@@ -10145,11 +11132,11 @@
           <a:bodyPr wrap="square" lIns="0" tIns="0" rIns="0" bIns="0" rtlCol="0" anchor="ctr"/>
           <a:lstStyle/>
           <a:p>
-            <a:pPr indent="0" marL="0">
-              <a:buNone/>
-            </a:pPr>
-            <a:r>
-              <a:rPr lang="en-US" sz="1200" spc="300" kern="0" dirty="0">
+            <a:pPr marL="0" indent="0">
+              <a:buNone/>
+            </a:pPr>
+            <a:r>
+              <a:rPr lang="en-US" sz="1200" kern="0" spc="300" dirty="0">
                 <a:solidFill>
                   <a:schemeClr val="accent1"/>
                 </a:solidFill>
@@ -10166,9 +11153,11 @@
       <p:sp>
         <p:nvSpPr>
           <p:cNvPr id="3" name="Text 4"/>
-          <p:cNvSpPr/>
+          <p:cNvSpPr>
+            <a:spLocks noGrp="1"/>
+          </p:cNvSpPr>
           <p:nvPr>
-            <p:ph idx="105" type="title" hasCustomPrompt="1"/>
+            <p:ph type="title" idx="105" hasCustomPrompt="1"/>
           </p:nvPr>
         </p:nvSpPr>
         <p:spPr>
@@ -10186,7 +11175,7 @@
           <a:bodyPr wrap="square" lIns="0" tIns="0" rIns="0" bIns="0" rtlCol="0" anchor="t"/>
           <a:lstStyle/>
           <a:p>
-            <a:pPr algn="l" indent="0" marL="0">
+            <a:pPr marL="0" indent="0" algn="l">
               <a:buNone/>
             </a:pPr>
             <a:r>
@@ -10230,6 +11219,13 @@
             <a:prstDash val="solid"/>
           </a:ln>
         </p:spPr>
+        <p:txBody>
+          <a:bodyPr/>
+          <a:lstStyle/>
+          <a:p>
+            <a:endParaRPr lang="en-GB"/>
+          </a:p>
+        </p:txBody>
       </p:sp>
       <p:sp>
         <p:nvSpPr>
@@ -10255,17 +11251,24 @@
             <a:prstDash val="solid"/>
           </a:ln>
         </p:spPr>
+        <p:txBody>
+          <a:bodyPr/>
+          <a:lstStyle/>
+          <a:p>
+            <a:endParaRPr lang="en-GB"/>
+          </a:p>
+        </p:txBody>
       </p:sp>
       <p:pic>
         <p:nvPicPr>
-          <p:cNvPr id="6" name="Icon 01" descr="preencoded.png">    </p:cNvPr>
+          <p:cNvPr id="6" name="Icon 01" descr="preencoded.png"/>
           <p:cNvPicPr>
             <a:picLocks noChangeAspect="1"/>
           </p:cNvPicPr>
           <p:nvPr/>
         </p:nvPicPr>
         <p:blipFill>
-          <a:blip r:embed="rId1"/>
+          <a:blip r:embed="rId3"/>
           <a:stretch>
             <a:fillRect/>
           </a:stretch>
@@ -10301,7 +11304,7 @@
           <a:bodyPr wrap="square" lIns="0" tIns="0" rIns="0" bIns="0" rtlCol="0" anchor="t"/>
           <a:lstStyle/>
           <a:p>
-            <a:pPr algn="r" indent="0" marL="0">
+            <a:pPr marL="0" indent="0" algn="r">
               <a:buNone/>
             </a:pPr>
             <a:r>
@@ -10340,7 +11343,7 @@
           <a:bodyPr wrap="square" lIns="0" tIns="0" rIns="0" bIns="0" rtlCol="0" anchor="t"/>
           <a:lstStyle/>
           <a:p>
-            <a:pPr indent="0" marL="0">
+            <a:pPr marL="0" indent="0">
               <a:buNone/>
             </a:pPr>
             <a:r>
@@ -10379,7 +11382,7 @@
           <a:bodyPr wrap="square" lIns="0" tIns="0" rIns="0" bIns="0" rtlCol="0" anchor="t"/>
           <a:lstStyle/>
           <a:p>
-            <a:pPr indent="0" marL="0">
+            <a:pPr marL="0" indent="0">
               <a:lnSpc>
                 <a:spcPct val="115000"/>
               </a:lnSpc>
@@ -10426,6 +11429,13 @@
             <a:prstDash val="solid"/>
           </a:ln>
         </p:spPr>
+        <p:txBody>
+          <a:bodyPr/>
+          <a:lstStyle/>
+          <a:p>
+            <a:endParaRPr lang="en-GB"/>
+          </a:p>
+        </p:txBody>
       </p:sp>
       <p:sp>
         <p:nvSpPr>
@@ -10451,17 +11461,24 @@
             <a:prstDash val="solid"/>
           </a:ln>
         </p:spPr>
+        <p:txBody>
+          <a:bodyPr/>
+          <a:lstStyle/>
+          <a:p>
+            <a:endParaRPr lang="en-GB"/>
+          </a:p>
+        </p:txBody>
       </p:sp>
       <p:pic>
         <p:nvPicPr>
-          <p:cNvPr id="12" name="Icon 02" descr="preencoded.png">    </p:cNvPr>
+          <p:cNvPr id="12" name="Icon 02" descr="preencoded.png"/>
           <p:cNvPicPr>
             <a:picLocks noChangeAspect="1"/>
           </p:cNvPicPr>
           <p:nvPr/>
         </p:nvPicPr>
         <p:blipFill>
-          <a:blip r:embed="rId2"/>
+          <a:blip r:embed="rId4"/>
           <a:stretch>
             <a:fillRect/>
           </a:stretch>
@@ -10497,7 +11514,7 @@
           <a:bodyPr wrap="square" lIns="0" tIns="0" rIns="0" bIns="0" rtlCol="0" anchor="t"/>
           <a:lstStyle/>
           <a:p>
-            <a:pPr algn="r" indent="0" marL="0">
+            <a:pPr marL="0" indent="0" algn="r">
               <a:buNone/>
             </a:pPr>
             <a:r>
@@ -10536,7 +11553,7 @@
           <a:bodyPr wrap="square" lIns="0" tIns="0" rIns="0" bIns="0" rtlCol="0" anchor="t"/>
           <a:lstStyle/>
           <a:p>
-            <a:pPr indent="0" marL="0">
+            <a:pPr marL="0" indent="0">
               <a:buNone/>
             </a:pPr>
             <a:r>
@@ -10575,7 +11592,7 @@
           <a:bodyPr wrap="square" lIns="0" tIns="0" rIns="0" bIns="0" rtlCol="0" anchor="t"/>
           <a:lstStyle/>
           <a:p>
-            <a:pPr indent="0" marL="0">
+            <a:pPr marL="0" indent="0">
               <a:lnSpc>
                 <a:spcPct val="115000"/>
               </a:lnSpc>
@@ -10622,6 +11639,13 @@
             <a:prstDash val="solid"/>
           </a:ln>
         </p:spPr>
+        <p:txBody>
+          <a:bodyPr/>
+          <a:lstStyle/>
+          <a:p>
+            <a:endParaRPr lang="en-GB"/>
+          </a:p>
+        </p:txBody>
       </p:sp>
       <p:sp>
         <p:nvSpPr>
@@ -10647,17 +11671,24 @@
             <a:prstDash val="solid"/>
           </a:ln>
         </p:spPr>
+        <p:txBody>
+          <a:bodyPr/>
+          <a:lstStyle/>
+          <a:p>
+            <a:endParaRPr lang="en-GB"/>
+          </a:p>
+        </p:txBody>
       </p:sp>
       <p:pic>
         <p:nvPicPr>
-          <p:cNvPr id="18" name="Icon 03" descr="preencoded.png">    </p:cNvPr>
+          <p:cNvPr id="18" name="Icon 03" descr="preencoded.png"/>
           <p:cNvPicPr>
             <a:picLocks noChangeAspect="1"/>
           </p:cNvPicPr>
           <p:nvPr/>
         </p:nvPicPr>
         <p:blipFill>
-          <a:blip r:embed="rId3"/>
+          <a:blip r:embed="rId5"/>
           <a:stretch>
             <a:fillRect/>
           </a:stretch>
@@ -10693,7 +11724,7 @@
           <a:bodyPr wrap="square" lIns="0" tIns="0" rIns="0" bIns="0" rtlCol="0" anchor="t"/>
           <a:lstStyle/>
           <a:p>
-            <a:pPr algn="r" indent="0" marL="0">
+            <a:pPr marL="0" indent="0" algn="r">
               <a:buNone/>
             </a:pPr>
             <a:r>
@@ -10732,7 +11763,7 @@
           <a:bodyPr wrap="square" lIns="0" tIns="0" rIns="0" bIns="0" rtlCol="0" anchor="t"/>
           <a:lstStyle/>
           <a:p>
-            <a:pPr indent="0" marL="0">
+            <a:pPr marL="0" indent="0">
               <a:buNone/>
             </a:pPr>
             <a:r>
@@ -10771,7 +11802,7 @@
           <a:bodyPr wrap="square" lIns="0" tIns="0" rIns="0" bIns="0" rtlCol="0" anchor="t"/>
           <a:lstStyle/>
           <a:p>
-            <a:pPr indent="0" marL="0">
+            <a:pPr marL="0" indent="0">
               <a:lnSpc>
                 <a:spcPct val="115000"/>
               </a:lnSpc>
@@ -10812,7 +11843,7 @@
           </a:prstGeom>
           <a:extLst>
             <a:ext uri="{C572A759-6A51-4108-AA02-DFA0A04FC94B}">
-              <ma14:wrappingTextBoxFlag xmlns:ma14="http://schemas.microsoft.com/office/mac/drawingml/2011/main" val="0"/>
+              <ma14:wrappingTextBoxFlag xmlns:ma14="http://schemas.microsoft.com/office/mac/drawingml/2011/main" xmlns="" val="0"/>
             </a:ext>
           </a:extLst>
         </p:spPr>
@@ -10833,7 +11864,7 @@
           <a:p>
             <a:pPr algn="r"/>
             <a:fld id="{F7021451-1387-4CA6-816F-3879F97B5CBC}" type="slidenum">
-              <a:rPr b="0" lang="en-US"/>
+              <a:rPr lang="en-US" b="0"/>
               <a:t>2</a:t>
             </a:fld>
             <a:endParaRPr lang="en-US"/>
@@ -10868,9 +11899,11 @@
       <p:sp>
         <p:nvSpPr>
           <p:cNvPr id="2" name="Text 4"/>
-          <p:cNvSpPr/>
+          <p:cNvSpPr>
+            <a:spLocks noGrp="1"/>
+          </p:cNvSpPr>
           <p:nvPr>
-            <p:ph idx="104" type="body" hasCustomPrompt="1"/>
+            <p:ph type="body" idx="104" hasCustomPrompt="1"/>
           </p:nvPr>
         </p:nvSpPr>
         <p:spPr>
@@ -10888,11 +11921,11 @@
           <a:bodyPr wrap="square" lIns="0" tIns="0" rIns="0" bIns="0" rtlCol="0" anchor="ctr"/>
           <a:lstStyle/>
           <a:p>
-            <a:pPr indent="0" marL="0">
-              <a:buNone/>
-            </a:pPr>
-            <a:r>
-              <a:rPr lang="en-US" sz="1200" spc="300" kern="0" dirty="0">
+            <a:pPr marL="0" indent="0">
+              <a:buNone/>
+            </a:pPr>
+            <a:r>
+              <a:rPr lang="en-US" sz="1200" kern="0" spc="300" dirty="0">
                 <a:solidFill>
                   <a:schemeClr val="accent1"/>
                 </a:solidFill>
@@ -10909,9 +11942,11 @@
       <p:sp>
         <p:nvSpPr>
           <p:cNvPr id="3" name="Text 4"/>
-          <p:cNvSpPr/>
+          <p:cNvSpPr>
+            <a:spLocks noGrp="1"/>
+          </p:cNvSpPr>
           <p:nvPr>
-            <p:ph idx="105" type="title" hasCustomPrompt="1"/>
+            <p:ph type="title" idx="105" hasCustomPrompt="1"/>
           </p:nvPr>
         </p:nvSpPr>
         <p:spPr>
@@ -10929,7 +11964,7 @@
           <a:bodyPr wrap="square" lIns="0" tIns="0" rIns="0" bIns="0" rtlCol="0" anchor="t"/>
           <a:lstStyle/>
           <a:p>
-            <a:pPr algn="l" indent="0" marL="0">
+            <a:pPr marL="0" indent="0" algn="l">
               <a:buNone/>
             </a:pPr>
             <a:r>
@@ -10973,6 +12008,13 @@
             <a:prstDash val="solid"/>
           </a:ln>
         </p:spPr>
+        <p:txBody>
+          <a:bodyPr/>
+          <a:lstStyle/>
+          <a:p>
+            <a:endParaRPr lang="en-GB"/>
+          </a:p>
+        </p:txBody>
       </p:sp>
       <p:sp>
         <p:nvSpPr>
@@ -10995,7 +12037,7 @@
           <a:bodyPr wrap="square" lIns="0" tIns="0" rIns="0" bIns="0" rtlCol="0" anchor="t"/>
           <a:lstStyle/>
           <a:p>
-            <a:pPr algn="ctr" indent="0" marL="0">
+            <a:pPr marL="0" indent="0" algn="ctr">
               <a:buNone/>
             </a:pPr>
             <a:r>
@@ -11034,7 +12076,7 @@
           <a:bodyPr wrap="square" lIns="0" tIns="0" rIns="0" bIns="0" rtlCol="0" anchor="t"/>
           <a:lstStyle/>
           <a:p>
-            <a:pPr indent="0" marL="0">
+            <a:pPr marL="0" indent="0">
               <a:lnSpc>
                 <a:spcPct val="120000"/>
               </a:lnSpc>
@@ -11054,7 +12096,7 @@
             <a:endParaRPr lang="en-US" sz="1300" dirty="0"/>
           </a:p>
           <a:p>
-            <a:pPr indent="0" marL="0">
+            <a:pPr marL="0" indent="0">
               <a:lnSpc>
                 <a:spcPct val="120000"/>
               </a:lnSpc>
@@ -11074,7 +12116,7 @@
             <a:endParaRPr lang="en-US" sz="1300" dirty="0"/>
           </a:p>
           <a:p>
-            <a:pPr indent="0" marL="0">
+            <a:pPr marL="0" indent="0">
               <a:lnSpc>
                 <a:spcPct val="120000"/>
               </a:lnSpc>
@@ -11116,7 +12158,7 @@
           <a:bodyPr wrap="square" lIns="0" tIns="0" rIns="0" bIns="0" rtlCol="0" anchor="t"/>
           <a:lstStyle/>
           <a:p>
-            <a:pPr indent="0" marL="0">
+            <a:pPr marL="0" indent="0">
               <a:lnSpc>
                 <a:spcPct val="115000"/>
               </a:lnSpc>
@@ -11158,7 +12200,7 @@
           <a:bodyPr wrap="square" lIns="0" tIns="0" rIns="0" bIns="0" rtlCol="0" anchor="t"/>
           <a:lstStyle/>
           <a:p>
-            <a:pPr indent="0" marL="0">
+            <a:pPr marL="0" indent="0">
               <a:lnSpc>
                 <a:spcPct val="112000"/>
               </a:lnSpc>
@@ -11178,7 +12220,7 @@
             <a:endParaRPr lang="en-US" sz="2200" dirty="0"/>
           </a:p>
           <a:p>
-            <a:pPr indent="0" marL="0">
+            <a:pPr marL="0" indent="0">
               <a:lnSpc>
                 <a:spcPct val="112000"/>
               </a:lnSpc>
@@ -11198,7 +12240,7 @@
             <a:endParaRPr lang="en-US" sz="2200" dirty="0"/>
           </a:p>
           <a:p>
-            <a:pPr indent="0" marL="0">
+            <a:pPr marL="0" indent="0">
               <a:lnSpc>
                 <a:spcPct val="112000"/>
               </a:lnSpc>
@@ -11240,7 +12282,7 @@
           <a:bodyPr wrap="square" lIns="0" tIns="0" rIns="0" bIns="0" rtlCol="0" anchor="t"/>
           <a:lstStyle/>
           <a:p>
-            <a:pPr indent="0" marL="0">
+            <a:pPr marL="0" indent="0">
               <a:buNone/>
             </a:pPr>
             <a:r>
@@ -11278,7 +12320,7 @@
           </a:prstGeom>
           <a:extLst>
             <a:ext uri="{C572A759-6A51-4108-AA02-DFA0A04FC94B}">
-              <ma14:wrappingTextBoxFlag xmlns:ma14="http://schemas.microsoft.com/office/mac/drawingml/2011/main" val="0"/>
+              <ma14:wrappingTextBoxFlag xmlns:ma14="http://schemas.microsoft.com/office/mac/drawingml/2011/main" xmlns="" val="0"/>
             </a:ext>
           </a:extLst>
         </p:spPr>
@@ -11299,7 +12341,7 @@
           <a:p>
             <a:pPr algn="r"/>
             <a:fld id="{F7021451-1387-4CA6-816F-3879F97B5CBC}" type="slidenum">
-              <a:rPr b="0" lang="en-US"/>
+              <a:rPr lang="en-US" b="0"/>
               <a:t>3</a:t>
             </a:fld>
             <a:endParaRPr lang="en-US"/>
@@ -11334,9 +12376,11 @@
       <p:sp>
         <p:nvSpPr>
           <p:cNvPr id="2" name="Text 4"/>
-          <p:cNvSpPr/>
+          <p:cNvSpPr>
+            <a:spLocks noGrp="1"/>
+          </p:cNvSpPr>
           <p:nvPr>
-            <p:ph idx="104" type="body" hasCustomPrompt="1"/>
+            <p:ph type="body" idx="104" hasCustomPrompt="1"/>
           </p:nvPr>
         </p:nvSpPr>
         <p:spPr>
@@ -11354,11 +12398,11 @@
           <a:bodyPr wrap="square" lIns="0" tIns="0" rIns="0" bIns="0" rtlCol="0" anchor="ctr"/>
           <a:lstStyle/>
           <a:p>
-            <a:pPr indent="0" marL="0">
-              <a:buNone/>
-            </a:pPr>
-            <a:r>
-              <a:rPr lang="en-US" sz="1200" spc="300" kern="0" dirty="0">
+            <a:pPr marL="0" indent="0">
+              <a:buNone/>
+            </a:pPr>
+            <a:r>
+              <a:rPr lang="en-US" sz="1200" kern="0" spc="300" dirty="0">
                 <a:solidFill>
                   <a:schemeClr val="accent1"/>
                 </a:solidFill>
@@ -11375,9 +12419,11 @@
       <p:sp>
         <p:nvSpPr>
           <p:cNvPr id="3" name="Text 4"/>
-          <p:cNvSpPr/>
+          <p:cNvSpPr>
+            <a:spLocks noGrp="1"/>
+          </p:cNvSpPr>
           <p:nvPr>
-            <p:ph idx="105" type="title" hasCustomPrompt="1"/>
+            <p:ph type="title" idx="105" hasCustomPrompt="1"/>
           </p:nvPr>
         </p:nvSpPr>
         <p:spPr>
@@ -11395,7 +12441,7 @@
           <a:bodyPr wrap="square" lIns="0" tIns="0" rIns="0" bIns="0" rtlCol="0" anchor="t"/>
           <a:lstStyle/>
           <a:p>
-            <a:pPr algn="l" indent="0" marL="0">
+            <a:pPr marL="0" indent="0" algn="l">
               <a:buNone/>
             </a:pPr>
             <a:r>
@@ -11434,11 +12480,11 @@
           <a:bodyPr wrap="square" lIns="0" tIns="0" rIns="0" bIns="0" rtlCol="0" anchor="t"/>
           <a:lstStyle/>
           <a:p>
-            <a:pPr indent="0" marL="0">
-              <a:buNone/>
-            </a:pPr>
-            <a:r>
-              <a:rPr lang="en-US" sz="1200" spc="300" kern="0" dirty="0">
+            <a:pPr marL="0" indent="0">
+              <a:buNone/>
+            </a:pPr>
+            <a:r>
+              <a:rPr lang="en-US" sz="1200" kern="0" spc="300" dirty="0">
                 <a:solidFill>
                   <a:schemeClr val="bg2"/>
                 </a:solidFill>
@@ -11473,11 +12519,11 @@
           <a:bodyPr wrap="square" lIns="0" tIns="0" rIns="0" bIns="0" rtlCol="0" anchor="t"/>
           <a:lstStyle/>
           <a:p>
-            <a:pPr indent="0" marL="0">
-              <a:buNone/>
-            </a:pPr>
-            <a:r>
-              <a:rPr lang="en-US" sz="1200" spc="300" kern="0" dirty="0">
+            <a:pPr marL="0" indent="0">
+              <a:buNone/>
+            </a:pPr>
+            <a:r>
+              <a:rPr lang="en-US" sz="1200" kern="0" spc="300" dirty="0">
                 <a:solidFill>
                   <a:schemeClr val="accent1"/>
                 </a:solidFill>
@@ -11513,6 +12559,13 @@
             <a:prstDash val="dash"/>
           </a:ln>
         </p:spPr>
+        <p:txBody>
+          <a:bodyPr/>
+          <a:lstStyle/>
+          <a:p>
+            <a:endParaRPr lang="en-GB"/>
+          </a:p>
+        </p:txBody>
       </p:sp>
       <p:sp>
         <p:nvSpPr>
@@ -11535,11 +12588,11 @@
           <a:bodyPr wrap="square" lIns="0" tIns="0" rIns="0" bIns="0" rtlCol="0" anchor="t"/>
           <a:lstStyle/>
           <a:p>
-            <a:pPr algn="ctr" indent="0" marL="0">
-              <a:buNone/>
-            </a:pPr>
-            <a:r>
-              <a:rPr lang="en-US" sz="1100" b="1" spc="200" kern="0" dirty="0">
+            <a:pPr marL="0" indent="0" algn="ctr">
+              <a:buNone/>
+            </a:pPr>
+            <a:r>
+              <a:rPr lang="en-US" sz="1100" b="1" kern="0" spc="200" dirty="0">
                 <a:solidFill>
                   <a:schemeClr val="accent1"/>
                 </a:solidFill>
@@ -11579,17 +12632,24 @@
             <a:prstDash val="solid"/>
           </a:ln>
         </p:spPr>
+        <p:txBody>
+          <a:bodyPr/>
+          <a:lstStyle/>
+          <a:p>
+            <a:endParaRPr lang="en-GB"/>
+          </a:p>
+        </p:txBody>
       </p:sp>
       <p:pic>
         <p:nvPicPr>
-          <p:cNvPr id="9" name="Step 1 icon" descr="preencoded.png">    </p:cNvPr>
+          <p:cNvPr id="9" name="Step 1 icon" descr="preencoded.png"/>
           <p:cNvPicPr>
             <a:picLocks noChangeAspect="1"/>
           </p:cNvPicPr>
           <p:nvPr/>
         </p:nvPicPr>
         <p:blipFill>
-          <a:blip r:embed="rId1"/>
+          <a:blip r:embed="rId3"/>
           <a:stretch>
             <a:fillRect/>
           </a:stretch>
@@ -11625,7 +12685,7 @@
           <a:bodyPr wrap="square" lIns="0" tIns="0" rIns="0" bIns="0" rtlCol="0" anchor="t"/>
           <a:lstStyle/>
           <a:p>
-            <a:pPr algn="r" indent="0" marL="0">
+            <a:pPr marL="0" indent="0" algn="r">
               <a:buNone/>
             </a:pPr>
             <a:r>
@@ -11664,7 +12724,7 @@
           <a:bodyPr wrap="square" lIns="0" tIns="0" rIns="0" bIns="0" rtlCol="0" anchor="t"/>
           <a:lstStyle/>
           <a:p>
-            <a:pPr indent="0" marL="0">
+            <a:pPr marL="0" indent="0">
               <a:buNone/>
             </a:pPr>
             <a:r>
@@ -11703,7 +12763,7 @@
           <a:bodyPr wrap="square" lIns="0" tIns="0" rIns="0" bIns="0" rtlCol="0" anchor="t"/>
           <a:lstStyle/>
           <a:p>
-            <a:pPr indent="0" marL="0">
+            <a:pPr marL="0" indent="0">
               <a:lnSpc>
                 <a:spcPct val="112000"/>
               </a:lnSpc>
@@ -11748,6 +12808,13 @@
             <a:prstDash val="solid"/>
           </a:ln>
         </p:spPr>
+        <p:txBody>
+          <a:bodyPr/>
+          <a:lstStyle/>
+          <a:p>
+            <a:endParaRPr lang="en-GB"/>
+          </a:p>
+        </p:txBody>
       </p:sp>
       <p:sp>
         <p:nvSpPr>
@@ -11775,17 +12842,24 @@
             <a:prstDash val="solid"/>
           </a:ln>
         </p:spPr>
+        <p:txBody>
+          <a:bodyPr/>
+          <a:lstStyle/>
+          <a:p>
+            <a:endParaRPr lang="en-GB"/>
+          </a:p>
+        </p:txBody>
       </p:sp>
       <p:pic>
         <p:nvPicPr>
-          <p:cNvPr id="15" name="Step 2 icon" descr="preencoded.png">    </p:cNvPr>
+          <p:cNvPr id="15" name="Step 2 icon" descr="preencoded.png"/>
           <p:cNvPicPr>
             <a:picLocks noChangeAspect="1"/>
           </p:cNvPicPr>
           <p:nvPr/>
         </p:nvPicPr>
         <p:blipFill>
-          <a:blip r:embed="rId2"/>
+          <a:blip r:embed="rId4"/>
           <a:stretch>
             <a:fillRect/>
           </a:stretch>
@@ -11821,7 +12895,7 @@
           <a:bodyPr wrap="square" lIns="0" tIns="0" rIns="0" bIns="0" rtlCol="0" anchor="t"/>
           <a:lstStyle/>
           <a:p>
-            <a:pPr algn="r" indent="0" marL="0">
+            <a:pPr marL="0" indent="0" algn="r">
               <a:buNone/>
             </a:pPr>
             <a:r>
@@ -11860,7 +12934,7 @@
           <a:bodyPr wrap="square" lIns="0" tIns="0" rIns="0" bIns="0" rtlCol="0" anchor="t"/>
           <a:lstStyle/>
           <a:p>
-            <a:pPr indent="0" marL="0">
+            <a:pPr marL="0" indent="0">
               <a:buNone/>
             </a:pPr>
             <a:r>
@@ -11899,7 +12973,7 @@
           <a:bodyPr wrap="square" lIns="0" tIns="0" rIns="0" bIns="0" rtlCol="0" anchor="t"/>
           <a:lstStyle/>
           <a:p>
-            <a:pPr indent="0" marL="0">
+            <a:pPr marL="0" indent="0">
               <a:lnSpc>
                 <a:spcPct val="112000"/>
               </a:lnSpc>
@@ -11946,17 +13020,24 @@
             <a:prstDash val="solid"/>
           </a:ln>
         </p:spPr>
+        <p:txBody>
+          <a:bodyPr/>
+          <a:lstStyle/>
+          <a:p>
+            <a:endParaRPr lang="en-GB"/>
+          </a:p>
+        </p:txBody>
       </p:sp>
       <p:pic>
         <p:nvPicPr>
-          <p:cNvPr id="20" name="Step 3 icon" descr="preencoded.png">    </p:cNvPr>
+          <p:cNvPr id="20" name="Step 3 icon" descr="preencoded.png"/>
           <p:cNvPicPr>
             <a:picLocks noChangeAspect="1"/>
           </p:cNvPicPr>
           <p:nvPr/>
         </p:nvPicPr>
         <p:blipFill>
-          <a:blip r:embed="rId3"/>
+          <a:blip r:embed="rId5"/>
           <a:stretch>
             <a:fillRect/>
           </a:stretch>
@@ -11992,7 +13073,7 @@
           <a:bodyPr wrap="square" lIns="0" tIns="0" rIns="0" bIns="0" rtlCol="0" anchor="t"/>
           <a:lstStyle/>
           <a:p>
-            <a:pPr algn="r" indent="0" marL="0">
+            <a:pPr marL="0" indent="0" algn="r">
               <a:buNone/>
             </a:pPr>
             <a:r>
@@ -12031,7 +13112,7 @@
           <a:bodyPr wrap="square" lIns="0" tIns="0" rIns="0" bIns="0" rtlCol="0" anchor="t"/>
           <a:lstStyle/>
           <a:p>
-            <a:pPr indent="0" marL="0">
+            <a:pPr marL="0" indent="0">
               <a:buNone/>
             </a:pPr>
             <a:r>
@@ -12070,7 +13151,7 @@
           <a:bodyPr wrap="square" lIns="0" tIns="0" rIns="0" bIns="0" rtlCol="0" anchor="t"/>
           <a:lstStyle/>
           <a:p>
-            <a:pPr indent="0" marL="0">
+            <a:pPr marL="0" indent="0">
               <a:lnSpc>
                 <a:spcPct val="112000"/>
               </a:lnSpc>
@@ -12115,6 +13196,13 @@
             <a:prstDash val="solid"/>
           </a:ln>
         </p:spPr>
+        <p:txBody>
+          <a:bodyPr/>
+          <a:lstStyle/>
+          <a:p>
+            <a:endParaRPr lang="en-GB"/>
+          </a:p>
+        </p:txBody>
       </p:sp>
       <p:sp>
         <p:nvSpPr>
@@ -12142,17 +13230,24 @@
             <a:prstDash val="solid"/>
           </a:ln>
         </p:spPr>
+        <p:txBody>
+          <a:bodyPr/>
+          <a:lstStyle/>
+          <a:p>
+            <a:endParaRPr lang="en-GB"/>
+          </a:p>
+        </p:txBody>
       </p:sp>
       <p:pic>
         <p:nvPicPr>
-          <p:cNvPr id="26" name="Step 4 icon" descr="preencoded.png">    </p:cNvPr>
+          <p:cNvPr id="26" name="Step 4 icon" descr="preencoded.png"/>
           <p:cNvPicPr>
             <a:picLocks noChangeAspect="1"/>
           </p:cNvPicPr>
           <p:nvPr/>
         </p:nvPicPr>
         <p:blipFill>
-          <a:blip r:embed="rId4"/>
+          <a:blip r:embed="rId6"/>
           <a:stretch>
             <a:fillRect/>
           </a:stretch>
@@ -12188,7 +13283,7 @@
           <a:bodyPr wrap="square" lIns="0" tIns="0" rIns="0" bIns="0" rtlCol="0" anchor="t"/>
           <a:lstStyle/>
           <a:p>
-            <a:pPr algn="r" indent="0" marL="0">
+            <a:pPr marL="0" indent="0" algn="r">
               <a:buNone/>
             </a:pPr>
             <a:r>
@@ -12227,7 +13322,7 @@
           <a:bodyPr wrap="square" lIns="0" tIns="0" rIns="0" bIns="0" rtlCol="0" anchor="t"/>
           <a:lstStyle/>
           <a:p>
-            <a:pPr indent="0" marL="0">
+            <a:pPr marL="0" indent="0">
               <a:buNone/>
             </a:pPr>
             <a:r>
@@ -12266,7 +13361,7 @@
           <a:bodyPr wrap="square" lIns="0" tIns="0" rIns="0" bIns="0" rtlCol="0" anchor="t"/>
           <a:lstStyle/>
           <a:p>
-            <a:pPr indent="0" marL="0">
+            <a:pPr marL="0" indent="0">
               <a:lnSpc>
                 <a:spcPct val="112000"/>
               </a:lnSpc>
@@ -12289,7 +13384,7 @@
       </p:sp>
       <p:sp>
         <p:nvSpPr>
-          <p:cNvPr id="25" name="Slide Number Placeholder 0"/>
+          <p:cNvPr id="30" name="Slide Number Placeholder 0"/>
           <p:cNvSpPr>
             <a:spLocks noGrp="1"/>
           </p:cNvSpPr>
@@ -12307,7 +13402,7 @@
           </a:prstGeom>
           <a:extLst>
             <a:ext uri="{C572A759-6A51-4108-AA02-DFA0A04FC94B}">
-              <ma14:wrappingTextBoxFlag xmlns:ma14="http://schemas.microsoft.com/office/mac/drawingml/2011/main" val="0"/>
+              <ma14:wrappingTextBoxFlag xmlns:ma14="http://schemas.microsoft.com/office/mac/drawingml/2011/main" xmlns="" val="0"/>
             </a:ext>
           </a:extLst>
         </p:spPr>
@@ -12328,7 +13423,7 @@
           <a:p>
             <a:pPr algn="r"/>
             <a:fld id="{F7021451-1387-4CA6-816F-3879F97B5CBC}" type="slidenum">
-              <a:rPr b="0" lang="en-US"/>
+              <a:rPr lang="en-US" b="0"/>
               <a:t>4</a:t>
             </a:fld>
             <a:endParaRPr lang="en-US"/>
@@ -12363,9 +13458,11 @@
       <p:sp>
         <p:nvSpPr>
           <p:cNvPr id="2" name="Text 4"/>
-          <p:cNvSpPr/>
+          <p:cNvSpPr>
+            <a:spLocks noGrp="1"/>
+          </p:cNvSpPr>
           <p:nvPr>
-            <p:ph idx="104" type="body" hasCustomPrompt="1"/>
+            <p:ph type="body" idx="104" hasCustomPrompt="1"/>
           </p:nvPr>
         </p:nvSpPr>
         <p:spPr>
@@ -12383,11 +13480,11 @@
           <a:bodyPr wrap="square" lIns="0" tIns="0" rIns="0" bIns="0" rtlCol="0" anchor="ctr"/>
           <a:lstStyle/>
           <a:p>
-            <a:pPr indent="0" marL="0">
-              <a:buNone/>
-            </a:pPr>
-            <a:r>
-              <a:rPr lang="en-US" sz="1200" spc="300" kern="0" dirty="0">
+            <a:pPr marL="0" indent="0">
+              <a:buNone/>
+            </a:pPr>
+            <a:r>
+              <a:rPr lang="en-US" sz="1200" kern="0" spc="300" dirty="0">
                 <a:solidFill>
                   <a:schemeClr val="accent1"/>
                 </a:solidFill>
@@ -12404,9 +13501,11 @@
       <p:sp>
         <p:nvSpPr>
           <p:cNvPr id="3" name="Text 4"/>
-          <p:cNvSpPr/>
+          <p:cNvSpPr>
+            <a:spLocks noGrp="1"/>
+          </p:cNvSpPr>
           <p:nvPr>
-            <p:ph idx="105" type="title" hasCustomPrompt="1"/>
+            <p:ph type="title" idx="105" hasCustomPrompt="1"/>
           </p:nvPr>
         </p:nvSpPr>
         <p:spPr>
@@ -12424,7 +13523,7 @@
           <a:bodyPr wrap="square" lIns="0" tIns="0" rIns="0" bIns="0" rtlCol="0" anchor="t"/>
           <a:lstStyle/>
           <a:p>
-            <a:pPr algn="l" indent="0" marL="0">
+            <a:pPr marL="0" indent="0" algn="l">
               <a:buNone/>
             </a:pPr>
             <a:r>
@@ -12444,55 +13543,7 @@
       </p:sp>
       <p:pic>
         <p:nvPicPr>
-          <p:cNvPr id="4" name="Member claim on phone" descr="C:\Users\tamra\AppData\Local\Temp\claude\c--Users-tamra-Documents-Projects-ledger-hackathon\fddb4cb0-085f-44b4-8227-1530ce90967d\scratchpad\deck\shots\c-phone.png">    </p:cNvPr>
-          <p:cNvPicPr>
-            <a:picLocks noChangeAspect="1"/>
-          </p:cNvPicPr>
-          <p:nvPr/>
-        </p:nvPicPr>
-        <p:blipFill>
-          <a:blip r:embed="rId1"/>
-          <a:stretch>
-            <a:fillRect/>
-          </a:stretch>
-        </p:blipFill>
-        <p:spPr>
-          <a:xfrm>
-            <a:off x="1112650" y="1783080"/>
-            <a:ext cx="1523739" cy="2929359"/>
-          </a:xfrm>
-          <a:prstGeom prst="rect">
-            <a:avLst/>
-          </a:prstGeom>
-        </p:spPr>
-      </p:pic>
-      <p:pic>
-        <p:nvPicPr>
-          <p:cNvPr id="5" name="Treasurer review" descr="C:\Users\tamra\AppData\Local\Temp\claude\c--Users-tamra-Documents-Projects-ledger-hackathon\fddb4cb0-085f-44b4-8227-1530ce90967d\scratchpad\deck\shots\c-treas.png">    </p:cNvPr>
-          <p:cNvPicPr>
-            <a:picLocks noChangeAspect="1"/>
-          </p:cNvPicPr>
-          <p:nvPr/>
-        </p:nvPicPr>
-        <p:blipFill>
-          <a:blip r:embed="rId2"/>
-          <a:stretch>
-            <a:fillRect/>
-          </a:stretch>
-        </p:blipFill>
-        <p:spPr>
-          <a:xfrm>
-            <a:off x="3520440" y="1783080"/>
-            <a:ext cx="3931920" cy="2929359"/>
-          </a:xfrm>
-          <a:prstGeom prst="rect">
-            <a:avLst/>
-          </a:prstGeom>
-        </p:spPr>
-      </p:pic>
-      <p:pic>
-        <p:nvPicPr>
-          <p:cNvPr id="6" name="Ledger signed and paid" descr="C:\Users\tamra\AppData\Local\Temp\claude\c--Users-tamra-Documents-Projects-ledger-hackathon\fddb4cb0-085f-44b4-8227-1530ce90967d\scratchpad\deck\shots\c-paid.png">    </p:cNvPr>
+          <p:cNvPr id="4" name="Member claim on phone" descr="C:\Users\tamra\AppData\Local\Temp\claude\c--Users-tamra-Documents-Projects-ledger-hackathon\fddb4cb0-085f-44b4-8227-1530ce90967d\scratchpad\deck\shots\c-phone.png"/>
           <p:cNvPicPr>
             <a:picLocks noChangeAspect="1"/>
           </p:cNvPicPr>
@@ -12506,6 +13557,54 @@
         </p:blipFill>
         <p:spPr>
           <a:xfrm>
+            <a:off x="1112650" y="1783080"/>
+            <a:ext cx="1523739" cy="2929359"/>
+          </a:xfrm>
+          <a:prstGeom prst="rect">
+            <a:avLst/>
+          </a:prstGeom>
+        </p:spPr>
+      </p:pic>
+      <p:pic>
+        <p:nvPicPr>
+          <p:cNvPr id="5" name="Treasurer review" descr="C:\Users\tamra\AppData\Local\Temp\claude\c--Users-tamra-Documents-Projects-ledger-hackathon\fddb4cb0-085f-44b4-8227-1530ce90967d\scratchpad\deck\shots\c-treas.png"/>
+          <p:cNvPicPr>
+            <a:picLocks noChangeAspect="1"/>
+          </p:cNvPicPr>
+          <p:nvPr/>
+        </p:nvPicPr>
+        <p:blipFill>
+          <a:blip r:embed="rId4"/>
+          <a:stretch>
+            <a:fillRect/>
+          </a:stretch>
+        </p:blipFill>
+        <p:spPr>
+          <a:xfrm>
+            <a:off x="3520440" y="1783080"/>
+            <a:ext cx="3931920" cy="2929359"/>
+          </a:xfrm>
+          <a:prstGeom prst="rect">
+            <a:avLst/>
+          </a:prstGeom>
+        </p:spPr>
+      </p:pic>
+      <p:pic>
+        <p:nvPicPr>
+          <p:cNvPr id="6" name="Ledger signed and paid" descr="C:\Users\tamra\AppData\Local\Temp\claude\c--Users-tamra-Documents-Projects-ledger-hackathon\fddb4cb0-085f-44b4-8227-1530ce90967d\scratchpad\deck\shots\c-paid.png"/>
+          <p:cNvPicPr>
+            <a:picLocks noChangeAspect="1"/>
+          </p:cNvPicPr>
+          <p:nvPr/>
+        </p:nvPicPr>
+        <p:blipFill>
+          <a:blip r:embed="rId5"/>
+          <a:stretch>
+            <a:fillRect/>
+          </a:stretch>
+        </p:blipFill>
+        <p:spPr>
+          <a:xfrm>
             <a:off x="7708392" y="1783080"/>
             <a:ext cx="3931920" cy="2929359"/>
           </a:xfrm>
@@ -12535,7 +13634,7 @@
           <a:bodyPr wrap="square" lIns="0" tIns="0" rIns="0" bIns="0" rtlCol="0" anchor="t"/>
           <a:lstStyle/>
           <a:p>
-            <a:pPr indent="0" marL="0">
+            <a:pPr marL="0" indent="0">
               <a:buNone/>
             </a:pPr>
             <a:r>
@@ -12574,7 +13673,7 @@
           <a:bodyPr wrap="square" lIns="0" tIns="0" rIns="0" bIns="0" rtlCol="0" anchor="t"/>
           <a:lstStyle/>
           <a:p>
-            <a:pPr indent="0" marL="0">
+            <a:pPr marL="0" indent="0">
               <a:lnSpc>
                 <a:spcPct val="110000"/>
               </a:lnSpc>
@@ -12616,7 +13715,7 @@
           <a:bodyPr wrap="square" lIns="0" tIns="0" rIns="0" bIns="0" rtlCol="0" anchor="t"/>
           <a:lstStyle/>
           <a:p>
-            <a:pPr indent="0" marL="0">
+            <a:pPr marL="0" indent="0">
               <a:buNone/>
             </a:pPr>
             <a:r>
@@ -12655,7 +13754,7 @@
           <a:bodyPr wrap="square" lIns="0" tIns="0" rIns="0" bIns="0" rtlCol="0" anchor="t"/>
           <a:lstStyle/>
           <a:p>
-            <a:pPr indent="0" marL="0">
+            <a:pPr marL="0" indent="0">
               <a:lnSpc>
                 <a:spcPct val="110000"/>
               </a:lnSpc>
@@ -12697,7 +13796,7 @@
           <a:bodyPr wrap="square" lIns="0" tIns="0" rIns="0" bIns="0" rtlCol="0" anchor="t"/>
           <a:lstStyle/>
           <a:p>
-            <a:pPr indent="0" marL="0">
+            <a:pPr marL="0" indent="0">
               <a:buNone/>
             </a:pPr>
             <a:r>
@@ -12736,7 +13835,7 @@
           <a:bodyPr wrap="square" lIns="0" tIns="0" rIns="0" bIns="0" rtlCol="0" anchor="t"/>
           <a:lstStyle/>
           <a:p>
-            <a:pPr indent="0" marL="0">
+            <a:pPr marL="0" indent="0">
               <a:lnSpc>
                 <a:spcPct val="110000"/>
               </a:lnSpc>
@@ -12777,7 +13876,7 @@
           </a:prstGeom>
           <a:extLst>
             <a:ext uri="{C572A759-6A51-4108-AA02-DFA0A04FC94B}">
-              <ma14:wrappingTextBoxFlag xmlns:ma14="http://schemas.microsoft.com/office/mac/drawingml/2011/main" val="0"/>
+              <ma14:wrappingTextBoxFlag xmlns:ma14="http://schemas.microsoft.com/office/mac/drawingml/2011/main" xmlns="" val="0"/>
             </a:ext>
           </a:extLst>
         </p:spPr>
@@ -12798,7 +13897,7 @@
           <a:p>
             <a:pPr algn="r"/>
             <a:fld id="{F7021451-1387-4CA6-816F-3879F97B5CBC}" type="slidenum">
-              <a:rPr b="0" lang="en-US"/>
+              <a:rPr lang="en-US" b="0"/>
               <a:t>5</a:t>
             </a:fld>
             <a:endParaRPr lang="en-US"/>
@@ -12833,9 +13932,11 @@
       <p:sp>
         <p:nvSpPr>
           <p:cNvPr id="2" name="Text 4"/>
-          <p:cNvSpPr/>
+          <p:cNvSpPr>
+            <a:spLocks noGrp="1"/>
+          </p:cNvSpPr>
           <p:nvPr>
-            <p:ph idx="104" type="body" hasCustomPrompt="1"/>
+            <p:ph type="body" idx="104" hasCustomPrompt="1"/>
           </p:nvPr>
         </p:nvSpPr>
         <p:spPr>
@@ -12853,11 +13954,11 @@
           <a:bodyPr wrap="square" lIns="0" tIns="0" rIns="0" bIns="0" rtlCol="0" anchor="ctr"/>
           <a:lstStyle/>
           <a:p>
-            <a:pPr indent="0" marL="0">
-              <a:buNone/>
-            </a:pPr>
-            <a:r>
-              <a:rPr lang="en-US" sz="1200" spc="300" kern="0" dirty="0">
+            <a:pPr marL="0" indent="0">
+              <a:buNone/>
+            </a:pPr>
+            <a:r>
+              <a:rPr lang="en-US" sz="1200" kern="0" spc="300" dirty="0">
                 <a:solidFill>
                   <a:schemeClr val="accent1"/>
                 </a:solidFill>
@@ -12874,9 +13975,11 @@
       <p:sp>
         <p:nvSpPr>
           <p:cNvPr id="3" name="Text 4"/>
-          <p:cNvSpPr/>
+          <p:cNvSpPr>
+            <a:spLocks noGrp="1"/>
+          </p:cNvSpPr>
           <p:nvPr>
-            <p:ph idx="105" type="title" hasCustomPrompt="1"/>
+            <p:ph type="title" idx="105" hasCustomPrompt="1"/>
           </p:nvPr>
         </p:nvSpPr>
         <p:spPr>
@@ -12894,7 +13997,7 @@
           <a:bodyPr wrap="square" lIns="0" tIns="0" rIns="0" bIns="0" rtlCol="0" anchor="t"/>
           <a:lstStyle/>
           <a:p>
-            <a:pPr algn="l" indent="0" marL="0">
+            <a:pPr marL="0" indent="0" algn="l">
               <a:buNone/>
             </a:pPr>
             <a:r>
@@ -12938,6 +14041,13 @@
             <a:prstDash val="solid"/>
           </a:ln>
         </p:spPr>
+        <p:txBody>
+          <a:bodyPr/>
+          <a:lstStyle/>
+          <a:p>
+            <a:endParaRPr lang="en-GB"/>
+          </a:p>
+        </p:txBody>
       </p:sp>
       <p:sp>
         <p:nvSpPr>
@@ -12960,7 +14070,7 @@
           <a:bodyPr wrap="square" lIns="0" tIns="0" rIns="0" bIns="0" rtlCol="0" anchor="t"/>
           <a:lstStyle/>
           <a:p>
-            <a:pPr indent="0" marL="0">
+            <a:pPr marL="0" indent="0">
               <a:buNone/>
             </a:pPr>
             <a:r>
@@ -12999,7 +14109,7 @@
           <a:bodyPr wrap="square" lIns="0" tIns="0" rIns="0" bIns="0" rtlCol="0" anchor="t"/>
           <a:lstStyle/>
           <a:p>
-            <a:pPr indent="0" marL="0">
+            <a:pPr marL="0" indent="0">
               <a:lnSpc>
                 <a:spcPct val="105000"/>
               </a:lnSpc>
@@ -13044,6 +14154,13 @@
             <a:prstDash val="solid"/>
           </a:ln>
         </p:spPr>
+        <p:txBody>
+          <a:bodyPr/>
+          <a:lstStyle/>
+          <a:p>
+            <a:endParaRPr lang="en-GB"/>
+          </a:p>
+        </p:txBody>
       </p:sp>
       <p:sp>
         <p:nvSpPr>
@@ -13071,6 +14188,13 @@
             <a:prstDash val="solid"/>
           </a:ln>
         </p:spPr>
+        <p:txBody>
+          <a:bodyPr/>
+          <a:lstStyle/>
+          <a:p>
+            <a:endParaRPr lang="en-GB"/>
+          </a:p>
+        </p:txBody>
       </p:sp>
       <p:sp>
         <p:nvSpPr>
@@ -13093,7 +14217,7 @@
           <a:bodyPr wrap="square" lIns="0" tIns="0" rIns="0" bIns="0" rtlCol="0" anchor="t"/>
           <a:lstStyle/>
           <a:p>
-            <a:pPr indent="0" marL="0">
+            <a:pPr marL="0" indent="0">
               <a:buNone/>
             </a:pPr>
             <a:r>
@@ -13132,7 +14256,7 @@
           <a:bodyPr wrap="square" lIns="0" tIns="0" rIns="0" bIns="0" rtlCol="0" anchor="t"/>
           <a:lstStyle/>
           <a:p>
-            <a:pPr indent="0" marL="0">
+            <a:pPr marL="0" indent="0">
               <a:lnSpc>
                 <a:spcPct val="105000"/>
               </a:lnSpc>
@@ -13177,6 +14301,13 @@
             <a:prstDash val="solid"/>
           </a:ln>
         </p:spPr>
+        <p:txBody>
+          <a:bodyPr/>
+          <a:lstStyle/>
+          <a:p>
+            <a:endParaRPr lang="en-GB"/>
+          </a:p>
+        </p:txBody>
       </p:sp>
       <p:sp>
         <p:nvSpPr>
@@ -13204,6 +14335,13 @@
             <a:prstDash val="solid"/>
           </a:ln>
         </p:spPr>
+        <p:txBody>
+          <a:bodyPr/>
+          <a:lstStyle/>
+          <a:p>
+            <a:endParaRPr lang="en-GB"/>
+          </a:p>
+        </p:txBody>
       </p:sp>
       <p:sp>
         <p:nvSpPr>
@@ -13226,7 +14364,7 @@
           <a:bodyPr wrap="square" lIns="0" tIns="0" rIns="0" bIns="0" rtlCol="0" anchor="t"/>
           <a:lstStyle/>
           <a:p>
-            <a:pPr indent="0" marL="0">
+            <a:pPr marL="0" indent="0">
               <a:buNone/>
             </a:pPr>
             <a:r>
@@ -13265,7 +14403,7 @@
           <a:bodyPr wrap="square" lIns="0" tIns="0" rIns="0" bIns="0" rtlCol="0" anchor="t"/>
           <a:lstStyle/>
           <a:p>
-            <a:pPr indent="0" marL="0">
+            <a:pPr marL="0" indent="0">
               <a:lnSpc>
                 <a:spcPct val="105000"/>
               </a:lnSpc>
@@ -13310,6 +14448,13 @@
             <a:prstDash val="solid"/>
           </a:ln>
         </p:spPr>
+        <p:txBody>
+          <a:bodyPr/>
+          <a:lstStyle/>
+          <a:p>
+            <a:endParaRPr lang="en-GB"/>
+          </a:p>
+        </p:txBody>
       </p:sp>
       <p:sp>
         <p:nvSpPr>
@@ -13337,6 +14482,13 @@
             <a:prstDash val="solid"/>
           </a:ln>
         </p:spPr>
+        <p:txBody>
+          <a:bodyPr/>
+          <a:lstStyle/>
+          <a:p>
+            <a:endParaRPr lang="en-GB"/>
+          </a:p>
+        </p:txBody>
       </p:sp>
       <p:sp>
         <p:nvSpPr>
@@ -13359,7 +14511,7 @@
           <a:bodyPr wrap="square" lIns="0" tIns="0" rIns="0" bIns="0" rtlCol="0" anchor="t"/>
           <a:lstStyle/>
           <a:p>
-            <a:pPr indent="0" marL="0">
+            <a:pPr marL="0" indent="0">
               <a:buNone/>
             </a:pPr>
             <a:r>
@@ -13398,7 +14550,7 @@
           <a:bodyPr wrap="square" lIns="0" tIns="0" rIns="0" bIns="0" rtlCol="0" anchor="t"/>
           <a:lstStyle/>
           <a:p>
-            <a:pPr indent="0" marL="0">
+            <a:pPr marL="0" indent="0">
               <a:lnSpc>
                 <a:spcPct val="105000"/>
               </a:lnSpc>
@@ -13443,6 +14595,13 @@
             <a:prstDash val="solid"/>
           </a:ln>
         </p:spPr>
+        <p:txBody>
+          <a:bodyPr/>
+          <a:lstStyle/>
+          <a:p>
+            <a:endParaRPr lang="en-GB"/>
+          </a:p>
+        </p:txBody>
       </p:sp>
       <p:sp>
         <p:nvSpPr>
@@ -13470,6 +14629,13 @@
             <a:prstDash val="solid"/>
           </a:ln>
         </p:spPr>
+        <p:txBody>
+          <a:bodyPr/>
+          <a:lstStyle/>
+          <a:p>
+            <a:endParaRPr lang="en-GB"/>
+          </a:p>
+        </p:txBody>
       </p:sp>
       <p:sp>
         <p:nvSpPr>
@@ -13492,7 +14658,7 @@
           <a:bodyPr wrap="square" lIns="0" tIns="0" rIns="0" bIns="0" rtlCol="0" anchor="t"/>
           <a:lstStyle/>
           <a:p>
-            <a:pPr indent="0" marL="0">
+            <a:pPr marL="0" indent="0">
               <a:buNone/>
             </a:pPr>
             <a:r>
@@ -13531,7 +14697,7 @@
           <a:bodyPr wrap="square" lIns="0" tIns="0" rIns="0" bIns="0" rtlCol="0" anchor="t"/>
           <a:lstStyle/>
           <a:p>
-            <a:pPr indent="0" marL="0">
+            <a:pPr marL="0" indent="0">
               <a:lnSpc>
                 <a:spcPct val="105000"/>
               </a:lnSpc>
@@ -13554,217 +14720,7 @@
       </p:sp>
       <p:pic>
         <p:nvPicPr>
-          <p:cNvPr id="23" name="Fact icon 1" descr="preencoded.png">    </p:cNvPr>
-          <p:cNvPicPr>
-            <a:picLocks noChangeAspect="1"/>
-          </p:cNvPicPr>
-          <p:nvPr/>
-        </p:nvPicPr>
-        <p:blipFill>
-          <a:blip r:embed="rId1"/>
-          <a:stretch>
-            <a:fillRect/>
-          </a:stretch>
-        </p:blipFill>
-        <p:spPr>
-          <a:xfrm>
-            <a:off x="548640" y="4023360"/>
-            <a:ext cx="310896" cy="310896"/>
-          </a:xfrm>
-          <a:prstGeom prst="rect">
-            <a:avLst/>
-          </a:prstGeom>
-        </p:spPr>
-      </p:pic>
-      <p:sp>
-        <p:nvSpPr>
-          <p:cNvPr id="24" name="Text 21"/>
-          <p:cNvSpPr txBox="1"/>
-          <p:nvPr/>
-        </p:nvSpPr>
-        <p:spPr>
-          <a:xfrm>
-            <a:off x="1005840" y="3995928"/>
-            <a:ext cx="3027578" cy="365760"/>
-          </a:xfrm>
-          <a:prstGeom prst="rect">
-            <a:avLst/>
-          </a:prstGeom>
-          <a:noFill/>
-          <a:ln/>
-        </p:spPr>
-        <p:txBody>
-          <a:bodyPr wrap="square" lIns="0" tIns="0" rIns="0" bIns="0" rtlCol="0" anchor="t"/>
-          <a:lstStyle/>
-          <a:p>
-            <a:pPr indent="0" marL="0">
-              <a:buNone/>
-            </a:pPr>
-            <a:r>
-              <a:rPr lang="en-US" sz="1500" b="1" dirty="0">
-                <a:solidFill>
-                  <a:schemeClr val="accent6"/>
-                </a:solidFill>
-                <a:latin typeface="Consolas" pitchFamily="34" charset="0"/>
-                <a:ea typeface="Consolas" pitchFamily="34" charset="-122"/>
-                <a:cs typeface="Consolas" pitchFamily="34" charset="-120"/>
-              </a:rPr>
-              <a:t>NO KEY ON ANY SERVER</a:t>
-            </a:r>
-            <a:endParaRPr lang="en-US" sz="1500" dirty="0"/>
-          </a:p>
-        </p:txBody>
-      </p:sp>
-      <p:sp>
-        <p:nvSpPr>
-          <p:cNvPr id="25" name="Text 22"/>
-          <p:cNvSpPr txBox="1"/>
-          <p:nvPr/>
-        </p:nvSpPr>
-        <p:spPr>
-          <a:xfrm>
-            <a:off x="1005840" y="4453128"/>
-            <a:ext cx="3027578" cy="1463040"/>
-          </a:xfrm>
-          <a:prstGeom prst="rect">
-            <a:avLst/>
-          </a:prstGeom>
-          <a:noFill/>
-          <a:ln/>
-        </p:spPr>
-        <p:txBody>
-          <a:bodyPr wrap="square" lIns="0" tIns="0" rIns="0" bIns="0" rtlCol="0" anchor="t"/>
-          <a:lstStyle/>
-          <a:p>
-            <a:pPr indent="0" marL="0">
-              <a:lnSpc>
-                <a:spcPct val="112000"/>
-              </a:lnSpc>
-              <a:buNone/>
-            </a:pPr>
-            <a:r>
-              <a:rPr lang="en-US" sz="1500" dirty="0">
-                <a:solidFill>
-                  <a:schemeClr val="bg2"/>
-                </a:solidFill>
-                <a:latin typeface="Calibri" pitchFamily="34" charset="0"/>
-                <a:ea typeface="Calibri" pitchFamily="34" charset="-122"/>
-                <a:cs typeface="Calibri" pitchFamily="34" charset="-120"/>
-              </a:rPr>
-              <a:t>The backend hands the device an unsigned transaction and gets a signature back. Private keys never leave the Ledger.</a:t>
-            </a:r>
-            <a:endParaRPr lang="en-US" sz="1500" dirty="0"/>
-          </a:p>
-        </p:txBody>
-      </p:sp>
-      <p:pic>
-        <p:nvPicPr>
-          <p:cNvPr id="26" name="Fact icon 2" descr="preencoded.png">    </p:cNvPr>
-          <p:cNvPicPr>
-            <a:picLocks noChangeAspect="1"/>
-          </p:cNvPicPr>
-          <p:nvPr/>
-        </p:nvPicPr>
-        <p:blipFill>
-          <a:blip r:embed="rId2"/>
-          <a:stretch>
-            <a:fillRect/>
-          </a:stretch>
-        </p:blipFill>
-        <p:spPr>
-          <a:xfrm>
-            <a:off x="4353458" y="4023360"/>
-            <a:ext cx="310896" cy="310896"/>
-          </a:xfrm>
-          <a:prstGeom prst="rect">
-            <a:avLst/>
-          </a:prstGeom>
-        </p:spPr>
-      </p:pic>
-      <p:sp>
-        <p:nvSpPr>
-          <p:cNvPr id="27" name="Text 23"/>
-          <p:cNvSpPr txBox="1"/>
-          <p:nvPr/>
-        </p:nvSpPr>
-        <p:spPr>
-          <a:xfrm>
-            <a:off x="4810658" y="3995928"/>
-            <a:ext cx="3027578" cy="365760"/>
-          </a:xfrm>
-          <a:prstGeom prst="rect">
-            <a:avLst/>
-          </a:prstGeom>
-          <a:noFill/>
-          <a:ln/>
-        </p:spPr>
-        <p:txBody>
-          <a:bodyPr wrap="square" lIns="0" tIns="0" rIns="0" bIns="0" rtlCol="0" anchor="t"/>
-          <a:lstStyle/>
-          <a:p>
-            <a:pPr indent="0" marL="0">
-              <a:buNone/>
-            </a:pPr>
-            <a:r>
-              <a:rPr lang="en-US" sz="1500" b="1" dirty="0">
-                <a:solidFill>
-                  <a:schemeClr val="accent6"/>
-                </a:solidFill>
-                <a:latin typeface="Consolas" pitchFamily="34" charset="0"/>
-                <a:ea typeface="Consolas" pitchFamily="34" charset="-122"/>
-                <a:cs typeface="Consolas" pitchFamily="34" charset="-120"/>
-              </a:rPr>
-              <a:t>CLEAR SIGNING, NOT BLIND</a:t>
-            </a:r>
-            <a:endParaRPr lang="en-US" sz="1500" dirty="0"/>
-          </a:p>
-        </p:txBody>
-      </p:sp>
-      <p:sp>
-        <p:nvSpPr>
-          <p:cNvPr id="28" name="Text 24"/>
-          <p:cNvSpPr txBox="1"/>
-          <p:nvPr/>
-        </p:nvSpPr>
-        <p:spPr>
-          <a:xfrm>
-            <a:off x="4810658" y="4453128"/>
-            <a:ext cx="3027578" cy="1463040"/>
-          </a:xfrm>
-          <a:prstGeom prst="rect">
-            <a:avLst/>
-          </a:prstGeom>
-          <a:noFill/>
-          <a:ln/>
-        </p:spPr>
-        <p:txBody>
-          <a:bodyPr wrap="square" lIns="0" tIns="0" rIns="0" bIns="0" rtlCol="0" anchor="t"/>
-          <a:lstStyle/>
-          <a:p>
-            <a:pPr indent="0" marL="0">
-              <a:lnSpc>
-                <a:spcPct val="112000"/>
-              </a:lnSpc>
-              <a:buNone/>
-            </a:pPr>
-            <a:r>
-              <a:rPr lang="en-US" sz="1500" dirty="0">
-                <a:solidFill>
-                  <a:schemeClr val="bg2"/>
-                </a:solidFill>
-                <a:latin typeface="Calibri" pitchFamily="34" charset="0"/>
-                <a:ea typeface="Calibri" pitchFamily="34" charset="-122"/>
-                <a:cs typeface="Calibri" pitchFamily="34" charset="-120"/>
-              </a:rPr>
-              <a:t>The screen shows “Amount · USDC”, the recipient and the network. If it doesn’t match the claim, the treasurer rejects and nothing is sent.</a:t>
-            </a:r>
-            <a:endParaRPr lang="en-US" sz="1500" dirty="0"/>
-          </a:p>
-        </p:txBody>
-      </p:sp>
-      <p:pic>
-        <p:nvPicPr>
-          <p:cNvPr id="29" name="Fact icon 3" descr="preencoded.png">    </p:cNvPr>
+          <p:cNvPr id="23" name="Fact icon 1" descr="preencoded.png"/>
           <p:cNvPicPr>
             <a:picLocks noChangeAspect="1"/>
           </p:cNvPicPr>
@@ -13778,7 +14734,7 @@
         </p:blipFill>
         <p:spPr>
           <a:xfrm>
-            <a:off x="8158277" y="4023360"/>
+            <a:off x="548640" y="4023360"/>
             <a:ext cx="310896" cy="310896"/>
           </a:xfrm>
           <a:prstGeom prst="rect">
@@ -13788,13 +14744,13 @@
       </p:pic>
       <p:sp>
         <p:nvSpPr>
-          <p:cNvPr id="30" name="Text 25"/>
-          <p:cNvSpPr txBox="1"/>
-          <p:nvPr/>
-        </p:nvSpPr>
-        <p:spPr>
-          <a:xfrm>
-            <a:off x="8615477" y="3995928"/>
+          <p:cNvPr id="24" name="Text 21"/>
+          <p:cNvSpPr txBox="1"/>
+          <p:nvPr/>
+        </p:nvSpPr>
+        <p:spPr>
+          <a:xfrm>
+            <a:off x="1005840" y="3995928"/>
             <a:ext cx="3027578" cy="365760"/>
           </a:xfrm>
           <a:prstGeom prst="rect">
@@ -13807,7 +14763,7 @@
           <a:bodyPr wrap="square" lIns="0" tIns="0" rIns="0" bIns="0" rtlCol="0" anchor="t"/>
           <a:lstStyle/>
           <a:p>
-            <a:pPr indent="0" marL="0">
+            <a:pPr marL="0" indent="0">
               <a:buNone/>
             </a:pPr>
             <a:r>
@@ -13819,7 +14775,7 @@
                 <a:ea typeface="Consolas" pitchFamily="34" charset="-122"/>
                 <a:cs typeface="Consolas" pitchFamily="34" charset="-120"/>
               </a:rPr>
-              <a:t>PROVEN END TO END</a:t>
+              <a:t>NO KEY ON ANY SERVER</a:t>
             </a:r>
             <a:endParaRPr lang="en-US" sz="1500" dirty="0"/>
           </a:p>
@@ -13827,13 +14783,13 @@
       </p:sp>
       <p:sp>
         <p:nvSpPr>
-          <p:cNvPr id="31" name="Text 26"/>
-          <p:cNvSpPr txBox="1"/>
-          <p:nvPr/>
-        </p:nvSpPr>
-        <p:spPr>
-          <a:xfrm>
-            <a:off x="8615477" y="4453128"/>
+          <p:cNvPr id="25" name="Text 22"/>
+          <p:cNvSpPr txBox="1"/>
+          <p:nvPr/>
+        </p:nvSpPr>
+        <p:spPr>
+          <a:xfrm>
+            <a:off x="1005840" y="4453128"/>
             <a:ext cx="3027578" cy="1463040"/>
           </a:xfrm>
           <a:prstGeom prst="rect">
@@ -13846,7 +14802,7 @@
           <a:bodyPr wrap="square" lIns="0" tIns="0" rIns="0" bIns="0" rtlCol="0" anchor="t"/>
           <a:lstStyle/>
           <a:p>
-            <a:pPr indent="0" marL="0">
+            <a:pPr marL="0" indent="0">
               <a:lnSpc>
                 <a:spcPct val="112000"/>
               </a:lnSpc>
@@ -13861,6 +14817,216 @@
                 <a:ea typeface="Calibri" pitchFamily="34" charset="-122"/>
                 <a:cs typeface="Calibri" pitchFamily="34" charset="-120"/>
               </a:rPr>
+              <a:t>The backend hands the device an unsigned transaction and gets a signature back. Private keys never leave the Ledger.</a:t>
+            </a:r>
+            <a:endParaRPr lang="en-US" sz="1500" dirty="0"/>
+          </a:p>
+        </p:txBody>
+      </p:sp>
+      <p:pic>
+        <p:nvPicPr>
+          <p:cNvPr id="26" name="Fact icon 2" descr="preencoded.png"/>
+          <p:cNvPicPr>
+            <a:picLocks noChangeAspect="1"/>
+          </p:cNvPicPr>
+          <p:nvPr/>
+        </p:nvPicPr>
+        <p:blipFill>
+          <a:blip r:embed="rId4"/>
+          <a:stretch>
+            <a:fillRect/>
+          </a:stretch>
+        </p:blipFill>
+        <p:spPr>
+          <a:xfrm>
+            <a:off x="4353458" y="4023360"/>
+            <a:ext cx="310896" cy="310896"/>
+          </a:xfrm>
+          <a:prstGeom prst="rect">
+            <a:avLst/>
+          </a:prstGeom>
+        </p:spPr>
+      </p:pic>
+      <p:sp>
+        <p:nvSpPr>
+          <p:cNvPr id="27" name="Text 23"/>
+          <p:cNvSpPr txBox="1"/>
+          <p:nvPr/>
+        </p:nvSpPr>
+        <p:spPr>
+          <a:xfrm>
+            <a:off x="4810658" y="3995928"/>
+            <a:ext cx="3027578" cy="365760"/>
+          </a:xfrm>
+          <a:prstGeom prst="rect">
+            <a:avLst/>
+          </a:prstGeom>
+          <a:noFill/>
+          <a:ln/>
+        </p:spPr>
+        <p:txBody>
+          <a:bodyPr wrap="square" lIns="0" tIns="0" rIns="0" bIns="0" rtlCol="0" anchor="t"/>
+          <a:lstStyle/>
+          <a:p>
+            <a:pPr marL="0" indent="0">
+              <a:buNone/>
+            </a:pPr>
+            <a:r>
+              <a:rPr lang="en-US" sz="1500" b="1" dirty="0">
+                <a:solidFill>
+                  <a:schemeClr val="accent6"/>
+                </a:solidFill>
+                <a:latin typeface="Consolas" pitchFamily="34" charset="0"/>
+                <a:ea typeface="Consolas" pitchFamily="34" charset="-122"/>
+                <a:cs typeface="Consolas" pitchFamily="34" charset="-120"/>
+              </a:rPr>
+              <a:t>CLEAR SIGNING, NOT BLIND</a:t>
+            </a:r>
+            <a:endParaRPr lang="en-US" sz="1500" dirty="0"/>
+          </a:p>
+        </p:txBody>
+      </p:sp>
+      <p:sp>
+        <p:nvSpPr>
+          <p:cNvPr id="28" name="Text 24"/>
+          <p:cNvSpPr txBox="1"/>
+          <p:nvPr/>
+        </p:nvSpPr>
+        <p:spPr>
+          <a:xfrm>
+            <a:off x="4810658" y="4453128"/>
+            <a:ext cx="3027578" cy="1463040"/>
+          </a:xfrm>
+          <a:prstGeom prst="rect">
+            <a:avLst/>
+          </a:prstGeom>
+          <a:noFill/>
+          <a:ln/>
+        </p:spPr>
+        <p:txBody>
+          <a:bodyPr wrap="square" lIns="0" tIns="0" rIns="0" bIns="0" rtlCol="0" anchor="t"/>
+          <a:lstStyle/>
+          <a:p>
+            <a:pPr marL="0" indent="0">
+              <a:lnSpc>
+                <a:spcPct val="112000"/>
+              </a:lnSpc>
+              <a:buNone/>
+            </a:pPr>
+            <a:r>
+              <a:rPr lang="en-US" sz="1500" dirty="0">
+                <a:solidFill>
+                  <a:schemeClr val="bg2"/>
+                </a:solidFill>
+                <a:latin typeface="Calibri" pitchFamily="34" charset="0"/>
+                <a:ea typeface="Calibri" pitchFamily="34" charset="-122"/>
+                <a:cs typeface="Calibri" pitchFamily="34" charset="-120"/>
+              </a:rPr>
+              <a:t>The screen shows “Amount · USDC”, the recipient and the network. If it doesn’t match the claim, the treasurer rejects and nothing is sent.</a:t>
+            </a:r>
+            <a:endParaRPr lang="en-US" sz="1500" dirty="0"/>
+          </a:p>
+        </p:txBody>
+      </p:sp>
+      <p:pic>
+        <p:nvPicPr>
+          <p:cNvPr id="29" name="Fact icon 3" descr="preencoded.png"/>
+          <p:cNvPicPr>
+            <a:picLocks noChangeAspect="1"/>
+          </p:cNvPicPr>
+          <p:nvPr/>
+        </p:nvPicPr>
+        <p:blipFill>
+          <a:blip r:embed="rId5"/>
+          <a:stretch>
+            <a:fillRect/>
+          </a:stretch>
+        </p:blipFill>
+        <p:spPr>
+          <a:xfrm>
+            <a:off x="8158277" y="4023360"/>
+            <a:ext cx="310896" cy="310896"/>
+          </a:xfrm>
+          <a:prstGeom prst="rect">
+            <a:avLst/>
+          </a:prstGeom>
+        </p:spPr>
+      </p:pic>
+      <p:sp>
+        <p:nvSpPr>
+          <p:cNvPr id="30" name="Text 25"/>
+          <p:cNvSpPr txBox="1"/>
+          <p:nvPr/>
+        </p:nvSpPr>
+        <p:spPr>
+          <a:xfrm>
+            <a:off x="8615477" y="3995928"/>
+            <a:ext cx="3027578" cy="365760"/>
+          </a:xfrm>
+          <a:prstGeom prst="rect">
+            <a:avLst/>
+          </a:prstGeom>
+          <a:noFill/>
+          <a:ln/>
+        </p:spPr>
+        <p:txBody>
+          <a:bodyPr wrap="square" lIns="0" tIns="0" rIns="0" bIns="0" rtlCol="0" anchor="t"/>
+          <a:lstStyle/>
+          <a:p>
+            <a:pPr marL="0" indent="0">
+              <a:buNone/>
+            </a:pPr>
+            <a:r>
+              <a:rPr lang="en-US" sz="1500" b="1" dirty="0">
+                <a:solidFill>
+                  <a:schemeClr val="accent6"/>
+                </a:solidFill>
+                <a:latin typeface="Consolas" pitchFamily="34" charset="0"/>
+                <a:ea typeface="Consolas" pitchFamily="34" charset="-122"/>
+                <a:cs typeface="Consolas" pitchFamily="34" charset="-120"/>
+              </a:rPr>
+              <a:t>PROVEN END TO END</a:t>
+            </a:r>
+            <a:endParaRPr lang="en-US" sz="1500" dirty="0"/>
+          </a:p>
+        </p:txBody>
+      </p:sp>
+      <p:sp>
+        <p:nvSpPr>
+          <p:cNvPr id="31" name="Text 26"/>
+          <p:cNvSpPr txBox="1"/>
+          <p:nvPr/>
+        </p:nvSpPr>
+        <p:spPr>
+          <a:xfrm>
+            <a:off x="8615477" y="4453128"/>
+            <a:ext cx="3027578" cy="1463040"/>
+          </a:xfrm>
+          <a:prstGeom prst="rect">
+            <a:avLst/>
+          </a:prstGeom>
+          <a:noFill/>
+          <a:ln/>
+        </p:spPr>
+        <p:txBody>
+          <a:bodyPr wrap="square" lIns="0" tIns="0" rIns="0" bIns="0" rtlCol="0" anchor="t"/>
+          <a:lstStyle/>
+          <a:p>
+            <a:pPr marL="0" indent="0">
+              <a:lnSpc>
+                <a:spcPct val="112000"/>
+              </a:lnSpc>
+              <a:buNone/>
+            </a:pPr>
+            <a:r>
+              <a:rPr lang="en-US" sz="1500" dirty="0">
+                <a:solidFill>
+                  <a:schemeClr val="bg2"/>
+                </a:solidFill>
+                <a:latin typeface="Calibri" pitchFamily="34" charset="0"/>
+                <a:ea typeface="Calibri" pitchFamily="34" charset="-122"/>
+                <a:cs typeface="Calibri" pitchFamily="34" charset="-120"/>
+              </a:rPr>
               <a:t>A claim submitted in the app, approved by the agent, signed on the device and paid in real test USDC on Base Sepolia.</a:t>
             </a:r>
             <a:endParaRPr lang="en-US" sz="1500" dirty="0"/>
@@ -13869,7 +15035,7 @@
       </p:sp>
       <p:sp>
         <p:nvSpPr>
-          <p:cNvPr id="25" name="Slide Number Placeholder 0"/>
+          <p:cNvPr id="32" name="Slide Number Placeholder 0"/>
           <p:cNvSpPr>
             <a:spLocks noGrp="1"/>
           </p:cNvSpPr>
@@ -13887,7 +15053,7 @@
           </a:prstGeom>
           <a:extLst>
             <a:ext uri="{C572A759-6A51-4108-AA02-DFA0A04FC94B}">
-              <ma14:wrappingTextBoxFlag xmlns:ma14="http://schemas.microsoft.com/office/mac/drawingml/2011/main" val="0"/>
+              <ma14:wrappingTextBoxFlag xmlns:ma14="http://schemas.microsoft.com/office/mac/drawingml/2011/main" xmlns="" val="0"/>
             </a:ext>
           </a:extLst>
         </p:spPr>
@@ -13908,7 +15074,7 @@
           <a:p>
             <a:pPr algn="r"/>
             <a:fld id="{F7021451-1387-4CA6-816F-3879F97B5CBC}" type="slidenum">
-              <a:rPr b="0" lang="en-US"/>
+              <a:rPr lang="en-US" b="0"/>
               <a:t>6</a:t>
             </a:fld>
             <a:endParaRPr lang="en-US"/>
@@ -13943,9 +15109,11 @@
       <p:sp>
         <p:nvSpPr>
           <p:cNvPr id="2" name="Text 4"/>
-          <p:cNvSpPr/>
+          <p:cNvSpPr>
+            <a:spLocks noGrp="1"/>
+          </p:cNvSpPr>
           <p:nvPr>
-            <p:ph idx="104" type="body" hasCustomPrompt="1"/>
+            <p:ph type="body" idx="104" hasCustomPrompt="1"/>
           </p:nvPr>
         </p:nvSpPr>
         <p:spPr>
@@ -13963,11 +15131,11 @@
           <a:bodyPr wrap="square" lIns="0" tIns="0" rIns="0" bIns="0" rtlCol="0" anchor="ctr"/>
           <a:lstStyle/>
           <a:p>
-            <a:pPr indent="0" marL="0">
-              <a:buNone/>
-            </a:pPr>
-            <a:r>
-              <a:rPr lang="en-US" sz="1200" spc="300" kern="0" dirty="0">
+            <a:pPr marL="0" indent="0">
+              <a:buNone/>
+            </a:pPr>
+            <a:r>
+              <a:rPr lang="en-US" sz="1200" kern="0" spc="300" dirty="0">
                 <a:solidFill>
                   <a:schemeClr val="accent1"/>
                 </a:solidFill>
@@ -13984,9 +15152,11 @@
       <p:sp>
         <p:nvSpPr>
           <p:cNvPr id="3" name="Text 4"/>
-          <p:cNvSpPr/>
+          <p:cNvSpPr>
+            <a:spLocks noGrp="1"/>
+          </p:cNvSpPr>
           <p:nvPr>
-            <p:ph idx="105" type="title" hasCustomPrompt="1"/>
+            <p:ph type="title" idx="105" hasCustomPrompt="1"/>
           </p:nvPr>
         </p:nvSpPr>
         <p:spPr>
@@ -14004,7 +15174,7 @@
           <a:bodyPr wrap="square" lIns="0" tIns="0" rIns="0" bIns="0" rtlCol="0" anchor="t"/>
           <a:lstStyle/>
           <a:p>
-            <a:pPr algn="l" indent="0" marL="0">
+            <a:pPr marL="0" indent="0" algn="l">
               <a:buNone/>
             </a:pPr>
             <a:r>
@@ -14043,11 +15213,11 @@
           <a:bodyPr wrap="square" lIns="0" tIns="0" rIns="0" bIns="0" rtlCol="0" anchor="ctr"/>
           <a:lstStyle/>
           <a:p>
-            <a:pPr indent="0" marL="0">
-              <a:buNone/>
-            </a:pPr>
-            <a:r>
-              <a:rPr lang="en-US" sz="1200" b="1" spc="200" kern="0" dirty="0">
+            <a:pPr marL="0" indent="0">
+              <a:buNone/>
+            </a:pPr>
+            <a:r>
+              <a:rPr lang="en-US" sz="1200" b="1" kern="0" spc="200" dirty="0">
                 <a:solidFill>
                   <a:schemeClr val="accent1"/>
                 </a:solidFill>
@@ -14082,11 +15252,11 @@
           <a:bodyPr wrap="square" lIns="0" tIns="0" rIns="0" bIns="0" rtlCol="0" anchor="ctr"/>
           <a:lstStyle/>
           <a:p>
-            <a:pPr indent="0" marL="0">
-              <a:buNone/>
-            </a:pPr>
-            <a:r>
-              <a:rPr lang="en-US" sz="1200" b="1" spc="200" kern="0" dirty="0">
+            <a:pPr marL="0" indent="0">
+              <a:buNone/>
+            </a:pPr>
+            <a:r>
+              <a:rPr lang="en-US" sz="1200" b="1" kern="0" spc="200" dirty="0">
                 <a:solidFill>
                   <a:schemeClr val="accent1"/>
                 </a:solidFill>
@@ -14122,6 +15292,13 @@
             <a:prstDash val="solid"/>
           </a:ln>
         </p:spPr>
+        <p:txBody>
+          <a:bodyPr/>
+          <a:lstStyle/>
+          <a:p>
+            <a:endParaRPr lang="en-GB"/>
+          </a:p>
+        </p:txBody>
       </p:sp>
       <p:sp>
         <p:nvSpPr>
@@ -14144,7 +15321,7 @@
           <a:bodyPr wrap="square" lIns="0" tIns="0" rIns="0" bIns="0" rtlCol="0" anchor="ctr"/>
           <a:lstStyle/>
           <a:p>
-            <a:pPr indent="0" marL="0">
+            <a:pPr marL="0" indent="0">
               <a:buNone/>
             </a:pPr>
             <a:r>
@@ -14183,7 +15360,7 @@
           <a:bodyPr wrap="square" lIns="0" tIns="0" rIns="0" bIns="0" rtlCol="0" anchor="ctr"/>
           <a:lstStyle/>
           <a:p>
-            <a:pPr indent="0" marL="0">
+            <a:pPr marL="0" indent="0">
               <a:buNone/>
             </a:pPr>
             <a:r>
@@ -14223,6 +15400,13 @@
             <a:prstDash val="solid"/>
           </a:ln>
         </p:spPr>
+        <p:txBody>
+          <a:bodyPr/>
+          <a:lstStyle/>
+          <a:p>
+            <a:endParaRPr lang="en-GB"/>
+          </a:p>
+        </p:txBody>
       </p:sp>
       <p:sp>
         <p:nvSpPr>
@@ -14245,7 +15429,7 @@
           <a:bodyPr wrap="square" lIns="0" tIns="0" rIns="0" bIns="0" rtlCol="0" anchor="ctr"/>
           <a:lstStyle/>
           <a:p>
-            <a:pPr indent="0" marL="0">
+            <a:pPr marL="0" indent="0">
               <a:buNone/>
             </a:pPr>
             <a:r>
@@ -14284,7 +15468,7 @@
           <a:bodyPr wrap="square" lIns="0" tIns="0" rIns="0" bIns="0" rtlCol="0" anchor="ctr"/>
           <a:lstStyle/>
           <a:p>
-            <a:pPr indent="0" marL="0">
+            <a:pPr marL="0" indent="0">
               <a:buNone/>
             </a:pPr>
             <a:r>
@@ -14324,6 +15508,13 @@
             <a:prstDash val="solid"/>
           </a:ln>
         </p:spPr>
+        <p:txBody>
+          <a:bodyPr/>
+          <a:lstStyle/>
+          <a:p>
+            <a:endParaRPr lang="en-GB"/>
+          </a:p>
+        </p:txBody>
       </p:sp>
       <p:sp>
         <p:nvSpPr>
@@ -14346,7 +15537,7 @@
           <a:bodyPr wrap="square" lIns="0" tIns="0" rIns="0" bIns="0" rtlCol="0" anchor="ctr"/>
           <a:lstStyle/>
           <a:p>
-            <a:pPr indent="0" marL="0">
+            <a:pPr marL="0" indent="0">
               <a:buNone/>
             </a:pPr>
             <a:r>
@@ -14385,7 +15576,7 @@
           <a:bodyPr wrap="square" lIns="0" tIns="0" rIns="0" bIns="0" rtlCol="0" anchor="ctr"/>
           <a:lstStyle/>
           <a:p>
-            <a:pPr indent="0" marL="0">
+            <a:pPr marL="0" indent="0">
               <a:buNone/>
             </a:pPr>
             <a:r>
@@ -14425,6 +15616,13 @@
             <a:prstDash val="solid"/>
           </a:ln>
         </p:spPr>
+        <p:txBody>
+          <a:bodyPr/>
+          <a:lstStyle/>
+          <a:p>
+            <a:endParaRPr lang="en-GB"/>
+          </a:p>
+        </p:txBody>
       </p:sp>
       <p:sp>
         <p:nvSpPr>
@@ -14447,7 +15645,7 @@
           <a:bodyPr wrap="square" lIns="0" tIns="0" rIns="0" bIns="0" rtlCol="0" anchor="ctr"/>
           <a:lstStyle/>
           <a:p>
-            <a:pPr indent="0" marL="0">
+            <a:pPr marL="0" indent="0">
               <a:buNone/>
             </a:pPr>
             <a:r>
@@ -14486,7 +15684,7 @@
           <a:bodyPr wrap="square" lIns="0" tIns="0" rIns="0" bIns="0" rtlCol="0" anchor="ctr"/>
           <a:lstStyle/>
           <a:p>
-            <a:pPr indent="0" marL="0">
+            <a:pPr marL="0" indent="0">
               <a:buNone/>
             </a:pPr>
             <a:r>
@@ -14526,6 +15724,13 @@
             <a:prstDash val="solid"/>
           </a:ln>
         </p:spPr>
+        <p:txBody>
+          <a:bodyPr/>
+          <a:lstStyle/>
+          <a:p>
+            <a:endParaRPr lang="en-GB"/>
+          </a:p>
+        </p:txBody>
       </p:sp>
       <p:sp>
         <p:nvSpPr>
@@ -14548,7 +15753,7 @@
           <a:bodyPr wrap="square" lIns="0" tIns="0" rIns="0" bIns="0" rtlCol="0" anchor="ctr"/>
           <a:lstStyle/>
           <a:p>
-            <a:pPr indent="0" marL="0">
+            <a:pPr marL="0" indent="0">
               <a:buNone/>
             </a:pPr>
             <a:r>
@@ -14587,7 +15792,7 @@
           <a:bodyPr wrap="square" lIns="0" tIns="0" rIns="0" bIns="0" rtlCol="0" anchor="ctr"/>
           <a:lstStyle/>
           <a:p>
-            <a:pPr indent="0" marL="0">
+            <a:pPr marL="0" indent="0">
               <a:buNone/>
             </a:pPr>
             <a:r>
@@ -14627,6 +15832,13 @@
             <a:prstDash val="solid"/>
           </a:ln>
         </p:spPr>
+        <p:txBody>
+          <a:bodyPr/>
+          <a:lstStyle/>
+          <a:p>
+            <a:endParaRPr lang="en-GB"/>
+          </a:p>
+        </p:txBody>
       </p:sp>
       <p:sp>
         <p:nvSpPr>
@@ -14649,7 +15861,7 @@
           <a:bodyPr wrap="square" lIns="0" tIns="0" rIns="0" bIns="0" rtlCol="0" anchor="ctr"/>
           <a:lstStyle/>
           <a:p>
-            <a:pPr indent="0" marL="0">
+            <a:pPr marL="0" indent="0">
               <a:buNone/>
             </a:pPr>
             <a:r>
@@ -14688,7 +15900,7 @@
           <a:bodyPr wrap="square" lIns="0" tIns="0" rIns="0" bIns="0" rtlCol="0" anchor="ctr"/>
           <a:lstStyle/>
           <a:p>
-            <a:pPr indent="0" marL="0">
+            <a:pPr marL="0" indent="0">
               <a:buNone/>
             </a:pPr>
             <a:r>
@@ -14728,6 +15940,13 @@
             <a:prstDash val="solid"/>
           </a:ln>
         </p:spPr>
+        <p:txBody>
+          <a:bodyPr/>
+          <a:lstStyle/>
+          <a:p>
+            <a:endParaRPr lang="en-GB"/>
+          </a:p>
+        </p:txBody>
       </p:sp>
       <p:sp>
         <p:nvSpPr>
@@ -14750,7 +15969,7 @@
           <a:bodyPr wrap="square" lIns="0" tIns="0" rIns="0" bIns="0" rtlCol="0" anchor="ctr"/>
           <a:lstStyle/>
           <a:p>
-            <a:pPr indent="0" marL="0">
+            <a:pPr marL="0" indent="0">
               <a:buNone/>
             </a:pPr>
             <a:r>
@@ -14789,7 +16008,7 @@
           <a:bodyPr wrap="square" lIns="0" tIns="0" rIns="0" bIns="0" rtlCol="0" anchor="ctr"/>
           <a:lstStyle/>
           <a:p>
-            <a:pPr indent="0" marL="0">
+            <a:pPr marL="0" indent="0">
               <a:buNone/>
             </a:pPr>
             <a:r>
@@ -14809,7 +16028,7 @@
       </p:sp>
       <p:sp>
         <p:nvSpPr>
-          <p:cNvPr id="25" name="Slide Number Placeholder 0"/>
+          <p:cNvPr id="27" name="Slide Number Placeholder 0"/>
           <p:cNvSpPr>
             <a:spLocks noGrp="1"/>
           </p:cNvSpPr>
@@ -14827,7 +16046,7 @@
           </a:prstGeom>
           <a:extLst>
             <a:ext uri="{C572A759-6A51-4108-AA02-DFA0A04FC94B}">
-              <ma14:wrappingTextBoxFlag xmlns:ma14="http://schemas.microsoft.com/office/mac/drawingml/2011/main" val="0"/>
+              <ma14:wrappingTextBoxFlag xmlns:ma14="http://schemas.microsoft.com/office/mac/drawingml/2011/main" xmlns="" val="0"/>
             </a:ext>
           </a:extLst>
         </p:spPr>
@@ -14848,7 +16067,7 @@
           <a:p>
             <a:pPr algn="r"/>
             <a:fld id="{F7021451-1387-4CA6-816F-3879F97B5CBC}" type="slidenum">
-              <a:rPr b="0" lang="en-US"/>
+              <a:rPr lang="en-US" b="0"/>
               <a:t>7</a:t>
             </a:fld>
             <a:endParaRPr lang="en-US"/>
@@ -14883,9 +16102,11 @@
       <p:sp>
         <p:nvSpPr>
           <p:cNvPr id="2" name="Text 4"/>
-          <p:cNvSpPr/>
+          <p:cNvSpPr>
+            <a:spLocks noGrp="1"/>
+          </p:cNvSpPr>
           <p:nvPr>
-            <p:ph idx="104" type="body" hasCustomPrompt="1"/>
+            <p:ph type="body" idx="104" hasCustomPrompt="1"/>
           </p:nvPr>
         </p:nvSpPr>
         <p:spPr>
@@ -14903,11 +16124,11 @@
           <a:bodyPr wrap="square" lIns="0" tIns="0" rIns="0" bIns="0" rtlCol="0" anchor="ctr"/>
           <a:lstStyle/>
           <a:p>
-            <a:pPr indent="0" marL="0">
-              <a:buNone/>
-            </a:pPr>
-            <a:r>
-              <a:rPr lang="en-US" sz="1200" spc="300" kern="0" dirty="0">
+            <a:pPr marL="0" indent="0">
+              <a:buNone/>
+            </a:pPr>
+            <a:r>
+              <a:rPr lang="en-US" sz="1200" kern="0" spc="300" dirty="0">
                 <a:solidFill>
                   <a:schemeClr val="accent1"/>
                 </a:solidFill>
@@ -14924,9 +16145,11 @@
       <p:sp>
         <p:nvSpPr>
           <p:cNvPr id="3" name="Text 4"/>
-          <p:cNvSpPr/>
+          <p:cNvSpPr>
+            <a:spLocks noGrp="1"/>
+          </p:cNvSpPr>
           <p:nvPr>
-            <p:ph idx="105" type="title" hasCustomPrompt="1"/>
+            <p:ph type="title" idx="105" hasCustomPrompt="1"/>
           </p:nvPr>
         </p:nvSpPr>
         <p:spPr>
@@ -14944,7 +16167,7 @@
           <a:bodyPr wrap="square" lIns="0" tIns="0" rIns="0" bIns="0" rtlCol="0" anchor="t"/>
           <a:lstStyle/>
           <a:p>
-            <a:pPr algn="l" indent="0" marL="0">
+            <a:pPr marL="0" indent="0" algn="l">
               <a:buNone/>
             </a:pPr>
             <a:r>
@@ -14988,6 +16211,13 @@
             <a:prstDash val="solid"/>
           </a:ln>
         </p:spPr>
+        <p:txBody>
+          <a:bodyPr/>
+          <a:lstStyle/>
+          <a:p>
+            <a:endParaRPr lang="en-GB"/>
+          </a:p>
+        </p:txBody>
       </p:sp>
       <p:sp>
         <p:nvSpPr>
@@ -15010,7 +16240,7 @@
           <a:bodyPr wrap="square" lIns="0" tIns="0" rIns="0" bIns="0" rtlCol="0" anchor="t"/>
           <a:lstStyle/>
           <a:p>
-            <a:pPr indent="0" marL="0">
+            <a:pPr marL="0" indent="0">
               <a:buNone/>
             </a:pPr>
             <a:r>
@@ -15181,6 +16411,13 @@
             <a:prstDash val="solid"/>
           </a:ln>
         </p:spPr>
+        <p:txBody>
+          <a:bodyPr/>
+          <a:lstStyle/>
+          <a:p>
+            <a:endParaRPr lang="en-GB"/>
+          </a:p>
+        </p:txBody>
       </p:sp>
       <p:sp>
         <p:nvSpPr>
@@ -15203,7 +16440,7 @@
           <a:bodyPr wrap="square" lIns="0" tIns="0" rIns="0" bIns="0" rtlCol="0" anchor="t"/>
           <a:lstStyle/>
           <a:p>
-            <a:pPr indent="0" marL="0">
+            <a:pPr marL="0" indent="0">
               <a:buNone/>
             </a:pPr>
             <a:r>
@@ -15353,6 +16590,13 @@
             <a:prstDash val="solid"/>
           </a:ln>
         </p:spPr>
+        <p:txBody>
+          <a:bodyPr/>
+          <a:lstStyle/>
+          <a:p>
+            <a:endParaRPr lang="en-GB"/>
+          </a:p>
+        </p:txBody>
       </p:sp>
       <p:sp>
         <p:nvSpPr>
@@ -15375,7 +16619,7 @@
           <a:bodyPr wrap="square" lIns="0" tIns="0" rIns="0" bIns="0" rtlCol="0" anchor="t"/>
           <a:lstStyle/>
           <a:p>
-            <a:pPr indent="0" marL="0">
+            <a:pPr marL="0" indent="0">
               <a:buNone/>
             </a:pPr>
             <a:r>
@@ -15546,6 +16790,13 @@
             <a:prstDash val="solid"/>
           </a:ln>
         </p:spPr>
+        <p:txBody>
+          <a:bodyPr/>
+          <a:lstStyle/>
+          <a:p>
+            <a:endParaRPr lang="en-GB"/>
+          </a:p>
+        </p:txBody>
       </p:sp>
       <p:sp>
         <p:nvSpPr>
@@ -15568,7 +16819,7 @@
           <a:bodyPr wrap="square" lIns="0" tIns="0" rIns="0" bIns="0" rtlCol="0" anchor="t"/>
           <a:lstStyle/>
           <a:p>
-            <a:pPr indent="0" marL="0">
+            <a:pPr marL="0" indent="0">
               <a:buNone/>
             </a:pPr>
             <a:r>
@@ -15691,7 +16942,7 @@
           </a:prstGeom>
           <a:extLst>
             <a:ext uri="{C572A759-6A51-4108-AA02-DFA0A04FC94B}">
-              <ma14:wrappingTextBoxFlag xmlns:ma14="http://schemas.microsoft.com/office/mac/drawingml/2011/main" val="0"/>
+              <ma14:wrappingTextBoxFlag xmlns:ma14="http://schemas.microsoft.com/office/mac/drawingml/2011/main" xmlns="" val="0"/>
             </a:ext>
           </a:extLst>
         </p:spPr>
@@ -15712,7 +16963,7 @@
           <a:p>
             <a:pPr algn="r"/>
             <a:fld id="{F7021451-1387-4CA6-816F-3879F97B5CBC}" type="slidenum">
-              <a:rPr b="0" lang="en-US"/>
+              <a:rPr lang="en-US" b="0"/>
               <a:t>8</a:t>
             </a:fld>
             <a:endParaRPr lang="en-US"/>
@@ -15747,9 +16998,11 @@
       <p:sp>
         <p:nvSpPr>
           <p:cNvPr id="2" name="Text 4"/>
-          <p:cNvSpPr/>
+          <p:cNvSpPr>
+            <a:spLocks noGrp="1"/>
+          </p:cNvSpPr>
           <p:nvPr>
-            <p:ph idx="104" type="body" hasCustomPrompt="1"/>
+            <p:ph type="body" idx="104" hasCustomPrompt="1"/>
           </p:nvPr>
         </p:nvSpPr>
         <p:spPr>
@@ -15767,11 +17020,11 @@
           <a:bodyPr wrap="square" lIns="0" tIns="0" rIns="0" bIns="0" rtlCol="0" anchor="ctr"/>
           <a:lstStyle/>
           <a:p>
-            <a:pPr indent="0" marL="0">
-              <a:buNone/>
-            </a:pPr>
-            <a:r>
-              <a:rPr lang="en-US" sz="1200" spc="300" kern="0" dirty="0">
+            <a:pPr marL="0" indent="0">
+              <a:buNone/>
+            </a:pPr>
+            <a:r>
+              <a:rPr lang="en-US" sz="1200" kern="0" spc="300" dirty="0">
                 <a:solidFill>
                   <a:schemeClr val="accent1"/>
                 </a:solidFill>
@@ -15788,9 +17041,11 @@
       <p:sp>
         <p:nvSpPr>
           <p:cNvPr id="3" name="Text 4"/>
-          <p:cNvSpPr/>
+          <p:cNvSpPr>
+            <a:spLocks noGrp="1"/>
+          </p:cNvSpPr>
           <p:nvPr>
-            <p:ph idx="105" type="title" hasCustomPrompt="1"/>
+            <p:ph type="title" idx="105" hasCustomPrompt="1"/>
           </p:nvPr>
         </p:nvSpPr>
         <p:spPr>
@@ -15808,7 +17063,7 @@
           <a:bodyPr wrap="square" lIns="0" tIns="0" rIns="0" bIns="0" rtlCol="0" anchor="t"/>
           <a:lstStyle/>
           <a:p>
-            <a:pPr algn="l" indent="0" marL="0">
+            <a:pPr marL="0" indent="0" algn="l">
               <a:buNone/>
             </a:pPr>
             <a:r>
@@ -15847,7 +17102,7 @@
           <a:bodyPr wrap="square" lIns="0" tIns="0" rIns="0" bIns="0" rtlCol="0" anchor="t"/>
           <a:lstStyle/>
           <a:p>
-            <a:pPr indent="0" marL="0">
+            <a:pPr marL="0" indent="0">
               <a:lnSpc>
                 <a:spcPct val="112000"/>
               </a:lnSpc>
@@ -15864,12 +17119,6 @@
               </a:rPr>
               <a:t>The pattern: </a:t>
             </a:r>
-            <a:pPr indent="0" marL="0">
-              <a:lnSpc>
-                <a:spcPct val="112000"/>
-              </a:lnSpc>
-              <a:buNone/>
-            </a:pPr>
             <a:r>
               <a:rPr lang="en-US" sz="1900" dirty="0">
                 <a:solidFill>
@@ -15881,12 +17130,6 @@
               </a:rPr>
               <a:t>an agent proposes, a person approves on hardware. </a:t>
             </a:r>
-            <a:pPr indent="0" marL="0">
-              <a:lnSpc>
-                <a:spcPct val="112000"/>
-              </a:lnSpc>
-              <a:buNone/>
-            </a:pPr>
             <a:r>
               <a:rPr lang="en-US" sz="1900" dirty="0">
                 <a:solidFill>
@@ -15928,17 +17171,24 @@
             <a:prstDash val="solid"/>
           </a:ln>
         </p:spPr>
+        <p:txBody>
+          <a:bodyPr/>
+          <a:lstStyle/>
+          <a:p>
+            <a:endParaRPr lang="en-GB"/>
+          </a:p>
+        </p:txBody>
       </p:sp>
       <p:pic>
         <p:nvPicPr>
-          <p:cNvPr id="6" name="Use icon 1" descr="preencoded.png">    </p:cNvPr>
+          <p:cNvPr id="6" name="Use icon 1" descr="preencoded.png"/>
           <p:cNvPicPr>
             <a:picLocks noChangeAspect="1"/>
           </p:cNvPicPr>
           <p:nvPr/>
         </p:nvPicPr>
         <p:blipFill>
-          <a:blip r:embed="rId1"/>
+          <a:blip r:embed="rId3"/>
           <a:stretch>
             <a:fillRect/>
           </a:stretch>
@@ -15974,7 +17224,7 @@
           <a:bodyPr wrap="square" lIns="0" tIns="0" rIns="0" bIns="0" rtlCol="0" anchor="t"/>
           <a:lstStyle/>
           <a:p>
-            <a:pPr indent="0" marL="0">
+            <a:pPr marL="0" indent="0">
               <a:buNone/>
             </a:pPr>
             <a:r>
@@ -16013,7 +17263,7 @@
           <a:bodyPr wrap="square" lIns="0" tIns="0" rIns="0" bIns="0" rtlCol="0" anchor="t"/>
           <a:lstStyle/>
           <a:p>
-            <a:pPr indent="0" marL="0">
+            <a:pPr marL="0" indent="0">
               <a:buNone/>
             </a:pPr>
             <a:r>
@@ -16057,17 +17307,24 @@
             <a:prstDash val="solid"/>
           </a:ln>
         </p:spPr>
+        <p:txBody>
+          <a:bodyPr/>
+          <a:lstStyle/>
+          <a:p>
+            <a:endParaRPr lang="en-GB"/>
+          </a:p>
+        </p:txBody>
       </p:sp>
       <p:pic>
         <p:nvPicPr>
-          <p:cNvPr id="10" name="Use icon 2" descr="preencoded.png">    </p:cNvPr>
+          <p:cNvPr id="10" name="Use icon 2" descr="preencoded.png"/>
           <p:cNvPicPr>
             <a:picLocks noChangeAspect="1"/>
           </p:cNvPicPr>
           <p:nvPr/>
         </p:nvPicPr>
         <p:blipFill>
-          <a:blip r:embed="rId2"/>
+          <a:blip r:embed="rId4"/>
           <a:stretch>
             <a:fillRect/>
           </a:stretch>
@@ -16103,7 +17360,7 @@
           <a:bodyPr wrap="square" lIns="0" tIns="0" rIns="0" bIns="0" rtlCol="0" anchor="t"/>
           <a:lstStyle/>
           <a:p>
-            <a:pPr indent="0" marL="0">
+            <a:pPr marL="0" indent="0">
               <a:buNone/>
             </a:pPr>
             <a:r>
@@ -16142,7 +17399,7 @@
           <a:bodyPr wrap="square" lIns="0" tIns="0" rIns="0" bIns="0" rtlCol="0" anchor="t"/>
           <a:lstStyle/>
           <a:p>
-            <a:pPr indent="0" marL="0">
+            <a:pPr marL="0" indent="0">
               <a:buNone/>
             </a:pPr>
             <a:r>
@@ -16186,17 +17443,24 @@
             <a:prstDash val="solid"/>
           </a:ln>
         </p:spPr>
+        <p:txBody>
+          <a:bodyPr/>
+          <a:lstStyle/>
+          <a:p>
+            <a:endParaRPr lang="en-GB"/>
+          </a:p>
+        </p:txBody>
       </p:sp>
       <p:pic>
         <p:nvPicPr>
-          <p:cNvPr id="14" name="Use icon 3" descr="preencoded.png">    </p:cNvPr>
+          <p:cNvPr id="14" name="Use icon 3" descr="preencoded.png"/>
           <p:cNvPicPr>
             <a:picLocks noChangeAspect="1"/>
           </p:cNvPicPr>
           <p:nvPr/>
         </p:nvPicPr>
         <p:blipFill>
-          <a:blip r:embed="rId3"/>
+          <a:blip r:embed="rId5"/>
           <a:stretch>
             <a:fillRect/>
           </a:stretch>
@@ -16232,7 +17496,7 @@
           <a:bodyPr wrap="square" lIns="0" tIns="0" rIns="0" bIns="0" rtlCol="0" anchor="t"/>
           <a:lstStyle/>
           <a:p>
-            <a:pPr indent="0" marL="0">
+            <a:pPr marL="0" indent="0">
               <a:buNone/>
             </a:pPr>
             <a:r>
@@ -16271,7 +17535,7 @@
           <a:bodyPr wrap="square" lIns="0" tIns="0" rIns="0" bIns="0" rtlCol="0" anchor="t"/>
           <a:lstStyle/>
           <a:p>
-            <a:pPr indent="0" marL="0">
+            <a:pPr marL="0" indent="0">
               <a:buNone/>
             </a:pPr>
             <a:r>
@@ -16315,17 +17579,24 @@
             <a:prstDash val="solid"/>
           </a:ln>
         </p:spPr>
+        <p:txBody>
+          <a:bodyPr/>
+          <a:lstStyle/>
+          <a:p>
+            <a:endParaRPr lang="en-GB"/>
+          </a:p>
+        </p:txBody>
       </p:sp>
       <p:pic>
         <p:nvPicPr>
-          <p:cNvPr id="18" name="Use icon 4" descr="preencoded.png">    </p:cNvPr>
+          <p:cNvPr id="18" name="Use icon 4" descr="preencoded.png"/>
           <p:cNvPicPr>
             <a:picLocks noChangeAspect="1"/>
           </p:cNvPicPr>
           <p:nvPr/>
         </p:nvPicPr>
         <p:blipFill>
-          <a:blip r:embed="rId4"/>
+          <a:blip r:embed="rId6"/>
           <a:stretch>
             <a:fillRect/>
           </a:stretch>
@@ -16361,7 +17632,7 @@
           <a:bodyPr wrap="square" lIns="0" tIns="0" rIns="0" bIns="0" rtlCol="0" anchor="t"/>
           <a:lstStyle/>
           <a:p>
-            <a:pPr indent="0" marL="0">
+            <a:pPr marL="0" indent="0">
               <a:buNone/>
             </a:pPr>
             <a:r>
@@ -16400,7 +17671,7 @@
           <a:bodyPr wrap="square" lIns="0" tIns="0" rIns="0" bIns="0" rtlCol="0" anchor="t"/>
           <a:lstStyle/>
           <a:p>
-            <a:pPr indent="0" marL="0">
+            <a:pPr marL="0" indent="0">
               <a:buNone/>
             </a:pPr>
             <a:r>
@@ -16444,17 +17715,24 @@
             <a:prstDash val="solid"/>
           </a:ln>
         </p:spPr>
+        <p:txBody>
+          <a:bodyPr/>
+          <a:lstStyle/>
+          <a:p>
+            <a:endParaRPr lang="en-GB"/>
+          </a:p>
+        </p:txBody>
       </p:sp>
       <p:pic>
         <p:nvPicPr>
-          <p:cNvPr id="22" name="Use icon 5" descr="preencoded.png">    </p:cNvPr>
+          <p:cNvPr id="22" name="Use icon 5" descr="preencoded.png"/>
           <p:cNvPicPr>
             <a:picLocks noChangeAspect="1"/>
           </p:cNvPicPr>
           <p:nvPr/>
         </p:nvPicPr>
         <p:blipFill>
-          <a:blip r:embed="rId5"/>
+          <a:blip r:embed="rId7"/>
           <a:stretch>
             <a:fillRect/>
           </a:stretch>
@@ -16490,7 +17768,7 @@
           <a:bodyPr wrap="square" lIns="0" tIns="0" rIns="0" bIns="0" rtlCol="0" anchor="t"/>
           <a:lstStyle/>
           <a:p>
-            <a:pPr indent="0" marL="0">
+            <a:pPr marL="0" indent="0">
               <a:buNone/>
             </a:pPr>
             <a:r>
@@ -16529,7 +17807,7 @@
           <a:bodyPr wrap="square" lIns="0" tIns="0" rIns="0" bIns="0" rtlCol="0" anchor="t"/>
           <a:lstStyle/>
           <a:p>
-            <a:pPr indent="0" marL="0">
+            <a:pPr marL="0" indent="0">
               <a:buNone/>
             </a:pPr>
             <a:r>
@@ -16573,17 +17851,24 @@
             <a:prstDash val="solid"/>
           </a:ln>
         </p:spPr>
+        <p:txBody>
+          <a:bodyPr/>
+          <a:lstStyle/>
+          <a:p>
+            <a:endParaRPr lang="en-GB"/>
+          </a:p>
+        </p:txBody>
       </p:sp>
       <p:pic>
         <p:nvPicPr>
-          <p:cNvPr id="26" name="Use icon 6" descr="preencoded.png">    </p:cNvPr>
+          <p:cNvPr id="26" name="Use icon 6" descr="preencoded.png"/>
           <p:cNvPicPr>
             <a:picLocks noChangeAspect="1"/>
           </p:cNvPicPr>
           <p:nvPr/>
         </p:nvPicPr>
         <p:blipFill>
-          <a:blip r:embed="rId6"/>
+          <a:blip r:embed="rId8"/>
           <a:stretch>
             <a:fillRect/>
           </a:stretch>
@@ -16619,7 +17904,7 @@
           <a:bodyPr wrap="square" lIns="0" tIns="0" rIns="0" bIns="0" rtlCol="0" anchor="t"/>
           <a:lstStyle/>
           <a:p>
-            <a:pPr indent="0" marL="0">
+            <a:pPr marL="0" indent="0">
               <a:buNone/>
             </a:pPr>
             <a:r>
@@ -16658,7 +17943,7 @@
           <a:bodyPr wrap="square" lIns="0" tIns="0" rIns="0" bIns="0" rtlCol="0" anchor="t"/>
           <a:lstStyle/>
           <a:p>
-            <a:pPr indent="0" marL="0">
+            <a:pPr marL="0" indent="0">
               <a:buNone/>
             </a:pPr>
             <a:r>
@@ -16678,7 +17963,7 @@
       </p:sp>
       <p:sp>
         <p:nvSpPr>
-          <p:cNvPr id="25" name="Slide Number Placeholder 0"/>
+          <p:cNvPr id="29" name="Slide Number Placeholder 0"/>
           <p:cNvSpPr>
             <a:spLocks noGrp="1"/>
           </p:cNvSpPr>
@@ -16696,7 +17981,7 @@
           </a:prstGeom>
           <a:extLst>
             <a:ext uri="{C572A759-6A51-4108-AA02-DFA0A04FC94B}">
-              <ma14:wrappingTextBoxFlag xmlns:ma14="http://schemas.microsoft.com/office/mac/drawingml/2011/main" val="0"/>
+              <ma14:wrappingTextBoxFlag xmlns:ma14="http://schemas.microsoft.com/office/mac/drawingml/2011/main" xmlns="" val="0"/>
             </a:ext>
           </a:extLst>
         </p:spPr>
@@ -16717,7 +18002,7 @@
           <a:p>
             <a:pPr algn="r"/>
             <a:fld id="{F7021451-1387-4CA6-816F-3879F97B5CBC}" type="slidenum">
-              <a:rPr b="0" lang="en-US"/>
+              <a:rPr lang="en-US" b="0"/>
               <a:t>9</a:t>
             </a:fld>
             <a:endParaRPr lang="en-US"/>
@@ -17025,4 +18310,319 @@
     </a:ext>
   </a:extLst>
 </a:theme>
+</file>
+
+<file path=ppt/theme/theme2.xml><?xml version="1.0" encoding="utf-8"?>
+<a:theme xmlns:a="http://schemas.openxmlformats.org/drawingml/2006/main" name="Office Theme">
+  <a:themeElements>
+    <a:clrScheme name="Office">
+      <a:dk1>
+        <a:sysClr val="windowText" lastClr="000000"/>
+      </a:dk1>
+      <a:lt1>
+        <a:sysClr val="window" lastClr="FFFFFF"/>
+      </a:lt1>
+      <a:dk2>
+        <a:srgbClr val="0E2841"/>
+      </a:dk2>
+      <a:lt2>
+        <a:srgbClr val="E8E8E8"/>
+      </a:lt2>
+      <a:accent1>
+        <a:srgbClr val="156082"/>
+      </a:accent1>
+      <a:accent2>
+        <a:srgbClr val="E97132"/>
+      </a:accent2>
+      <a:accent3>
+        <a:srgbClr val="196B24"/>
+      </a:accent3>
+      <a:accent4>
+        <a:srgbClr val="0F9ED5"/>
+      </a:accent4>
+      <a:accent5>
+        <a:srgbClr val="A02B93"/>
+      </a:accent5>
+      <a:accent6>
+        <a:srgbClr val="4EA72E"/>
+      </a:accent6>
+      <a:hlink>
+        <a:srgbClr val="467886"/>
+      </a:hlink>
+      <a:folHlink>
+        <a:srgbClr val="96607D"/>
+      </a:folHlink>
+    </a:clrScheme>
+    <a:fontScheme name="Office">
+      <a:majorFont>
+        <a:latin typeface="Aptos Display" panose="02110004020202020204"/>
+        <a:ea typeface=""/>
+        <a:cs typeface=""/>
+        <a:font script="Jpan" typeface="游ゴシック Light"/>
+        <a:font script="Hang" typeface="맑은 고딕"/>
+        <a:font script="Hans" typeface="等线 Light"/>
+        <a:font script="Hant" typeface="新細明體"/>
+        <a:font script="Arab" typeface="Times New Roman"/>
+        <a:font script="Hebr" typeface="Times New Roman"/>
+        <a:font script="Thai" typeface="Angsana New"/>
+        <a:font script="Ethi" typeface="Nyala"/>
+        <a:font script="Beng" typeface="Vrinda"/>
+        <a:font script="Gujr" typeface="Shruti"/>
+        <a:font script="Khmr" typeface="MoolBoran"/>
+        <a:font script="Knda" typeface="Tunga"/>
+        <a:font script="Guru" typeface="Raavi"/>
+        <a:font script="Cans" typeface="Euphemia"/>
+        <a:font script="Cher" typeface="Plantagenet Cherokee"/>
+        <a:font script="Yiii" typeface="Microsoft Yi Baiti"/>
+        <a:font script="Tibt" typeface="Microsoft Himalaya"/>
+        <a:font script="Thaa" typeface="MV Boli"/>
+        <a:font script="Deva" typeface="Mangal"/>
+        <a:font script="Telu" typeface="Gautami"/>
+        <a:font script="Taml" typeface="Latha"/>
+        <a:font script="Syrc" typeface="Estrangelo Edessa"/>
+        <a:font script="Orya" typeface="Kalinga"/>
+        <a:font script="Mlym" typeface="Kartika"/>
+        <a:font script="Laoo" typeface="DokChampa"/>
+        <a:font script="Sinh" typeface="Iskoola Pota"/>
+        <a:font script="Mong" typeface="Mongolian Baiti"/>
+        <a:font script="Viet" typeface="Times New Roman"/>
+        <a:font script="Uigh" typeface="Microsoft Uighur"/>
+        <a:font script="Geor" typeface="Sylfaen"/>
+        <a:font script="Armn" typeface="Arial"/>
+        <a:font script="Bugi" typeface="Leelawadee UI"/>
+        <a:font script="Bopo" typeface="Microsoft JhengHei"/>
+        <a:font script="Java" typeface="Javanese Text"/>
+        <a:font script="Lisu" typeface="Segoe UI"/>
+        <a:font script="Mymr" typeface="Myanmar Text"/>
+        <a:font script="Nkoo" typeface="Ebrima"/>
+        <a:font script="Olck" typeface="Nirmala UI"/>
+        <a:font script="Osma" typeface="Ebrima"/>
+        <a:font script="Phag" typeface="Phagspa"/>
+        <a:font script="Syrn" typeface="Estrangelo Edessa"/>
+        <a:font script="Syrj" typeface="Estrangelo Edessa"/>
+        <a:font script="Syre" typeface="Estrangelo Edessa"/>
+        <a:font script="Sora" typeface="Nirmala UI"/>
+        <a:font script="Tale" typeface="Microsoft Tai Le"/>
+        <a:font script="Talu" typeface="Microsoft New Tai Lue"/>
+        <a:font script="Tfng" typeface="Ebrima"/>
+      </a:majorFont>
+      <a:minorFont>
+        <a:latin typeface="Aptos" panose="02110004020202020204"/>
+        <a:ea typeface=""/>
+        <a:cs typeface=""/>
+        <a:font script="Jpan" typeface="游ゴシック"/>
+        <a:font script="Hang" typeface="맑은 고딕"/>
+        <a:font script="Hans" typeface="等线"/>
+        <a:font script="Hant" typeface="新細明體"/>
+        <a:font script="Arab" typeface="Arial"/>
+        <a:font script="Hebr" typeface="Arial"/>
+        <a:font script="Thai" typeface="Cordia New"/>
+        <a:font script="Ethi" typeface="Nyala"/>
+        <a:font script="Beng" typeface="Vrinda"/>
+        <a:font script="Gujr" typeface="Shruti"/>
+        <a:font script="Khmr" typeface="DaunPenh"/>
+        <a:font script="Knda" typeface="Tunga"/>
+        <a:font script="Guru" typeface="Raavi"/>
+        <a:font script="Cans" typeface="Euphemia"/>
+        <a:font script="Cher" typeface="Plantagenet Cherokee"/>
+        <a:font script="Yiii" typeface="Microsoft Yi Baiti"/>
+        <a:font script="Tibt" typeface="Microsoft Himalaya"/>
+        <a:font script="Thaa" typeface="MV Boli"/>
+        <a:font script="Deva" typeface="Mangal"/>
+        <a:font script="Telu" typeface="Gautami"/>
+        <a:font script="Taml" typeface="Latha"/>
+        <a:font script="Syrc" typeface="Estrangelo Edessa"/>
+        <a:font script="Orya" typeface="Kalinga"/>
+        <a:font script="Mlym" typeface="Kartika"/>
+        <a:font script="Laoo" typeface="DokChampa"/>
+        <a:font script="Sinh" typeface="Iskoola Pota"/>
+        <a:font script="Mong" typeface="Mongolian Baiti"/>
+        <a:font script="Viet" typeface="Arial"/>
+        <a:font script="Uigh" typeface="Microsoft Uighur"/>
+        <a:font script="Geor" typeface="Sylfaen"/>
+        <a:font script="Armn" typeface="Arial"/>
+        <a:font script="Bugi" typeface="Leelawadee UI"/>
+        <a:font script="Bopo" typeface="Microsoft JhengHei"/>
+        <a:font script="Java" typeface="Javanese Text"/>
+        <a:font script="Lisu" typeface="Segoe UI"/>
+        <a:font script="Mymr" typeface="Myanmar Text"/>
+        <a:font script="Nkoo" typeface="Ebrima"/>
+        <a:font script="Olck" typeface="Nirmala UI"/>
+        <a:font script="Osma" typeface="Ebrima"/>
+        <a:font script="Phag" typeface="Phagspa"/>
+        <a:font script="Syrn" typeface="Estrangelo Edessa"/>
+        <a:font script="Syrj" typeface="Estrangelo Edessa"/>
+        <a:font script="Syre" typeface="Estrangelo Edessa"/>
+        <a:font script="Sora" typeface="Nirmala UI"/>
+        <a:font script="Tale" typeface="Microsoft Tai Le"/>
+        <a:font script="Talu" typeface="Microsoft New Tai Lue"/>
+        <a:font script="Tfng" typeface="Ebrima"/>
+      </a:minorFont>
+    </a:fontScheme>
+    <a:fmtScheme name="Office">
+      <a:fillStyleLst>
+        <a:solidFill>
+          <a:schemeClr val="phClr"/>
+        </a:solidFill>
+        <a:gradFill rotWithShape="1">
+          <a:gsLst>
+            <a:gs pos="0">
+              <a:schemeClr val="phClr">
+                <a:lumMod val="110000"/>
+                <a:satMod val="105000"/>
+                <a:tint val="67000"/>
+              </a:schemeClr>
+            </a:gs>
+            <a:gs pos="50000">
+              <a:schemeClr val="phClr">
+                <a:lumMod val="105000"/>
+                <a:satMod val="103000"/>
+                <a:tint val="73000"/>
+              </a:schemeClr>
+            </a:gs>
+            <a:gs pos="100000">
+              <a:schemeClr val="phClr">
+                <a:lumMod val="105000"/>
+                <a:satMod val="109000"/>
+                <a:tint val="81000"/>
+              </a:schemeClr>
+            </a:gs>
+          </a:gsLst>
+          <a:lin ang="5400000" scaled="0"/>
+        </a:gradFill>
+        <a:gradFill rotWithShape="1">
+          <a:gsLst>
+            <a:gs pos="0">
+              <a:schemeClr val="phClr">
+                <a:satMod val="103000"/>
+                <a:lumMod val="102000"/>
+                <a:tint val="94000"/>
+              </a:schemeClr>
+            </a:gs>
+            <a:gs pos="50000">
+              <a:schemeClr val="phClr">
+                <a:satMod val="110000"/>
+                <a:lumMod val="100000"/>
+                <a:shade val="100000"/>
+              </a:schemeClr>
+            </a:gs>
+            <a:gs pos="100000">
+              <a:schemeClr val="phClr">
+                <a:lumMod val="99000"/>
+                <a:satMod val="120000"/>
+                <a:shade val="78000"/>
+              </a:schemeClr>
+            </a:gs>
+          </a:gsLst>
+          <a:lin ang="5400000" scaled="0"/>
+        </a:gradFill>
+      </a:fillStyleLst>
+      <a:lnStyleLst>
+        <a:ln w="12700" cap="flat" cmpd="sng" algn="ctr">
+          <a:solidFill>
+            <a:schemeClr val="phClr"/>
+          </a:solidFill>
+          <a:prstDash val="solid"/>
+          <a:miter lim="800000"/>
+        </a:ln>
+        <a:ln w="19050" cap="flat" cmpd="sng" algn="ctr">
+          <a:solidFill>
+            <a:schemeClr val="phClr"/>
+          </a:solidFill>
+          <a:prstDash val="solid"/>
+          <a:miter lim="800000"/>
+        </a:ln>
+        <a:ln w="25400" cap="flat" cmpd="sng" algn="ctr">
+          <a:solidFill>
+            <a:schemeClr val="phClr"/>
+          </a:solidFill>
+          <a:prstDash val="solid"/>
+          <a:miter lim="800000"/>
+        </a:ln>
+      </a:lnStyleLst>
+      <a:effectStyleLst>
+        <a:effectStyle>
+          <a:effectLst/>
+        </a:effectStyle>
+        <a:effectStyle>
+          <a:effectLst/>
+        </a:effectStyle>
+        <a:effectStyle>
+          <a:effectLst>
+            <a:outerShdw blurRad="57150" dist="19050" dir="5400000" algn="ctr" rotWithShape="0">
+              <a:srgbClr val="000000">
+                <a:alpha val="63000"/>
+              </a:srgbClr>
+            </a:outerShdw>
+          </a:effectLst>
+        </a:effectStyle>
+      </a:effectStyleLst>
+      <a:bgFillStyleLst>
+        <a:solidFill>
+          <a:schemeClr val="phClr"/>
+        </a:solidFill>
+        <a:solidFill>
+          <a:schemeClr val="phClr">
+            <a:tint val="95000"/>
+            <a:satMod val="170000"/>
+          </a:schemeClr>
+        </a:solidFill>
+        <a:gradFill rotWithShape="1">
+          <a:gsLst>
+            <a:gs pos="0">
+              <a:schemeClr val="phClr">
+                <a:tint val="93000"/>
+                <a:satMod val="150000"/>
+                <a:shade val="98000"/>
+                <a:lumMod val="102000"/>
+              </a:schemeClr>
+            </a:gs>
+            <a:gs pos="50000">
+              <a:schemeClr val="phClr">
+                <a:tint val="98000"/>
+                <a:satMod val="130000"/>
+                <a:shade val="90000"/>
+                <a:lumMod val="103000"/>
+              </a:schemeClr>
+            </a:gs>
+            <a:gs pos="100000">
+              <a:schemeClr val="phClr">
+                <a:shade val="63000"/>
+                <a:satMod val="120000"/>
+              </a:schemeClr>
+            </a:gs>
+          </a:gsLst>
+          <a:lin ang="5400000" scaled="0"/>
+        </a:gradFill>
+      </a:bgFillStyleLst>
+    </a:fmtScheme>
+  </a:themeElements>
+  <a:objectDefaults>
+    <a:lnDef>
+      <a:spPr/>
+      <a:bodyPr/>
+      <a:lstStyle/>
+      <a:style>
+        <a:lnRef idx="2">
+          <a:schemeClr val="accent1"/>
+        </a:lnRef>
+        <a:fillRef idx="0">
+          <a:schemeClr val="accent1"/>
+        </a:fillRef>
+        <a:effectRef idx="1">
+          <a:schemeClr val="accent1"/>
+        </a:effectRef>
+        <a:fontRef idx="minor">
+          <a:schemeClr val="tx1"/>
+        </a:fontRef>
+      </a:style>
+    </a:lnDef>
+  </a:objectDefaults>
+  <a:extraClrSchemeLst/>
+  <a:extLst>
+    <a:ext uri="{05A4C25C-085E-4340-85A3-A5531E510DB2}">
+      <thm15:themeFamily xmlns:thm15="http://schemas.microsoft.com/office/thememl/2012/main" name="Office Theme" id="{2E142A2C-CD16-42D6-873A-C26D2A0506FA}" vid="{1BDDFF52-6CD6-40A5-AB3C-68EB2F1E4D0A}"/>
+    </a:ext>
+  </a:extLst>
+</a:theme>
 </file>